--- a/presentation.pptx
+++ b/presentation.pptx
@@ -642,50 +642,50 @@
           <a:p/>
           <a:p>
             <a:r>
-              <a:t>[Point at the checks column.] Every check it ran, by name, and the one it failed. That's</a:t>
-            </a:r>
-          </a:p>
-          <a:p>
-            <a:r>
-              <a:t>your answer to "I can't see what it does" — not a confidence score, a list.</a:t>
+              <a:t>[Point at the list.] It's a queue — read overnight. Nobody types a complaint into a box it</a:t>
+            </a:r>
+          </a:p>
+          <a:p>
+            <a:r>
+              <a:t>already arrived in.</a:t>
             </a:r>
           </a:p>
           <a:p/>
           <a:p>
             <a:r>
-              <a:t>[Point at the button.] And nothing has happened yet. It's proposed. Someone has to press</a:t>
-            </a:r>
-          </a:p>
-          <a:p>
-            <a:r>
-              <a:t>that.</a:t>
+              <a:t>[Point at the deadline column.] And that's the column your regulator asks about. Your own</a:t>
+            </a:r>
+          </a:p>
+          <a:p>
+            <a:r>
+              <a:t>book had three hundred and thirty-five that missed a deadline; this one sorts by it.</a:t>
             </a:r>
           </a:p>
           <a:p/>
           <a:p>
             <a:r>
-              <a:t>[Click it, then open the log.] Now look — what it proposed sits next to what your handler</a:t>
-            </a:r>
-          </a:p>
-          <a:p>
-            <a:r>
-              <a:t>actually did. That pairing is the audit record. A proposal with nobody's decision beside it</a:t>
+              <a:t>[Open a row.] Every check it ran, by name, and the one it failed. Not a confidence score —</a:t>
+            </a:r>
+          </a:p>
+          <a:p>
+            <a:r>
+              <a:t>a list.</a:t>
+            </a:r>
+          </a:p>
+          <a:p/>
+          <a:p>
+            <a:r>
+              <a:t>[Point at the buttons.] Nothing has happened yet. Someone has to press that, and the press</a:t>
+            </a:r>
+          </a:p>
+          <a:p>
+            <a:r>
+              <a:t>is recorded next to what the system proposed. A proposal with nobody's decision beside it</a:t>
             </a:r>
           </a:p>
           <a:p>
             <a:r>
               <a:t>isn't a decision, it's a suggestion nobody owns.</a:t>
-            </a:r>
-          </a:p>
-          <a:p/>
-          <a:p>
-            <a:r>
-              <a:t>Same screen runs all three. And twenty-seven checks pass with no network at all, so I can</a:t>
-            </a:r>
-          </a:p>
-          <a:p>
-            <a:r>
-              <a:t>prove the safety logic works without spending a penny.</a:t>
             </a:r>
           </a:p>
         </p:txBody>
@@ -1554,17 +1554,28 @@
           <a:p/>
           <a:p>
             <a:r>
-              <a:t>And it ranks by how far something departs from that account's own normal, never by the</a:t>
-            </a:r>
-          </a:p>
-          <a:p>
-            <a:r>
-              <a:t>amount. A large-but-ordinary payment on a wealthy account doesn't outrank a small impossible</a:t>
-            </a:r>
-          </a:p>
-          <a:p>
-            <a:r>
-              <a:t>one on a modest account. A predicted payout never orders the queue.</a:t>
+              <a:t>It ranks by how far something departs from that account's own normal, never by the amount. A</a:t>
+            </a:r>
+          </a:p>
+          <a:p>
+            <a:r>
+              <a:t>large but ordinary payment on a wealthy account doesn't outrank a small impossible one on a</a:t>
+            </a:r>
+          </a:p>
+          <a:p>
+            <a:r>
+              <a:t>modest account. A predicted payout never orders the queue.</a:t>
+            </a:r>
+          </a:p>
+          <a:p/>
+          <a:p>
+            <a:r>
+              <a:t>And the guard earns its place here too. Six of fifty-six case notes quoted a figure that</a:t>
+            </a:r>
+          </a:p>
+          <a:p>
+            <a:r>
+              <a:t>wasn't in the transaction record. Every one was stopped before an analyst saw it.</a:t>
             </a:r>
           </a:p>
         </p:txBody>
@@ -1953,12 +1964,23 @@
           <a:p/>
           <a:p>
             <a:r>
-              <a:t>[Land this:] Which is why adding the second and third use cases cost me a prompt and a</a:t>
-            </a:r>
-          </a:p>
-          <a:p>
-            <a:r>
-              <a:t>check, not a new system. Building all three cost 1.3 times building one — not three times.</a:t>
+              <a:t>[Land this:] Which is why building all three cost 1.3 times building one — not three times.</a:t>
+            </a:r>
+          </a:p>
+          <a:p/>
+          <a:p>
+            <a:r>
+              <a:t>[Point at the strip.] And the checks earn it. On one batch this week it caught a fabrication</a:t>
+            </a:r>
+          </a:p>
+          <a:p>
+            <a:r>
+              <a:t>in all three: two quotes that weren't in the complaint, six values that weren't in the</a:t>
+            </a:r>
+          </a:p>
+          <a:p>
+            <a:r>
+              <a:t>transaction, one figure we never computed.</a:t>
             </a:r>
           </a:p>
         </p:txBody>
@@ -3795,7 +3817,7 @@
                   <a:srgbClr val="C6D8E4"/>
                 </a:solidFill>
               </a:rPr>
-              <a:t>Every check it ran, by name — and the one it failed.</a:t>
+              <a:t>A queue, already read. Nobody types a complaint into a box it already arrived in.</a:t>
             </a:r>
             <a:endParaRPr lang="en-US" sz="1500" dirty="0"/>
           </a:p>
@@ -3813,7 +3835,7 @@
                   <a:srgbClr val="C6D8E4"/>
                 </a:solidFill>
               </a:rPr>
-              <a:t>The button. Nothing happens until a person presses it.</a:t>
+              <a:t>A deadline column — the question your regulator actually asks.</a:t>
             </a:r>
             <a:endParaRPr lang="en-US" sz="1500" dirty="0"/>
           </a:p>
@@ -3831,7 +3853,7 @@
                   <a:srgbClr val="C6D8E4"/>
                 </a:solidFill>
               </a:rPr>
-              <a:t>What it proposed sits beside what your handler actually did. That pairing is the audit record.</a:t>
+              <a:t>Every check it ran, by name, and the one it failed.</a:t>
             </a:r>
             <a:endParaRPr lang="en-US" sz="1500" dirty="0"/>
           </a:p>
@@ -3849,7 +3871,7 @@
                   <a:srgbClr val="C6D8E4"/>
                 </a:solidFill>
               </a:rPr>
-              <a:t>Same screen runs all three. 27 checks pass with no network at all.</a:t>
+              <a:t>Nothing happens until someone presses a button — and the press is recorded beside the proposal.</a:t>
             </a:r>
             <a:endParaRPr lang="en-US" sz="1500" dirty="0"/>
           </a:p>
@@ -10172,7 +10194,7 @@
                   <a:srgbClr val="C6D8E4"/>
                 </a:solidFill>
               </a:rPr>
-              <a:t>Ranked by how far it departs from that account's own normal — never by the amount.</a:t>
+              <a:t>Ranked by departure from that account's own normal — never by the amount.</a:t>
             </a:r>
             <a:endParaRPr lang="en-US" sz="1500" dirty="0"/>
           </a:p>
@@ -10190,7 +10212,7 @@
                   <a:srgbClr val="C6D8E4"/>
                 </a:solidFill>
               </a:rPr>
-              <a:t>A predicted payout never orders the queue.</a:t>
+              <a:t>Six of 56 case notes were stopped for citing a figure that was not in the record.</a:t>
             </a:r>
             <a:endParaRPr lang="en-US" sz="1500" dirty="0"/>
           </a:p>
@@ -13855,6 +13877,20 @@
               <a:buNone/>
             </a:pPr>
             <a:r>
+              <a:rPr lang="en-US" sz="1700" dirty="0">
+                <a:solidFill>
+                  <a:srgbClr val="1B2730"/>
+                </a:solidFill>
+                <a:latin typeface="Calibri" pitchFamily="34" charset="0"/>
+                <a:ea typeface="Calibri" pitchFamily="34" charset="-122"/>
+                <a:cs typeface="Calibri" pitchFamily="34" charset="-120"/>
+              </a:rPr>
+              <a:t>One batch, three capabilities, three kinds of fabrication caught: </a:t>
+            </a:r>
+            <a:pPr indent="0" marL="0">
+              <a:buNone/>
+            </a:pPr>
+            <a:r>
               <a:rPr lang="en-US" sz="1700" b="1" dirty="0">
                 <a:solidFill>
                   <a:srgbClr val="24343F"/>
@@ -13863,7 +13899,7 @@
                 <a:ea typeface="Calibri" pitchFamily="34" charset="-122"/>
                 <a:cs typeface="Calibri" pitchFamily="34" charset="-120"/>
               </a:rPr>
-              <a:t>A capability costs a prompt and a check — not a new system.</a:t>
+              <a:t>2 invented quotes · 6 invented values · 1 uncomputed figure.</a:t>
             </a:r>
             <a:endParaRPr lang="en-US" sz="1700" dirty="0"/>
           </a:p>
@@ -14222,8 +14258,8 @@
         </p:blipFill>
         <p:spPr>
           <a:xfrm>
-            <a:off x="1495689" y="2395728"/>
-            <a:ext cx="9197575" cy="3959352"/>
+            <a:off x="1279904" y="2395728"/>
+            <a:ext cx="9629144" cy="3959352"/>
           </a:xfrm>
           <a:prstGeom prst="rect">
             <a:avLst/>

--- a/presentation.pptx
+++ b/presentation.pptx
@@ -1807,23 +1807,23 @@
           <a:p/>
           <a:p>
             <a:r>
-              <a:t>And fraud. Seven per cent of your complaints are unauthorised transactions — which means by</a:t>
-            </a:r>
-          </a:p>
-          <a:p>
-            <a:r>
-              <a:t>the time you hear about it, the money has already gone.</a:t>
+              <a:t>And fraud. Seven per cent of your complaints are unauthorised transactions — by the time you</a:t>
+            </a:r>
+          </a:p>
+          <a:p>
+            <a:r>
+              <a:t>hear about it, the money has gone.</a:t>
             </a:r>
           </a:p>
           <a:p/>
           <a:p>
             <a:r>
-              <a:t>[Land this:] High volume, low complexity, unstructured text. That's the shape a firm your</a:t>
-            </a:r>
-          </a:p>
-          <a:p>
-            <a:r>
-              <a:t>size can neither automate with rules nor afford to staff properly.</a:t>
+              <a:t>[Land this:] High volume, low complexity, unstructured text. The shape a firm your size can</a:t>
+            </a:r>
+          </a:p>
+          <a:p>
+            <a:r>
+              <a:t>neither automate with rules nor afford to staff properly.</a:t>
             </a:r>
           </a:p>
           <a:p/>
@@ -1937,7 +1937,7 @@
           <a:p/>
           <a:p>
             <a:r>
-              <a:t>[Point at the last arrow.] That step is not a feature. It is the whole design. There is no</a:t>
+              <a:t>[Point at the last arrow.] That step is not a feature, it is the whole design. There is no</a:t>
             </a:r>
           </a:p>
           <a:p>
@@ -1948,17 +1948,12 @@
           <a:p/>
           <a:p>
             <a:r>
-              <a:t>Every capability is those same four steps. The only thing that changes is what counts as</a:t>
-            </a:r>
-          </a:p>
-          <a:p>
-            <a:r>
-              <a:t>evidence — a sentence from the complaint, a figure we computed, or the transaction's own</a:t>
-            </a:r>
-          </a:p>
-          <a:p>
-            <a:r>
-              <a:t>values.</a:t>
+              <a:t>Every capability is those same four steps. Only the evidence changes — a sentence from the</a:t>
+            </a:r>
+          </a:p>
+          <a:p>
+            <a:r>
+              <a:t>complaint, a figure we computed, or the transaction's own values.</a:t>
             </a:r>
           </a:p>
           <a:p/>
@@ -2106,22 +2101,45 @@
           <a:p/>
           <a:p>
             <a:r>
-              <a:t>What this does not prove is accuracy. It agrees with the public dataset's labels sixty per</a:t>
-            </a:r>
-          </a:p>
-          <a:p>
-            <a:r>
-              <a:t>cent of the time — and those labels were picked by the customer filing the complaint, from</a:t>
-            </a:r>
-          </a:p>
-          <a:p>
-            <a:r>
-              <a:t>a dropdown, untrained. That's agreement, not accuracy. There is no accuracy number for this</a:t>
-            </a:r>
-          </a:p>
-          <a:p>
-            <a:r>
-              <a:t>system yet, and I'll come back to what it costs to get one.</a:t>
+              <a:t>[Three things to say before you move on.]</a:t>
+            </a:r>
+          </a:p>
+          <a:p/>
+          <a:p>
+            <a:r>
+              <a:t>Tools: n8n, because your team can read it as boxes and arrows — a Python script would have</a:t>
+            </a:r>
+          </a:p>
+          <a:p>
+            <a:r>
+              <a:t>been quicker to write and impossible to show you.</a:t>
+            </a:r>
+          </a:p>
+          <a:p/>
+          <a:p>
+            <a:r>
+              <a:t>What it does not prove is accuracy. It agrees with the public dataset's labels sixty per</a:t>
+            </a:r>
+          </a:p>
+          <a:p>
+            <a:r>
+              <a:t>cent of the time, and those labels were picked by the customer filing the complaint, from a</a:t>
+            </a:r>
+          </a:p>
+          <a:p>
+            <a:r>
+              <a:t>dropdown. That's agreement, not accuracy — and I'll come back to what it costs to fix.</a:t>
+            </a:r>
+          </a:p>
+          <a:p/>
+          <a:p>
+            <a:r>
+              <a:t>In production the trigger is your case system rather than a button, rejected inputs get</a:t>
+            </a:r>
+          </a:p>
+          <a:p>
+            <a:r>
+              <a:t>traced too, and delivery is confirmed back — today it records the decision, not the receipt.</a:t>
             </a:r>
           </a:p>
         </p:txBody>

--- a/presentation.pptx
+++ b/presentation.pptx
@@ -534,17 +534,12 @@
           <a:p/>
           <a:p>
             <a:r>
-              <a:t>Last time we met, I pitched you one thing. You told me to build all three. So that's what</a:t>
-            </a:r>
-          </a:p>
-          <a:p>
-            <a:r>
-              <a:t>you're going to see — three capabilities, all running, and one number I'd rather tell you</a:t>
-            </a:r>
-          </a:p>
-          <a:p>
-            <a:r>
-              <a:t>myself than let you find later.</a:t>
+              <a:t>Three capabilities, all running. One decision you can watch end to end. And the business</a:t>
+            </a:r>
+          </a:p>
+          <a:p>
+            <a:r>
+              <a:t>case as it actually came out.</a:t>
             </a:r>
           </a:p>
         </p:txBody>
@@ -788,13 +783,13 @@
           <a:p/>
           <a:p>
             <a:r>
-              <a:t>It works, it's lawful, and it doesn't yet pay for itself at your size.</a:t>
+              <a:t>It works, it's lawful, and it does not yet pay for itself at this size.</a:t>
             </a:r>
           </a:p>
           <a:p/>
           <a:p>
             <a:r>
-              <a:t>[Beat.] I'd rather you heard that third one from me now than found it in month three.</a:t>
+              <a:t>[Beat.] The pilot is what settles the third one.</a:t>
             </a:r>
           </a:p>
         </p:txBody>
@@ -1667,28 +1662,23 @@
           <a:p/>
           <a:p>
             <a:r>
-              <a:t>Nothing changed direction. Same sector, same firm, same lead use case — because nothing you</a:t>
-            </a:r>
-          </a:p>
-          <a:p>
-            <a:r>
-              <a:t>said challenged them.</a:t>
+              <a:t>Direction is unchanged: same sector, same firm, same lead use case.</a:t>
             </a:r>
           </a:p>
           <a:p/>
           <a:p>
             <a:r>
-              <a:t>What changed is scope. You asked for all three, and all three are built. And two things got</a:t>
-            </a:r>
-          </a:p>
-          <a:p>
-            <a:r>
-              <a:t>harder rather than easier: I now have a real ROI number instead of a cost estimate, and I've</a:t>
-            </a:r>
-          </a:p>
-          <a:p>
-            <a:r>
-              <a:t>done the AI Act work I deliberately refused to guess at last time.</a:t>
+              <a:t>Scope widened. Round 1 proposed three use cases and built one; all three are built now. And</a:t>
+            </a:r>
+          </a:p>
+          <a:p>
+            <a:r>
+              <a:t>two things got harder rather than easier — a real ROI number in place of a cost estimate,</a:t>
+            </a:r>
+          </a:p>
+          <a:p>
+            <a:r>
+              <a:t>and the AI Act work Round 1 deliberately refused to guess at.</a:t>
             </a:r>
           </a:p>
         </p:txBody>
@@ -1829,12 +1819,12 @@
           <a:p/>
           <a:p>
             <a:r>
-              <a:t>But the reason you haven't solved it isn't technical. It's that you told me you don't trust</a:t>
-            </a:r>
-          </a:p>
-          <a:p>
-            <a:r>
-              <a:t>AI, because you can't see what it does.</a:t>
+              <a:t>What stops this being solved isn't technical. It is that nobody can see what such a system</a:t>
+            </a:r>
+          </a:p>
+          <a:p>
+            <a:r>
+              <a:t>does — and a decision you cannot see is one you cannot sign off.</a:t>
             </a:r>
           </a:p>
         </p:txBody>
@@ -2073,62 +2063,61 @@
           <a:p/>
           <a:p>
             <a:r>
-              <a:t>[Run it.] Green ticks mean each step executed. It's proposed Disputes and fraud. And look</a:t>
-            </a:r>
-          </a:p>
-          <a:p>
-            <a:r>
-              <a:t>at why — it quoted your customer's own sentence back at you. Not a summary. Her words.</a:t>
+              <a:t>[Run it.] Green ticks mean each step executed. It proposed Disputes and fraud, and quoted</a:t>
+            </a:r>
+          </a:p>
+          <a:p>
+            <a:r>
+              <a:t>the customer's own sentence as the reason. Not a summary — her words. Then it stopped and</a:t>
+            </a:r>
+          </a:p>
+          <a:p>
+            <a:r>
+              <a:t>waited for a person.</a:t>
             </a:r>
           </a:p>
           <a:p/>
           <a:p>
             <a:r>
-              <a:t>Then it stopped and waited for a person.</a:t>
+              <a:t>[If time, edit the complaint and re-run.] When it isn't sure it doesn't fail. It says which</a:t>
+            </a:r>
+          </a:p>
+          <a:p>
+            <a:r>
+              <a:t>check stopped it, in words a handler can act on.</a:t>
             </a:r>
           </a:p>
           <a:p/>
           <a:p>
             <a:r>
-              <a:t>[If time, edit the complaint and re-run.] Watch what happens when it isn't sure. It doesn't</a:t>
-            </a:r>
-          </a:p>
-          <a:p>
-            <a:r>
-              <a:t>fail. It says which check stopped it, in words your handler can act on.</a:t>
+              <a:t>[Three things to say before you move on.]</a:t>
             </a:r>
           </a:p>
           <a:p/>
           <a:p>
             <a:r>
-              <a:t>[Three things to say before you move on.]</a:t>
+              <a:t>Tools: n8n, because your team can read it as boxes and arrows — a Python script would have</a:t>
+            </a:r>
+          </a:p>
+          <a:p>
+            <a:r>
+              <a:t>been quicker to write and impossible to show you.</a:t>
             </a:r>
           </a:p>
           <a:p/>
           <a:p>
             <a:r>
-              <a:t>Tools: n8n, because your team can read it as boxes and arrows — a Python script would have</a:t>
-            </a:r>
-          </a:p>
-          <a:p>
-            <a:r>
-              <a:t>been quicker to write and impossible to show you.</a:t>
-            </a:r>
-          </a:p>
-          <a:p/>
-          <a:p>
-            <a:r>
               <a:t>What it does not prove is accuracy. It agrees with the public dataset's labels sixty per</a:t>
             </a:r>
           </a:p>
           <a:p>
             <a:r>
-              <a:t>cent of the time, and those labels were picked by the customer filing the complaint, from a</a:t>
-            </a:r>
-          </a:p>
-          <a:p>
-            <a:r>
-              <a:t>dropdown. That's agreement, not accuracy — and I'll come back to what it costs to fix.</a:t>
+              <a:t>cent of the time, and those labels were picked by the complainant from a dropdown. That is</a:t>
+            </a:r>
+          </a:p>
+          <a:p>
+            <a:r>
+              <a:t>agreement, not accuracy.</a:t>
             </a:r>
           </a:p>
           <a:p/>
@@ -2231,44 +2220,39 @@
           <a:p/>
           <a:p>
             <a:r>
-              <a:t>If I build this for you as a one-off, it does not pay back. Minus thirty-one per cent over</a:t>
-            </a:r>
-          </a:p>
-          <a:p>
-            <a:r>
-              <a:t>three years. Break-even lands in month sixty-nine.</a:t>
+              <a:t>Built as a one-off for a firm this size, it does not pay back. Minus thirty-one per cent</a:t>
+            </a:r>
+          </a:p>
+          <a:p>
+            <a:r>
+              <a:t>over three years, break-even in month sixty-nine.</a:t>
             </a:r>
           </a:p>
           <a:p/>
           <a:p>
             <a:r>
-              <a:t>I could have made that number positive. I'd have had to start the benefits on day one, or</a:t>
-            </a:r>
-          </a:p>
-          <a:p>
-            <a:r>
-              <a:t>quietly cut the oversight cost. Both would have been lies, and you'd have found them.</a:t>
+              <a:t>That number could have been positive — start the benefits on day one, or trim the oversight</a:t>
+            </a:r>
+          </a:p>
+          <a:p>
+            <a:r>
+              <a:t>line. Both would have been wrong, and both would have surfaced in the pilot.</a:t>
             </a:r>
           </a:p>
           <a:p/>
           <a:p>
             <a:r>
-              <a:t>Here's what's actually going on. The capability is fine. The commercial shape is wrong. You</a:t>
-            </a:r>
-          </a:p>
-          <a:p>
-            <a:r>
-              <a:t>need about three thousand eight hundred complaints a year for a bespoke build to pay for</a:t>
-            </a:r>
-          </a:p>
-          <a:p>
-            <a:r>
-              <a:t>itself, and you have two and a half thousand. You are a third too small — which is a fact</a:t>
-            </a:r>
-          </a:p>
-          <a:p>
-            <a:r>
-              <a:t>about your size, not about the technology.</a:t>
+              <a:t>The capability is fine; the commercial shape is wrong. A bespoke build needs about three</a:t>
+            </a:r>
+          </a:p>
+          <a:p>
+            <a:r>
+              <a:t>thousand eight hundred complaints a year to pay for itself, and this firm has two and a</a:t>
+            </a:r>
+          </a:p>
+          <a:p>
+            <a:r>
+              <a:t>half thousand — a third too small. That is a fact about size, not about the technology.</a:t>
             </a:r>
           </a:p>
           <a:p/>
@@ -2538,54 +2522,49 @@
           <a:p/>
           <a:p>
             <a:r>
-              <a:t>It's not Annex Three, because it never evaluates anyone's creditworthiness — that's the trap</a:t>
-            </a:r>
-          </a:p>
-          <a:p>
-            <a:r>
-              <a:t>everyone expects to catch a bank, and it's why credit scoring is something I refuse to</a:t>
-            </a:r>
-          </a:p>
-          <a:p>
-            <a:r>
-              <a:t>build. And Article Four, AI literacy, applies to you today whatever the tier, which is why</a:t>
-            </a:r>
-          </a:p>
-          <a:p>
-            <a:r>
-              <a:t>training is funded rather than assumed.</a:t>
+              <a:t>Not Annex Three, because it never evaluates creditworthiness — the trap everyone expects to</a:t>
+            </a:r>
+          </a:p>
+          <a:p>
+            <a:r>
+              <a:t>catch a bank, and why credit scoring is excluded by design. Article Four, AI literacy,</a:t>
+            </a:r>
+          </a:p>
+          <a:p>
+            <a:r>
+              <a:t>applies today whatever the tier, which is why training is funded rather than assumed.</a:t>
             </a:r>
           </a:p>
           <a:p/>
           <a:p>
             <a:r>
-              <a:t>I've left two questions for your counsel, both about anomaly flagging, and both worth</a:t>
-            </a:r>
-          </a:p>
-          <a:p>
-            <a:r>
-              <a:t>answering before it's built rather than after.</a:t>
+              <a:t>Two questions are left for counsel, both on anomaly flagging, both cheaper to answer before</a:t>
+            </a:r>
+          </a:p>
+          <a:p>
+            <a:r>
+              <a:t>it is built.</a:t>
             </a:r>
           </a:p>
           <a:p/>
           <a:p>
             <a:r>
-              <a:t>On the right, the thing I'd rather you heard from me. We pseudonymise the reference — but</a:t>
-            </a:r>
-          </a:p>
-          <a:p>
-            <a:r>
-              <a:t>the complaint narrative goes to the model in full. Anyone who tells you "it's fine, the data</a:t>
-            </a:r>
-          </a:p>
-          <a:p>
-            <a:r>
-              <a:t>is pseudonymised" hasn't read the system. So the transfer work is a gate before any pilot on</a:t>
-            </a:r>
-          </a:p>
-          <a:p>
-            <a:r>
-              <a:t>real customer data, not something we discover later.</a:t>
+              <a:t>On the right, the part worth stating plainly. We pseudonymise the reference — but the</a:t>
+            </a:r>
+          </a:p>
+          <a:p>
+            <a:r>
+              <a:t>complaint narrative goes to the model in full. Anyone who says "it's fine, the data is</a:t>
+            </a:r>
+          </a:p>
+          <a:p>
+            <a:r>
+              <a:t>pseudonymised" has not read the system. So the transfer work is a gate before any pilot on</a:t>
+            </a:r>
+          </a:p>
+          <a:p>
+            <a:r>
+              <a:t>real customer data.</a:t>
             </a:r>
           </a:p>
           <a:p/>
@@ -3189,7 +3168,7 @@
                 <a:ea typeface="Calibri" pitchFamily="34" charset="-122"/>
                 <a:cs typeface="Calibri" pitchFamily="34" charset="-120"/>
               </a:rPr>
-              <a:t>VALEON LIMITED</a:t>
+              <a:t>AI CONSULTING CAPSTONE  ·  ROUND 2</a:t>
             </a:r>
             <a:endParaRPr lang="en-US" sz="1300" dirty="0"/>
           </a:p>
@@ -3363,24 +3342,7 @@
                 <a:ea typeface="Calibri" pitchFamily="34" charset="-122"/>
                 <a:cs typeface="Calibri" pitchFamily="34" charset="-120"/>
               </a:rPr>
-              <a:t>AI Consulting Capstone — Round 2</a:t>
-            </a:r>
-            <a:endParaRPr lang="en-US" sz="1200" dirty="0"/>
-          </a:p>
-          <a:p>
-            <a:pPr indent="0" marL="0">
-              <a:buNone/>
-            </a:pPr>
-            <a:r>
-              <a:rPr lang="en-US" sz="1100" dirty="0">
-                <a:solidFill>
-                  <a:srgbClr val="6B7C88"/>
-                </a:solidFill>
-                <a:latin typeface="Calibri" pitchFamily="34" charset="0"/>
-                <a:ea typeface="Calibri" pitchFamily="34" charset="-122"/>
-                <a:cs typeface="Calibri" pitchFamily="34" charset="-120"/>
-              </a:rPr>
-              <a:t>Financial services · mid-size</a:t>
+              <a:t>Financial services · mid-size EU retail bank</a:t>
             </a:r>
             <a:endParaRPr lang="en-US" sz="1200" dirty="0"/>
           </a:p>
@@ -14432,7 +14394,7 @@
                 <a:ea typeface="Trebuchet MS" pitchFamily="34" charset="-122"/>
                 <a:cs typeface="Trebuchet MS" pitchFamily="34" charset="-120"/>
               </a:rPr>
-              <a:t>The number I'd rather you heard from me</a:t>
+              <a:t>What it returns</a:t>
             </a:r>
             <a:endParaRPr lang="en-US" sz="3000" dirty="0"/>
           </a:p>

--- a/presentation.pptx
+++ b/presentation.pptx
@@ -10439,7 +10439,7 @@
                 <a:ea typeface="Calibri" pitchFamily="34" charset="-122"/>
                 <a:cs typeface="Calibri" pitchFamily="34" charset="-120"/>
               </a:rPr>
-              <a:t>Same industry, same client, same lead use case. You told me to build all three — so I did.</a:t>
+              <a:t>Same industry, same client, same lead use case. The scope widened from one use case to three.</a:t>
             </a:r>
             <a:endParaRPr lang="en-US" sz="1050" dirty="0"/>
           </a:p>
@@ -12442,7 +12442,7 @@
                 <a:ea typeface="Calibri" pitchFamily="34" charset="-122"/>
                 <a:cs typeface="Calibri" pitchFamily="34" charset="-120"/>
               </a:rPr>
-              <a:t>You told me you don't trust AI because you can't see what it does.</a:t>
+              <a:t>A decision nobody can see is a decision nobody can sign off.</a:t>
             </a:r>
             <a:endParaRPr lang="en-US" sz="1700" dirty="0"/>
           </a:p>

--- a/presentation.pptx
+++ b/presentation.pptx
@@ -4116,7 +4116,7 @@
                 <a:ea typeface="Calibri" pitchFamily="34" charset="-122"/>
                 <a:cs typeface="Calibri" pitchFamily="34" charset="-120"/>
               </a:rPr>
-              <a:t>It does not yet pay for itself at your size — and I would rather you heard that from me now than found it in month three.</a:t>
+              <a:t>It does not yet pay for itself at your size. The pilot is what settles that.</a:t>
             </a:r>
             <a:endParaRPr lang="en-US" sz="2400" dirty="0"/>
           </a:p>
@@ -11570,7 +11570,7 @@
                 <a:ea typeface="Calibri" pitchFamily="34" charset="-122"/>
                 <a:cs typeface="Calibri" pitchFamily="34" charset="-120"/>
               </a:rPr>
-              <a:t>Nothing challenged the sector or the honesty position, so nothing changed direction.</a:t>
+              <a:t>The two refusals stand: no customer-facing chatbot, no credit scoring.</a:t>
             </a:r>
             <a:endParaRPr lang="en-US" sz="1700" dirty="0"/>
           </a:p>
@@ -14809,7 +14809,7 @@
                             <a:srgbClr val="1B2730"/>
                           </a:solidFill>
                         </a:rPr>
-                        <a:t>As proposed — I build it for you, I run the oversight</a:t>
+                        <a:t>As proposed — bespoke build, consultant-run oversight</a:t>
                       </a:r>
                       <a:endParaRPr lang="en-US" sz="1500" dirty="0"/>
                     </a:p>

--- a/presentation.pptx
+++ b/presentation.pptx
@@ -3749,7 +3749,7 @@
               <a:buNone/>
             </a:pPr>
             <a:r>
-              <a:rPr lang="en-US" sz="1900" b="1" dirty="0">
+              <a:rPr lang="en-US" sz="1300" b="1" dirty="0">
                 <a:solidFill>
                   <a:srgbClr val="FFFFFF"/>
                 </a:solidFill>
@@ -5877,7 +5877,7 @@
               <a:buNone/>
             </a:pPr>
             <a:r>
-              <a:rPr lang="en-US" sz="1300" b="1" spc="200" kern="0" dirty="0">
+              <a:rPr lang="en-US" sz="1900" b="1" spc="200" kern="0" dirty="0">
                 <a:solidFill>
                   <a:srgbClr val="FFFFFF"/>
                 </a:solidFill>
@@ -5887,7 +5887,7 @@
               </a:rPr>
               <a:t>WHAT IT LEGITIMATELY SHOWS</a:t>
             </a:r>
-            <a:endParaRPr lang="en-US" sz="1300" dirty="0"/>
+            <a:endParaRPr lang="en-US" sz="1900" dirty="0"/>
           </a:p>
         </p:txBody>
       </p:sp>
@@ -6053,7 +6053,7 @@
               <a:buNone/>
             </a:pPr>
             <a:r>
-              <a:rPr lang="en-US" sz="1300" b="1" spc="200" kern="0" dirty="0">
+              <a:rPr lang="en-US" sz="1900" b="1" spc="200" kern="0" dirty="0">
                 <a:solidFill>
                   <a:srgbClr val="FFFFFF"/>
                 </a:solidFill>
@@ -6063,7 +6063,7 @@
               </a:rPr>
               <a:t>WHY IT IS NOT ACCURACY</a:t>
             </a:r>
-            <a:endParaRPr lang="en-US" sz="1300" dirty="0"/>
+            <a:endParaRPr lang="en-US" sz="1900" dirty="0"/>
           </a:p>
         </p:txBody>
       </p:sp>
@@ -10090,7 +10090,7 @@
               <a:buNone/>
             </a:pPr>
             <a:r>
-              <a:rPr lang="en-US" sz="1900" b="1" dirty="0">
+              <a:rPr lang="en-US" sz="1300" b="1" dirty="0">
                 <a:solidFill>
                   <a:srgbClr val="FFFFFF"/>
                 </a:solidFill>
@@ -16927,7 +16927,7 @@
               <a:buNone/>
             </a:pPr>
             <a:r>
-              <a:rPr lang="en-US" sz="1300" b="1" spc="200" kern="0" dirty="0">
+              <a:rPr lang="en-US" sz="1900" b="1" spc="200" kern="0" dirty="0">
                 <a:solidFill>
                   <a:srgbClr val="FFFFFF"/>
                 </a:solidFill>
@@ -16937,7 +16937,7 @@
               </a:rPr>
               <a:t>EU AI ACT</a:t>
             </a:r>
-            <a:endParaRPr lang="en-US" sz="1300" dirty="0"/>
+            <a:endParaRPr lang="en-US" sz="1900" dirty="0"/>
           </a:p>
         </p:txBody>
       </p:sp>
@@ -17103,7 +17103,7 @@
               <a:buNone/>
             </a:pPr>
             <a:r>
-              <a:rPr lang="en-US" sz="1300" b="1" spc="200" kern="0" dirty="0">
+              <a:rPr lang="en-US" sz="1900" b="1" spc="200" kern="0" dirty="0">
                 <a:solidFill>
                   <a:srgbClr val="FFFFFF"/>
                 </a:solidFill>
@@ -17113,7 +17113,7 @@
               </a:rPr>
               <a:t>GDPR</a:t>
             </a:r>
-            <a:endParaRPr lang="en-US" sz="1300" dirty="0"/>
+            <a:endParaRPr lang="en-US" sz="1900" dirty="0"/>
           </a:p>
         </p:txBody>
       </p:sp>

--- a/presentation.pptx
+++ b/presentation.pptx
@@ -1177,39 +1177,100 @@
           <a:lstStyle/>
           <a:p>
             <a:r>
-              <a:t>[If Legal wants the reasoning.]</a:t>
+              <a:t>[If Legal wants the reasoning. The slide shows four steps; these are all seven.]</a:t>
             </a:r>
           </a:p>
           <a:p/>
           <a:p>
             <a:r>
-              <a:t>Six steps. Step four is the one that matters: it's not an Annex Three use, because it never</a:t>
-            </a:r>
-          </a:p>
-          <a:p>
-            <a:r>
-              <a:t>evaluates creditworthiness.</a:t>
+              <a:t>Seven steps in the assessment. The slide shows the four that decide the outcome.</a:t>
             </a:r>
           </a:p>
           <a:p/>
           <a:p>
             <a:r>
-              <a:t>Step five is the interesting one. If step four ever fails, anomaly flagging alone becomes</a:t>
-            </a:r>
-          </a:p>
-          <a:p>
-            <a:r>
-              <a:t>high-risk — because it profiles, and the derogation can't save something that profiles.</a:t>
-            </a:r>
-          </a:p>
-          <a:p>
-            <a:r>
-              <a:t>Triage and reporting stay outside. That asymmetry is exactly why anomaly flagging is built</a:t>
-            </a:r>
-          </a:p>
-          <a:p>
-            <a:r>
-              <a:t>last and can be switched off without touching the other two.</a:t>
+              <a:t>One: it is an AI system under Article 3(1) — inference from input to output.</a:t>
+            </a:r>
+          </a:p>
+          <a:p>
+            <a:r>
+              <a:t>Two: not a prohibited practice under Article 5. One close call on anomaly flagging, and it</a:t>
+            </a:r>
+          </a:p>
+          <a:p>
+            <a:r>
+              <a:t>is flagged for your counsel rather than waved through.</a:t>
+            </a:r>
+          </a:p>
+          <a:p>
+            <a:r>
+              <a:t>Three: not a safety component of an Annex One product — nothing here goes into a regulated</a:t>
+            </a:r>
+          </a:p>
+          <a:p>
+            <a:r>
+              <a:t>machine, so Article 6(1) does not apply.</a:t>
+            </a:r>
+          </a:p>
+          <a:p>
+            <a:r>
+              <a:t>Four: not an Annex Three use case. This is the one that matters. Annex Three, point five(b)</a:t>
+            </a:r>
+          </a:p>
+          <a:p>
+            <a:r>
+              <a:t>covers creditworthiness, and this system never evaluates it.</a:t>
+            </a:r>
+          </a:p>
+          <a:p>
+            <a:r>
+              <a:t>Five: the Article 6(3) derogation is therefore not reached. Worth knowing why that matters —</a:t>
+            </a:r>
+          </a:p>
+          <a:p>
+            <a:r>
+              <a:t>if step four ever failed, anomaly flagging alone would become high-risk, because it profiles,</a:t>
+            </a:r>
+          </a:p>
+          <a:p>
+            <a:r>
+              <a:t>and the derogation cannot save something that profiles. Triage and reporting stay outside.</a:t>
+            </a:r>
+          </a:p>
+          <a:p>
+            <a:r>
+              <a:t>That asymmetry is exactly why anomaly flagging is built last and can be switched off without</a:t>
+            </a:r>
+          </a:p>
+          <a:p>
+            <a:r>
+              <a:t>touching the other two.</a:t>
+            </a:r>
+          </a:p>
+          <a:p>
+            <a:r>
+              <a:t>Six: Article 50 transparency. No customer-facing surface, but generated drafts are marked</a:t>
+            </a:r>
+          </a:p>
+          <a:p>
+            <a:r>
+              <a:t>anyway.</a:t>
+            </a:r>
+          </a:p>
+          <a:p>
+            <a:r>
+              <a:t>Seven: the obligations that apply whatever the tier — Article 4 AI literacy applies today.</a:t>
+            </a:r>
+          </a:p>
+          <a:p/>
+          <a:p>
+            <a:r>
+              <a:t>[If pressed on the label:] What holds it out of the high-risk tier is not a claim, it is a</a:t>
+            </a:r>
+          </a:p>
+          <a:p>
+            <a:r>
+              <a:t>design property: it proposes, a person decides. Remove that step and it is a new assessment.</a:t>
             </a:r>
           </a:p>
         </p:txBody>
@@ -3160,7 +3221,7 @@
               <a:buNone/>
             </a:pPr>
             <a:r>
-              <a:rPr lang="en-US" sz="1300" b="1" spc="400" kern="0" dirty="0">
+              <a:rPr lang="en-US" sz="2400" b="1" spc="400" kern="0" dirty="0">
                 <a:solidFill>
                   <a:srgbClr val="2A78D6"/>
                 </a:solidFill>
@@ -3170,7 +3231,7 @@
               </a:rPr>
               <a:t>AI CONSULTING CAPSTONE  ·  ROUND 2</a:t>
             </a:r>
-            <a:endParaRPr lang="en-US" sz="1300" dirty="0"/>
+            <a:endParaRPr lang="en-US" sz="2400" dirty="0"/>
           </a:p>
         </p:txBody>
       </p:sp>
@@ -3222,7 +3283,7 @@
         <p:spPr>
           <a:xfrm>
             <a:off x="566928" y="3310128"/>
-            <a:ext cx="11055096" cy="457200"/>
+            <a:ext cx="11055096" cy="603504"/>
           </a:xfrm>
           <a:prstGeom prst="rect">
             <a:avLst/>
@@ -3238,7 +3299,7 @@
               <a:buNone/>
             </a:pPr>
             <a:r>
-              <a:rPr lang="en-US" sz="1900" i="1" dirty="0">
+              <a:rPr lang="en-US" sz="2400" i="1" dirty="0">
                 <a:solidFill>
                   <a:srgbClr val="C6D8E4"/>
                 </a:solidFill>
@@ -3248,24 +3309,7 @@
               </a:rPr>
               <a:t>Complaint operations for a mid-size EU bank.</a:t>
             </a:r>
-            <a:endParaRPr lang="en-US" sz="1900" dirty="0"/>
-          </a:p>
-          <a:p>
-            <a:pPr indent="0" marL="0">
-              <a:buNone/>
-            </a:pPr>
-            <a:r>
-              <a:rPr lang="en-US" sz="1900" i="1" dirty="0">
-                <a:solidFill>
-                  <a:srgbClr val="C6D8E4"/>
-                </a:solidFill>
-                <a:latin typeface="Trebuchet MS" pitchFamily="34" charset="0"/>
-                <a:ea typeface="Trebuchet MS" pitchFamily="34" charset="-122"/>
-                <a:cs typeface="Trebuchet MS" pitchFamily="34" charset="-120"/>
-              </a:rPr>
-              <a:t>Three decisions proposed. Every one confirmed by a person.</a:t>
-            </a:r>
-            <a:endParaRPr lang="en-US" sz="1900" dirty="0"/>
+            <a:endParaRPr lang="en-US" sz="2400" dirty="0"/>
           </a:p>
         </p:txBody>
       </p:sp>
@@ -3300,8 +3344,8 @@
         </p:nvSpPr>
         <p:spPr>
           <a:xfrm>
-            <a:off x="566928" y="4297680"/>
-            <a:ext cx="11055096" cy="640080"/>
+            <a:off x="566928" y="4261104"/>
+            <a:ext cx="11055096" cy="960120"/>
           </a:xfrm>
           <a:prstGeom prst="rect">
             <a:avLst/>
@@ -3317,7 +3361,7 @@
               <a:buNone/>
             </a:pPr>
             <a:r>
-              <a:rPr lang="en-US" sz="1200" b="1" dirty="0">
+              <a:rPr lang="en-US" sz="2400" b="1" dirty="0">
                 <a:solidFill>
                   <a:srgbClr val="FFFFFF"/>
                 </a:solidFill>
@@ -3327,14 +3371,14 @@
               </a:rPr>
               <a:t>Ugo Ahukannah</a:t>
             </a:r>
-            <a:endParaRPr lang="en-US" sz="1200" dirty="0"/>
+            <a:endParaRPr lang="en-US" sz="2400" dirty="0"/>
           </a:p>
           <a:p>
             <a:pPr indent="0" marL="0">
               <a:buNone/>
             </a:pPr>
             <a:r>
-              <a:rPr lang="en-US" sz="1100" dirty="0">
+              <a:rPr lang="en-US" sz="2400" dirty="0">
                 <a:solidFill>
                   <a:srgbClr val="6B7C88"/>
                 </a:solidFill>
@@ -3344,7 +3388,7 @@
               </a:rPr>
               <a:t>Financial services · mid-size EU retail bank</a:t>
             </a:r>
-            <a:endParaRPr lang="en-US" sz="1200" dirty="0"/>
+            <a:endParaRPr lang="en-US" sz="2400" dirty="0"/>
           </a:p>
         </p:txBody>
       </p:sp>
@@ -3719,7 +3763,7 @@
         <p:spPr>
           <a:xfrm>
             <a:off x="7712050" y="1682496"/>
-            <a:ext cx="3690518" cy="310896"/>
+            <a:ext cx="3690518" cy="420624"/>
           </a:xfrm>
           <a:prstGeom prst="rect">
             <a:avLst/>
@@ -3735,7 +3779,7 @@
               <a:buNone/>
             </a:pPr>
             <a:r>
-              <a:rPr lang="en-US" sz="1100" dirty="0">
+              <a:rPr lang="en-US" sz="2400" dirty="0">
                 <a:solidFill>
                   <a:srgbClr val="2A78D6"/>
                 </a:solidFill>
@@ -3749,7 +3793,7 @@
               <a:buNone/>
             </a:pPr>
             <a:r>
-              <a:rPr lang="en-US" sz="1300" b="1" dirty="0">
+              <a:rPr lang="en-US" sz="2400" b="1" dirty="0">
                 <a:solidFill>
                   <a:srgbClr val="FFFFFF"/>
                 </a:solidFill>
@@ -3759,7 +3803,7 @@
               </a:rPr>
               <a:t>What the POC only implied</a:t>
             </a:r>
-            <a:endParaRPr lang="en-US" sz="1100" dirty="0"/>
+            <a:endParaRPr lang="en-US" sz="2400" dirty="0"/>
           </a:p>
         </p:txBody>
       </p:sp>
@@ -3771,8 +3815,8 @@
         </p:nvSpPr>
         <p:spPr>
           <a:xfrm>
-            <a:off x="7712050" y="2194560"/>
-            <a:ext cx="3672230" cy="3959352"/>
+            <a:off x="7712050" y="2322576"/>
+            <a:ext cx="3672230" cy="3822192"/>
           </a:xfrm>
           <a:prstGeom prst="rect">
             <a:avLst/>
@@ -3786,74 +3830,74 @@
           <a:p>
             <a:pPr marL="152400" indent="-152400">
               <a:spcAft>
-                <a:spcPts val="900"/>
+                <a:spcPts val="1000"/>
               </a:spcAft>
               <a:buSzPct val="100000"/>
               <a:buChar char="•"/>
             </a:pPr>
             <a:r>
-              <a:rPr lang="en-US" sz="1500" dirty="0">
+              <a:rPr lang="en-US" sz="2400" dirty="0">
                 <a:solidFill>
                   <a:srgbClr val="C6D8E4"/>
                 </a:solidFill>
               </a:rPr>
-              <a:t>A queue, already read. Nobody types a complaint into a box it already arrived in.</a:t>
-            </a:r>
-            <a:endParaRPr lang="en-US" sz="1500" dirty="0"/>
+              <a:t>A queue, already read.</a:t>
+            </a:r>
+            <a:endParaRPr lang="en-US" sz="2400" dirty="0"/>
           </a:p>
           <a:p>
             <a:pPr marL="152400" indent="-152400">
               <a:spcAft>
-                <a:spcPts val="900"/>
+                <a:spcPts val="1000"/>
               </a:spcAft>
               <a:buSzPct val="100000"/>
               <a:buChar char="•"/>
             </a:pPr>
             <a:r>
-              <a:rPr lang="en-US" sz="1500" dirty="0">
+              <a:rPr lang="en-US" sz="2400" dirty="0">
                 <a:solidFill>
                   <a:srgbClr val="C6D8E4"/>
                 </a:solidFill>
               </a:rPr>
-              <a:t>A deadline column — the question your regulator actually asks.</a:t>
-            </a:r>
-            <a:endParaRPr lang="en-US" sz="1500" dirty="0"/>
+              <a:t>A deadline column.</a:t>
+            </a:r>
+            <a:endParaRPr lang="en-US" sz="2400" dirty="0"/>
           </a:p>
           <a:p>
             <a:pPr marL="152400" indent="-152400">
               <a:spcAft>
-                <a:spcPts val="900"/>
+                <a:spcPts val="1000"/>
               </a:spcAft>
               <a:buSzPct val="100000"/>
               <a:buChar char="•"/>
             </a:pPr>
             <a:r>
-              <a:rPr lang="en-US" sz="1500" dirty="0">
+              <a:rPr lang="en-US" sz="2400" dirty="0">
                 <a:solidFill>
                   <a:srgbClr val="C6D8E4"/>
                 </a:solidFill>
               </a:rPr>
-              <a:t>Every check it ran, by name, and the one it failed.</a:t>
-            </a:r>
-            <a:endParaRPr lang="en-US" sz="1500" dirty="0"/>
+              <a:t>Every check it ran, by name.</a:t>
+            </a:r>
+            <a:endParaRPr lang="en-US" sz="2400" dirty="0"/>
           </a:p>
           <a:p>
             <a:pPr marL="152400" indent="-152400">
               <a:spcAft>
-                <a:spcPts val="900"/>
+                <a:spcPts val="1000"/>
               </a:spcAft>
               <a:buSzPct val="100000"/>
               <a:buChar char="•"/>
             </a:pPr>
             <a:r>
-              <a:rPr lang="en-US" sz="1500" dirty="0">
+              <a:rPr lang="en-US" sz="2400" dirty="0">
                 <a:solidFill>
                   <a:srgbClr val="C6D8E4"/>
                 </a:solidFill>
               </a:rPr>
-              <a:t>Nothing happens until someone presses a button — and the press is recorded beside the proposal.</a:t>
-            </a:r>
-            <a:endParaRPr lang="en-US" sz="1500" dirty="0"/>
+              <a:t>Nothing moves until someone presses a button.</a:t>
+            </a:r>
+            <a:endParaRPr lang="en-US" sz="2400" dirty="0"/>
           </a:p>
         </p:txBody>
       </p:sp>
@@ -4019,8 +4063,8 @@
         </p:nvSpPr>
         <p:spPr>
           <a:xfrm>
-            <a:off x="566928" y="1920240"/>
-            <a:ext cx="11055096" cy="2926080"/>
+            <a:off x="566928" y="1691640"/>
+            <a:ext cx="11055096" cy="1188720"/>
           </a:xfrm>
           <a:prstGeom prst="rect">
             <a:avLst/>
@@ -4029,94 +4073,115 @@
           <a:ln/>
         </p:spPr>
         <p:txBody>
-          <a:bodyPr wrap="square" rtlCol="0" anchor="t"/>
+          <a:bodyPr wrap="square" lIns="0" tIns="0" rIns="0" bIns="0" rtlCol="0" anchor="t"/>
           <a:lstStyle/>
           <a:p>
             <a:pPr indent="0" marL="0">
               <a:buNone/>
             </a:pPr>
             <a:r>
-              <a:rPr lang="en-US" sz="2400" b="1" dirty="0">
+              <a:rPr lang="en-US" sz="2800" b="1" dirty="0">
                 <a:solidFill>
                   <a:srgbClr val="FFFFFF"/>
                 </a:solidFill>
-                <a:latin typeface="Calibri" pitchFamily="34" charset="0"/>
-                <a:ea typeface="Calibri" pitchFamily="34" charset="-122"/>
-                <a:cs typeface="Calibri" pitchFamily="34" charset="-120"/>
+                <a:latin typeface="Trebuchet MS" pitchFamily="34" charset="0"/>
+                <a:ea typeface="Trebuchet MS" pitchFamily="34" charset="-122"/>
+                <a:cs typeface="Trebuchet MS" pitchFamily="34" charset="-120"/>
               </a:rPr>
-              <a:t>A 60-day shadow pilot on your own complaints.
-</a:t>
-            </a:r>
-            <a:endParaRPr lang="en-US" sz="2400" dirty="0"/>
+              <a:t>€18,200 to Phase 1.</a:t>
+            </a:r>
+            <a:endParaRPr lang="en-US" sz="2800" dirty="0"/>
           </a:p>
           <a:p>
             <a:pPr indent="0" marL="0">
               <a:buNone/>
             </a:pPr>
             <a:r>
-              <a:rPr lang="en-US" sz="2000" dirty="0">
+              <a:rPr lang="en-US" sz="2400" dirty="0">
                 <a:solidFill>
                   <a:srgbClr val="C6D8E4"/>
                 </a:solidFill>
-                <a:latin typeface="Calibri" pitchFamily="34" charset="0"/>
-                <a:ea typeface="Calibri" pitchFamily="34" charset="-122"/>
-                <a:cs typeface="Calibri" pitchFamily="34" charset="-120"/>
+                <a:latin typeface="Trebuchet MS" pitchFamily="34" charset="0"/>
+                <a:ea typeface="Trebuchet MS" pitchFamily="34" charset="-122"/>
+                <a:cs typeface="Trebuchet MS" pitchFamily="34" charset="-120"/>
               </a:rPr>
-              <a:t>€18,200 to Phase 1. Nobody acts on a single suggestion.
-</a:t>
-            </a:r>
-            <a:endParaRPr lang="en-US" sz="2400" dirty="0"/>
-          </a:p>
-          <a:p>
-            <a:pPr indent="0" marL="0">
-              <a:buNone/>
+              <a:t>Nobody acts on a single suggestion.</a:t>
+            </a:r>
+            <a:endParaRPr lang="en-US" sz="2800" dirty="0"/>
+          </a:p>
+        </p:txBody>
+      </p:sp>
+      <p:sp>
+        <p:nvSpPr>
+          <p:cNvPr id="7" name="Text 4"/>
+          <p:cNvSpPr/>
+          <p:nvPr/>
+        </p:nvSpPr>
+        <p:spPr>
+          <a:xfrm>
+            <a:off x="566928" y="3063240"/>
+            <a:ext cx="11055096" cy="2377440"/>
+          </a:xfrm>
+          <a:prstGeom prst="rect">
+            <a:avLst/>
+          </a:prstGeom>
+          <a:noFill/>
+          <a:ln/>
+        </p:spPr>
+        <p:txBody>
+          <a:bodyPr wrap="square" rtlCol="0" anchor="t"/>
+          <a:lstStyle/>
+          <a:p>
+            <a:pPr marL="152400" indent="-152400">
+              <a:spcAft>
+                <a:spcPts val="1400"/>
+              </a:spcAft>
+              <a:buSzPct val="100000"/>
+              <a:buChar char="•"/>
             </a:pPr>
             <a:r>
-              <a:rPr lang="en-US" sz="1800" dirty="0">
+              <a:rPr lang="en-US" sz="2400" dirty="0">
                 <a:solidFill>
                   <a:srgbClr val="FFFFFF"/>
                 </a:solidFill>
-                <a:latin typeface="Calibri" pitchFamily="34" charset="0"/>
-                <a:ea typeface="Calibri" pitchFamily="34" charset="-122"/>
-                <a:cs typeface="Calibri" pitchFamily="34" charset="-120"/>
               </a:rPr>
-              <a:t>It works — three capabilities running, every decision checked and traced.
-</a:t>
+              <a:t>It works — three capabilities, every decision checked.</a:t>
             </a:r>
             <a:endParaRPr lang="en-US" sz="2400" dirty="0"/>
           </a:p>
           <a:p>
-            <a:pPr indent="0" marL="0">
-              <a:buNone/>
+            <a:pPr marL="152400" indent="-152400">
+              <a:spcAft>
+                <a:spcPts val="1400"/>
+              </a:spcAft>
+              <a:buSzPct val="100000"/>
+              <a:buChar char="•"/>
             </a:pPr>
             <a:r>
-              <a:rPr lang="en-US" sz="1800" dirty="0">
+              <a:rPr lang="en-US" sz="2400" dirty="0">
                 <a:solidFill>
                   <a:srgbClr val="FFFFFF"/>
                 </a:solidFill>
-                <a:latin typeface="Calibri" pitchFamily="34" charset="0"/>
-                <a:ea typeface="Calibri" pitchFamily="34" charset="-122"/>
-                <a:cs typeface="Calibri" pitchFamily="34" charset="-120"/>
               </a:rPr>
-              <a:t>It is lawful — not high-risk, with the reasoning written down and two questions named for your counsel.
-</a:t>
+              <a:t>It is lawful — not high-risk, reasoning written down.</a:t>
             </a:r>
             <a:endParaRPr lang="en-US" sz="2400" dirty="0"/>
           </a:p>
           <a:p>
-            <a:pPr indent="0" marL="0">
-              <a:buNone/>
+            <a:pPr marL="152400" indent="-152400">
+              <a:spcAft>
+                <a:spcPts val="1400"/>
+              </a:spcAft>
+              <a:buSzPct val="100000"/>
+              <a:buChar char="•"/>
             </a:pPr>
             <a:r>
-              <a:rPr lang="en-US" sz="1800" dirty="0">
+              <a:rPr lang="en-US" sz="2400" dirty="0">
                 <a:solidFill>
-                  <a:srgbClr val="8FBFF0"/>
+                  <a:srgbClr val="FFFFFF"/>
                 </a:solidFill>
-                <a:latin typeface="Calibri" pitchFamily="34" charset="0"/>
-                <a:ea typeface="Calibri" pitchFamily="34" charset="-122"/>
-                <a:cs typeface="Calibri" pitchFamily="34" charset="-120"/>
               </a:rPr>
-              <a:t>It does not yet pay for itself at your size. The pilot is what settles that.</a:t>
+              <a:t>It does not yet pay for itself. The pilot settles that.</a:t>
             </a:r>
             <a:endParaRPr lang="en-US" sz="2400" dirty="0"/>
           </a:p>
@@ -4439,7 +4504,7 @@
         <p:spPr>
           <a:xfrm>
             <a:off x="566928" y="1481328"/>
-            <a:ext cx="11055096" cy="676656"/>
+            <a:ext cx="11055096" cy="1078992"/>
           </a:xfrm>
           <a:prstGeom prst="rect">
             <a:avLst/>
@@ -4459,7 +4524,7 @@
         <p:spPr>
           <a:xfrm>
             <a:off x="566928" y="1481328"/>
-            <a:ext cx="82296" cy="676656"/>
+            <a:ext cx="82296" cy="1078992"/>
           </a:xfrm>
           <a:prstGeom prst="rect">
             <a:avLst/>
@@ -4479,7 +4544,7 @@
         <p:spPr>
           <a:xfrm>
             <a:off x="822960" y="1481328"/>
-            <a:ext cx="10597896" cy="676656"/>
+            <a:ext cx="10597896" cy="1078992"/>
           </a:xfrm>
           <a:prstGeom prst="rect">
             <a:avLst/>
@@ -4495,7 +4560,7 @@
               <a:buNone/>
             </a:pPr>
             <a:r>
-              <a:rPr lang="en-US" sz="1050" b="1" spc="100" kern="0" dirty="0">
+              <a:rPr lang="en-US" sz="2400" b="1" spc="100" kern="0" dirty="0">
                 <a:solidFill>
                   <a:srgbClr val="2A78D6"/>
                 </a:solidFill>
@@ -4509,7 +4574,7 @@
               <a:buNone/>
             </a:pPr>
             <a:r>
-              <a:rPr lang="en-US" sz="1300" dirty="0">
+              <a:rPr lang="en-US" sz="2400" dirty="0">
                 <a:solidFill>
                   <a:srgbClr val="1B2730"/>
                 </a:solidFill>
@@ -4519,7 +4584,7 @@
               </a:rPr>
               <a:t>The model is consistent. It disagrees with an untrained label.</a:t>
             </a:r>
-            <a:endParaRPr lang="en-US" sz="1050" dirty="0"/>
+            <a:endParaRPr lang="en-US" sz="2400" dirty="0"/>
           </a:p>
         </p:txBody>
       </p:sp>
@@ -4628,7 +4693,7 @@
           </p:nvPr>
         </p:nvGraphicFramePr>
         <p:xfrm>
-          <a:off x="566928" y="2395728"/>
+          <a:off x="566928" y="2798064"/>
           <a:ext cx="11055096" cy="914400"/>
         </p:xfrm>
         <a:graphic>
@@ -4636,11 +4701,10 @@
             <a:tbl>
               <a:tblPr/>
               <a:tblGrid>
-                <a:gridCol w="3200400"/>
-                <a:gridCol w="1737360"/>
-                <a:gridCol w="6336792"/>
+                <a:gridCol w="7397496"/>
+                <a:gridCol w="3657600"/>
               </a:tblGrid>
-              <a:tr h="411480">
+              <a:tr h="475488">
                 <a:tc>
                   <a:txBody>
                     <a:bodyPr/>
@@ -4650,14 +4714,14 @@
                         <a:buNone/>
                       </a:pPr>
                       <a:r>
-                        <a:rPr lang="en-US" sz="1500" b="1" dirty="0">
+                        <a:rPr lang="en-US" sz="2400" b="1" dirty="0">
                           <a:solidFill>
                             <a:srgbClr val="FFFFFF"/>
                           </a:solidFill>
                         </a:rPr>
-                        <a:t>Measure</a:t>
+                        <a:t>MEASURE</a:t>
                       </a:r>
-                      <a:endParaRPr lang="en-US" sz="1500" dirty="0"/>
+                      <a:endParaRPr lang="en-US" sz="2400" dirty="0"/>
                     </a:p>
                   </a:txBody>
                   <a:tcPr marL="76200" marR="76200" marT="38100" marB="38100" anchor="ctr">
@@ -4711,75 +4775,14 @@
                         <a:buNone/>
                       </a:pPr>
                       <a:r>
-                        <a:rPr lang="en-US" sz="1500" b="1" dirty="0">
+                        <a:rPr lang="en-US" sz="2400" b="1" dirty="0">
                           <a:solidFill>
                             <a:srgbClr val="FFFFFF"/>
                           </a:solidFill>
                         </a:rPr>
-                        <a:t>Value</a:t>
+                        <a:t>RESULT</a:t>
                       </a:r>
-                      <a:endParaRPr lang="en-US" sz="1500" dirty="0"/>
-                    </a:p>
-                  </a:txBody>
-                  <a:tcPr marL="76200" marR="76200" marT="38100" marB="38100" anchor="ctr">
-                    <a:lnL w="12700" cap="flat" cmpd="sng" algn="ctr">
-                      <a:solidFill>
-                        <a:srgbClr val="D9E3EA"/>
-                      </a:solidFill>
-                      <a:prstDash val="solid"/>
-                      <a:round/>
-                      <a:headEnd type="none" w="med" len="med"/>
-                      <a:tailEnd type="none" w="med" len="med"/>
-                    </a:lnL>
-                    <a:lnR w="12700" cap="flat" cmpd="sng" algn="ctr">
-                      <a:solidFill>
-                        <a:srgbClr val="D9E3EA"/>
-                      </a:solidFill>
-                      <a:prstDash val="solid"/>
-                      <a:round/>
-                      <a:headEnd type="none" w="med" len="med"/>
-                      <a:tailEnd type="none" w="med" len="med"/>
-                    </a:lnR>
-                    <a:lnT w="12700" cap="flat" cmpd="sng" algn="ctr">
-                      <a:solidFill>
-                        <a:srgbClr val="D9E3EA"/>
-                      </a:solidFill>
-                      <a:prstDash val="solid"/>
-                      <a:round/>
-                      <a:headEnd type="none" w="med" len="med"/>
-                      <a:tailEnd type="none" w="med" len="med"/>
-                    </a:lnT>
-                    <a:lnB w="12700" cap="flat" cmpd="sng" algn="ctr">
-                      <a:solidFill>
-                        <a:srgbClr val="D9E3EA"/>
-                      </a:solidFill>
-                      <a:prstDash val="solid"/>
-                      <a:round/>
-                      <a:headEnd type="none" w="med" len="med"/>
-                      <a:tailEnd type="none" w="med" len="med"/>
-                    </a:lnB>
-                    <a:solidFill>
-                      <a:srgbClr val="445A69"/>
-                    </a:solidFill>
-                  </a:tcPr>
-                </a:tc>
-                <a:tc>
-                  <a:txBody>
-                    <a:bodyPr/>
-                    <a:lstStyle/>
-                    <a:p>
-                      <a:pPr indent="0" marL="0">
-                        <a:buNone/>
-                      </a:pPr>
-                      <a:r>
-                        <a:rPr lang="en-US" sz="1500" b="1" dirty="0">
-                          <a:solidFill>
-                            <a:srgbClr val="FFFFFF"/>
-                          </a:solidFill>
-                        </a:rPr>
-                        <a:t>What it means</a:t>
-                      </a:r>
-                      <a:endParaRPr lang="en-US" sz="1500" dirty="0"/>
+                      <a:endParaRPr lang="en-US" sz="2400" dirty="0"/>
                     </a:p>
                   </a:txBody>
                   <a:tcPr marL="76200" marR="76200" marT="38100" marB="38100" anchor="ctr">
@@ -4835,14 +4838,14 @@
                         <a:buNone/>
                       </a:pPr>
                       <a:r>
-                        <a:rPr lang="en-US" sz="1500" b="1" dirty="0">
+                        <a:rPr lang="en-US" sz="2400" b="1" dirty="0">
                           <a:solidFill>
                             <a:srgbClr val="24343F"/>
                           </a:solidFill>
                         </a:rPr>
                         <a:t>Agreement with CFPB labels</a:t>
                       </a:r>
-                      <a:endParaRPr lang="en-US" sz="1500" dirty="0"/>
+                      <a:endParaRPr lang="en-US" sz="2400" dirty="0"/>
                     </a:p>
                   </a:txBody>
                   <a:tcPr marL="76200" marR="76200" marT="38100" marB="38100" anchor="ctr">
@@ -4896,75 +4899,14 @@
                         <a:buNone/>
                       </a:pPr>
                       <a:r>
-                        <a:rPr lang="en-US" sz="1500" dirty="0">
+                        <a:rPr lang="en-US" sz="2400" dirty="0">
                           <a:solidFill>
                             <a:srgbClr val="1B2730"/>
                           </a:solidFill>
                         </a:rPr>
                         <a:t>60.5%</a:t>
                       </a:r>
-                      <a:endParaRPr lang="en-US" sz="1500" dirty="0"/>
-                    </a:p>
-                  </a:txBody>
-                  <a:tcPr marL="76200" marR="76200" marT="38100" marB="38100" anchor="ctr">
-                    <a:lnL w="12700" cap="flat" cmpd="sng" algn="ctr">
-                      <a:solidFill>
-                        <a:srgbClr val="D9E3EA"/>
-                      </a:solidFill>
-                      <a:prstDash val="solid"/>
-                      <a:round/>
-                      <a:headEnd type="none" w="med" len="med"/>
-                      <a:tailEnd type="none" w="med" len="med"/>
-                    </a:lnL>
-                    <a:lnR w="12700" cap="flat" cmpd="sng" algn="ctr">
-                      <a:solidFill>
-                        <a:srgbClr val="D9E3EA"/>
-                      </a:solidFill>
-                      <a:prstDash val="solid"/>
-                      <a:round/>
-                      <a:headEnd type="none" w="med" len="med"/>
-                      <a:tailEnd type="none" w="med" len="med"/>
-                    </a:lnR>
-                    <a:lnT w="12700" cap="flat" cmpd="sng" algn="ctr">
-                      <a:solidFill>
-                        <a:srgbClr val="D9E3EA"/>
-                      </a:solidFill>
-                      <a:prstDash val="solid"/>
-                      <a:round/>
-                      <a:headEnd type="none" w="med" len="med"/>
-                      <a:tailEnd type="none" w="med" len="med"/>
-                    </a:lnT>
-                    <a:lnB w="12700" cap="flat" cmpd="sng" algn="ctr">
-                      <a:solidFill>
-                        <a:srgbClr val="D9E3EA"/>
-                      </a:solidFill>
-                      <a:prstDash val="solid"/>
-                      <a:round/>
-                      <a:headEnd type="none" w="med" len="med"/>
-                      <a:tailEnd type="none" w="med" len="med"/>
-                    </a:lnB>
-                    <a:solidFill>
-                      <a:srgbClr val="FFFFFF"/>
-                    </a:solidFill>
-                  </a:tcPr>
-                </a:tc>
-                <a:tc>
-                  <a:txBody>
-                    <a:bodyPr/>
-                    <a:lstStyle/>
-                    <a:p>
-                      <a:pPr indent="0" marL="0">
-                        <a:buNone/>
-                      </a:pPr>
-                      <a:r>
-                        <a:rPr lang="en-US" sz="1500" dirty="0">
-                          <a:solidFill>
-                            <a:srgbClr val="1B2730"/>
-                          </a:solidFill>
-                        </a:rPr>
-                        <a:t>Those labels were picked by the complainant from a dropdown</a:t>
-                      </a:r>
-                      <a:endParaRPr lang="en-US" sz="1500" dirty="0"/>
+                      <a:endParaRPr lang="en-US" sz="2400" dirty="0"/>
                     </a:p>
                   </a:txBody>
                   <a:tcPr marL="76200" marR="76200" marT="38100" marB="38100" anchor="ctr">
@@ -5020,14 +4962,14 @@
                         <a:buNone/>
                       </a:pPr>
                       <a:r>
-                        <a:rPr lang="en-US" sz="1500" b="1" dirty="0">
+                        <a:rPr lang="en-US" sz="2400" b="1" dirty="0">
                           <a:solidFill>
                             <a:srgbClr val="24343F"/>
                           </a:solidFill>
                         </a:rPr>
                         <a:t>Self-agreement, same input twice</a:t>
                       </a:r>
-                      <a:endParaRPr lang="en-US" sz="1500" dirty="0"/>
+                      <a:endParaRPr lang="en-US" sz="2400" dirty="0"/>
                     </a:p>
                   </a:txBody>
                   <a:tcPr marL="76200" marR="76200" marT="38100" marB="38100" anchor="ctr">
@@ -5081,75 +5023,14 @@
                         <a:buNone/>
                       </a:pPr>
                       <a:r>
-                        <a:rPr lang="en-US" sz="1500" dirty="0">
+                        <a:rPr lang="en-US" sz="2400" dirty="0">
                           <a:solidFill>
                             <a:srgbClr val="1B2730"/>
                           </a:solidFill>
                         </a:rPr>
                         <a:t>88.0%</a:t>
                       </a:r>
-                      <a:endParaRPr lang="en-US" sz="1500" dirty="0"/>
-                    </a:p>
-                  </a:txBody>
-                  <a:tcPr marL="76200" marR="76200" marT="38100" marB="38100" anchor="ctr">
-                    <a:lnL w="12700" cap="flat" cmpd="sng" algn="ctr">
-                      <a:solidFill>
-                        <a:srgbClr val="D9E3EA"/>
-                      </a:solidFill>
-                      <a:prstDash val="solid"/>
-                      <a:round/>
-                      <a:headEnd type="none" w="med" len="med"/>
-                      <a:tailEnd type="none" w="med" len="med"/>
-                    </a:lnL>
-                    <a:lnR w="12700" cap="flat" cmpd="sng" algn="ctr">
-                      <a:solidFill>
-                        <a:srgbClr val="D9E3EA"/>
-                      </a:solidFill>
-                      <a:prstDash val="solid"/>
-                      <a:round/>
-                      <a:headEnd type="none" w="med" len="med"/>
-                      <a:tailEnd type="none" w="med" len="med"/>
-                    </a:lnR>
-                    <a:lnT w="12700" cap="flat" cmpd="sng" algn="ctr">
-                      <a:solidFill>
-                        <a:srgbClr val="D9E3EA"/>
-                      </a:solidFill>
-                      <a:prstDash val="solid"/>
-                      <a:round/>
-                      <a:headEnd type="none" w="med" len="med"/>
-                      <a:tailEnd type="none" w="med" len="med"/>
-                    </a:lnT>
-                    <a:lnB w="12700" cap="flat" cmpd="sng" algn="ctr">
-                      <a:solidFill>
-                        <a:srgbClr val="D9E3EA"/>
-                      </a:solidFill>
-                      <a:prstDash val="solid"/>
-                      <a:round/>
-                      <a:headEnd type="none" w="med" len="med"/>
-                      <a:tailEnd type="none" w="med" len="med"/>
-                    </a:lnB>
-                    <a:solidFill>
-                      <a:srgbClr val="FFFFFF"/>
-                    </a:solidFill>
-                  </a:tcPr>
-                </a:tc>
-                <a:tc>
-                  <a:txBody>
-                    <a:bodyPr/>
-                    <a:lstStyle/>
-                    <a:p>
-                      <a:pPr indent="0" marL="0">
-                        <a:buNone/>
-                      </a:pPr>
-                      <a:r>
-                        <a:rPr lang="en-US" sz="1500" dirty="0">
-                          <a:solidFill>
-                            <a:srgbClr val="1B2730"/>
-                          </a:solidFill>
-                        </a:rPr>
-                        <a:t>It is consistent — so a cleverer model is not the fix</a:t>
-                      </a:r>
-                      <a:endParaRPr lang="en-US" sz="1500" dirty="0"/>
+                      <a:endParaRPr lang="en-US" sz="2400" dirty="0"/>
                     </a:p>
                   </a:txBody>
                   <a:tcPr marL="76200" marR="76200" marT="38100" marB="38100" anchor="ctr">
@@ -5205,14 +5086,14 @@
                         <a:buNone/>
                       </a:pPr>
                       <a:r>
-                        <a:rPr lang="en-US" sz="1500" b="1" dirty="0">
+                        <a:rPr lang="en-US" sz="2400" b="1" dirty="0">
                           <a:solidFill>
                             <a:srgbClr val="24343F"/>
                           </a:solidFill>
                         </a:rPr>
                         <a:t>Fabricated quotes caught</a:t>
                       </a:r>
-                      <a:endParaRPr lang="en-US" sz="1500" dirty="0"/>
+                      <a:endParaRPr lang="en-US" sz="2400" dirty="0"/>
                     </a:p>
                   </a:txBody>
                   <a:tcPr marL="76200" marR="76200" marT="38100" marB="38100" anchor="ctr">
@@ -5266,75 +5147,14 @@
                         <a:buNone/>
                       </a:pPr>
                       <a:r>
-                        <a:rPr lang="en-US" sz="1500" dirty="0">
+                        <a:rPr lang="en-US" sz="2400" dirty="0">
                           <a:solidFill>
                             <a:srgbClr val="1B2730"/>
                           </a:solidFill>
                         </a:rPr>
                         <a:t>4 of 60</a:t>
                       </a:r>
-                      <a:endParaRPr lang="en-US" sz="1500" dirty="0"/>
-                    </a:p>
-                  </a:txBody>
-                  <a:tcPr marL="76200" marR="76200" marT="38100" marB="38100" anchor="ctr">
-                    <a:lnL w="12700" cap="flat" cmpd="sng" algn="ctr">
-                      <a:solidFill>
-                        <a:srgbClr val="D9E3EA"/>
-                      </a:solidFill>
-                      <a:prstDash val="solid"/>
-                      <a:round/>
-                      <a:headEnd type="none" w="med" len="med"/>
-                      <a:tailEnd type="none" w="med" len="med"/>
-                    </a:lnL>
-                    <a:lnR w="12700" cap="flat" cmpd="sng" algn="ctr">
-                      <a:solidFill>
-                        <a:srgbClr val="D9E3EA"/>
-                      </a:solidFill>
-                      <a:prstDash val="solid"/>
-                      <a:round/>
-                      <a:headEnd type="none" w="med" len="med"/>
-                      <a:tailEnd type="none" w="med" len="med"/>
-                    </a:lnR>
-                    <a:lnT w="12700" cap="flat" cmpd="sng" algn="ctr">
-                      <a:solidFill>
-                        <a:srgbClr val="D9E3EA"/>
-                      </a:solidFill>
-                      <a:prstDash val="solid"/>
-                      <a:round/>
-                      <a:headEnd type="none" w="med" len="med"/>
-                      <a:tailEnd type="none" w="med" len="med"/>
-                    </a:lnT>
-                    <a:lnB w="12700" cap="flat" cmpd="sng" algn="ctr">
-                      <a:solidFill>
-                        <a:srgbClr val="D9E3EA"/>
-                      </a:solidFill>
-                      <a:prstDash val="solid"/>
-                      <a:round/>
-                      <a:headEnd type="none" w="med" len="med"/>
-                      <a:tailEnd type="none" w="med" len="med"/>
-                    </a:lnB>
-                    <a:solidFill>
-                      <a:srgbClr val="FFFFFF"/>
-                    </a:solidFill>
-                  </a:tcPr>
-                </a:tc>
-                <a:tc>
-                  <a:txBody>
-                    <a:bodyPr/>
-                    <a:lstStyle/>
-                    <a:p>
-                      <a:pPr indent="0" marL="0">
-                        <a:buNone/>
-                      </a:pPr>
-                      <a:r>
-                        <a:rPr lang="en-US" sz="1500" dirty="0">
-                          <a:solidFill>
-                            <a:srgbClr val="1B2730"/>
-                          </a:solidFill>
-                        </a:rPr>
-                        <a:t>Confidently invented. Every one stopped by the guard</a:t>
-                      </a:r>
-                      <a:endParaRPr lang="en-US" sz="1500" dirty="0"/>
+                      <a:endParaRPr lang="en-US" sz="2400" dirty="0"/>
                     </a:p>
                   </a:txBody>
                   <a:tcPr marL="76200" marR="76200" marT="38100" marB="38100" anchor="ctr">
@@ -5392,8 +5212,8 @@
         </p:nvSpPr>
         <p:spPr>
           <a:xfrm>
-            <a:off x="566928" y="4855464"/>
-            <a:ext cx="11055096" cy="640080"/>
+            <a:off x="566928" y="5321808"/>
+            <a:ext cx="11055096" cy="914400"/>
           </a:xfrm>
           <a:prstGeom prst="rect">
             <a:avLst/>
@@ -5412,8 +5232,8 @@
         </p:nvSpPr>
         <p:spPr>
           <a:xfrm>
-            <a:off x="566928" y="4855464"/>
-            <a:ext cx="82296" cy="640080"/>
+            <a:off x="566928" y="5321808"/>
+            <a:ext cx="82296" cy="914400"/>
           </a:xfrm>
           <a:prstGeom prst="rect">
             <a:avLst/>
@@ -5432,8 +5252,8 @@
         </p:nvSpPr>
         <p:spPr>
           <a:xfrm>
-            <a:off x="822960" y="4855464"/>
-            <a:ext cx="10597896" cy="640080"/>
+            <a:off x="822960" y="5321808"/>
+            <a:ext cx="10597896" cy="914400"/>
           </a:xfrm>
           <a:prstGeom prst="rect">
             <a:avLst/>
@@ -5449,17 +5269,17 @@
               <a:buNone/>
             </a:pPr>
             <a:r>
-              <a:rPr lang="en-US" sz="1700" b="1" dirty="0">
+              <a:rPr lang="en-US" sz="2400" b="1" dirty="0">
                 <a:solidFill>
-                  <a:srgbClr val="24343F"/>
+                  <a:srgbClr val="000000"/>
                 </a:solidFill>
                 <a:latin typeface="Calibri" pitchFamily="34" charset="0"/>
                 <a:ea typeface="Calibri" pitchFamily="34" charset="-122"/>
                 <a:cs typeface="Calibri" pitchFamily="34" charset="-120"/>
               </a:rPr>
-              <a:t>Phase 0 creates the expert labels that would make an accuracy claim possible.</a:t>
-            </a:r>
-            <a:endParaRPr lang="en-US" sz="1700" dirty="0"/>
+              <a:t>Phase 0 creates the expert labels an accuracy claim would need.</a:t>
+            </a:r>
+            <a:endParaRPr lang="en-US" sz="2400" dirty="0"/>
           </a:p>
         </p:txBody>
       </p:sp>
@@ -5626,7 +5446,7 @@
         <p:spPr>
           <a:xfrm>
             <a:off x="566928" y="1481328"/>
-            <a:ext cx="11055096" cy="676656"/>
+            <a:ext cx="11055096" cy="1078992"/>
           </a:xfrm>
           <a:prstGeom prst="rect">
             <a:avLst/>
@@ -5646,7 +5466,7 @@
         <p:spPr>
           <a:xfrm>
             <a:off x="566928" y="1481328"/>
-            <a:ext cx="82296" cy="676656"/>
+            <a:ext cx="82296" cy="1078992"/>
           </a:xfrm>
           <a:prstGeom prst="rect">
             <a:avLst/>
@@ -5666,7 +5486,7 @@
         <p:spPr>
           <a:xfrm>
             <a:off x="822960" y="1481328"/>
-            <a:ext cx="10597896" cy="676656"/>
+            <a:ext cx="10597896" cy="1078992"/>
           </a:xfrm>
           <a:prstGeom prst="rect">
             <a:avLst/>
@@ -5682,7 +5502,7 @@
               <a:buNone/>
             </a:pPr>
             <a:r>
-              <a:rPr lang="en-US" sz="1050" b="1" spc="100" kern="0" dirty="0">
+              <a:rPr lang="en-US" sz="2400" b="1" spc="100" kern="0" dirty="0">
                 <a:solidFill>
                   <a:srgbClr val="2A78D6"/>
                 </a:solidFill>
@@ -5696,7 +5516,7 @@
               <a:buNone/>
             </a:pPr>
             <a:r>
-              <a:rPr lang="en-US" sz="1300" dirty="0">
+              <a:rPr lang="en-US" sz="2400" dirty="0">
                 <a:solidFill>
                   <a:srgbClr val="1B2730"/>
                 </a:solidFill>
@@ -5704,9 +5524,9 @@
                 <a:ea typeface="Calibri" pitchFamily="34" charset="-122"/>
                 <a:cs typeface="Calibri" pitchFamily="34" charset="-120"/>
               </a:rPr>
-              <a:t>It finds 100% of planted anomalies. Do not report that as a detection rate.</a:t>
-            </a:r>
-            <a:endParaRPr lang="en-US" sz="1050" dirty="0"/>
+              <a:t>It finds every planted anomaly. That is not a detection rate.</a:t>
+            </a:r>
+            <a:endParaRPr lang="en-US" sz="2400" dirty="0"/>
           </a:p>
         </p:txBody>
       </p:sp>
@@ -5808,8 +5628,8 @@
         </p:nvSpPr>
         <p:spPr>
           <a:xfrm>
-            <a:off x="566928" y="2395728"/>
-            <a:ext cx="5390388" cy="2468880"/>
+            <a:off x="566928" y="2798064"/>
+            <a:ext cx="5390388" cy="2286000"/>
           </a:xfrm>
           <a:prstGeom prst="rect">
             <a:avLst/>
@@ -5840,8 +5660,8 @@
         </p:nvSpPr>
         <p:spPr>
           <a:xfrm>
-            <a:off x="566928" y="2395728"/>
-            <a:ext cx="5390388" cy="457200"/>
+            <a:off x="566928" y="2798064"/>
+            <a:ext cx="5390388" cy="566928"/>
           </a:xfrm>
           <a:prstGeom prst="rect">
             <a:avLst/>
@@ -5860,8 +5680,8 @@
         </p:nvSpPr>
         <p:spPr>
           <a:xfrm>
-            <a:off x="768096" y="2395728"/>
-            <a:ext cx="5024628" cy="457200"/>
+            <a:off x="768096" y="2798064"/>
+            <a:ext cx="5024628" cy="566928"/>
           </a:xfrm>
           <a:prstGeom prst="rect">
             <a:avLst/>
@@ -5877,7 +5697,7 @@
               <a:buNone/>
             </a:pPr>
             <a:r>
-              <a:rPr lang="en-US" sz="1900" b="1" spc="200" kern="0" dirty="0">
+              <a:rPr lang="en-US" sz="2400" b="1" spc="200" kern="0" dirty="0">
                 <a:solidFill>
                   <a:srgbClr val="FFFFFF"/>
                 </a:solidFill>
@@ -5885,9 +5705,9 @@
                 <a:ea typeface="Calibri" pitchFamily="34" charset="-122"/>
                 <a:cs typeface="Calibri" pitchFamily="34" charset="-120"/>
               </a:rPr>
-              <a:t>WHAT IT LEGITIMATELY SHOWS</a:t>
-            </a:r>
-            <a:endParaRPr lang="en-US" sz="1900" dirty="0"/>
+              <a:t>WHAT IT SHOWS</a:t>
+            </a:r>
+            <a:endParaRPr lang="en-US" sz="2400" dirty="0"/>
           </a:p>
         </p:txBody>
       </p:sp>
@@ -5899,8 +5719,8 @@
         </p:nvSpPr>
         <p:spPr>
           <a:xfrm>
-            <a:off x="768096" y="2962656"/>
-            <a:ext cx="4988052" cy="1737360"/>
+            <a:off x="768096" y="3364992"/>
+            <a:ext cx="4988052" cy="1554480"/>
           </a:xfrm>
           <a:prstGeom prst="rect">
             <a:avLst/>
@@ -5914,13 +5734,13 @@
           <a:p>
             <a:pPr marL="152400" indent="-152400">
               <a:spcAft>
-                <a:spcPts val="900"/>
+                <a:spcPts val="600"/>
               </a:spcAft>
               <a:buSzPct val="100000"/>
               <a:buChar char="•"/>
             </a:pPr>
             <a:r>
-              <a:rPr lang="en-US" sz="1700" dirty="0">
+              <a:rPr lang="en-US" sz="2400" dirty="0">
                 <a:solidFill>
                   <a:srgbClr val="1B2730"/>
                 </a:solidFill>
@@ -5928,20 +5748,20 @@
                 <a:ea typeface="Calibri" pitchFamily="34" charset="-122"/>
                 <a:cs typeface="Calibri" pitchFamily="34" charset="-120"/>
               </a:rPr>
-              <a:t>Deterministic — same batch, same candidates, every time</a:t>
-            </a:r>
-            <a:endParaRPr lang="en-US" sz="1700" dirty="0"/>
+              <a:t>Deterministic — same batch, same result</a:t>
+            </a:r>
+            <a:endParaRPr lang="en-US" sz="2400" dirty="0"/>
           </a:p>
           <a:p>
             <a:pPr marL="152400" indent="-152400">
               <a:spcAft>
-                <a:spcPts val="900"/>
+                <a:spcPts val="600"/>
               </a:spcAft>
               <a:buSzPct val="100000"/>
               <a:buChar char="•"/>
             </a:pPr>
             <a:r>
-              <a:rPr lang="en-US" sz="1700" dirty="0">
+              <a:rPr lang="en-US" sz="2400" dirty="0">
                 <a:solidFill>
                   <a:srgbClr val="1B2730"/>
                 </a:solidFill>
@@ -5949,20 +5769,20 @@
                 <a:ea typeface="Calibri" pitchFamily="34" charset="-122"/>
                 <a:cs typeface="Calibri" pitchFamily="34" charset="-120"/>
               </a:rPr>
-              <a:t>Covers all four patterns, not just the easy one</a:t>
-            </a:r>
-            <a:endParaRPr lang="en-US" sz="1700" dirty="0"/>
+              <a:t>All four patterns, not just the easy one</a:t>
+            </a:r>
+            <a:endParaRPr lang="en-US" sz="2400" dirty="0"/>
           </a:p>
           <a:p>
             <a:pPr marL="152400" indent="-152400">
               <a:spcAft>
-                <a:spcPts val="900"/>
+                <a:spcPts val="600"/>
               </a:spcAft>
               <a:buSzPct val="100000"/>
               <a:buChar char="•"/>
             </a:pPr>
             <a:r>
-              <a:rPr lang="en-US" sz="1700" dirty="0">
+              <a:rPr lang="en-US" sz="2400" dirty="0">
                 <a:solidFill>
                   <a:srgbClr val="1B2730"/>
                 </a:solidFill>
@@ -5972,7 +5792,7 @@
               </a:rPr>
               <a:t>97.1% precision on 2,069 transactions</a:t>
             </a:r>
-            <a:endParaRPr lang="en-US" sz="1700" dirty="0"/>
+            <a:endParaRPr lang="en-US" sz="2400" dirty="0"/>
           </a:p>
         </p:txBody>
       </p:sp>
@@ -5984,8 +5804,8 @@
         </p:nvSpPr>
         <p:spPr>
           <a:xfrm>
-            <a:off x="6231636" y="2395728"/>
-            <a:ext cx="5390388" cy="2468880"/>
+            <a:off x="6231636" y="2798064"/>
+            <a:ext cx="5390388" cy="2286000"/>
           </a:xfrm>
           <a:prstGeom prst="rect">
             <a:avLst/>
@@ -6016,8 +5836,8 @@
         </p:nvSpPr>
         <p:spPr>
           <a:xfrm>
-            <a:off x="6231636" y="2395728"/>
-            <a:ext cx="5390388" cy="457200"/>
+            <a:off x="6231636" y="2798064"/>
+            <a:ext cx="5390388" cy="566928"/>
           </a:xfrm>
           <a:prstGeom prst="rect">
             <a:avLst/>
@@ -6036,8 +5856,8 @@
         </p:nvSpPr>
         <p:spPr>
           <a:xfrm>
-            <a:off x="6432804" y="2395728"/>
-            <a:ext cx="5024628" cy="457200"/>
+            <a:off x="6432804" y="2798064"/>
+            <a:ext cx="5024628" cy="566928"/>
           </a:xfrm>
           <a:prstGeom prst="rect">
             <a:avLst/>
@@ -6053,7 +5873,7 @@
               <a:buNone/>
             </a:pPr>
             <a:r>
-              <a:rPr lang="en-US" sz="1900" b="1" spc="200" kern="0" dirty="0">
+              <a:rPr lang="en-US" sz="2400" b="1" spc="200" kern="0" dirty="0">
                 <a:solidFill>
                   <a:srgbClr val="FFFFFF"/>
                 </a:solidFill>
@@ -6061,9 +5881,9 @@
                 <a:ea typeface="Calibri" pitchFamily="34" charset="-122"/>
                 <a:cs typeface="Calibri" pitchFamily="34" charset="-120"/>
               </a:rPr>
-              <a:t>WHY IT IS NOT ACCURACY</a:t>
-            </a:r>
-            <a:endParaRPr lang="en-US" sz="1900" dirty="0"/>
+              <a:t>WHAT IT DOES NOT</a:t>
+            </a:r>
+            <a:endParaRPr lang="en-US" sz="2400" dirty="0"/>
           </a:p>
         </p:txBody>
       </p:sp>
@@ -6075,8 +5895,8 @@
         </p:nvSpPr>
         <p:spPr>
           <a:xfrm>
-            <a:off x="6432804" y="2962656"/>
-            <a:ext cx="4988052" cy="1737360"/>
+            <a:off x="6432804" y="3364992"/>
+            <a:ext cx="4988052" cy="1554480"/>
           </a:xfrm>
           <a:prstGeom prst="rect">
             <a:avLst/>
@@ -6090,65 +5910,65 @@
           <a:p>
             <a:pPr marL="152400" indent="-152400">
               <a:spcAft>
-                <a:spcPts val="900"/>
+                <a:spcPts val="600"/>
               </a:spcAft>
               <a:buSzPct val="100000"/>
               <a:buChar char="•"/>
             </a:pPr>
             <a:r>
-              <a:rPr lang="en-US" sz="1700" dirty="0">
+              <a:rPr lang="en-US" sz="2400" dirty="0">
                 <a:solidFill>
-                  <a:srgbClr val="1B2730"/>
+                  <a:srgbClr val="6B7C88"/>
                 </a:solidFill>
                 <a:latin typeface="Calibri" pitchFamily="34" charset="0"/>
                 <a:ea typeface="Calibri" pitchFamily="34" charset="-122"/>
                 <a:cs typeface="Calibri" pitchFamily="34" charset="-120"/>
               </a:rPr>
-              <a:t>The thresholds and the data generator were written by the same author</a:t>
-            </a:r>
-            <a:endParaRPr lang="en-US" sz="1700" dirty="0"/>
+              <a:t>Thresholds and generator, same author</a:t>
+            </a:r>
+            <a:endParaRPr lang="en-US" sz="2400" dirty="0"/>
           </a:p>
           <a:p>
             <a:pPr marL="152400" indent="-152400">
               <a:spcAft>
-                <a:spcPts val="900"/>
+                <a:spcPts val="600"/>
               </a:spcAft>
               <a:buSzPct val="100000"/>
               <a:buChar char="•"/>
             </a:pPr>
             <a:r>
-              <a:rPr lang="en-US" sz="1700" dirty="0">
+              <a:rPr lang="en-US" sz="2400" dirty="0">
                 <a:solidFill>
-                  <a:srgbClr val="1B2730"/>
+                  <a:srgbClr val="6B7C88"/>
                 </a:solidFill>
                 <a:latin typeface="Calibri" pitchFamily="34" charset="0"/>
                 <a:ea typeface="Calibri" pitchFamily="34" charset="-122"/>
                 <a:cs typeface="Calibri" pitchFamily="34" charset="-120"/>
               </a:rPr>
-              <a:t>So it measures whether the code agrees with itself</a:t>
-            </a:r>
-            <a:endParaRPr lang="en-US" sz="1700" dirty="0"/>
+              <a:t>So it measures self-agreement</a:t>
+            </a:r>
+            <a:endParaRPr lang="en-US" sz="2400" dirty="0"/>
           </a:p>
           <a:p>
             <a:pPr marL="152400" indent="-152400">
               <a:spcAft>
-                <a:spcPts val="900"/>
+                <a:spcPts val="600"/>
               </a:spcAft>
               <a:buSzPct val="100000"/>
               <a:buChar char="•"/>
             </a:pPr>
             <a:r>
-              <a:rPr lang="en-US" sz="1700" dirty="0">
+              <a:rPr lang="en-US" sz="2400" dirty="0">
                 <a:solidFill>
-                  <a:srgbClr val="1B2730"/>
+                  <a:srgbClr val="6B7C88"/>
                 </a:solidFill>
                 <a:latin typeface="Calibri" pitchFamily="34" charset="0"/>
                 <a:ea typeface="Calibri" pitchFamily="34" charset="-122"/>
                 <a:cs typeface="Calibri" pitchFamily="34" charset="-120"/>
               </a:rPr>
-              <a:t>Same trap as the 60.5%. Only a pilot on real traffic settles it</a:t>
-            </a:r>
-            <a:endParaRPr lang="en-US" sz="1700" dirty="0"/>
+              <a:t>Only a pilot on real traffic settles it</a:t>
+            </a:r>
+            <a:endParaRPr lang="en-US" sz="2400" dirty="0"/>
           </a:p>
         </p:txBody>
       </p:sp>
@@ -6160,8 +5980,8 @@
         </p:nvSpPr>
         <p:spPr>
           <a:xfrm>
-            <a:off x="566928" y="5120640"/>
-            <a:ext cx="11055096" cy="640080"/>
+            <a:off x="566928" y="5321808"/>
+            <a:ext cx="11055096" cy="914400"/>
           </a:xfrm>
           <a:prstGeom prst="rect">
             <a:avLst/>
@@ -6180,8 +6000,8 @@
         </p:nvSpPr>
         <p:spPr>
           <a:xfrm>
-            <a:off x="566928" y="5120640"/>
-            <a:ext cx="82296" cy="640080"/>
+            <a:off x="566928" y="5321808"/>
+            <a:ext cx="82296" cy="914400"/>
           </a:xfrm>
           <a:prstGeom prst="rect">
             <a:avLst/>
@@ -6200,8 +6020,8 @@
         </p:nvSpPr>
         <p:spPr>
           <a:xfrm>
-            <a:off x="822960" y="5120640"/>
-            <a:ext cx="10597896" cy="640080"/>
+            <a:off x="822960" y="5321808"/>
+            <a:ext cx="10597896" cy="914400"/>
           </a:xfrm>
           <a:prstGeom prst="rect">
             <a:avLst/>
@@ -6217,7 +6037,7 @@
               <a:buNone/>
             </a:pPr>
             <a:r>
-              <a:rPr lang="en-US" sz="1700" dirty="0">
+              <a:rPr lang="en-US" sz="2400" b="1" dirty="0">
                 <a:solidFill>
                   <a:srgbClr val="000000"/>
                 </a:solidFill>
@@ -6225,9 +6045,9 @@
                 <a:ea typeface="Calibri" pitchFamily="34" charset="-122"/>
                 <a:cs typeface="Calibri" pitchFamily="34" charset="-120"/>
               </a:rPr>
-              <a:t>The caveat travels with the figure in the code, so it cannot be lifted onto a slide alone.</a:t>
-            </a:r>
-            <a:endParaRPr lang="en-US" sz="1700" dirty="0"/>
+              <a:t>Same trap as the 60.5%.</a:t>
+            </a:r>
+            <a:endParaRPr lang="en-US" sz="2400" dirty="0"/>
           </a:p>
         </p:txBody>
       </p:sp>
@@ -6379,7 +6199,7 @@
                 <a:ea typeface="Trebuchet MS" pitchFamily="34" charset="-122"/>
                 <a:cs typeface="Trebuchet MS" pitchFamily="34" charset="-120"/>
               </a:rPr>
-              <a:t>Backup · AI Act classification, step by step</a:t>
+              <a:t>Backup · AI Act classification</a:t>
             </a:r>
             <a:endParaRPr lang="en-US" sz="3000" dirty="0"/>
           </a:p>
@@ -6394,7 +6214,7 @@
         <p:spPr>
           <a:xfrm>
             <a:off x="566928" y="1481328"/>
-            <a:ext cx="11055096" cy="676656"/>
+            <a:ext cx="11055096" cy="1078992"/>
           </a:xfrm>
           <a:prstGeom prst="rect">
             <a:avLst/>
@@ -6414,7 +6234,7 @@
         <p:spPr>
           <a:xfrm>
             <a:off x="566928" y="1481328"/>
-            <a:ext cx="82296" cy="676656"/>
+            <a:ext cx="82296" cy="1078992"/>
           </a:xfrm>
           <a:prstGeom prst="rect">
             <a:avLst/>
@@ -6434,7 +6254,7 @@
         <p:spPr>
           <a:xfrm>
             <a:off x="822960" y="1481328"/>
-            <a:ext cx="10597896" cy="676656"/>
+            <a:ext cx="10597896" cy="1078992"/>
           </a:xfrm>
           <a:prstGeom prst="rect">
             <a:avLst/>
@@ -6450,7 +6270,7 @@
               <a:buNone/>
             </a:pPr>
             <a:r>
-              <a:rPr lang="en-US" sz="1050" b="1" spc="100" kern="0" dirty="0">
+              <a:rPr lang="en-US" sz="2400" b="1" spc="100" kern="0" dirty="0">
                 <a:solidFill>
                   <a:srgbClr val="2A78D6"/>
                 </a:solidFill>
@@ -6464,7 +6284,7 @@
               <a:buNone/>
             </a:pPr>
             <a:r>
-              <a:rPr lang="en-US" sz="1300" dirty="0">
+              <a:rPr lang="en-US" sz="2400" dirty="0">
                 <a:solidFill>
                   <a:srgbClr val="1B2730"/>
                 </a:solidFill>
@@ -6472,9 +6292,9 @@
                 <a:ea typeface="Calibri" pitchFamily="34" charset="-122"/>
                 <a:cs typeface="Calibri" pitchFamily="34" charset="-120"/>
               </a:rPr>
-              <a:t>Six steps. The one that matters is step 4.</a:t>
-            </a:r>
-            <a:endParaRPr lang="en-US" sz="1050" dirty="0"/>
+              <a:t>Seven steps. Step 4 is the one that matters.</a:t>
+            </a:r>
+            <a:endParaRPr lang="en-US" sz="2400" dirty="0"/>
           </a:p>
         </p:txBody>
       </p:sp>
@@ -6583,7 +6403,7 @@
           </p:nvPr>
         </p:nvGraphicFramePr>
         <p:xfrm>
-          <a:off x="566928" y="2395728"/>
+          <a:off x="566928" y="2798064"/>
           <a:ext cx="11055096" cy="914400"/>
         </p:xfrm>
         <a:graphic>
@@ -6591,10 +6411,10 @@
             <a:tbl>
               <a:tblPr/>
               <a:tblGrid>
-                <a:gridCol w="4023360"/>
-                <a:gridCol w="7031736"/>
+                <a:gridCol w="4572000"/>
+                <a:gridCol w="6483096"/>
               </a:tblGrid>
-              <a:tr h="329184">
+              <a:tr h="475488">
                 <a:tc>
                   <a:txBody>
                     <a:bodyPr/>
@@ -6604,14 +6424,14 @@
                         <a:buNone/>
                       </a:pPr>
                       <a:r>
-                        <a:rPr lang="en-US" sz="1500" b="1" spc="100" kern="0" dirty="0">
+                        <a:rPr lang="en-US" sz="2400" b="1" spc="100" kern="0" dirty="0">
                           <a:solidFill>
                             <a:srgbClr val="FFFFFF"/>
                           </a:solidFill>
                         </a:rPr>
                         <a:t>STEP</a:t>
                       </a:r>
-                      <a:endParaRPr lang="en-US" sz="1500" dirty="0"/>
+                      <a:endParaRPr lang="en-US" sz="2400" dirty="0"/>
                     </a:p>
                   </a:txBody>
                   <a:tcPr marL="101600" marR="101600" marT="25400" marB="25400" anchor="ctr">
@@ -6665,14 +6485,14 @@
                         <a:buNone/>
                       </a:pPr>
                       <a:r>
-                        <a:rPr lang="en-US" sz="1500" b="1" spc="100" kern="0" dirty="0">
+                        <a:rPr lang="en-US" sz="2400" b="1" spc="100" kern="0" dirty="0">
                           <a:solidFill>
                             <a:srgbClr val="1D2A32"/>
                           </a:solidFill>
                         </a:rPr>
                         <a:t>FINDING</a:t>
                       </a:r>
-                      <a:endParaRPr lang="en-US" sz="1500" dirty="0"/>
+                      <a:endParaRPr lang="en-US" sz="2400" dirty="0"/>
                     </a:p>
                   </a:txBody>
                   <a:tcPr marL="101600" marR="101600" marT="25400" marB="25400" anchor="ctr">
@@ -6718,7 +6538,7 @@
                   </a:tcPr>
                 </a:tc>
               </a:tr>
-              <a:tr h="338328">
+              <a:tr h="530352">
                 <a:tc>
                   <a:txBody>
                     <a:bodyPr/>
@@ -6728,14 +6548,14 @@
                         <a:buNone/>
                       </a:pPr>
                       <a:r>
-                        <a:rPr lang="en-US" sz="1500" b="1" dirty="0">
+                        <a:rPr lang="en-US" sz="2400" b="1" dirty="0">
                           <a:solidFill>
                             <a:srgbClr val="24343F"/>
                           </a:solidFill>
                         </a:rPr>
-                        <a:t>1 · Is it an AI system?</a:t>
+                        <a:t>1 · An AI system?</a:t>
                       </a:r>
-                      <a:endParaRPr lang="en-US" sz="1500" dirty="0"/>
+                      <a:endParaRPr lang="en-US" sz="2400" dirty="0"/>
                     </a:p>
                   </a:txBody>
                   <a:tcPr marL="101600" marR="101600" marT="25400" marB="25400" anchor="ctr">
@@ -6789,14 +6609,14 @@
                         <a:buNone/>
                       </a:pPr>
                       <a:r>
-                        <a:rPr lang="en-US" sz="1500" dirty="0">
+                        <a:rPr lang="en-US" sz="2400" dirty="0">
                           <a:solidFill>
                             <a:srgbClr val="1B2730"/>
                           </a:solidFill>
                         </a:rPr>
-                        <a:t>Yes, all three</a:t>
+                        <a:t>Yes — Art. 3(1)</a:t>
                       </a:r>
-                      <a:endParaRPr lang="en-US" sz="1500" dirty="0"/>
+                      <a:endParaRPr lang="en-US" sz="2400" dirty="0"/>
                     </a:p>
                   </a:txBody>
                   <a:tcPr marL="101600" marR="101600" marT="25400" marB="25400" anchor="ctr">
@@ -6842,7 +6662,7 @@
                   </a:tcPr>
                 </a:tc>
               </a:tr>
-              <a:tr h="338328">
+              <a:tr h="530352">
                 <a:tc>
                   <a:txBody>
                     <a:bodyPr/>
@@ -6852,14 +6672,14 @@
                         <a:buNone/>
                       </a:pPr>
                       <a:r>
-                        <a:rPr lang="en-US" sz="1500" b="1" dirty="0">
+                        <a:rPr lang="en-US" sz="2400" b="1" dirty="0">
                           <a:solidFill>
                             <a:srgbClr val="24343F"/>
                           </a:solidFill>
                         </a:rPr>
-                        <a:t>2 · Prohibited under Art. 5?</a:t>
+                        <a:t>2 · Prohibited, Art. 5?</a:t>
                       </a:r>
-                      <a:endParaRPr lang="en-US" sz="1500" dirty="0"/>
+                      <a:endParaRPr lang="en-US" sz="2400" dirty="0"/>
                     </a:p>
                   </a:txBody>
                   <a:tcPr marL="101600" marR="101600" marT="25400" marB="25400" anchor="ctr">
@@ -6913,14 +6733,14 @@
                         <a:buNone/>
                       </a:pPr>
                       <a:r>
-                        <a:rPr lang="en-US" sz="1500" dirty="0">
+                        <a:rPr lang="en-US" sz="2400" dirty="0">
                           <a:solidFill>
                             <a:srgbClr val="1B2730"/>
                           </a:solidFill>
                         </a:rPr>
-                        <a:t>No — one close call on anomaly flagging, flagged for counsel</a:t>
+                        <a:t>No — one close call, flagged</a:t>
                       </a:r>
-                      <a:endParaRPr lang="en-US" sz="1500" dirty="0"/>
+                      <a:endParaRPr lang="en-US" sz="2400" dirty="0"/>
                     </a:p>
                   </a:txBody>
                   <a:tcPr marL="101600" marR="101600" marT="25400" marB="25400" anchor="ctr">
@@ -6966,7 +6786,7 @@
                   </a:tcPr>
                 </a:tc>
               </a:tr>
-              <a:tr h="338328">
+              <a:tr h="530352">
                 <a:tc>
                   <a:txBody>
                     <a:bodyPr/>
@@ -6976,14 +6796,14 @@
                         <a:buNone/>
                       </a:pPr>
                       <a:r>
-                        <a:rPr lang="en-US" sz="1500" b="1" dirty="0">
+                        <a:rPr lang="en-US" sz="2400" b="1" dirty="0">
                           <a:solidFill>
                             <a:srgbClr val="24343F"/>
                           </a:solidFill>
                         </a:rPr>
-                        <a:t>3 · Annex I safety component?</a:t>
+                        <a:t>4 · An Annex III use case?</a:t>
                       </a:r>
-                      <a:endParaRPr lang="en-US" sz="1500" dirty="0"/>
+                      <a:endParaRPr lang="en-US" sz="2400" dirty="0"/>
                     </a:p>
                   </a:txBody>
                   <a:tcPr marL="101600" marR="101600" marT="25400" marB="25400" anchor="ctr">
@@ -7037,14 +6857,14 @@
                         <a:buNone/>
                       </a:pPr>
                       <a:r>
-                        <a:rPr lang="en-US" sz="1500" dirty="0">
+                        <a:rPr lang="en-US" sz="2400" dirty="0">
                           <a:solidFill>
                             <a:srgbClr val="1B2730"/>
                           </a:solidFill>
                         </a:rPr>
-                        <a:t>No</a:t>
+                        <a:t>No — never creditworthiness</a:t>
                       </a:r>
-                      <a:endParaRPr lang="en-US" sz="1500" dirty="0"/>
+                      <a:endParaRPr lang="en-US" sz="2400" dirty="0"/>
                     </a:p>
                   </a:txBody>
                   <a:tcPr marL="101600" marR="101600" marT="25400" marB="25400" anchor="ctr">
@@ -7090,7 +6910,7 @@
                   </a:tcPr>
                 </a:tc>
               </a:tr>
-              <a:tr h="338328">
+              <a:tr h="530352">
                 <a:tc>
                   <a:txBody>
                     <a:bodyPr/>
@@ -7100,14 +6920,14 @@
                         <a:buNone/>
                       </a:pPr>
                       <a:r>
-                        <a:rPr lang="en-US" sz="1500" b="1" dirty="0">
+                        <a:rPr lang="en-US" sz="2400" b="1" dirty="0">
                           <a:solidFill>
                             <a:srgbClr val="24343F"/>
                           </a:solidFill>
                         </a:rPr>
-                        <a:t>4 · An Annex III use case?</a:t>
+                        <a:t>6 · Art. 50 transparency</a:t>
                       </a:r>
-                      <a:endParaRPr lang="en-US" sz="1500" dirty="0"/>
+                      <a:endParaRPr lang="en-US" sz="2400" dirty="0"/>
                     </a:p>
                   </a:txBody>
                   <a:tcPr marL="101600" marR="101600" marT="25400" marB="25400" anchor="ctr">
@@ -7161,262 +6981,14 @@
                         <a:buNone/>
                       </a:pPr>
                       <a:r>
-                        <a:rPr lang="en-US" sz="1500" dirty="0">
+                        <a:rPr lang="en-US" sz="2400" dirty="0">
                           <a:solidFill>
                             <a:srgbClr val="1B2730"/>
                           </a:solidFill>
                         </a:rPr>
-                        <a:t>No. Never evaluates creditworthiness — Annex III(5)(b) does not bite</a:t>
+                        <a:t>Drafts marked anyway</a:t>
                       </a:r>
-                      <a:endParaRPr lang="en-US" sz="1500" dirty="0"/>
-                    </a:p>
-                  </a:txBody>
-                  <a:tcPr marL="101600" marR="101600" marT="25400" marB="25400" anchor="ctr">
-                    <a:lnL w="12700" cap="flat" cmpd="sng" algn="ctr">
-                      <a:solidFill>
-                        <a:srgbClr val="D9E3EA"/>
-                      </a:solidFill>
-                      <a:prstDash val="solid"/>
-                      <a:round/>
-                      <a:headEnd type="none" w="med" len="med"/>
-                      <a:tailEnd type="none" w="med" len="med"/>
-                    </a:lnL>
-                    <a:lnR w="12700" cap="flat" cmpd="sng" algn="ctr">
-                      <a:solidFill>
-                        <a:srgbClr val="D9E3EA"/>
-                      </a:solidFill>
-                      <a:prstDash val="solid"/>
-                      <a:round/>
-                      <a:headEnd type="none" w="med" len="med"/>
-                      <a:tailEnd type="none" w="med" len="med"/>
-                    </a:lnR>
-                    <a:lnT w="12700" cap="flat" cmpd="sng" algn="ctr">
-                      <a:solidFill>
-                        <a:srgbClr val="D9E3EA"/>
-                      </a:solidFill>
-                      <a:prstDash val="solid"/>
-                      <a:round/>
-                      <a:headEnd type="none" w="med" len="med"/>
-                      <a:tailEnd type="none" w="med" len="med"/>
-                    </a:lnT>
-                    <a:lnB w="12700" cap="flat" cmpd="sng" algn="ctr">
-                      <a:solidFill>
-                        <a:srgbClr val="D9E3EA"/>
-                      </a:solidFill>
-                      <a:prstDash val="solid"/>
-                      <a:round/>
-                      <a:headEnd type="none" w="med" len="med"/>
-                      <a:tailEnd type="none" w="med" len="med"/>
-                    </a:lnB>
-                    <a:solidFill>
-                      <a:srgbClr val="EFF5F9"/>
-                    </a:solidFill>
-                  </a:tcPr>
-                </a:tc>
-              </a:tr>
-              <a:tr h="338328">
-                <a:tc>
-                  <a:txBody>
-                    <a:bodyPr/>
-                    <a:lstStyle/>
-                    <a:p>
-                      <a:pPr indent="0" marL="0">
-                        <a:buNone/>
-                      </a:pPr>
-                      <a:r>
-                        <a:rPr lang="en-US" sz="1500" b="1" dirty="0">
-                          <a:solidFill>
-                            <a:srgbClr val="24343F"/>
-                          </a:solidFill>
-                        </a:rPr>
-                        <a:t>5 · Art. 6(3) derogation</a:t>
-                      </a:r>
-                      <a:endParaRPr lang="en-US" sz="1500" dirty="0"/>
-                    </a:p>
-                  </a:txBody>
-                  <a:tcPr marL="101600" marR="101600" marT="25400" marB="25400" anchor="ctr">
-                    <a:lnL w="12700" cap="flat" cmpd="sng" algn="ctr">
-                      <a:solidFill>
-                        <a:srgbClr val="D9E3EA"/>
-                      </a:solidFill>
-                      <a:prstDash val="solid"/>
-                      <a:round/>
-                      <a:headEnd type="none" w="med" len="med"/>
-                      <a:tailEnd type="none" w="med" len="med"/>
-                    </a:lnL>
-                    <a:lnR w="12700" cap="flat" cmpd="sng" algn="ctr">
-                      <a:solidFill>
-                        <a:srgbClr val="D9E3EA"/>
-                      </a:solidFill>
-                      <a:prstDash val="solid"/>
-                      <a:round/>
-                      <a:headEnd type="none" w="med" len="med"/>
-                      <a:tailEnd type="none" w="med" len="med"/>
-                    </a:lnR>
-                    <a:lnT w="12700" cap="flat" cmpd="sng" algn="ctr">
-                      <a:solidFill>
-                        <a:srgbClr val="D9E3EA"/>
-                      </a:solidFill>
-                      <a:prstDash val="solid"/>
-                      <a:round/>
-                      <a:headEnd type="none" w="med" len="med"/>
-                      <a:tailEnd type="none" w="med" len="med"/>
-                    </a:lnT>
-                    <a:lnB w="12700" cap="flat" cmpd="sng" algn="ctr">
-                      <a:solidFill>
-                        <a:srgbClr val="D9E3EA"/>
-                      </a:solidFill>
-                      <a:prstDash val="solid"/>
-                      <a:round/>
-                      <a:headEnd type="none" w="med" len="med"/>
-                      <a:tailEnd type="none" w="med" len="med"/>
-                    </a:lnB>
-                    <a:solidFill>
-                      <a:srgbClr val="FFFFFF"/>
-                    </a:solidFill>
-                  </a:tcPr>
-                </a:tc>
-                <a:tc>
-                  <a:txBody>
-                    <a:bodyPr/>
-                    <a:lstStyle/>
-                    <a:p>
-                      <a:pPr indent="0" marL="0">
-                        <a:buNone/>
-                      </a:pPr>
-                      <a:r>
-                        <a:rPr lang="en-US" sz="1500" dirty="0">
-                          <a:solidFill>
-                            <a:srgbClr val="1B2730"/>
-                          </a:solidFill>
-                        </a:rPr>
-                        <a:t>Not reached. If step 4 fails, anomaly flagging alone becomes high-risk — it profiles</a:t>
-                      </a:r>
-                      <a:endParaRPr lang="en-US" sz="1500" dirty="0"/>
-                    </a:p>
-                  </a:txBody>
-                  <a:tcPr marL="101600" marR="101600" marT="25400" marB="25400" anchor="ctr">
-                    <a:lnL w="12700" cap="flat" cmpd="sng" algn="ctr">
-                      <a:solidFill>
-                        <a:srgbClr val="D9E3EA"/>
-                      </a:solidFill>
-                      <a:prstDash val="solid"/>
-                      <a:round/>
-                      <a:headEnd type="none" w="med" len="med"/>
-                      <a:tailEnd type="none" w="med" len="med"/>
-                    </a:lnL>
-                    <a:lnR w="12700" cap="flat" cmpd="sng" algn="ctr">
-                      <a:solidFill>
-                        <a:srgbClr val="D9E3EA"/>
-                      </a:solidFill>
-                      <a:prstDash val="solid"/>
-                      <a:round/>
-                      <a:headEnd type="none" w="med" len="med"/>
-                      <a:tailEnd type="none" w="med" len="med"/>
-                    </a:lnR>
-                    <a:lnT w="12700" cap="flat" cmpd="sng" algn="ctr">
-                      <a:solidFill>
-                        <a:srgbClr val="D9E3EA"/>
-                      </a:solidFill>
-                      <a:prstDash val="solid"/>
-                      <a:round/>
-                      <a:headEnd type="none" w="med" len="med"/>
-                      <a:tailEnd type="none" w="med" len="med"/>
-                    </a:lnT>
-                    <a:lnB w="12700" cap="flat" cmpd="sng" algn="ctr">
-                      <a:solidFill>
-                        <a:srgbClr val="D9E3EA"/>
-                      </a:solidFill>
-                      <a:prstDash val="solid"/>
-                      <a:round/>
-                      <a:headEnd type="none" w="med" len="med"/>
-                      <a:tailEnd type="none" w="med" len="med"/>
-                    </a:lnB>
-                    <a:solidFill>
-                      <a:srgbClr val="FFFFFF"/>
-                    </a:solidFill>
-                  </a:tcPr>
-                </a:tc>
-              </a:tr>
-              <a:tr h="338328">
-                <a:tc>
-                  <a:txBody>
-                    <a:bodyPr/>
-                    <a:lstStyle/>
-                    <a:p>
-                      <a:pPr indent="0" marL="0">
-                        <a:buNone/>
-                      </a:pPr>
-                      <a:r>
-                        <a:rPr lang="en-US" sz="1500" b="1" dirty="0">
-                          <a:solidFill>
-                            <a:srgbClr val="24343F"/>
-                          </a:solidFill>
-                        </a:rPr>
-                        <a:t>6 · Art. 50 transparency</a:t>
-                      </a:r>
-                      <a:endParaRPr lang="en-US" sz="1500" dirty="0"/>
-                    </a:p>
-                  </a:txBody>
-                  <a:tcPr marL="101600" marR="101600" marT="25400" marB="25400" anchor="ctr">
-                    <a:lnL w="12700" cap="flat" cmpd="sng" algn="ctr">
-                      <a:solidFill>
-                        <a:srgbClr val="D9E3EA"/>
-                      </a:solidFill>
-                      <a:prstDash val="solid"/>
-                      <a:round/>
-                      <a:headEnd type="none" w="med" len="med"/>
-                      <a:tailEnd type="none" w="med" len="med"/>
-                    </a:lnL>
-                    <a:lnR w="12700" cap="flat" cmpd="sng" algn="ctr">
-                      <a:solidFill>
-                        <a:srgbClr val="D9E3EA"/>
-                      </a:solidFill>
-                      <a:prstDash val="solid"/>
-                      <a:round/>
-                      <a:headEnd type="none" w="med" len="med"/>
-                      <a:tailEnd type="none" w="med" len="med"/>
-                    </a:lnR>
-                    <a:lnT w="12700" cap="flat" cmpd="sng" algn="ctr">
-                      <a:solidFill>
-                        <a:srgbClr val="D9E3EA"/>
-                      </a:solidFill>
-                      <a:prstDash val="solid"/>
-                      <a:round/>
-                      <a:headEnd type="none" w="med" len="med"/>
-                      <a:tailEnd type="none" w="med" len="med"/>
-                    </a:lnT>
-                    <a:lnB w="12700" cap="flat" cmpd="sng" algn="ctr">
-                      <a:solidFill>
-                        <a:srgbClr val="D9E3EA"/>
-                      </a:solidFill>
-                      <a:prstDash val="solid"/>
-                      <a:round/>
-                      <a:headEnd type="none" w="med" len="med"/>
-                      <a:tailEnd type="none" w="med" len="med"/>
-                    </a:lnB>
-                    <a:solidFill>
-                      <a:srgbClr val="EFF5F9"/>
-                    </a:solidFill>
-                  </a:tcPr>
-                </a:tc>
-                <a:tc>
-                  <a:txBody>
-                    <a:bodyPr/>
-                    <a:lstStyle/>
-                    <a:p>
-                      <a:pPr indent="0" marL="0">
-                        <a:buNone/>
-                      </a:pPr>
-                      <a:r>
-                        <a:rPr lang="en-US" sz="1500" dirty="0">
-                          <a:solidFill>
-                            <a:srgbClr val="1B2730"/>
-                          </a:solidFill>
-                        </a:rPr>
-                        <a:t>No customer-facing surface. Generated drafts marked anyway</a:t>
-                      </a:r>
-                      <a:endParaRPr lang="en-US" sz="1500" dirty="0"/>
+                      <a:endParaRPr lang="en-US" sz="2400" dirty="0"/>
                     </a:p>
                   </a:txBody>
                   <a:tcPr marL="101600" marR="101600" marT="25400" marB="25400" anchor="ctr">
@@ -7629,7 +7201,7 @@
         <p:spPr>
           <a:xfrm>
             <a:off x="566928" y="1481328"/>
-            <a:ext cx="11055096" cy="676656"/>
+            <a:ext cx="11055096" cy="1078992"/>
           </a:xfrm>
           <a:prstGeom prst="rect">
             <a:avLst/>
@@ -7649,7 +7221,7 @@
         <p:spPr>
           <a:xfrm>
             <a:off x="566928" y="1481328"/>
-            <a:ext cx="82296" cy="676656"/>
+            <a:ext cx="82296" cy="1078992"/>
           </a:xfrm>
           <a:prstGeom prst="rect">
             <a:avLst/>
@@ -7669,7 +7241,7 @@
         <p:spPr>
           <a:xfrm>
             <a:off x="822960" y="1481328"/>
-            <a:ext cx="10597896" cy="676656"/>
+            <a:ext cx="10597896" cy="1078992"/>
           </a:xfrm>
           <a:prstGeom prst="rect">
             <a:avLst/>
@@ -7685,7 +7257,7 @@
               <a:buNone/>
             </a:pPr>
             <a:r>
-              <a:rPr lang="en-US" sz="1050" b="1" spc="100" kern="0" dirty="0">
+              <a:rPr lang="en-US" sz="2400" b="1" spc="100" kern="0" dirty="0">
                 <a:solidFill>
                   <a:srgbClr val="2A78D6"/>
                 </a:solidFill>
@@ -7699,7 +7271,7 @@
               <a:buNone/>
             </a:pPr>
             <a:r>
-              <a:rPr lang="en-US" sz="1300" dirty="0">
+              <a:rPr lang="en-US" sz="2400" dirty="0">
                 <a:solidFill>
                   <a:srgbClr val="1B2730"/>
                 </a:solidFill>
@@ -7707,9 +7279,9 @@
                 <a:ea typeface="Calibri" pitchFamily="34" charset="-122"/>
                 <a:cs typeface="Calibri" pitchFamily="34" charset="-120"/>
               </a:rPr>
-              <a:t>Pseudonymisation protects the reference. It does not protect the content.</a:t>
-            </a:r>
-            <a:endParaRPr lang="en-US" sz="1050" dirty="0"/>
+              <a:t>Pseudonymisation protects the reference, not the content.</a:t>
+            </a:r>
+            <a:endParaRPr lang="en-US" sz="2400" dirty="0"/>
           </a:p>
         </p:txBody>
       </p:sp>
@@ -7818,7 +7390,7 @@
           </p:nvPr>
         </p:nvGraphicFramePr>
         <p:xfrm>
-          <a:off x="566928" y="2395728"/>
+          <a:off x="566928" y="2798064"/>
           <a:ext cx="11055096" cy="914400"/>
         </p:xfrm>
         <a:graphic>
@@ -7826,11 +7398,10 @@
             <a:tbl>
               <a:tblPr/>
               <a:tblGrid>
-                <a:gridCol w="4572000"/>
-                <a:gridCol w="3291840"/>
-                <a:gridCol w="3410712"/>
+                <a:gridCol w="4114800"/>
+                <a:gridCol w="6940296"/>
               </a:tblGrid>
-              <a:tr h="411480">
+              <a:tr h="475488">
                 <a:tc>
                   <a:txBody>
                     <a:bodyPr/>
@@ -7839,7 +7410,15 @@
                       <a:pPr indent="0" marL="0">
                         <a:buNone/>
                       </a:pPr>
-                      <a:endParaRPr lang="en-US" sz="1500" dirty="0"/>
+                      <a:r>
+                        <a:rPr lang="en-US" sz="2400" b="1" dirty="0">
+                          <a:solidFill>
+                            <a:srgbClr val="FFFFFF"/>
+                          </a:solidFill>
+                        </a:rPr>
+                        <a:t>WHAT</a:t>
+                      </a:r>
+                      <a:endParaRPr lang="en-US" sz="2400" dirty="0"/>
                     </a:p>
                   </a:txBody>
                   <a:tcPr marL="76200" marR="76200" marT="38100" marB="38100" anchor="ctr">
@@ -7893,14 +7472,14 @@
                         <a:buNone/>
                       </a:pPr>
                       <a:r>
-                        <a:rPr lang="en-US" sz="1500" b="1" dirty="0">
+                        <a:rPr lang="en-US" sz="2400" b="1" dirty="0">
                           <a:solidFill>
                             <a:srgbClr val="FFFFFF"/>
                           </a:solidFill>
                         </a:rPr>
-                        <a:t>Identifier</a:t>
+                        <a:t>WHERE IT GOES</a:t>
                       </a:r>
-                      <a:endParaRPr lang="en-US" sz="1500" dirty="0"/>
+                      <a:endParaRPr lang="en-US" sz="2400" dirty="0"/>
                     </a:p>
                   </a:txBody>
                   <a:tcPr marL="76200" marR="76200" marT="38100" marB="38100" anchor="ctr">
@@ -7945,6 +7524,8 @@
                     </a:solidFill>
                   </a:tcPr>
                 </a:tc>
+              </a:tr>
+              <a:tr h="603504">
                 <a:tc>
                   <a:txBody>
                     <a:bodyPr/>
@@ -7954,77 +7535,14 @@
                         <a:buNone/>
                       </a:pPr>
                       <a:r>
-                        <a:rPr lang="en-US" sz="1500" b="1" dirty="0">
-                          <a:solidFill>
-                            <a:srgbClr val="FFFFFF"/>
-                          </a:solidFill>
-                        </a:rPr>
-                        <a:t>Narrative content</a:t>
-                      </a:r>
-                      <a:endParaRPr lang="en-US" sz="1500" dirty="0"/>
-                    </a:p>
-                  </a:txBody>
-                  <a:tcPr marL="76200" marR="76200" marT="38100" marB="38100" anchor="ctr">
-                    <a:lnL w="12700" cap="flat" cmpd="sng" algn="ctr">
-                      <a:solidFill>
-                        <a:srgbClr val="D9E3EA"/>
-                      </a:solidFill>
-                      <a:prstDash val="solid"/>
-                      <a:round/>
-                      <a:headEnd type="none" w="med" len="med"/>
-                      <a:tailEnd type="none" w="med" len="med"/>
-                    </a:lnL>
-                    <a:lnR w="12700" cap="flat" cmpd="sng" algn="ctr">
-                      <a:solidFill>
-                        <a:srgbClr val="D9E3EA"/>
-                      </a:solidFill>
-                      <a:prstDash val="solid"/>
-                      <a:round/>
-                      <a:headEnd type="none" w="med" len="med"/>
-                      <a:tailEnd type="none" w="med" len="med"/>
-                    </a:lnR>
-                    <a:lnT w="12700" cap="flat" cmpd="sng" algn="ctr">
-                      <a:solidFill>
-                        <a:srgbClr val="D9E3EA"/>
-                      </a:solidFill>
-                      <a:prstDash val="solid"/>
-                      <a:round/>
-                      <a:headEnd type="none" w="med" len="med"/>
-                      <a:tailEnd type="none" w="med" len="med"/>
-                    </a:lnT>
-                    <a:lnB w="12700" cap="flat" cmpd="sng" algn="ctr">
-                      <a:solidFill>
-                        <a:srgbClr val="D9E3EA"/>
-                      </a:solidFill>
-                      <a:prstDash val="solid"/>
-                      <a:round/>
-                      <a:headEnd type="none" w="med" len="med"/>
-                      <a:tailEnd type="none" w="med" len="med"/>
-                    </a:lnB>
-                    <a:solidFill>
-                      <a:srgbClr val="445A69"/>
-                    </a:solidFill>
-                  </a:tcPr>
-                </a:tc>
-              </a:tr>
-              <a:tr h="566928">
-                <a:tc>
-                  <a:txBody>
-                    <a:bodyPr/>
-                    <a:lstStyle/>
-                    <a:p>
-                      <a:pPr indent="0" marL="0">
-                        <a:buNone/>
-                      </a:pPr>
-                      <a:r>
-                        <a:rPr lang="en-US" sz="1500" b="1" dirty="0">
+                        <a:rPr lang="en-US" sz="2400" b="1" dirty="0">
                           <a:solidFill>
                             <a:srgbClr val="24343F"/>
                           </a:solidFill>
                         </a:rPr>
-                        <a:t>Sent to the model provider (US)</a:t>
+                        <a:t>The complaint narrative</a:t>
                       </a:r>
-                      <a:endParaRPr lang="en-US" sz="1500" dirty="0"/>
+                      <a:endParaRPr lang="en-US" sz="2400" dirty="0"/>
                     </a:p>
                   </a:txBody>
                   <a:tcPr marL="76200" marR="76200" marT="38100" marB="38100" anchor="ctr">
@@ -8078,14 +7596,77 @@
                         <a:buNone/>
                       </a:pPr>
                       <a:r>
-                        <a:rPr lang="en-US" sz="1500" dirty="0">
+                        <a:rPr lang="en-US" sz="2400" dirty="0">
                           <a:solidFill>
                             <a:srgbClr val="1B2730"/>
                           </a:solidFill>
                         </a:rPr>
-                        <a:t>Never</a:t>
+                        <a:t>To the model provider, in full (US)</a:t>
                       </a:r>
-                      <a:endParaRPr lang="en-US" sz="1500" dirty="0"/>
+                      <a:endParaRPr lang="en-US" sz="2400" dirty="0"/>
+                    </a:p>
+                  </a:txBody>
+                  <a:tcPr marL="76200" marR="76200" marT="38100" marB="38100" anchor="ctr">
+                    <a:lnL w="12700" cap="flat" cmpd="sng" algn="ctr">
+                      <a:solidFill>
+                        <a:srgbClr val="D9E3EA"/>
+                      </a:solidFill>
+                      <a:prstDash val="solid"/>
+                      <a:round/>
+                      <a:headEnd type="none" w="med" len="med"/>
+                      <a:tailEnd type="none" w="med" len="med"/>
+                    </a:lnL>
+                    <a:lnR w="12700" cap="flat" cmpd="sng" algn="ctr">
+                      <a:solidFill>
+                        <a:srgbClr val="D9E3EA"/>
+                      </a:solidFill>
+                      <a:prstDash val="solid"/>
+                      <a:round/>
+                      <a:headEnd type="none" w="med" len="med"/>
+                      <a:tailEnd type="none" w="med" len="med"/>
+                    </a:lnR>
+                    <a:lnT w="12700" cap="flat" cmpd="sng" algn="ctr">
+                      <a:solidFill>
+                        <a:srgbClr val="D9E3EA"/>
+                      </a:solidFill>
+                      <a:prstDash val="solid"/>
+                      <a:round/>
+                      <a:headEnd type="none" w="med" len="med"/>
+                      <a:tailEnd type="none" w="med" len="med"/>
+                    </a:lnT>
+                    <a:lnB w="12700" cap="flat" cmpd="sng" algn="ctr">
+                      <a:solidFill>
+                        <a:srgbClr val="D9E3EA"/>
+                      </a:solidFill>
+                      <a:prstDash val="solid"/>
+                      <a:round/>
+                      <a:headEnd type="none" w="med" len="med"/>
+                      <a:tailEnd type="none" w="med" len="med"/>
+                    </a:lnB>
+                    <a:solidFill>
+                      <a:srgbClr val="FFFFFF"/>
+                    </a:solidFill>
+                  </a:tcPr>
+                </a:tc>
+              </a:tr>
+              <a:tr h="603504">
+                <a:tc>
+                  <a:txBody>
+                    <a:bodyPr/>
+                    <a:lstStyle/>
+                    <a:p>
+                      <a:pPr indent="0" marL="0">
+                        <a:buNone/>
+                      </a:pPr>
+                      <a:r>
+                        <a:rPr lang="en-US" sz="2400" b="1" dirty="0">
+                          <a:solidFill>
+                            <a:srgbClr val="24343F"/>
+                          </a:solidFill>
+                        </a:rPr>
+                        <a:t>The quoted sentence</a:t>
+                      </a:r>
+                      <a:endParaRPr lang="en-US" sz="2400" dirty="0"/>
                     </a:p>
                   </a:txBody>
                   <a:tcPr marL="76200" marR="76200" marT="38100" marB="38100" anchor="ctr">
@@ -8139,14 +7720,14 @@
                         <a:buNone/>
                       </a:pPr>
                       <a:r>
-                        <a:rPr lang="en-US" sz="1500" dirty="0">
+                        <a:rPr lang="en-US" sz="2400" dirty="0">
                           <a:solidFill>
                             <a:srgbClr val="1B2730"/>
                           </a:solidFill>
                         </a:rPr>
-                        <a:t>In full</a:t>
+                        <a:t>Stored in monitoring</a:t>
                       </a:r>
-                      <a:endParaRPr lang="en-US" sz="1500" dirty="0"/>
+                      <a:endParaRPr lang="en-US" sz="2400" dirty="0"/>
                     </a:p>
                   </a:txBody>
                   <a:tcPr marL="76200" marR="76200" marT="38100" marB="38100" anchor="ctr">
@@ -8192,7 +7773,7 @@
                   </a:tcPr>
                 </a:tc>
               </a:tr>
-              <a:tr h="566928">
+              <a:tr h="603504">
                 <a:tc>
                   <a:txBody>
                     <a:bodyPr/>
@@ -8202,14 +7783,14 @@
                         <a:buNone/>
                       </a:pPr>
                       <a:r>
-                        <a:rPr lang="en-US" sz="1500" b="1" dirty="0">
+                        <a:rPr lang="en-US" sz="2400" b="1" dirty="0">
                           <a:solidFill>
                             <a:srgbClr val="24343F"/>
                           </a:solidFill>
                         </a:rPr>
-                        <a:t>Stored in monitoring (EU)</a:t>
+                        <a:t>The customer reference</a:t>
                       </a:r>
-                      <a:endParaRPr lang="en-US" sz="1500" dirty="0"/>
+                      <a:endParaRPr lang="en-US" sz="2400" dirty="0"/>
                     </a:p>
                   </a:txBody>
                   <a:tcPr marL="76200" marR="76200" marT="38100" marB="38100" anchor="ctr">
@@ -8263,260 +7844,14 @@
                         <a:buNone/>
                       </a:pPr>
                       <a:r>
-                        <a:rPr lang="en-US" sz="1500" dirty="0">
+                        <a:rPr lang="en-US" sz="2400" dirty="0">
                           <a:solidFill>
                             <a:srgbClr val="1B2730"/>
                           </a:solidFill>
                         </a:rPr>
-                        <a:t>Never</a:t>
+                        <a:t>Pseudonymised at the boundary</a:t>
                       </a:r>
-                      <a:endParaRPr lang="en-US" sz="1500" dirty="0"/>
-                    </a:p>
-                  </a:txBody>
-                  <a:tcPr marL="76200" marR="76200" marT="38100" marB="38100" anchor="ctr">
-                    <a:lnL w="12700" cap="flat" cmpd="sng" algn="ctr">
-                      <a:solidFill>
-                        <a:srgbClr val="D9E3EA"/>
-                      </a:solidFill>
-                      <a:prstDash val="solid"/>
-                      <a:round/>
-                      <a:headEnd type="none" w="med" len="med"/>
-                      <a:tailEnd type="none" w="med" len="med"/>
-                    </a:lnL>
-                    <a:lnR w="12700" cap="flat" cmpd="sng" algn="ctr">
-                      <a:solidFill>
-                        <a:srgbClr val="D9E3EA"/>
-                      </a:solidFill>
-                      <a:prstDash val="solid"/>
-                      <a:round/>
-                      <a:headEnd type="none" w="med" len="med"/>
-                      <a:tailEnd type="none" w="med" len="med"/>
-                    </a:lnR>
-                    <a:lnT w="12700" cap="flat" cmpd="sng" algn="ctr">
-                      <a:solidFill>
-                        <a:srgbClr val="D9E3EA"/>
-                      </a:solidFill>
-                      <a:prstDash val="solid"/>
-                      <a:round/>
-                      <a:headEnd type="none" w="med" len="med"/>
-                      <a:tailEnd type="none" w="med" len="med"/>
-                    </a:lnT>
-                    <a:lnB w="12700" cap="flat" cmpd="sng" algn="ctr">
-                      <a:solidFill>
-                        <a:srgbClr val="D9E3EA"/>
-                      </a:solidFill>
-                      <a:prstDash val="solid"/>
-                      <a:round/>
-                      <a:headEnd type="none" w="med" len="med"/>
-                      <a:tailEnd type="none" w="med" len="med"/>
-                    </a:lnB>
-                    <a:solidFill>
-                      <a:srgbClr val="FFFFFF"/>
-                    </a:solidFill>
-                  </a:tcPr>
-                </a:tc>
-                <a:tc>
-                  <a:txBody>
-                    <a:bodyPr/>
-                    <a:lstStyle/>
-                    <a:p>
-                      <a:pPr indent="0" marL="0">
-                        <a:buNone/>
-                      </a:pPr>
-                      <a:r>
-                        <a:rPr lang="en-US" sz="1500" dirty="0">
-                          <a:solidFill>
-                            <a:srgbClr val="1B2730"/>
-                          </a:solidFill>
-                        </a:rPr>
-                        <a:t>The quoted sentence</a:t>
-                      </a:r>
-                      <a:endParaRPr lang="en-US" sz="1500" dirty="0"/>
-                    </a:p>
-                  </a:txBody>
-                  <a:tcPr marL="76200" marR="76200" marT="38100" marB="38100" anchor="ctr">
-                    <a:lnL w="12700" cap="flat" cmpd="sng" algn="ctr">
-                      <a:solidFill>
-                        <a:srgbClr val="D9E3EA"/>
-                      </a:solidFill>
-                      <a:prstDash val="solid"/>
-                      <a:round/>
-                      <a:headEnd type="none" w="med" len="med"/>
-                      <a:tailEnd type="none" w="med" len="med"/>
-                    </a:lnL>
-                    <a:lnR w="12700" cap="flat" cmpd="sng" algn="ctr">
-                      <a:solidFill>
-                        <a:srgbClr val="D9E3EA"/>
-                      </a:solidFill>
-                      <a:prstDash val="solid"/>
-                      <a:round/>
-                      <a:headEnd type="none" w="med" len="med"/>
-                      <a:tailEnd type="none" w="med" len="med"/>
-                    </a:lnR>
-                    <a:lnT w="12700" cap="flat" cmpd="sng" algn="ctr">
-                      <a:solidFill>
-                        <a:srgbClr val="D9E3EA"/>
-                      </a:solidFill>
-                      <a:prstDash val="solid"/>
-                      <a:round/>
-                      <a:headEnd type="none" w="med" len="med"/>
-                      <a:tailEnd type="none" w="med" len="med"/>
-                    </a:lnT>
-                    <a:lnB w="12700" cap="flat" cmpd="sng" algn="ctr">
-                      <a:solidFill>
-                        <a:srgbClr val="D9E3EA"/>
-                      </a:solidFill>
-                      <a:prstDash val="solid"/>
-                      <a:round/>
-                      <a:headEnd type="none" w="med" len="med"/>
-                      <a:tailEnd type="none" w="med" len="med"/>
-                    </a:lnB>
-                    <a:solidFill>
-                      <a:srgbClr val="FFFFFF"/>
-                    </a:solidFill>
-                  </a:tcPr>
-                </a:tc>
-              </a:tr>
-              <a:tr h="566928">
-                <a:tc>
-                  <a:txBody>
-                    <a:bodyPr/>
-                    <a:lstStyle/>
-                    <a:p>
-                      <a:pPr indent="0" marL="0">
-                        <a:buNone/>
-                      </a:pPr>
-                      <a:r>
-                        <a:rPr lang="en-US" sz="1500" b="1" dirty="0">
-                          <a:solidFill>
-                            <a:srgbClr val="24343F"/>
-                          </a:solidFill>
-                        </a:rPr>
-                        <a:t>In the decision log</a:t>
-                      </a:r>
-                      <a:endParaRPr lang="en-US" sz="1500" dirty="0"/>
-                    </a:p>
-                  </a:txBody>
-                  <a:tcPr marL="76200" marR="76200" marT="38100" marB="38100" anchor="ctr">
-                    <a:lnL w="12700" cap="flat" cmpd="sng" algn="ctr">
-                      <a:solidFill>
-                        <a:srgbClr val="D9E3EA"/>
-                      </a:solidFill>
-                      <a:prstDash val="solid"/>
-                      <a:round/>
-                      <a:headEnd type="none" w="med" len="med"/>
-                      <a:tailEnd type="none" w="med" len="med"/>
-                    </a:lnL>
-                    <a:lnR w="12700" cap="flat" cmpd="sng" algn="ctr">
-                      <a:solidFill>
-                        <a:srgbClr val="D9E3EA"/>
-                      </a:solidFill>
-                      <a:prstDash val="solid"/>
-                      <a:round/>
-                      <a:headEnd type="none" w="med" len="med"/>
-                      <a:tailEnd type="none" w="med" len="med"/>
-                    </a:lnR>
-                    <a:lnT w="12700" cap="flat" cmpd="sng" algn="ctr">
-                      <a:solidFill>
-                        <a:srgbClr val="D9E3EA"/>
-                      </a:solidFill>
-                      <a:prstDash val="solid"/>
-                      <a:round/>
-                      <a:headEnd type="none" w="med" len="med"/>
-                      <a:tailEnd type="none" w="med" len="med"/>
-                    </a:lnT>
-                    <a:lnB w="12700" cap="flat" cmpd="sng" algn="ctr">
-                      <a:solidFill>
-                        <a:srgbClr val="D9E3EA"/>
-                      </a:solidFill>
-                      <a:prstDash val="solid"/>
-                      <a:round/>
-                      <a:headEnd type="none" w="med" len="med"/>
-                      <a:tailEnd type="none" w="med" len="med"/>
-                    </a:lnB>
-                    <a:solidFill>
-                      <a:srgbClr val="FFFFFF"/>
-                    </a:solidFill>
-                  </a:tcPr>
-                </a:tc>
-                <a:tc>
-                  <a:txBody>
-                    <a:bodyPr/>
-                    <a:lstStyle/>
-                    <a:p>
-                      <a:pPr indent="0" marL="0">
-                        <a:buNone/>
-                      </a:pPr>
-                      <a:r>
-                        <a:rPr lang="en-US" sz="1500" dirty="0">
-                          <a:solidFill>
-                            <a:srgbClr val="1B2730"/>
-                          </a:solidFill>
-                        </a:rPr>
-                        <a:t>Never</a:t>
-                      </a:r>
-                      <a:endParaRPr lang="en-US" sz="1500" dirty="0"/>
-                    </a:p>
-                  </a:txBody>
-                  <a:tcPr marL="76200" marR="76200" marT="38100" marB="38100" anchor="ctr">
-                    <a:lnL w="12700" cap="flat" cmpd="sng" algn="ctr">
-                      <a:solidFill>
-                        <a:srgbClr val="D9E3EA"/>
-                      </a:solidFill>
-                      <a:prstDash val="solid"/>
-                      <a:round/>
-                      <a:headEnd type="none" w="med" len="med"/>
-                      <a:tailEnd type="none" w="med" len="med"/>
-                    </a:lnL>
-                    <a:lnR w="12700" cap="flat" cmpd="sng" algn="ctr">
-                      <a:solidFill>
-                        <a:srgbClr val="D9E3EA"/>
-                      </a:solidFill>
-                      <a:prstDash val="solid"/>
-                      <a:round/>
-                      <a:headEnd type="none" w="med" len="med"/>
-                      <a:tailEnd type="none" w="med" len="med"/>
-                    </a:lnR>
-                    <a:lnT w="12700" cap="flat" cmpd="sng" algn="ctr">
-                      <a:solidFill>
-                        <a:srgbClr val="D9E3EA"/>
-                      </a:solidFill>
-                      <a:prstDash val="solid"/>
-                      <a:round/>
-                      <a:headEnd type="none" w="med" len="med"/>
-                      <a:tailEnd type="none" w="med" len="med"/>
-                    </a:lnT>
-                    <a:lnB w="12700" cap="flat" cmpd="sng" algn="ctr">
-                      <a:solidFill>
-                        <a:srgbClr val="D9E3EA"/>
-                      </a:solidFill>
-                      <a:prstDash val="solid"/>
-                      <a:round/>
-                      <a:headEnd type="none" w="med" len="med"/>
-                      <a:tailEnd type="none" w="med" len="med"/>
-                    </a:lnB>
-                    <a:solidFill>
-                      <a:srgbClr val="FFFFFF"/>
-                    </a:solidFill>
-                  </a:tcPr>
-                </a:tc>
-                <a:tc>
-                  <a:txBody>
-                    <a:bodyPr/>
-                    <a:lstStyle/>
-                    <a:p>
-                      <a:pPr indent="0" marL="0">
-                        <a:buNone/>
-                      </a:pPr>
-                      <a:r>
-                        <a:rPr lang="en-US" sz="1500" dirty="0">
-                          <a:solidFill>
-                            <a:srgbClr val="1B2730"/>
-                          </a:solidFill>
-                        </a:rPr>
-                        <a:t>The quoted sentence</a:t>
-                      </a:r>
-                      <a:endParaRPr lang="en-US" sz="1500" dirty="0"/>
+                      <a:endParaRPr lang="en-US" sz="2400" dirty="0"/>
                     </a:p>
                   </a:txBody>
                   <a:tcPr marL="76200" marR="76200" marT="38100" marB="38100" anchor="ctr">
@@ -8574,8 +7909,8 @@
         </p:nvSpPr>
         <p:spPr>
           <a:xfrm>
-            <a:off x="566928" y="4745736"/>
-            <a:ext cx="11055096" cy="640080"/>
+            <a:off x="566928" y="5321808"/>
+            <a:ext cx="11055096" cy="914400"/>
           </a:xfrm>
           <a:prstGeom prst="rect">
             <a:avLst/>
@@ -8594,8 +7929,8 @@
         </p:nvSpPr>
         <p:spPr>
           <a:xfrm>
-            <a:off x="566928" y="4745736"/>
-            <a:ext cx="82296" cy="640080"/>
+            <a:off x="566928" y="5321808"/>
+            <a:ext cx="82296" cy="914400"/>
           </a:xfrm>
           <a:prstGeom prst="rect">
             <a:avLst/>
@@ -8614,8 +7949,8 @@
         </p:nvSpPr>
         <p:spPr>
           <a:xfrm>
-            <a:off x="822960" y="4745736"/>
-            <a:ext cx="10597896" cy="640080"/>
+            <a:off x="822960" y="5321808"/>
+            <a:ext cx="10597896" cy="914400"/>
           </a:xfrm>
           <a:prstGeom prst="rect">
             <a:avLst/>
@@ -8631,7 +7966,7 @@
               <a:buNone/>
             </a:pPr>
             <a:r>
-              <a:rPr lang="en-US" sz="1700" dirty="0">
+              <a:rPr lang="en-US" sz="2400" b="1" dirty="0">
                 <a:solidFill>
                   <a:srgbClr val="000000"/>
                 </a:solidFill>
@@ -8639,9 +7974,9 @@
                 <a:ea typeface="Calibri" pitchFamily="34" charset="-122"/>
                 <a:cs typeface="Calibri" pitchFamily="34" charset="-120"/>
               </a:rPr>
-              <a:t>So the transfer work — DPA, transfer impact assessment, zero retention — is a gate before any pilot on real data, not a Phase 2 discovery.</a:t>
-            </a:r>
-            <a:endParaRPr lang="en-US" sz="1700" dirty="0"/>
+              <a:t>So the transfer work is a gate before any pilot on real data.</a:t>
+            </a:r>
+            <a:endParaRPr lang="en-US" sz="2400" dirty="0"/>
           </a:p>
         </p:txBody>
       </p:sp>
@@ -8808,7 +8143,7 @@
         <p:spPr>
           <a:xfrm>
             <a:off x="566928" y="1481328"/>
-            <a:ext cx="11055096" cy="676656"/>
+            <a:ext cx="11055096" cy="1078992"/>
           </a:xfrm>
           <a:prstGeom prst="rect">
             <a:avLst/>
@@ -8828,7 +8163,7 @@
         <p:spPr>
           <a:xfrm>
             <a:off x="566928" y="1481328"/>
-            <a:ext cx="82296" cy="676656"/>
+            <a:ext cx="82296" cy="1078992"/>
           </a:xfrm>
           <a:prstGeom prst="rect">
             <a:avLst/>
@@ -8848,7 +8183,7 @@
         <p:spPr>
           <a:xfrm>
             <a:off x="822960" y="1481328"/>
-            <a:ext cx="10597896" cy="676656"/>
+            <a:ext cx="10597896" cy="1078992"/>
           </a:xfrm>
           <a:prstGeom prst="rect">
             <a:avLst/>
@@ -8864,7 +8199,7 @@
               <a:buNone/>
             </a:pPr>
             <a:r>
-              <a:rPr lang="en-US" sz="1050" b="1" spc="100" kern="0" dirty="0">
+              <a:rPr lang="en-US" sz="2400" b="1" spc="100" kern="0" dirty="0">
                 <a:solidFill>
                   <a:srgbClr val="2A78D6"/>
                 </a:solidFill>
@@ -8878,7 +8213,7 @@
               <a:buNone/>
             </a:pPr>
             <a:r>
-              <a:rPr lang="en-US" sz="1300" dirty="0">
+              <a:rPr lang="en-US" sz="2400" dirty="0">
                 <a:solidFill>
                   <a:srgbClr val="1B2730"/>
                 </a:solidFill>
@@ -8888,7 +8223,7 @@
               </a:rPr>
               <a:t>Miss any of the first three and we do not proceed.</a:t>
             </a:r>
-            <a:endParaRPr lang="en-US" sz="1050" dirty="0"/>
+            <a:endParaRPr lang="en-US" sz="2400" dirty="0"/>
           </a:p>
         </p:txBody>
       </p:sp>
@@ -8997,7 +8332,7 @@
           </p:nvPr>
         </p:nvGraphicFramePr>
         <p:xfrm>
-          <a:off x="566928" y="2395728"/>
+          <a:off x="566928" y="2798064"/>
           <a:ext cx="11055096" cy="914400"/>
         </p:xfrm>
         <a:graphic>
@@ -9005,10 +8340,10 @@
             <a:tbl>
               <a:tblPr/>
               <a:tblGrid>
-                <a:gridCol w="5120640"/>
-                <a:gridCol w="5934456"/>
+                <a:gridCol w="7397496"/>
+                <a:gridCol w="3657600"/>
               </a:tblGrid>
-              <a:tr h="329184">
+              <a:tr h="475488">
                 <a:tc>
                   <a:txBody>
                     <a:bodyPr/>
@@ -9018,14 +8353,14 @@
                         <a:buNone/>
                       </a:pPr>
                       <a:r>
-                        <a:rPr lang="en-US" sz="1500" b="1" spc="100" kern="0" dirty="0">
+                        <a:rPr lang="en-US" sz="2400" b="1" spc="100" kern="0" dirty="0">
                           <a:solidFill>
                             <a:srgbClr val="FFFFFF"/>
                           </a:solidFill>
                         </a:rPr>
-                        <a:t>GATE</a:t>
+                        <a:t>MEASURE</a:t>
                       </a:r>
-                      <a:endParaRPr lang="en-US" sz="1500" dirty="0"/>
+                      <a:endParaRPr lang="en-US" sz="2400" dirty="0"/>
                     </a:p>
                   </a:txBody>
                   <a:tcPr marL="101600" marR="101600" marT="25400" marB="25400" anchor="ctr">
@@ -9079,14 +8414,14 @@
                         <a:buNone/>
                       </a:pPr>
                       <a:r>
-                        <a:rPr lang="en-US" sz="1500" b="1" spc="100" kern="0" dirty="0">
+                        <a:rPr lang="en-US" sz="2400" b="1" spc="100" kern="0" dirty="0">
                           <a:solidFill>
                             <a:srgbClr val="1D2A32"/>
                           </a:solidFill>
                         </a:rPr>
                         <a:t>THRESHOLD</a:t>
                       </a:r>
-                      <a:endParaRPr lang="en-US" sz="1500" dirty="0"/>
+                      <a:endParaRPr lang="en-US" sz="2400" dirty="0"/>
                     </a:p>
                   </a:txBody>
                   <a:tcPr marL="101600" marR="101600" marT="25400" marB="25400" anchor="ctr">
@@ -9132,7 +8467,7 @@
                   </a:tcPr>
                 </a:tc>
               </a:tr>
-              <a:tr h="338328">
+              <a:tr h="530352">
                 <a:tc>
                   <a:txBody>
                     <a:bodyPr/>
@@ -9142,14 +8477,14 @@
                         <a:buNone/>
                       </a:pPr>
                       <a:r>
-                        <a:rPr lang="en-US" sz="1500" b="1" dirty="0">
+                        <a:rPr lang="en-US" sz="2400" b="1" dirty="0">
                           <a:solidFill>
                             <a:srgbClr val="24343F"/>
                           </a:solidFill>
                         </a:rPr>
-                        <a:t>Team-level accuracy vs expert labels</a:t>
+                        <a:t>Team accuracy vs expert labels</a:t>
                       </a:r>
-                      <a:endParaRPr lang="en-US" sz="1500" dirty="0"/>
+                      <a:endParaRPr lang="en-US" sz="2400" dirty="0"/>
                     </a:p>
                   </a:txBody>
                   <a:tcPr marL="101600" marR="101600" marT="25400" marB="25400" anchor="ctr">
@@ -9203,14 +8538,14 @@
                         <a:buNone/>
                       </a:pPr>
                       <a:r>
-                        <a:rPr lang="en-US" sz="1500" dirty="0">
+                        <a:rPr lang="en-US" sz="2400" dirty="0">
                           <a:solidFill>
                             <a:srgbClr val="1B2730"/>
                           </a:solidFill>
                         </a:rPr>
                         <a:t>≥ 80%</a:t>
                       </a:r>
-                      <a:endParaRPr lang="en-US" sz="1500" dirty="0"/>
+                      <a:endParaRPr lang="en-US" sz="2400" dirty="0"/>
                     </a:p>
                   </a:txBody>
                   <a:tcPr marL="101600" marR="101600" marT="25400" marB="25400" anchor="ctr">
@@ -9256,7 +8591,7 @@
                   </a:tcPr>
                 </a:tc>
               </a:tr>
-              <a:tr h="338328">
+              <a:tr h="530352">
                 <a:tc>
                   <a:txBody>
                     <a:bodyPr/>
@@ -9266,14 +8601,14 @@
                         <a:buNone/>
                       </a:pPr>
                       <a:r>
-                        <a:rPr lang="en-US" sz="1500" b="1" dirty="0">
+                        <a:rPr lang="en-US" sz="2400" b="1" dirty="0">
                           <a:solidFill>
                             <a:srgbClr val="24343F"/>
                           </a:solidFill>
                         </a:rPr>
-                        <a:t>Handler acceptance rate</a:t>
+                        <a:t>Acceptance rate, per handler</a:t>
                       </a:r>
-                      <a:endParaRPr lang="en-US" sz="1500" dirty="0"/>
+                      <a:endParaRPr lang="en-US" sz="2400" dirty="0"/>
                     </a:p>
                   </a:txBody>
                   <a:tcPr marL="101600" marR="101600" marT="25400" marB="25400" anchor="ctr">
@@ -9327,14 +8662,14 @@
                         <a:buNone/>
                       </a:pPr>
                       <a:r>
-                        <a:rPr lang="en-US" sz="1500" dirty="0">
+                        <a:rPr lang="en-US" sz="2400" dirty="0">
                           <a:solidFill>
                             <a:srgbClr val="1B2730"/>
                           </a:solidFill>
                         </a:rPr>
-                        <a:t>≥ 75% AND ≤ 97%</a:t>
+                        <a:t>75 – 97%</a:t>
                       </a:r>
-                      <a:endParaRPr lang="en-US" sz="1500" dirty="0"/>
+                      <a:endParaRPr lang="en-US" sz="2400" dirty="0"/>
                     </a:p>
                   </a:txBody>
                   <a:tcPr marL="101600" marR="101600" marT="25400" marB="25400" anchor="ctr">
@@ -9380,7 +8715,7 @@
                   </a:tcPr>
                 </a:tc>
               </a:tr>
-              <a:tr h="338328">
+              <a:tr h="530352">
                 <a:tc>
                   <a:txBody>
                     <a:bodyPr/>
@@ -9390,14 +8725,14 @@
                         <a:buNone/>
                       </a:pPr>
                       <a:r>
-                        <a:rPr lang="en-US" sz="1500" b="1" dirty="0">
+                        <a:rPr lang="en-US" sz="2400" b="1" dirty="0">
                           <a:solidFill>
                             <a:srgbClr val="24343F"/>
                           </a:solidFill>
                         </a:rPr>
-                        <a:t>Ungrounded outputs reaching a handler</a:t>
+                        <a:t>Ungrounded output reaching a handler</a:t>
                       </a:r>
-                      <a:endParaRPr lang="en-US" sz="1500" dirty="0"/>
+                      <a:endParaRPr lang="en-US" sz="2400" dirty="0"/>
                     </a:p>
                   </a:txBody>
                   <a:tcPr marL="101600" marR="101600" marT="25400" marB="25400" anchor="ctr">
@@ -9451,14 +8786,14 @@
                         <a:buNone/>
                       </a:pPr>
                       <a:r>
-                        <a:rPr lang="en-US" sz="1500" dirty="0">
+                        <a:rPr lang="en-US" sz="2400" dirty="0">
                           <a:solidFill>
                             <a:srgbClr val="1B2730"/>
                           </a:solidFill>
                         </a:rPr>
-                        <a:t>Zero. Absolute</a:t>
+                        <a:t>Zero</a:t>
                       </a:r>
-                      <a:endParaRPr lang="en-US" sz="1500" dirty="0"/>
+                      <a:endParaRPr lang="en-US" sz="2400" dirty="0"/>
                     </a:p>
                   </a:txBody>
                   <a:tcPr marL="101600" marR="101600" marT="25400" marB="25400" anchor="ctr">
@@ -9504,7 +8839,7 @@
                   </a:tcPr>
                 </a:tc>
               </a:tr>
-              <a:tr h="338328">
+              <a:tr h="530352">
                 <a:tc>
                   <a:txBody>
                     <a:bodyPr/>
@@ -9514,14 +8849,14 @@
                         <a:buNone/>
                       </a:pPr>
                       <a:r>
-                        <a:rPr lang="en-US" sz="1500" b="1" dirty="0">
+                        <a:rPr lang="en-US" sz="2400" b="1" dirty="0">
                           <a:solidFill>
                             <a:srgbClr val="24343F"/>
                           </a:solidFill>
                         </a:rPr>
                         <a:t>Correct abstention</a:t>
                       </a:r>
-                      <a:endParaRPr lang="en-US" sz="1500" dirty="0"/>
+                      <a:endParaRPr lang="en-US" sz="2400" dirty="0"/>
                     </a:p>
                   </a:txBody>
                   <a:tcPr marL="101600" marR="101600" marT="25400" marB="25400" anchor="ctr">
@@ -9575,14 +8910,14 @@
                         <a:buNone/>
                       </a:pPr>
                       <a:r>
-                        <a:rPr lang="en-US" sz="1500" dirty="0">
+                        <a:rPr lang="en-US" sz="2400" dirty="0">
                           <a:solidFill>
                             <a:srgbClr val="1B2730"/>
                           </a:solidFill>
                         </a:rPr>
                         <a:t>≥ 95%</a:t>
                       </a:r>
-                      <a:endParaRPr lang="en-US" sz="1500" dirty="0"/>
+                      <a:endParaRPr lang="en-US" sz="2400" dirty="0"/>
                     </a:p>
                   </a:txBody>
                   <a:tcPr marL="101600" marR="101600" marT="25400" marB="25400" anchor="ctr">
@@ -9628,7 +8963,7 @@
                   </a:tcPr>
                 </a:tc>
               </a:tr>
-              <a:tr h="338328">
+              <a:tr h="530352">
                 <a:tc>
                   <a:txBody>
                     <a:bodyPr/>
@@ -9638,14 +8973,14 @@
                         <a:buNone/>
                       </a:pPr>
                       <a:r>
-                        <a:rPr lang="en-US" sz="1500" b="1" dirty="0">
+                        <a:rPr lang="en-US" sz="2400" b="1" dirty="0">
                           <a:solidFill>
                             <a:srgbClr val="24343F"/>
                           </a:solidFill>
                         </a:rPr>
-                        <a:t>Anomaly precision on analyst disposition</a:t>
+                        <a:t>Anomaly precision on disposition</a:t>
                       </a:r>
-                      <a:endParaRPr lang="en-US" sz="1500" dirty="0"/>
+                      <a:endParaRPr lang="en-US" sz="2400" dirty="0"/>
                     </a:p>
                   </a:txBody>
                   <a:tcPr marL="101600" marR="101600" marT="25400" marB="25400" anchor="ctr">
@@ -9699,14 +9034,14 @@
                         <a:buNone/>
                       </a:pPr>
                       <a:r>
-                        <a:rPr lang="en-US" sz="1500" dirty="0">
+                        <a:rPr lang="en-US" sz="2400" dirty="0">
                           <a:solidFill>
                             <a:srgbClr val="1B2730"/>
                           </a:solidFill>
                         </a:rPr>
-                        <a:t>≥ 30% — if this alone fails, ship the other two</a:t>
+                        <a:t>≥ 30%</a:t>
                       </a:r>
-                      <a:endParaRPr lang="en-US" sz="1500" dirty="0"/>
+                      <a:endParaRPr lang="en-US" sz="2400" dirty="0"/>
                     </a:p>
                   </a:txBody>
                   <a:tcPr marL="101600" marR="101600" marT="25400" marB="25400" anchor="ctr">
@@ -10060,7 +9395,7 @@
         <p:spPr>
           <a:xfrm>
             <a:off x="7712050" y="1682496"/>
-            <a:ext cx="3690518" cy="310896"/>
+            <a:ext cx="3690518" cy="420624"/>
           </a:xfrm>
           <a:prstGeom prst="rect">
             <a:avLst/>
@@ -10076,7 +9411,7 @@
               <a:buNone/>
             </a:pPr>
             <a:r>
-              <a:rPr lang="en-US" sz="1100" dirty="0">
+              <a:rPr lang="en-US" sz="2400" dirty="0">
                 <a:solidFill>
                   <a:srgbClr val="2A78D6"/>
                 </a:solidFill>
@@ -10090,7 +9425,7 @@
               <a:buNone/>
             </a:pPr>
             <a:r>
-              <a:rPr lang="en-US" sz="1300" b="1" dirty="0">
+              <a:rPr lang="en-US" sz="2400" b="1" dirty="0">
                 <a:solidFill>
                   <a:srgbClr val="FFFFFF"/>
                 </a:solidFill>
@@ -10100,7 +9435,7 @@
               </a:rPr>
               <a:t>The division of labour</a:t>
             </a:r>
-            <a:endParaRPr lang="en-US" sz="1100" dirty="0"/>
+            <a:endParaRPr lang="en-US" sz="2400" dirty="0"/>
           </a:p>
         </p:txBody>
       </p:sp>
@@ -10112,8 +9447,8 @@
         </p:nvSpPr>
         <p:spPr>
           <a:xfrm>
-            <a:off x="7712050" y="2194560"/>
-            <a:ext cx="3672230" cy="3959352"/>
+            <a:off x="7712050" y="2322576"/>
+            <a:ext cx="3672230" cy="3822192"/>
           </a:xfrm>
           <a:prstGeom prst="rect">
             <a:avLst/>
@@ -10127,74 +9462,74 @@
           <a:p>
             <a:pPr marL="152400" indent="-152400">
               <a:spcAft>
-                <a:spcPts val="900"/>
+                <a:spcPts val="1000"/>
               </a:spcAft>
               <a:buSzPct val="100000"/>
               <a:buChar char="•"/>
             </a:pPr>
             <a:r>
-              <a:rPr lang="en-US" sz="1500" dirty="0">
+              <a:rPr lang="en-US" sz="2400" dirty="0">
                 <a:solidFill>
                   <a:srgbClr val="C6D8E4"/>
                 </a:solidFill>
               </a:rPr>
-              <a:t>A deterministic detector decides WHAT is unusual.</a:t>
-            </a:r>
-            <a:endParaRPr lang="en-US" sz="1500" dirty="0"/>
+              <a:t>A detector decides WHAT is unusual.</a:t>
+            </a:r>
+            <a:endParaRPr lang="en-US" sz="2400" dirty="0"/>
           </a:p>
           <a:p>
             <a:pPr marL="152400" indent="-152400">
               <a:spcAft>
-                <a:spcPts val="900"/>
+                <a:spcPts val="1000"/>
               </a:spcAft>
               <a:buSzPct val="100000"/>
               <a:buChar char="•"/>
             </a:pPr>
             <a:r>
-              <a:rPr lang="en-US" sz="1500" dirty="0">
+              <a:rPr lang="en-US" sz="2400" dirty="0">
                 <a:solidFill>
                   <a:srgbClr val="C6D8E4"/>
                 </a:solidFill>
               </a:rPr>
-              <a:t>The model only explains WHY, in language an analyst can act on.</a:t>
-            </a:r>
-            <a:endParaRPr lang="en-US" sz="1500" dirty="0"/>
+              <a:t>The model only explains WHY.</a:t>
+            </a:r>
+            <a:endParaRPr lang="en-US" sz="2400" dirty="0"/>
           </a:p>
           <a:p>
             <a:pPr marL="152400" indent="-152400">
               <a:spcAft>
-                <a:spcPts val="900"/>
+                <a:spcPts val="1000"/>
               </a:spcAft>
               <a:buSzPct val="100000"/>
               <a:buChar char="•"/>
             </a:pPr>
             <a:r>
-              <a:rPr lang="en-US" sz="1500" dirty="0">
+              <a:rPr lang="en-US" sz="2400" dirty="0">
                 <a:solidFill>
                   <a:srgbClr val="C6D8E4"/>
                 </a:solidFill>
               </a:rPr>
-              <a:t>Ranked by departure from that account's own normal — never by the amount.</a:t>
-            </a:r>
-            <a:endParaRPr lang="en-US" sz="1500" dirty="0"/>
+              <a:t>Ranked by that account's own normal — never by amount.</a:t>
+            </a:r>
+            <a:endParaRPr lang="en-US" sz="2400" dirty="0"/>
           </a:p>
           <a:p>
             <a:pPr marL="152400" indent="-152400">
               <a:spcAft>
-                <a:spcPts val="900"/>
+                <a:spcPts val="1000"/>
               </a:spcAft>
               <a:buSzPct val="100000"/>
               <a:buChar char="•"/>
             </a:pPr>
             <a:r>
-              <a:rPr lang="en-US" sz="1500" dirty="0">
+              <a:rPr lang="en-US" sz="2400" dirty="0">
                 <a:solidFill>
                   <a:srgbClr val="C6D8E4"/>
                 </a:solidFill>
               </a:rPr>
-              <a:t>Six of 56 case notes were stopped for citing a figure that was not in the record.</a:t>
-            </a:r>
-            <a:endParaRPr lang="en-US" sz="1500" dirty="0"/>
+              <a:t>Six of 56 notes stopped for an uncited figure.</a:t>
+            </a:r>
+            <a:endParaRPr lang="en-US" sz="2400" dirty="0"/>
           </a:p>
         </p:txBody>
       </p:sp>
@@ -10361,7 +9696,7 @@
         <p:spPr>
           <a:xfrm>
             <a:off x="566928" y="1481328"/>
-            <a:ext cx="11055096" cy="676656"/>
+            <a:ext cx="11055096" cy="1078992"/>
           </a:xfrm>
           <a:prstGeom prst="rect">
             <a:avLst/>
@@ -10381,7 +9716,7 @@
         <p:spPr>
           <a:xfrm>
             <a:off x="566928" y="1481328"/>
-            <a:ext cx="82296" cy="676656"/>
+            <a:ext cx="82296" cy="1078992"/>
           </a:xfrm>
           <a:prstGeom prst="rect">
             <a:avLst/>
@@ -10401,7 +9736,7 @@
         <p:spPr>
           <a:xfrm>
             <a:off x="822960" y="1481328"/>
-            <a:ext cx="10597896" cy="676656"/>
+            <a:ext cx="10597896" cy="1078992"/>
           </a:xfrm>
           <a:prstGeom prst="rect">
             <a:avLst/>
@@ -10417,7 +9752,7 @@
               <a:buNone/>
             </a:pPr>
             <a:r>
-              <a:rPr lang="en-US" sz="1050" b="1" spc="100" kern="0" dirty="0">
+              <a:rPr lang="en-US" sz="2400" b="1" spc="100" kern="0" dirty="0">
                 <a:solidFill>
                   <a:srgbClr val="2A78D6"/>
                 </a:solidFill>
@@ -10431,7 +9766,7 @@
               <a:buNone/>
             </a:pPr>
             <a:r>
-              <a:rPr lang="en-US" sz="1300" dirty="0">
+              <a:rPr lang="en-US" sz="2400" dirty="0">
                 <a:solidFill>
                   <a:srgbClr val="1B2730"/>
                 </a:solidFill>
@@ -10439,9 +9774,9 @@
                 <a:ea typeface="Calibri" pitchFamily="34" charset="-122"/>
                 <a:cs typeface="Calibri" pitchFamily="34" charset="-120"/>
               </a:rPr>
-              <a:t>Same industry, same client, same lead use case. The scope widened from one use case to three.</a:t>
-            </a:r>
-            <a:endParaRPr lang="en-US" sz="1050" dirty="0"/>
+              <a:t>Same client, same use case. The scope widened.</a:t>
+            </a:r>
+            <a:endParaRPr lang="en-US" sz="2400" dirty="0"/>
           </a:p>
         </p:txBody>
       </p:sp>
@@ -10550,7 +9885,7 @@
           </p:nvPr>
         </p:nvGraphicFramePr>
         <p:xfrm>
-          <a:off x="566928" y="2395728"/>
+          <a:off x="566928" y="2798064"/>
           <a:ext cx="11055096" cy="914400"/>
         </p:xfrm>
         <a:graphic>
@@ -10562,7 +9897,7 @@
                 <a:gridCol w="548640"/>
                 <a:gridCol w="5253228"/>
               </a:tblGrid>
-              <a:tr h="365760">
+              <a:tr h="475488">
                 <a:tc>
                   <a:txBody>
                     <a:bodyPr/>
@@ -10572,14 +9907,14 @@
                         <a:buNone/>
                       </a:pPr>
                       <a:r>
-                        <a:rPr lang="en-US" sz="1150" b="1" spc="100" kern="0" dirty="0">
+                        <a:rPr lang="en-US" sz="2400" b="1" spc="100" kern="0" dirty="0">
                           <a:solidFill>
                             <a:srgbClr val="FFFFFF"/>
                           </a:solidFill>
                         </a:rPr>
-                        <a:t>ROUND 1 — THE PITCH</a:t>
+                        <a:t>ROUND 1</a:t>
                       </a:r>
-                      <a:endParaRPr lang="en-US" sz="1150" dirty="0"/>
+                      <a:endParaRPr lang="en-US" sz="2400" dirty="0"/>
                     </a:p>
                   </a:txBody>
                   <a:tcPr marL="101600" marR="101600" marT="25400" marB="25400" anchor="ctr">
@@ -10686,14 +10021,14 @@
                         <a:buNone/>
                       </a:pPr>
                       <a:r>
-                        <a:rPr lang="en-US" sz="1150" b="1" spc="100" kern="0" dirty="0">
+                        <a:rPr lang="en-US" sz="2400" b="1" spc="100" kern="0" dirty="0">
                           <a:solidFill>
                             <a:srgbClr val="1D2A32"/>
                           </a:solidFill>
                         </a:rPr>
-                        <a:t>ROUND 2 — WHAT I BUILT</a:t>
+                        <a:t>ROUND 2</a:t>
                       </a:r>
-                      <a:endParaRPr lang="en-US" sz="1150" dirty="0"/>
+                      <a:endParaRPr lang="en-US" sz="2400" dirty="0"/>
                     </a:p>
                   </a:txBody>
                   <a:tcPr marL="101600" marR="101600" marT="25400" marB="25400" anchor="ctr">
@@ -10739,7 +10074,7 @@
                   </a:tcPr>
                 </a:tc>
               </a:tr>
-              <a:tr h="457200">
+              <a:tr h="566928">
                 <a:tc>
                   <a:txBody>
                     <a:bodyPr/>
@@ -10749,14 +10084,14 @@
                         <a:buNone/>
                       </a:pPr>
                       <a:r>
-                        <a:rPr lang="en-US" sz="1080" dirty="0">
+                        <a:rPr lang="en-US" sz="2400" dirty="0">
                           <a:solidFill>
                             <a:srgbClr val="1B2730"/>
                           </a:solidFill>
                         </a:rPr>
-                        <a:t>Three use cases proposed, one built</a:t>
+                        <a:t>Three proposed, one built</a:t>
                       </a:r>
-                      <a:endParaRPr lang="en-US" sz="1080" dirty="0"/>
+                      <a:endParaRPr lang="en-US" sz="2400" dirty="0"/>
                     </a:p>
                   </a:txBody>
                   <a:tcPr marL="101600" marR="101600" marT="25400" marB="25400" anchor="ctr">
@@ -10810,14 +10145,14 @@
                         <a:buNone/>
                       </a:pPr>
                       <a:r>
-                        <a:rPr lang="en-US" sz="1400" b="1" dirty="0">
+                        <a:rPr lang="en-US" sz="2400" b="1" dirty="0">
                           <a:solidFill>
                             <a:srgbClr val="2A78D6"/>
                           </a:solidFill>
                         </a:rPr>
                         <a:t>→</a:t>
                       </a:r>
-                      <a:endParaRPr lang="en-US" sz="1400" dirty="0"/>
+                      <a:endParaRPr lang="en-US" sz="2400" dirty="0"/>
                     </a:p>
                   </a:txBody>
                   <a:tcPr marL="101600" marR="101600" marT="25400" marB="25400" anchor="ctr">
@@ -10871,14 +10206,14 @@
                         <a:buNone/>
                       </a:pPr>
                       <a:r>
-                        <a:rPr lang="en-US" sz="1080" b="1" dirty="0">
+                        <a:rPr lang="en-US" sz="2400" b="1" dirty="0">
                           <a:solidFill>
                             <a:srgbClr val="24343F"/>
                           </a:solidFill>
                         </a:rPr>
-                        <a:t>Three proposed, three built</a:t>
+                        <a:t>Three built</a:t>
                       </a:r>
-                      <a:endParaRPr lang="en-US" sz="1080" dirty="0"/>
+                      <a:endParaRPr lang="en-US" sz="2400" dirty="0"/>
                     </a:p>
                   </a:txBody>
                   <a:tcPr marL="101600" marR="101600" marT="25400" marB="25400" anchor="ctr">
@@ -10924,7 +10259,7 @@
                   </a:tcPr>
                 </a:tc>
               </a:tr>
-              <a:tr h="457200">
+              <a:tr h="566928">
                 <a:tc>
                   <a:txBody>
                     <a:bodyPr/>
@@ -10934,14 +10269,14 @@
                         <a:buNone/>
                       </a:pPr>
                       <a:r>
-                        <a:rPr lang="en-US" sz="1080" dirty="0">
+                        <a:rPr lang="en-US" sz="2400" dirty="0">
                           <a:solidFill>
                             <a:srgbClr val="1B2730"/>
                           </a:solidFill>
                         </a:rPr>
                         <a:t>A workflow you could watch</a:t>
                       </a:r>
-                      <a:endParaRPr lang="en-US" sz="1080" dirty="0"/>
+                      <a:endParaRPr lang="en-US" sz="2400" dirty="0"/>
                     </a:p>
                   </a:txBody>
                   <a:tcPr marL="101600" marR="101600" marT="25400" marB="25400" anchor="ctr">
@@ -10995,14 +10330,14 @@
                         <a:buNone/>
                       </a:pPr>
                       <a:r>
-                        <a:rPr lang="en-US" sz="1400" b="1" dirty="0">
+                        <a:rPr lang="en-US" sz="2400" b="1" dirty="0">
                           <a:solidFill>
                             <a:srgbClr val="2A78D6"/>
                           </a:solidFill>
                         </a:rPr>
                         <a:t>→</a:t>
                       </a:r>
-                      <a:endParaRPr lang="en-US" sz="1400" dirty="0"/>
+                      <a:endParaRPr lang="en-US" sz="2400" dirty="0"/>
                     </a:p>
                   </a:txBody>
                   <a:tcPr marL="101600" marR="101600" marT="25400" marB="25400" anchor="ctr">
@@ -11056,14 +10391,14 @@
                         <a:buNone/>
                       </a:pPr>
                       <a:r>
-                        <a:rPr lang="en-US" sz="1080" b="1" dirty="0">
+                        <a:rPr lang="en-US" sz="2400" b="1" dirty="0">
                           <a:solidFill>
                             <a:srgbClr val="24343F"/>
                           </a:solidFill>
                         </a:rPr>
-                        <a:t>A working application you can use</a:t>
+                        <a:t>An application you can use</a:t>
                       </a:r>
-                      <a:endParaRPr lang="en-US" sz="1080" dirty="0"/>
+                      <a:endParaRPr lang="en-US" sz="2400" dirty="0"/>
                     </a:p>
                   </a:txBody>
                   <a:tcPr marL="101600" marR="101600" marT="25400" marB="25400" anchor="ctr">
@@ -11109,7 +10444,7 @@
                   </a:tcPr>
                 </a:tc>
               </a:tr>
-              <a:tr h="457200">
+              <a:tr h="566928">
                 <a:tc>
                   <a:txBody>
                     <a:bodyPr/>
@@ -11119,14 +10454,14 @@
                         <a:buNone/>
                       </a:pPr>
                       <a:r>
-                        <a:rPr lang="en-US" sz="1080" dirty="0">
+                        <a:rPr lang="en-US" sz="2400" dirty="0">
                           <a:solidFill>
                             <a:srgbClr val="1B2730"/>
                           </a:solidFill>
                         </a:rPr>
-                        <a:t>Cost estimate</a:t>
+                        <a:t>AI Act work deferred</a:t>
                       </a:r>
-                      <a:endParaRPr lang="en-US" sz="1080" dirty="0"/>
+                      <a:endParaRPr lang="en-US" sz="2400" dirty="0"/>
                     </a:p>
                   </a:txBody>
                   <a:tcPr marL="101600" marR="101600" marT="25400" marB="25400" anchor="ctr">
@@ -11180,14 +10515,14 @@
                         <a:buNone/>
                       </a:pPr>
                       <a:r>
-                        <a:rPr lang="en-US" sz="1400" b="1" dirty="0">
+                        <a:rPr lang="en-US" sz="2400" b="1" dirty="0">
                           <a:solidFill>
                             <a:srgbClr val="2A78D6"/>
                           </a:solidFill>
                         </a:rPr>
                         <a:t>→</a:t>
                       </a:r>
-                      <a:endParaRPr lang="en-US" sz="1400" dirty="0"/>
+                      <a:endParaRPr lang="en-US" sz="2400" dirty="0"/>
                     </a:p>
                   </a:txBody>
                   <a:tcPr marL="101600" marR="101600" marT="25400" marB="25400" anchor="ctr">
@@ -11241,199 +10576,14 @@
                         <a:buNone/>
                       </a:pPr>
                       <a:r>
-                        <a:rPr lang="en-US" sz="1080" b="1" dirty="0">
+                        <a:rPr lang="en-US" sz="2400" b="1" dirty="0">
                           <a:solidFill>
                             <a:srgbClr val="24343F"/>
                           </a:solidFill>
                         </a:rPr>
-                        <a:t>ROI, break-even and a commercial model</a:t>
+                        <a:t>Classified, with reasoning</a:t>
                       </a:r>
-                      <a:endParaRPr lang="en-US" sz="1080" dirty="0"/>
-                    </a:p>
-                  </a:txBody>
-                  <a:tcPr marL="101600" marR="101600" marT="25400" marB="25400" anchor="ctr">
-                    <a:lnL w="12700" cap="flat" cmpd="sng" algn="ctr">
-                      <a:solidFill>
-                        <a:srgbClr val="D9E3EA"/>
-                      </a:solidFill>
-                      <a:prstDash val="solid"/>
-                      <a:round/>
-                      <a:headEnd type="none" w="med" len="med"/>
-                      <a:tailEnd type="none" w="med" len="med"/>
-                    </a:lnL>
-                    <a:lnR w="12700" cap="flat" cmpd="sng" algn="ctr">
-                      <a:solidFill>
-                        <a:srgbClr val="D9E3EA"/>
-                      </a:solidFill>
-                      <a:prstDash val="solid"/>
-                      <a:round/>
-                      <a:headEnd type="none" w="med" len="med"/>
-                      <a:tailEnd type="none" w="med" len="med"/>
-                    </a:lnR>
-                    <a:lnT w="12700" cap="flat" cmpd="sng" algn="ctr">
-                      <a:solidFill>
-                        <a:srgbClr val="D9E3EA"/>
-                      </a:solidFill>
-                      <a:prstDash val="solid"/>
-                      <a:round/>
-                      <a:headEnd type="none" w="med" len="med"/>
-                      <a:tailEnd type="none" w="med" len="med"/>
-                    </a:lnT>
-                    <a:lnB w="12700" cap="flat" cmpd="sng" algn="ctr">
-                      <a:solidFill>
-                        <a:srgbClr val="D9E3EA"/>
-                      </a:solidFill>
-                      <a:prstDash val="solid"/>
-                      <a:round/>
-                      <a:headEnd type="none" w="med" len="med"/>
-                      <a:tailEnd type="none" w="med" len="med"/>
-                    </a:lnB>
-                    <a:solidFill>
-                      <a:srgbClr val="EFF5F9"/>
-                    </a:solidFill>
-                  </a:tcPr>
-                </a:tc>
-              </a:tr>
-              <a:tr h="457200">
-                <a:tc>
-                  <a:txBody>
-                    <a:bodyPr/>
-                    <a:lstStyle/>
-                    <a:p>
-                      <a:pPr indent="0" marL="0">
-                        <a:buNone/>
-                      </a:pPr>
-                      <a:r>
-                        <a:rPr lang="en-US" sz="1080" dirty="0">
-                          <a:solidFill>
-                            <a:srgbClr val="1B2730"/>
-                          </a:solidFill>
-                        </a:rPr>
-                        <a:t>"AI Act work deferred to Round 2"</a:t>
-                      </a:r>
-                      <a:endParaRPr lang="en-US" sz="1080" dirty="0"/>
-                    </a:p>
-                  </a:txBody>
-                  <a:tcPr marL="101600" marR="101600" marT="25400" marB="25400" anchor="ctr">
-                    <a:lnL w="12700" cap="flat" cmpd="sng" algn="ctr">
-                      <a:solidFill>
-                        <a:srgbClr val="D9E3EA"/>
-                      </a:solidFill>
-                      <a:prstDash val="solid"/>
-                      <a:round/>
-                      <a:headEnd type="none" w="med" len="med"/>
-                      <a:tailEnd type="none" w="med" len="med"/>
-                    </a:lnL>
-                    <a:lnR w="12700" cap="flat" cmpd="sng" algn="ctr">
-                      <a:solidFill>
-                        <a:srgbClr val="D9E3EA"/>
-                      </a:solidFill>
-                      <a:prstDash val="solid"/>
-                      <a:round/>
-                      <a:headEnd type="none" w="med" len="med"/>
-                      <a:tailEnd type="none" w="med" len="med"/>
-                    </a:lnR>
-                    <a:lnT w="12700" cap="flat" cmpd="sng" algn="ctr">
-                      <a:solidFill>
-                        <a:srgbClr val="D9E3EA"/>
-                      </a:solidFill>
-                      <a:prstDash val="solid"/>
-                      <a:round/>
-                      <a:headEnd type="none" w="med" len="med"/>
-                      <a:tailEnd type="none" w="med" len="med"/>
-                    </a:lnT>
-                    <a:lnB w="12700" cap="flat" cmpd="sng" algn="ctr">
-                      <a:solidFill>
-                        <a:srgbClr val="D9E3EA"/>
-                      </a:solidFill>
-                      <a:prstDash val="solid"/>
-                      <a:round/>
-                      <a:headEnd type="none" w="med" len="med"/>
-                      <a:tailEnd type="none" w="med" len="med"/>
-                    </a:lnB>
-                    <a:solidFill>
-                      <a:srgbClr val="FFFFFF"/>
-                    </a:solidFill>
-                  </a:tcPr>
-                </a:tc>
-                <a:tc>
-                  <a:txBody>
-                    <a:bodyPr/>
-                    <a:lstStyle/>
-                    <a:p>
-                      <a:pPr algn="ctr" indent="0" marL="0">
-                        <a:buNone/>
-                      </a:pPr>
-                      <a:r>
-                        <a:rPr lang="en-US" sz="1400" b="1" dirty="0">
-                          <a:solidFill>
-                            <a:srgbClr val="2A78D6"/>
-                          </a:solidFill>
-                        </a:rPr>
-                        <a:t>→</a:t>
-                      </a:r>
-                      <a:endParaRPr lang="en-US" sz="1400" dirty="0"/>
-                    </a:p>
-                  </a:txBody>
-                  <a:tcPr marL="101600" marR="101600" marT="25400" marB="25400" anchor="ctr">
-                    <a:lnL w="12700" cap="flat" cmpd="sng" algn="ctr">
-                      <a:solidFill>
-                        <a:srgbClr val="D9E3EA"/>
-                      </a:solidFill>
-                      <a:prstDash val="solid"/>
-                      <a:round/>
-                      <a:headEnd type="none" w="med" len="med"/>
-                      <a:tailEnd type="none" w="med" len="med"/>
-                    </a:lnL>
-                    <a:lnR w="12700" cap="flat" cmpd="sng" algn="ctr">
-                      <a:solidFill>
-                        <a:srgbClr val="D9E3EA"/>
-                      </a:solidFill>
-                      <a:prstDash val="solid"/>
-                      <a:round/>
-                      <a:headEnd type="none" w="med" len="med"/>
-                      <a:tailEnd type="none" w="med" len="med"/>
-                    </a:lnR>
-                    <a:lnT w="12700" cap="flat" cmpd="sng" algn="ctr">
-                      <a:solidFill>
-                        <a:srgbClr val="D9E3EA"/>
-                      </a:solidFill>
-                      <a:prstDash val="solid"/>
-                      <a:round/>
-                      <a:headEnd type="none" w="med" len="med"/>
-                      <a:tailEnd type="none" w="med" len="med"/>
-                    </a:lnT>
-                    <a:lnB w="12700" cap="flat" cmpd="sng" algn="ctr">
-                      <a:solidFill>
-                        <a:srgbClr val="D9E3EA"/>
-                      </a:solidFill>
-                      <a:prstDash val="solid"/>
-                      <a:round/>
-                      <a:headEnd type="none" w="med" len="med"/>
-                      <a:tailEnd type="none" w="med" len="med"/>
-                    </a:lnB>
-                    <a:solidFill>
-                      <a:srgbClr val="FFFFFF"/>
-                    </a:solidFill>
-                  </a:tcPr>
-                </a:tc>
-                <a:tc>
-                  <a:txBody>
-                    <a:bodyPr/>
-                    <a:lstStyle/>
-                    <a:p>
-                      <a:pPr indent="0" marL="0">
-                        <a:buNone/>
-                      </a:pPr>
-                      <a:r>
-                        <a:rPr lang="en-US" sz="1080" b="1" dirty="0">
-                          <a:solidFill>
-                            <a:srgbClr val="24343F"/>
-                          </a:solidFill>
-                        </a:rPr>
-                        <a:t>Classification, reasoning, conformity summary</a:t>
-                      </a:r>
-                      <a:endParaRPr lang="en-US" sz="1080" dirty="0"/>
+                      <a:endParaRPr lang="en-US" sz="2400" dirty="0"/>
                     </a:p>
                   </a:txBody>
                   <a:tcPr marL="101600" marR="101600" marT="25400" marB="25400" anchor="ctr">
@@ -11491,8 +10641,8 @@
         </p:nvSpPr>
         <p:spPr>
           <a:xfrm>
-            <a:off x="566928" y="4864608"/>
-            <a:ext cx="11055096" cy="640080"/>
+            <a:off x="566928" y="5212080"/>
+            <a:ext cx="11055096" cy="914400"/>
           </a:xfrm>
           <a:prstGeom prst="rect">
             <a:avLst/>
@@ -11511,8 +10661,8 @@
         </p:nvSpPr>
         <p:spPr>
           <a:xfrm>
-            <a:off x="566928" y="4864608"/>
-            <a:ext cx="82296" cy="640080"/>
+            <a:off x="566928" y="5212080"/>
+            <a:ext cx="82296" cy="914400"/>
           </a:xfrm>
           <a:prstGeom prst="rect">
             <a:avLst/>
@@ -11531,8 +10681,8 @@
         </p:nvSpPr>
         <p:spPr>
           <a:xfrm>
-            <a:off x="822960" y="4864608"/>
-            <a:ext cx="10597896" cy="640080"/>
+            <a:off x="822960" y="5212080"/>
+            <a:ext cx="10597896" cy="914400"/>
           </a:xfrm>
           <a:prstGeom prst="rect">
             <a:avLst/>
@@ -11548,21 +10698,7 @@
               <a:buNone/>
             </a:pPr>
             <a:r>
-              <a:rPr lang="en-US" sz="1700" b="1" dirty="0">
-                <a:solidFill>
-                  <a:srgbClr val="24343F"/>
-                </a:solidFill>
-                <a:latin typeface="Calibri" pitchFamily="34" charset="0"/>
-                <a:ea typeface="Calibri" pitchFamily="34" charset="-122"/>
-                <a:cs typeface="Calibri" pitchFamily="34" charset="-120"/>
-              </a:rPr>
-              <a:t>Decision: KEEP. </a:t>
-            </a:r>
-            <a:pPr indent="0" marL="0">
-              <a:buNone/>
-            </a:pPr>
-            <a:r>
-              <a:rPr lang="en-US" sz="1700" dirty="0">
+              <a:rPr lang="en-US" sz="2400" b="1" dirty="0">
                 <a:solidFill>
                   <a:srgbClr val="000000"/>
                 </a:solidFill>
@@ -11570,9 +10706,9 @@
                 <a:ea typeface="Calibri" pitchFamily="34" charset="-122"/>
                 <a:cs typeface="Calibri" pitchFamily="34" charset="-120"/>
               </a:rPr>
-              <a:t>The two refusals stand: no customer-facing chatbot, no credit scoring.</a:t>
-            </a:r>
-            <a:endParaRPr lang="en-US" sz="1700" dirty="0"/>
+              <a:t>Decision: KEEP. No customer-facing chatbot. No credit scoring.</a:t>
+            </a:r>
+            <a:endParaRPr lang="en-US" sz="2400" dirty="0"/>
           </a:p>
         </p:txBody>
       </p:sp>
@@ -11739,7 +10875,7 @@
         <p:spPr>
           <a:xfrm>
             <a:off x="566928" y="1481328"/>
-            <a:ext cx="11055096" cy="676656"/>
+            <a:ext cx="11055096" cy="1078992"/>
           </a:xfrm>
           <a:prstGeom prst="rect">
             <a:avLst/>
@@ -11759,7 +10895,7 @@
         <p:spPr>
           <a:xfrm>
             <a:off x="566928" y="1481328"/>
-            <a:ext cx="82296" cy="676656"/>
+            <a:ext cx="82296" cy="1078992"/>
           </a:xfrm>
           <a:prstGeom prst="rect">
             <a:avLst/>
@@ -11779,7 +10915,7 @@
         <p:spPr>
           <a:xfrm>
             <a:off x="822960" y="1481328"/>
-            <a:ext cx="10597896" cy="676656"/>
+            <a:ext cx="10597896" cy="1078992"/>
           </a:xfrm>
           <a:prstGeom prst="rect">
             <a:avLst/>
@@ -11795,7 +10931,7 @@
               <a:buNone/>
             </a:pPr>
             <a:r>
-              <a:rPr lang="en-US" sz="1050" b="1" spc="100" kern="0" dirty="0">
+              <a:rPr lang="en-US" sz="2400" b="1" spc="100" kern="0" dirty="0">
                 <a:solidFill>
                   <a:srgbClr val="2A78D6"/>
                 </a:solidFill>
@@ -11809,7 +10945,7 @@
               <a:buNone/>
             </a:pPr>
             <a:r>
-              <a:rPr lang="en-US" sz="1300" dirty="0">
+              <a:rPr lang="en-US" sz="2400" dirty="0">
                 <a:solidFill>
                   <a:srgbClr val="1B2730"/>
                 </a:solidFill>
@@ -11817,9 +10953,9 @@
                 <a:ea typeface="Calibri" pitchFamily="34" charset="-122"/>
                 <a:cs typeface="Calibri" pitchFamily="34" charset="-120"/>
               </a:rPr>
-              <a:t>High volume, low complexity, unstructured text — the work a mid-size firm can neither automate with rules nor afford to staff.</a:t>
-            </a:r>
-            <a:endParaRPr lang="en-US" sz="1050" dirty="0"/>
+              <a:t>High volume, low complexity, unstructured text.</a:t>
+            </a:r>
+            <a:endParaRPr lang="en-US" sz="2400" dirty="0"/>
           </a:p>
         </p:txBody>
       </p:sp>
@@ -11921,8 +11057,8 @@
         </p:nvSpPr>
         <p:spPr>
           <a:xfrm>
-            <a:off x="566928" y="2395728"/>
-            <a:ext cx="3502152" cy="2651760"/>
+            <a:off x="566928" y="2798064"/>
+            <a:ext cx="3502152" cy="2286000"/>
           </a:xfrm>
           <a:prstGeom prst="rect">
             <a:avLst/>
@@ -11953,8 +11089,8 @@
         </p:nvSpPr>
         <p:spPr>
           <a:xfrm>
-            <a:off x="768096" y="2578608"/>
-            <a:ext cx="3099816" cy="274320"/>
+            <a:off x="768096" y="2980944"/>
+            <a:ext cx="3099816" cy="841248"/>
           </a:xfrm>
           <a:prstGeom prst="rect">
             <a:avLst/>
@@ -11963,53 +11099,14 @@
           <a:ln/>
         </p:spPr>
         <p:txBody>
-          <a:bodyPr wrap="square" lIns="0" tIns="0" rIns="0" bIns="0" rtlCol="0" anchor="ctr"/>
+          <a:bodyPr wrap="square" lIns="0" tIns="0" rIns="0" bIns="0" rtlCol="0" anchor="t"/>
           <a:lstStyle/>
           <a:p>
             <a:pPr indent="0" marL="0">
               <a:buNone/>
             </a:pPr>
             <a:r>
-              <a:rPr lang="en-US" sz="1300" b="1" spc="150" kern="0" dirty="0">
-                <a:solidFill>
-                  <a:srgbClr val="445A69"/>
-                </a:solidFill>
-                <a:latin typeface="Calibri" pitchFamily="34" charset="0"/>
-                <a:ea typeface="Calibri" pitchFamily="34" charset="-122"/>
-                <a:cs typeface="Calibri" pitchFamily="34" charset="-120"/>
-              </a:rPr>
-              <a:t>EVERY DAY</a:t>
-            </a:r>
-            <a:endParaRPr lang="en-US" sz="1300" dirty="0"/>
-          </a:p>
-        </p:txBody>
-      </p:sp>
-      <p:sp>
-        <p:nvSpPr>
-          <p:cNvPr id="14" name="Text 11"/>
-          <p:cNvSpPr/>
-          <p:nvPr/>
-        </p:nvSpPr>
-        <p:spPr>
-          <a:xfrm>
-            <a:off x="768096" y="2852928"/>
-            <a:ext cx="3099816" cy="640080"/>
-          </a:xfrm>
-          <a:prstGeom prst="rect">
-            <a:avLst/>
-          </a:prstGeom>
-          <a:noFill/>
-          <a:ln/>
-        </p:spPr>
-        <p:txBody>
-          <a:bodyPr wrap="square" lIns="0" tIns="0" rIns="0" bIns="0" rtlCol="0" anchor="t"/>
-          <a:lstStyle/>
-          <a:p>
-            <a:pPr indent="0" marL="0">
-              <a:buNone/>
-            </a:pPr>
-            <a:r>
-              <a:rPr lang="en-US" sz="2100" b="1" dirty="0">
+              <a:rPr lang="en-US" sz="2400" b="1" dirty="0">
                 <a:solidFill>
                   <a:srgbClr val="24343F"/>
                 </a:solidFill>
@@ -12019,20 +11116,20 @@
               </a:rPr>
               <a:t>Routing</a:t>
             </a:r>
-            <a:endParaRPr lang="en-US" sz="2100" dirty="0"/>
-          </a:p>
-        </p:txBody>
-      </p:sp>
-      <p:sp>
-        <p:nvSpPr>
-          <p:cNvPr id="15" name="Text 12"/>
-          <p:cNvSpPr/>
-          <p:nvPr/>
-        </p:nvSpPr>
-        <p:spPr>
-          <a:xfrm>
-            <a:off x="768096" y="3474720"/>
-            <a:ext cx="3099816" cy="1463040"/>
+            <a:endParaRPr lang="en-US" sz="2400" dirty="0"/>
+          </a:p>
+        </p:txBody>
+      </p:sp>
+      <p:sp>
+        <p:nvSpPr>
+          <p:cNvPr id="14" name="Text 11"/>
+          <p:cNvSpPr/>
+          <p:nvPr/>
+        </p:nvSpPr>
+        <p:spPr>
+          <a:xfrm>
+            <a:off x="768096" y="3602736"/>
+            <a:ext cx="3099816" cy="1371600"/>
           </a:xfrm>
           <a:prstGeom prst="rect">
             <a:avLst/>
@@ -12048,7 +11145,7 @@
               <a:buNone/>
             </a:pPr>
             <a:r>
-              <a:rPr lang="en-US" sz="1600" dirty="0">
+              <a:rPr lang="en-US" sz="2400" dirty="0">
                 <a:solidFill>
                   <a:srgbClr val="1B2730"/>
                 </a:solidFill>
@@ -12056,166 +11153,22 @@
                 <a:ea typeface="Calibri" pitchFamily="34" charset="-122"/>
                 <a:cs typeface="Calibri" pitchFamily="34" charset="-120"/>
               </a:rPr>
-              <a:t>2,426 complaints a year. 64 categories. Two handlers reading the same complaint pick different ones.</a:t>
-            </a:r>
-            <a:endParaRPr lang="en-US" sz="1600" dirty="0"/>
-          </a:p>
-        </p:txBody>
-      </p:sp>
-      <p:sp>
-        <p:nvSpPr>
-          <p:cNvPr id="16" name="Shape 13"/>
-          <p:cNvSpPr/>
-          <p:nvPr/>
-        </p:nvSpPr>
-        <p:spPr>
-          <a:xfrm>
-            <a:off x="4343400" y="2395728"/>
-            <a:ext cx="3502152" cy="2651760"/>
-          </a:xfrm>
-          <a:prstGeom prst="rect">
-            <a:avLst/>
-          </a:prstGeom>
-          <a:solidFill>
-            <a:srgbClr val="24343F"/>
-          </a:solidFill>
-          <a:ln/>
-          <a:effectLst>
-            <a:outerShdw sx="100000" sy="100000" kx="0" ky="0" algn="bl" rotWithShape="0" blurRad="88900" dist="38100" dir="8100000">
-              <a:srgbClr val="1C2440">
-                <a:alpha val="13000"/>
-              </a:srgbClr>
-            </a:outerShdw>
-          </a:effectLst>
-        </p:spPr>
-      </p:sp>
-      <p:sp>
-        <p:nvSpPr>
-          <p:cNvPr id="17" name="Text 14"/>
-          <p:cNvSpPr/>
-          <p:nvPr/>
-        </p:nvSpPr>
-        <p:spPr>
-          <a:xfrm>
-            <a:off x="4544568" y="2578608"/>
-            <a:ext cx="3099816" cy="274320"/>
-          </a:xfrm>
-          <a:prstGeom prst="rect">
-            <a:avLst/>
-          </a:prstGeom>
-          <a:noFill/>
-          <a:ln/>
-        </p:spPr>
-        <p:txBody>
-          <a:bodyPr wrap="square" lIns="0" tIns="0" rIns="0" bIns="0" rtlCol="0" anchor="ctr"/>
-          <a:lstStyle/>
-          <a:p>
-            <a:pPr indent="0" marL="0">
-              <a:buNone/>
-            </a:pPr>
-            <a:r>
-              <a:rPr lang="en-US" sz="1300" b="1" spc="150" kern="0" dirty="0">
-                <a:solidFill>
-                  <a:srgbClr val="2A78D6"/>
-                </a:solidFill>
-                <a:latin typeface="Calibri" pitchFamily="34" charset="0"/>
-                <a:ea typeface="Calibri" pitchFamily="34" charset="-122"/>
-                <a:cs typeface="Calibri" pitchFamily="34" charset="-120"/>
-              </a:rPr>
-              <a:t>EVERY QUARTER</a:t>
-            </a:r>
-            <a:endParaRPr lang="en-US" sz="1300" dirty="0"/>
-          </a:p>
-        </p:txBody>
-      </p:sp>
-      <p:sp>
-        <p:nvSpPr>
-          <p:cNvPr id="18" name="Text 15"/>
-          <p:cNvSpPr/>
-          <p:nvPr/>
-        </p:nvSpPr>
-        <p:spPr>
-          <a:xfrm>
-            <a:off x="4544568" y="2852928"/>
-            <a:ext cx="3099816" cy="640080"/>
-          </a:xfrm>
-          <a:prstGeom prst="rect">
-            <a:avLst/>
-          </a:prstGeom>
-          <a:noFill/>
-          <a:ln/>
-        </p:spPr>
-        <p:txBody>
-          <a:bodyPr wrap="square" lIns="0" tIns="0" rIns="0" bIns="0" rtlCol="0" anchor="t"/>
-          <a:lstStyle/>
-          <a:p>
-            <a:pPr indent="0" marL="0">
-              <a:buNone/>
-            </a:pPr>
-            <a:r>
-              <a:rPr lang="en-US" sz="2100" b="1" dirty="0">
-                <a:solidFill>
-                  <a:srgbClr val="FFFFFF"/>
-                </a:solidFill>
-                <a:latin typeface="Trebuchet MS" pitchFamily="34" charset="0"/>
-                <a:ea typeface="Trebuchet MS" pitchFamily="34" charset="-122"/>
-                <a:cs typeface="Trebuchet MS" pitchFamily="34" charset="-120"/>
-              </a:rPr>
-              <a:t>Reporting</a:t>
-            </a:r>
-            <a:endParaRPr lang="en-US" sz="2100" dirty="0"/>
-          </a:p>
-        </p:txBody>
-      </p:sp>
-      <p:sp>
-        <p:nvSpPr>
-          <p:cNvPr id="19" name="Text 16"/>
-          <p:cNvSpPr/>
-          <p:nvPr/>
-        </p:nvSpPr>
-        <p:spPr>
-          <a:xfrm>
-            <a:off x="4544568" y="3474720"/>
-            <a:ext cx="3099816" cy="1463040"/>
-          </a:xfrm>
-          <a:prstGeom prst="rect">
-            <a:avLst/>
-          </a:prstGeom>
-          <a:noFill/>
-          <a:ln/>
-        </p:spPr>
-        <p:txBody>
-          <a:bodyPr wrap="square" lIns="0" tIns="0" rIns="0" bIns="0" rtlCol="0" anchor="t"/>
-          <a:lstStyle/>
-          <a:p>
-            <a:pPr indent="0" marL="0">
-              <a:buNone/>
-            </a:pPr>
-            <a:r>
-              <a:rPr lang="en-US" sz="1600" dirty="0">
-                <a:solidFill>
-                  <a:srgbClr val="FFFFFF"/>
-                </a:solidFill>
-                <a:latin typeface="Calibri" pitchFamily="34" charset="0"/>
-                <a:ea typeface="Calibri" pitchFamily="34" charset="-122"/>
-                <a:cs typeface="Calibri" pitchFamily="34" charset="-120"/>
-              </a:rPr>
-              <a:t>The regulatory return is assembled by hand, under time pressure, by the people least able to spare it.</a:t>
-            </a:r>
-            <a:endParaRPr lang="en-US" sz="1600" dirty="0"/>
-          </a:p>
-        </p:txBody>
-      </p:sp>
-      <p:sp>
-        <p:nvSpPr>
-          <p:cNvPr id="20" name="Shape 17"/>
-          <p:cNvSpPr/>
-          <p:nvPr/>
-        </p:nvSpPr>
-        <p:spPr>
-          <a:xfrm>
-            <a:off x="8119872" y="2395728"/>
-            <a:ext cx="3502152" cy="2651760"/>
+              <a:t>2,426 a year, 64 categories. Two handlers disagree.</a:t>
+            </a:r>
+            <a:endParaRPr lang="en-US" sz="2400" dirty="0"/>
+          </a:p>
+        </p:txBody>
+      </p:sp>
+      <p:sp>
+        <p:nvSpPr>
+          <p:cNvPr id="15" name="Shape 12"/>
+          <p:cNvSpPr/>
+          <p:nvPr/>
+        </p:nvSpPr>
+        <p:spPr>
+          <a:xfrm>
+            <a:off x="4343400" y="2798064"/>
+            <a:ext cx="3502152" cy="2286000"/>
           </a:xfrm>
           <a:prstGeom prst="rect">
             <a:avLst/>
@@ -12240,14 +11193,14 @@
       </p:sp>
       <p:sp>
         <p:nvSpPr>
-          <p:cNvPr id="21" name="Text 18"/>
-          <p:cNvSpPr/>
-          <p:nvPr/>
-        </p:nvSpPr>
-        <p:spPr>
-          <a:xfrm>
-            <a:off x="8321040" y="2578608"/>
-            <a:ext cx="3099816" cy="274320"/>
+          <p:cNvPr id="16" name="Text 13"/>
+          <p:cNvSpPr/>
+          <p:nvPr/>
+        </p:nvSpPr>
+        <p:spPr>
+          <a:xfrm>
+            <a:off x="4544568" y="2980944"/>
+            <a:ext cx="3099816" cy="841248"/>
           </a:xfrm>
           <a:prstGeom prst="rect">
             <a:avLst/>
@@ -12256,53 +11209,14 @@
           <a:ln/>
         </p:spPr>
         <p:txBody>
-          <a:bodyPr wrap="square" lIns="0" tIns="0" rIns="0" bIns="0" rtlCol="0" anchor="ctr"/>
+          <a:bodyPr wrap="square" lIns="0" tIns="0" rIns="0" bIns="0" rtlCol="0" anchor="t"/>
           <a:lstStyle/>
           <a:p>
             <a:pPr indent="0" marL="0">
               <a:buNone/>
             </a:pPr>
             <a:r>
-              <a:rPr lang="en-US" sz="1300" b="1" spc="150" kern="0" dirty="0">
-                <a:solidFill>
-                  <a:srgbClr val="445A69"/>
-                </a:solidFill>
-                <a:latin typeface="Calibri" pitchFamily="34" charset="0"/>
-                <a:ea typeface="Calibri" pitchFamily="34" charset="-122"/>
-                <a:cs typeface="Calibri" pitchFamily="34" charset="-120"/>
-              </a:rPr>
-              <a:t>TOO LATE</a:t>
-            </a:r>
-            <a:endParaRPr lang="en-US" sz="1300" dirty="0"/>
-          </a:p>
-        </p:txBody>
-      </p:sp>
-      <p:sp>
-        <p:nvSpPr>
-          <p:cNvPr id="22" name="Text 19"/>
-          <p:cNvSpPr/>
-          <p:nvPr/>
-        </p:nvSpPr>
-        <p:spPr>
-          <a:xfrm>
-            <a:off x="8321040" y="2852928"/>
-            <a:ext cx="3099816" cy="640080"/>
-          </a:xfrm>
-          <a:prstGeom prst="rect">
-            <a:avLst/>
-          </a:prstGeom>
-          <a:noFill/>
-          <a:ln/>
-        </p:spPr>
-        <p:txBody>
-          <a:bodyPr wrap="square" lIns="0" tIns="0" rIns="0" bIns="0" rtlCol="0" anchor="t"/>
-          <a:lstStyle/>
-          <a:p>
-            <a:pPr indent="0" marL="0">
-              <a:buNone/>
-            </a:pPr>
-            <a:r>
-              <a:rPr lang="en-US" sz="2100" b="1" dirty="0">
+              <a:rPr lang="en-US" sz="2400" b="1" dirty="0">
                 <a:solidFill>
                   <a:srgbClr val="24343F"/>
                 </a:solidFill>
@@ -12310,22 +11224,22 @@
                 <a:ea typeface="Trebuchet MS" pitchFamily="34" charset="-122"/>
                 <a:cs typeface="Trebuchet MS" pitchFamily="34" charset="-120"/>
               </a:rPr>
-              <a:t>Fraud</a:t>
-            </a:r>
-            <a:endParaRPr lang="en-US" sz="2100" dirty="0"/>
-          </a:p>
-        </p:txBody>
-      </p:sp>
-      <p:sp>
-        <p:nvSpPr>
-          <p:cNvPr id="23" name="Text 20"/>
-          <p:cNvSpPr/>
-          <p:nvPr/>
-        </p:nvSpPr>
-        <p:spPr>
-          <a:xfrm>
-            <a:off x="8321040" y="3474720"/>
-            <a:ext cx="3099816" cy="1463040"/>
+              <a:t>Reporting</a:t>
+            </a:r>
+            <a:endParaRPr lang="en-US" sz="2400" dirty="0"/>
+          </a:p>
+        </p:txBody>
+      </p:sp>
+      <p:sp>
+        <p:nvSpPr>
+          <p:cNvPr id="17" name="Text 14"/>
+          <p:cNvSpPr/>
+          <p:nvPr/>
+        </p:nvSpPr>
+        <p:spPr>
+          <a:xfrm>
+            <a:off x="4544568" y="3602736"/>
+            <a:ext cx="3099816" cy="1371600"/>
           </a:xfrm>
           <a:prstGeom prst="rect">
             <a:avLst/>
@@ -12341,7 +11255,7 @@
               <a:buNone/>
             </a:pPr>
             <a:r>
-              <a:rPr lang="en-US" sz="1600" dirty="0">
+              <a:rPr lang="en-US" sz="2400" dirty="0">
                 <a:solidFill>
                   <a:srgbClr val="1B2730"/>
                 </a:solidFill>
@@ -12349,62 +11263,49 @@
                 <a:ea typeface="Calibri" pitchFamily="34" charset="-122"/>
                 <a:cs typeface="Calibri" pitchFamily="34" charset="-120"/>
               </a:rPr>
-              <a:t>7.4% of complaints are unauthorised transactions. By the time one arrives, the money has gone.</a:t>
-            </a:r>
-            <a:endParaRPr lang="en-US" sz="1600" dirty="0"/>
-          </a:p>
-        </p:txBody>
-      </p:sp>
-      <p:sp>
-        <p:nvSpPr>
-          <p:cNvPr id="24" name="Shape 21"/>
-          <p:cNvSpPr/>
-          <p:nvPr/>
-        </p:nvSpPr>
-        <p:spPr>
-          <a:xfrm>
-            <a:off x="566928" y="5303520"/>
-            <a:ext cx="11055096" cy="640080"/>
+              <a:t>The regulatory return, built by hand under deadline.</a:t>
+            </a:r>
+            <a:endParaRPr lang="en-US" sz="2400" dirty="0"/>
+          </a:p>
+        </p:txBody>
+      </p:sp>
+      <p:sp>
+        <p:nvSpPr>
+          <p:cNvPr id="18" name="Shape 15"/>
+          <p:cNvSpPr/>
+          <p:nvPr/>
+        </p:nvSpPr>
+        <p:spPr>
+          <a:xfrm>
+            <a:off x="8119872" y="2798064"/>
+            <a:ext cx="3502152" cy="2286000"/>
           </a:xfrm>
           <a:prstGeom prst="rect">
             <a:avLst/>
           </a:prstGeom>
           <a:solidFill>
-            <a:srgbClr val="EFF5F9"/>
+            <a:srgbClr val="24343F"/>
           </a:solidFill>
           <a:ln/>
-        </p:spPr>
-      </p:sp>
-      <p:sp>
-        <p:nvSpPr>
-          <p:cNvPr id="25" name="Shape 22"/>
-          <p:cNvSpPr/>
-          <p:nvPr/>
-        </p:nvSpPr>
-        <p:spPr>
-          <a:xfrm>
-            <a:off x="566928" y="5303520"/>
-            <a:ext cx="82296" cy="640080"/>
-          </a:xfrm>
-          <a:prstGeom prst="rect">
-            <a:avLst/>
-          </a:prstGeom>
-          <a:solidFill>
-            <a:srgbClr val="2A78D6"/>
-          </a:solidFill>
-          <a:ln/>
-        </p:spPr>
-      </p:sp>
-      <p:sp>
-        <p:nvSpPr>
-          <p:cNvPr id="26" name="Text 23"/>
-          <p:cNvSpPr/>
-          <p:nvPr/>
-        </p:nvSpPr>
-        <p:spPr>
-          <a:xfrm>
-            <a:off x="822960" y="5303520"/>
-            <a:ext cx="10597896" cy="640080"/>
+          <a:effectLst>
+            <a:outerShdw sx="100000" sy="100000" kx="0" ky="0" algn="bl" rotWithShape="0" blurRad="88900" dist="38100" dir="8100000">
+              <a:srgbClr val="1C2440">
+                <a:alpha val="13000"/>
+              </a:srgbClr>
+            </a:outerShdw>
+          </a:effectLst>
+        </p:spPr>
+      </p:sp>
+      <p:sp>
+        <p:nvSpPr>
+          <p:cNvPr id="19" name="Text 16"/>
+          <p:cNvSpPr/>
+          <p:nvPr/>
+        </p:nvSpPr>
+        <p:spPr>
+          <a:xfrm>
+            <a:off x="8321040" y="2980944"/>
+            <a:ext cx="3099816" cy="841248"/>
           </a:xfrm>
           <a:prstGeom prst="rect">
             <a:avLst/>
@@ -12413,28 +11314,132 @@
           <a:ln/>
         </p:spPr>
         <p:txBody>
-          <a:bodyPr wrap="square" lIns="0" tIns="0" rIns="0" bIns="0" rtlCol="0" anchor="ctr"/>
+          <a:bodyPr wrap="square" lIns="0" tIns="0" rIns="0" bIns="0" rtlCol="0" anchor="t"/>
           <a:lstStyle/>
           <a:p>
             <a:pPr indent="0" marL="0">
               <a:buNone/>
             </a:pPr>
             <a:r>
-              <a:rPr lang="en-US" sz="1700" b="1" dirty="0">
+              <a:rPr lang="en-US" sz="2400" b="1" dirty="0">
                 <a:solidFill>
-                  <a:srgbClr val="24343F"/>
+                  <a:srgbClr val="FFFFFF"/>
+                </a:solidFill>
+                <a:latin typeface="Trebuchet MS" pitchFamily="34" charset="0"/>
+                <a:ea typeface="Trebuchet MS" pitchFamily="34" charset="-122"/>
+                <a:cs typeface="Trebuchet MS" pitchFamily="34" charset="-120"/>
+              </a:rPr>
+              <a:t>Fraud</a:t>
+            </a:r>
+            <a:endParaRPr lang="en-US" sz="2400" dirty="0"/>
+          </a:p>
+        </p:txBody>
+      </p:sp>
+      <p:sp>
+        <p:nvSpPr>
+          <p:cNvPr id="20" name="Text 17"/>
+          <p:cNvSpPr/>
+          <p:nvPr/>
+        </p:nvSpPr>
+        <p:spPr>
+          <a:xfrm>
+            <a:off x="8321040" y="3602736"/>
+            <a:ext cx="3099816" cy="1371600"/>
+          </a:xfrm>
+          <a:prstGeom prst="rect">
+            <a:avLst/>
+          </a:prstGeom>
+          <a:noFill/>
+          <a:ln/>
+        </p:spPr>
+        <p:txBody>
+          <a:bodyPr wrap="square" lIns="0" tIns="0" rIns="0" bIns="0" rtlCol="0" anchor="t"/>
+          <a:lstStyle/>
+          <a:p>
+            <a:pPr indent="0" marL="0">
+              <a:buNone/>
+            </a:pPr>
+            <a:r>
+              <a:rPr lang="en-US" sz="2400" dirty="0">
+                <a:solidFill>
+                  <a:srgbClr val="FFFFFF"/>
                 </a:solidFill>
                 <a:latin typeface="Calibri" pitchFamily="34" charset="0"/>
                 <a:ea typeface="Calibri" pitchFamily="34" charset="-122"/>
                 <a:cs typeface="Calibri" pitchFamily="34" charset="-120"/>
               </a:rPr>
-              <a:t>The blocker isn't technical. </a:t>
-            </a:r>
+              <a:t>7.4% unauthorised. The money has already gone.</a:t>
+            </a:r>
+            <a:endParaRPr lang="en-US" sz="2400" dirty="0"/>
+          </a:p>
+        </p:txBody>
+      </p:sp>
+      <p:sp>
+        <p:nvSpPr>
+          <p:cNvPr id="21" name="Shape 18"/>
+          <p:cNvSpPr/>
+          <p:nvPr/>
+        </p:nvSpPr>
+        <p:spPr>
+          <a:xfrm>
+            <a:off x="566928" y="5321808"/>
+            <a:ext cx="11055096" cy="914400"/>
+          </a:xfrm>
+          <a:prstGeom prst="rect">
+            <a:avLst/>
+          </a:prstGeom>
+          <a:solidFill>
+            <a:srgbClr val="EFF5F9"/>
+          </a:solidFill>
+          <a:ln/>
+        </p:spPr>
+      </p:sp>
+      <p:sp>
+        <p:nvSpPr>
+          <p:cNvPr id="22" name="Shape 19"/>
+          <p:cNvSpPr/>
+          <p:nvPr/>
+        </p:nvSpPr>
+        <p:spPr>
+          <a:xfrm>
+            <a:off x="566928" y="5321808"/>
+            <a:ext cx="82296" cy="914400"/>
+          </a:xfrm>
+          <a:prstGeom prst="rect">
+            <a:avLst/>
+          </a:prstGeom>
+          <a:solidFill>
+            <a:srgbClr val="2A78D6"/>
+          </a:solidFill>
+          <a:ln/>
+        </p:spPr>
+      </p:sp>
+      <p:sp>
+        <p:nvSpPr>
+          <p:cNvPr id="23" name="Text 20"/>
+          <p:cNvSpPr/>
+          <p:nvPr/>
+        </p:nvSpPr>
+        <p:spPr>
+          <a:xfrm>
+            <a:off x="822960" y="5321808"/>
+            <a:ext cx="10597896" cy="914400"/>
+          </a:xfrm>
+          <a:prstGeom prst="rect">
+            <a:avLst/>
+          </a:prstGeom>
+          <a:noFill/>
+          <a:ln/>
+        </p:spPr>
+        <p:txBody>
+          <a:bodyPr wrap="square" lIns="0" tIns="0" rIns="0" bIns="0" rtlCol="0" anchor="ctr"/>
+          <a:lstStyle/>
+          <a:p>
             <a:pPr indent="0" marL="0">
               <a:buNone/>
             </a:pPr>
             <a:r>
-              <a:rPr lang="en-US" sz="1700" dirty="0">
+              <a:rPr lang="en-US" sz="2400" b="1" dirty="0">
                 <a:solidFill>
                   <a:srgbClr val="000000"/>
                 </a:solidFill>
@@ -12442,9 +11447,9 @@
                 <a:ea typeface="Calibri" pitchFamily="34" charset="-122"/>
                 <a:cs typeface="Calibri" pitchFamily="34" charset="-120"/>
               </a:rPr>
-              <a:t>A decision nobody can see is a decision nobody can sign off.</a:t>
-            </a:r>
-            <a:endParaRPr lang="en-US" sz="1700" dirty="0"/>
+              <a:t>A decision nobody can see is one nobody can sign off.</a:t>
+            </a:r>
+            <a:endParaRPr lang="en-US" sz="2400" dirty="0"/>
           </a:p>
         </p:txBody>
       </p:sp>
@@ -12596,7 +11601,7 @@
                 <a:ea typeface="Trebuchet MS" pitchFamily="34" charset="-122"/>
                 <a:cs typeface="Trebuchet MS" pitchFamily="34" charset="-120"/>
               </a:rPr>
-              <a:t>One decision spine, three capabilities</a:t>
+              <a:t>One decision spine</a:t>
             </a:r>
             <a:endParaRPr lang="en-US" sz="3000" dirty="0"/>
           </a:p>
@@ -12611,7 +11616,7 @@
         <p:spPr>
           <a:xfrm>
             <a:off x="566928" y="1481328"/>
-            <a:ext cx="11055096" cy="676656"/>
+            <a:ext cx="11055096" cy="1078992"/>
           </a:xfrm>
           <a:prstGeom prst="rect">
             <a:avLst/>
@@ -12631,7 +11636,7 @@
         <p:spPr>
           <a:xfrm>
             <a:off x="566928" y="1481328"/>
-            <a:ext cx="82296" cy="676656"/>
+            <a:ext cx="82296" cy="1078992"/>
           </a:xfrm>
           <a:prstGeom prst="rect">
             <a:avLst/>
@@ -12651,7 +11656,7 @@
         <p:spPr>
           <a:xfrm>
             <a:off x="822960" y="1481328"/>
-            <a:ext cx="10597896" cy="676656"/>
+            <a:ext cx="10597896" cy="1078992"/>
           </a:xfrm>
           <a:prstGeom prst="rect">
             <a:avLst/>
@@ -12667,7 +11672,7 @@
               <a:buNone/>
             </a:pPr>
             <a:r>
-              <a:rPr lang="en-US" sz="1050" b="1" spc="100" kern="0" dirty="0">
+              <a:rPr lang="en-US" sz="2400" b="1" spc="100" kern="0" dirty="0">
                 <a:solidFill>
                   <a:srgbClr val="2A78D6"/>
                 </a:solidFill>
@@ -12681,7 +11686,7 @@
               <a:buNone/>
             </a:pPr>
             <a:r>
-              <a:rPr lang="en-US" sz="1300" dirty="0">
+              <a:rPr lang="en-US" sz="2400" dirty="0">
                 <a:solidFill>
                   <a:srgbClr val="1B2730"/>
                 </a:solidFill>
@@ -12689,9 +11694,9 @@
                 <a:ea typeface="Calibri" pitchFamily="34" charset="-122"/>
                 <a:cs typeface="Calibri" pitchFamily="34" charset="-120"/>
               </a:rPr>
-              <a:t>Every capability is the same four steps. Only the evidence changes.</a:t>
-            </a:r>
-            <a:endParaRPr lang="en-US" sz="1050" dirty="0"/>
+              <a:t>Every capability is the same four steps.</a:t>
+            </a:r>
+            <a:endParaRPr lang="en-US" sz="2400" dirty="0"/>
           </a:p>
         </p:txBody>
       </p:sp>
@@ -12793,8 +11798,8 @@
         </p:nvSpPr>
         <p:spPr>
           <a:xfrm>
-            <a:off x="566928" y="2395728"/>
-            <a:ext cx="2681478" cy="868680"/>
+            <a:off x="566928" y="2798064"/>
+            <a:ext cx="2681478" cy="960120"/>
           </a:xfrm>
           <a:prstGeom prst="rightArrow">
             <a:avLst/>
@@ -12813,8 +11818,8 @@
         </p:nvSpPr>
         <p:spPr>
           <a:xfrm>
-            <a:off x="612648" y="2395728"/>
-            <a:ext cx="2571750" cy="868680"/>
+            <a:off x="612648" y="2798064"/>
+            <a:ext cx="2571750" cy="960120"/>
           </a:xfrm>
           <a:prstGeom prst="rect">
             <a:avLst/>
@@ -12830,7 +11835,7 @@
               <a:buNone/>
             </a:pPr>
             <a:r>
-              <a:rPr lang="en-US" sz="1500" b="1" dirty="0">
+              <a:rPr lang="en-US" sz="2400" b="1" dirty="0">
                 <a:solidFill>
                   <a:srgbClr val="FFFFFF"/>
                 </a:solidFill>
@@ -12838,9 +11843,9 @@
                 <a:ea typeface="Calibri" pitchFamily="34" charset="-122"/>
                 <a:cs typeface="Calibri" pitchFamily="34" charset="-120"/>
               </a:rPr>
-              <a:t>Validate the input</a:t>
-            </a:r>
-            <a:endParaRPr lang="en-US" sz="1500" dirty="0"/>
+              <a:t>Validate input</a:t>
+            </a:r>
+            <a:endParaRPr lang="en-US" sz="2400" dirty="0"/>
           </a:p>
         </p:txBody>
       </p:sp>
@@ -12852,8 +11857,8 @@
         </p:nvSpPr>
         <p:spPr>
           <a:xfrm>
-            <a:off x="3358134" y="2395728"/>
-            <a:ext cx="2681478" cy="868680"/>
+            <a:off x="3358134" y="2798064"/>
+            <a:ext cx="2681478" cy="960120"/>
           </a:xfrm>
           <a:prstGeom prst="rightArrow">
             <a:avLst/>
@@ -12872,8 +11877,8 @@
         </p:nvSpPr>
         <p:spPr>
           <a:xfrm>
-            <a:off x="3403854" y="2395728"/>
-            <a:ext cx="2571750" cy="868680"/>
+            <a:off x="3403854" y="2798064"/>
+            <a:ext cx="2571750" cy="960120"/>
           </a:xfrm>
           <a:prstGeom prst="rect">
             <a:avLst/>
@@ -12889,7 +11894,7 @@
               <a:buNone/>
             </a:pPr>
             <a:r>
-              <a:rPr lang="en-US" sz="1500" b="1" dirty="0">
+              <a:rPr lang="en-US" sz="2400" b="1" dirty="0">
                 <a:solidFill>
                   <a:srgbClr val="FFFFFF"/>
                 </a:solidFill>
@@ -12897,9 +11902,9 @@
                 <a:ea typeface="Calibri" pitchFamily="34" charset="-122"/>
                 <a:cs typeface="Calibri" pitchFamily="34" charset="-120"/>
               </a:rPr>
-              <a:t>The model proposes</a:t>
-            </a:r>
-            <a:endParaRPr lang="en-US" sz="1500" dirty="0"/>
+              <a:t>Model proposes</a:t>
+            </a:r>
+            <a:endParaRPr lang="en-US" sz="2400" dirty="0"/>
           </a:p>
         </p:txBody>
       </p:sp>
@@ -12911,8 +11916,8 @@
         </p:nvSpPr>
         <p:spPr>
           <a:xfrm>
-            <a:off x="6149340" y="2395728"/>
-            <a:ext cx="2681478" cy="868680"/>
+            <a:off x="6149340" y="2798064"/>
+            <a:ext cx="2681478" cy="960120"/>
           </a:xfrm>
           <a:prstGeom prst="rightArrow">
             <a:avLst/>
@@ -12931,8 +11936,8 @@
         </p:nvSpPr>
         <p:spPr>
           <a:xfrm>
-            <a:off x="6195060" y="2395728"/>
-            <a:ext cx="2571750" cy="868680"/>
+            <a:off x="6195060" y="2798064"/>
+            <a:ext cx="2571750" cy="960120"/>
           </a:xfrm>
           <a:prstGeom prst="rect">
             <a:avLst/>
@@ -12948,7 +11953,7 @@
               <a:buNone/>
             </a:pPr>
             <a:r>
-              <a:rPr lang="en-US" sz="1500" b="1" dirty="0">
+              <a:rPr lang="en-US" sz="2400" b="1" dirty="0">
                 <a:solidFill>
                   <a:srgbClr val="FFFFFF"/>
                 </a:solidFill>
@@ -12956,9 +11961,9 @@
                 <a:ea typeface="Calibri" pitchFamily="34" charset="-122"/>
                 <a:cs typeface="Calibri" pitchFamily="34" charset="-120"/>
               </a:rPr>
-              <a:t>Guards check the evidence</a:t>
-            </a:r>
-            <a:endParaRPr lang="en-US" sz="1500" dirty="0"/>
+              <a:t>Guards check</a:t>
+            </a:r>
+            <a:endParaRPr lang="en-US" sz="2400" dirty="0"/>
           </a:p>
         </p:txBody>
       </p:sp>
@@ -12970,8 +11975,8 @@
         </p:nvSpPr>
         <p:spPr>
           <a:xfrm>
-            <a:off x="8940546" y="2395728"/>
-            <a:ext cx="2681478" cy="868680"/>
+            <a:off x="8940546" y="2798064"/>
+            <a:ext cx="2681478" cy="960120"/>
           </a:xfrm>
           <a:prstGeom prst="rightArrow">
             <a:avLst/>
@@ -12990,8 +11995,8 @@
         </p:nvSpPr>
         <p:spPr>
           <a:xfrm>
-            <a:off x="8986266" y="2395728"/>
-            <a:ext cx="2571750" cy="868680"/>
+            <a:off x="8986266" y="2798064"/>
+            <a:ext cx="2571750" cy="960120"/>
           </a:xfrm>
           <a:prstGeom prst="rect">
             <a:avLst/>
@@ -13007,7 +12012,7 @@
               <a:buNone/>
             </a:pPr>
             <a:r>
-              <a:rPr lang="en-US" sz="1500" b="1" dirty="0">
+              <a:rPr lang="en-US" sz="2400" b="1" dirty="0">
                 <a:solidFill>
                   <a:srgbClr val="1D2A32"/>
                 </a:solidFill>
@@ -13015,793 +12020,22 @@
                 <a:ea typeface="Calibri" pitchFamily="34" charset="-122"/>
                 <a:cs typeface="Calibri" pitchFamily="34" charset="-120"/>
               </a:rPr>
-              <a:t>A PERSON DECIDES</a:t>
-            </a:r>
-            <a:endParaRPr lang="en-US" sz="1500" dirty="0"/>
-          </a:p>
-        </p:txBody>
-      </p:sp>
-      <p:graphicFrame>
-        <p:nvGraphicFramePr>
-          <p:cNvPr id="5" name="Table 0"/>
-          <p:cNvGraphicFramePr>
-            <a:graphicFrameLocks noGrp="1"/>
-          </p:cNvGraphicFramePr>
-          <p:nvPr>
-            <p:extLst>
-              <p:ext uri="{D42A27DB-BD31-4B8C-83A1-F6EECF244321}">
-                <p14:modId xmlns:p14="http://schemas.microsoft.com/office/powerpoint/2010/main" val="1579011935"/>
-              </p:ext>
-            </p:extLst>
-          </p:nvPr>
-        </p:nvGraphicFramePr>
-        <p:xfrm>
-          <a:off x="566928" y="3483864"/>
-          <a:ext cx="11055096" cy="914400"/>
-        </p:xfrm>
-        <a:graphic>
-          <a:graphicData uri="http://schemas.openxmlformats.org/drawingml/2006/table">
-            <a:tbl>
-              <a:tblPr/>
-              <a:tblGrid>
-                <a:gridCol w="3291840"/>
-                <a:gridCol w="3657600"/>
-                <a:gridCol w="4325112"/>
-              </a:tblGrid>
-              <a:tr h="384048">
-                <a:tc>
-                  <a:txBody>
-                    <a:bodyPr/>
-                    <a:lstStyle/>
-                    <a:p>
-                      <a:pPr indent="0" marL="0">
-                        <a:buNone/>
-                      </a:pPr>
-                      <a:r>
-                        <a:rPr lang="en-US" sz="1500" b="1" dirty="0">
-                          <a:solidFill>
-                            <a:srgbClr val="FFFFFF"/>
-                          </a:solidFill>
-                        </a:rPr>
-                        <a:t>Capability</a:t>
-                      </a:r>
-                      <a:endParaRPr lang="en-US" sz="1500" dirty="0"/>
-                    </a:p>
-                  </a:txBody>
-                  <a:tcPr marL="76200" marR="76200" marT="38100" marB="38100" anchor="ctr">
-                    <a:lnL w="12700" cap="flat" cmpd="sng" algn="ctr">
-                      <a:solidFill>
-                        <a:srgbClr val="D9E3EA"/>
-                      </a:solidFill>
-                      <a:prstDash val="solid"/>
-                      <a:round/>
-                      <a:headEnd type="none" w="med" len="med"/>
-                      <a:tailEnd type="none" w="med" len="med"/>
-                    </a:lnL>
-                    <a:lnR w="12700" cap="flat" cmpd="sng" algn="ctr">
-                      <a:solidFill>
-                        <a:srgbClr val="D9E3EA"/>
-                      </a:solidFill>
-                      <a:prstDash val="solid"/>
-                      <a:round/>
-                      <a:headEnd type="none" w="med" len="med"/>
-                      <a:tailEnd type="none" w="med" len="med"/>
-                    </a:lnR>
-                    <a:lnT w="12700" cap="flat" cmpd="sng" algn="ctr">
-                      <a:solidFill>
-                        <a:srgbClr val="D9E3EA"/>
-                      </a:solidFill>
-                      <a:prstDash val="solid"/>
-                      <a:round/>
-                      <a:headEnd type="none" w="med" len="med"/>
-                      <a:tailEnd type="none" w="med" len="med"/>
-                    </a:lnT>
-                    <a:lnB w="12700" cap="flat" cmpd="sng" algn="ctr">
-                      <a:solidFill>
-                        <a:srgbClr val="D9E3EA"/>
-                      </a:solidFill>
-                      <a:prstDash val="solid"/>
-                      <a:round/>
-                      <a:headEnd type="none" w="med" len="med"/>
-                      <a:tailEnd type="none" w="med" len="med"/>
-                    </a:lnB>
-                    <a:solidFill>
-                      <a:srgbClr val="445A69"/>
-                    </a:solidFill>
-                  </a:tcPr>
-                </a:tc>
-                <a:tc>
-                  <a:txBody>
-                    <a:bodyPr/>
-                    <a:lstStyle/>
-                    <a:p>
-                      <a:pPr indent="0" marL="0">
-                        <a:buNone/>
-                      </a:pPr>
-                      <a:r>
-                        <a:rPr lang="en-US" sz="1500" b="1" dirty="0">
-                          <a:solidFill>
-                            <a:srgbClr val="FFFFFF"/>
-                          </a:solidFill>
-                        </a:rPr>
-                        <a:t>It proposes</a:t>
-                      </a:r>
-                      <a:endParaRPr lang="en-US" sz="1500" dirty="0"/>
-                    </a:p>
-                  </a:txBody>
-                  <a:tcPr marL="76200" marR="76200" marT="38100" marB="38100" anchor="ctr">
-                    <a:lnL w="12700" cap="flat" cmpd="sng" algn="ctr">
-                      <a:solidFill>
-                        <a:srgbClr val="D9E3EA"/>
-                      </a:solidFill>
-                      <a:prstDash val="solid"/>
-                      <a:round/>
-                      <a:headEnd type="none" w="med" len="med"/>
-                      <a:tailEnd type="none" w="med" len="med"/>
-                    </a:lnL>
-                    <a:lnR w="12700" cap="flat" cmpd="sng" algn="ctr">
-                      <a:solidFill>
-                        <a:srgbClr val="D9E3EA"/>
-                      </a:solidFill>
-                      <a:prstDash val="solid"/>
-                      <a:round/>
-                      <a:headEnd type="none" w="med" len="med"/>
-                      <a:tailEnd type="none" w="med" len="med"/>
-                    </a:lnR>
-                    <a:lnT w="12700" cap="flat" cmpd="sng" algn="ctr">
-                      <a:solidFill>
-                        <a:srgbClr val="D9E3EA"/>
-                      </a:solidFill>
-                      <a:prstDash val="solid"/>
-                      <a:round/>
-                      <a:headEnd type="none" w="med" len="med"/>
-                      <a:tailEnd type="none" w="med" len="med"/>
-                    </a:lnT>
-                    <a:lnB w="12700" cap="flat" cmpd="sng" algn="ctr">
-                      <a:solidFill>
-                        <a:srgbClr val="D9E3EA"/>
-                      </a:solidFill>
-                      <a:prstDash val="solid"/>
-                      <a:round/>
-                      <a:headEnd type="none" w="med" len="med"/>
-                      <a:tailEnd type="none" w="med" len="med"/>
-                    </a:lnB>
-                    <a:solidFill>
-                      <a:srgbClr val="445A69"/>
-                    </a:solidFill>
-                  </a:tcPr>
-                </a:tc>
-                <a:tc>
-                  <a:txBody>
-                    <a:bodyPr/>
-                    <a:lstStyle/>
-                    <a:p>
-                      <a:pPr indent="0" marL="0">
-                        <a:buNone/>
-                      </a:pPr>
-                      <a:r>
-                        <a:rPr lang="en-US" sz="1500" b="1" dirty="0">
-                          <a:solidFill>
-                            <a:srgbClr val="FFFFFF"/>
-                          </a:solidFill>
-                        </a:rPr>
-                        <a:t>Grounded in</a:t>
-                      </a:r>
-                      <a:endParaRPr lang="en-US" sz="1500" dirty="0"/>
-                    </a:p>
-                  </a:txBody>
-                  <a:tcPr marL="76200" marR="76200" marT="38100" marB="38100" anchor="ctr">
-                    <a:lnL w="12700" cap="flat" cmpd="sng" algn="ctr">
-                      <a:solidFill>
-                        <a:srgbClr val="D9E3EA"/>
-                      </a:solidFill>
-                      <a:prstDash val="solid"/>
-                      <a:round/>
-                      <a:headEnd type="none" w="med" len="med"/>
-                      <a:tailEnd type="none" w="med" len="med"/>
-                    </a:lnL>
-                    <a:lnR w="12700" cap="flat" cmpd="sng" algn="ctr">
-                      <a:solidFill>
-                        <a:srgbClr val="D9E3EA"/>
-                      </a:solidFill>
-                      <a:prstDash val="solid"/>
-                      <a:round/>
-                      <a:headEnd type="none" w="med" len="med"/>
-                      <a:tailEnd type="none" w="med" len="med"/>
-                    </a:lnR>
-                    <a:lnT w="12700" cap="flat" cmpd="sng" algn="ctr">
-                      <a:solidFill>
-                        <a:srgbClr val="D9E3EA"/>
-                      </a:solidFill>
-                      <a:prstDash val="solid"/>
-                      <a:round/>
-                      <a:headEnd type="none" w="med" len="med"/>
-                      <a:tailEnd type="none" w="med" len="med"/>
-                    </a:lnT>
-                    <a:lnB w="12700" cap="flat" cmpd="sng" algn="ctr">
-                      <a:solidFill>
-                        <a:srgbClr val="D9E3EA"/>
-                      </a:solidFill>
-                      <a:prstDash val="solid"/>
-                      <a:round/>
-                      <a:headEnd type="none" w="med" len="med"/>
-                      <a:tailEnd type="none" w="med" len="med"/>
-                    </a:lnB>
-                    <a:solidFill>
-                      <a:srgbClr val="445A69"/>
-                    </a:solidFill>
-                  </a:tcPr>
-                </a:tc>
-              </a:tr>
-              <a:tr h="502920">
-                <a:tc>
-                  <a:txBody>
-                    <a:bodyPr/>
-                    <a:lstStyle/>
-                    <a:p>
-                      <a:pPr indent="0" marL="0">
-                        <a:buNone/>
-                      </a:pPr>
-                      <a:r>
-                        <a:rPr lang="en-US" sz="1500" b="1" dirty="0">
-                          <a:solidFill>
-                            <a:srgbClr val="24343F"/>
-                          </a:solidFill>
-                        </a:rPr>
-                        <a:t>Complaint triage</a:t>
-                      </a:r>
-                      <a:endParaRPr lang="en-US" sz="1500" dirty="0"/>
-                    </a:p>
-                  </a:txBody>
-                  <a:tcPr marL="76200" marR="76200" marT="38100" marB="38100" anchor="ctr">
-                    <a:lnL w="12700" cap="flat" cmpd="sng" algn="ctr">
-                      <a:solidFill>
-                        <a:srgbClr val="D9E3EA"/>
-                      </a:solidFill>
-                      <a:prstDash val="solid"/>
-                      <a:round/>
-                      <a:headEnd type="none" w="med" len="med"/>
-                      <a:tailEnd type="none" w="med" len="med"/>
-                    </a:lnL>
-                    <a:lnR w="12700" cap="flat" cmpd="sng" algn="ctr">
-                      <a:solidFill>
-                        <a:srgbClr val="D9E3EA"/>
-                      </a:solidFill>
-                      <a:prstDash val="solid"/>
-                      <a:round/>
-                      <a:headEnd type="none" w="med" len="med"/>
-                      <a:tailEnd type="none" w="med" len="med"/>
-                    </a:lnR>
-                    <a:lnT w="12700" cap="flat" cmpd="sng" algn="ctr">
-                      <a:solidFill>
-                        <a:srgbClr val="D9E3EA"/>
-                      </a:solidFill>
-                      <a:prstDash val="solid"/>
-                      <a:round/>
-                      <a:headEnd type="none" w="med" len="med"/>
-                      <a:tailEnd type="none" w="med" len="med"/>
-                    </a:lnT>
-                    <a:lnB w="12700" cap="flat" cmpd="sng" algn="ctr">
-                      <a:solidFill>
-                        <a:srgbClr val="D9E3EA"/>
-                      </a:solidFill>
-                      <a:prstDash val="solid"/>
-                      <a:round/>
-                      <a:headEnd type="none" w="med" len="med"/>
-                      <a:tailEnd type="none" w="med" len="med"/>
-                    </a:lnB>
-                    <a:solidFill>
-                      <a:srgbClr val="FFFFFF"/>
-                    </a:solidFill>
-                  </a:tcPr>
-                </a:tc>
-                <a:tc>
-                  <a:txBody>
-                    <a:bodyPr/>
-                    <a:lstStyle/>
-                    <a:p>
-                      <a:pPr indent="0" marL="0">
-                        <a:buNone/>
-                      </a:pPr>
-                      <a:r>
-                        <a:rPr lang="en-US" sz="1500" dirty="0">
-                          <a:solidFill>
-                            <a:srgbClr val="1B2730"/>
-                          </a:solidFill>
-                        </a:rPr>
-                        <a:t>A routing queue</a:t>
-                      </a:r>
-                      <a:endParaRPr lang="en-US" sz="1500" dirty="0"/>
-                    </a:p>
-                  </a:txBody>
-                  <a:tcPr marL="76200" marR="76200" marT="38100" marB="38100" anchor="ctr">
-                    <a:lnL w="12700" cap="flat" cmpd="sng" algn="ctr">
-                      <a:solidFill>
-                        <a:srgbClr val="D9E3EA"/>
-                      </a:solidFill>
-                      <a:prstDash val="solid"/>
-                      <a:round/>
-                      <a:headEnd type="none" w="med" len="med"/>
-                      <a:tailEnd type="none" w="med" len="med"/>
-                    </a:lnL>
-                    <a:lnR w="12700" cap="flat" cmpd="sng" algn="ctr">
-                      <a:solidFill>
-                        <a:srgbClr val="D9E3EA"/>
-                      </a:solidFill>
-                      <a:prstDash val="solid"/>
-                      <a:round/>
-                      <a:headEnd type="none" w="med" len="med"/>
-                      <a:tailEnd type="none" w="med" len="med"/>
-                    </a:lnR>
-                    <a:lnT w="12700" cap="flat" cmpd="sng" algn="ctr">
-                      <a:solidFill>
-                        <a:srgbClr val="D9E3EA"/>
-                      </a:solidFill>
-                      <a:prstDash val="solid"/>
-                      <a:round/>
-                      <a:headEnd type="none" w="med" len="med"/>
-                      <a:tailEnd type="none" w="med" len="med"/>
-                    </a:lnT>
-                    <a:lnB w="12700" cap="flat" cmpd="sng" algn="ctr">
-                      <a:solidFill>
-                        <a:srgbClr val="D9E3EA"/>
-                      </a:solidFill>
-                      <a:prstDash val="solid"/>
-                      <a:round/>
-                      <a:headEnd type="none" w="med" len="med"/>
-                      <a:tailEnd type="none" w="med" len="med"/>
-                    </a:lnB>
-                    <a:solidFill>
-                      <a:srgbClr val="FFFFFF"/>
-                    </a:solidFill>
-                  </a:tcPr>
-                </a:tc>
-                <a:tc>
-                  <a:txBody>
-                    <a:bodyPr/>
-                    <a:lstStyle/>
-                    <a:p>
-                      <a:pPr indent="0" marL="0">
-                        <a:buNone/>
-                      </a:pPr>
-                      <a:r>
-                        <a:rPr lang="en-US" sz="1500" dirty="0">
-                          <a:solidFill>
-                            <a:srgbClr val="1B2730"/>
-                          </a:solidFill>
-                        </a:rPr>
-                        <a:t>A verbatim quote from the complaint</a:t>
-                      </a:r>
-                      <a:endParaRPr lang="en-US" sz="1500" dirty="0"/>
-                    </a:p>
-                  </a:txBody>
-                  <a:tcPr marL="76200" marR="76200" marT="38100" marB="38100" anchor="ctr">
-                    <a:lnL w="12700" cap="flat" cmpd="sng" algn="ctr">
-                      <a:solidFill>
-                        <a:srgbClr val="D9E3EA"/>
-                      </a:solidFill>
-                      <a:prstDash val="solid"/>
-                      <a:round/>
-                      <a:headEnd type="none" w="med" len="med"/>
-                      <a:tailEnd type="none" w="med" len="med"/>
-                    </a:lnL>
-                    <a:lnR w="12700" cap="flat" cmpd="sng" algn="ctr">
-                      <a:solidFill>
-                        <a:srgbClr val="D9E3EA"/>
-                      </a:solidFill>
-                      <a:prstDash val="solid"/>
-                      <a:round/>
-                      <a:headEnd type="none" w="med" len="med"/>
-                      <a:tailEnd type="none" w="med" len="med"/>
-                    </a:lnR>
-                    <a:lnT w="12700" cap="flat" cmpd="sng" algn="ctr">
-                      <a:solidFill>
-                        <a:srgbClr val="D9E3EA"/>
-                      </a:solidFill>
-                      <a:prstDash val="solid"/>
-                      <a:round/>
-                      <a:headEnd type="none" w="med" len="med"/>
-                      <a:tailEnd type="none" w="med" len="med"/>
-                    </a:lnT>
-                    <a:lnB w="12700" cap="flat" cmpd="sng" algn="ctr">
-                      <a:solidFill>
-                        <a:srgbClr val="D9E3EA"/>
-                      </a:solidFill>
-                      <a:prstDash val="solid"/>
-                      <a:round/>
-                      <a:headEnd type="none" w="med" len="med"/>
-                      <a:tailEnd type="none" w="med" len="med"/>
-                    </a:lnB>
-                    <a:solidFill>
-                      <a:srgbClr val="FFFFFF"/>
-                    </a:solidFill>
-                  </a:tcPr>
-                </a:tc>
-              </a:tr>
-              <a:tr h="502920">
-                <a:tc>
-                  <a:txBody>
-                    <a:bodyPr/>
-                    <a:lstStyle/>
-                    <a:p>
-                      <a:pPr indent="0" marL="0">
-                        <a:buNone/>
-                      </a:pPr>
-                      <a:r>
-                        <a:rPr lang="en-US" sz="1500" b="1" dirty="0">
-                          <a:solidFill>
-                            <a:srgbClr val="24343F"/>
-                          </a:solidFill>
-                        </a:rPr>
-                        <a:t>Reporting assistance</a:t>
-                      </a:r>
-                      <a:endParaRPr lang="en-US" sz="1500" dirty="0"/>
-                    </a:p>
-                  </a:txBody>
-                  <a:tcPr marL="76200" marR="76200" marT="38100" marB="38100" anchor="ctr">
-                    <a:lnL w="12700" cap="flat" cmpd="sng" algn="ctr">
-                      <a:solidFill>
-                        <a:srgbClr val="D9E3EA"/>
-                      </a:solidFill>
-                      <a:prstDash val="solid"/>
-                      <a:round/>
-                      <a:headEnd type="none" w="med" len="med"/>
-                      <a:tailEnd type="none" w="med" len="med"/>
-                    </a:lnL>
-                    <a:lnR w="12700" cap="flat" cmpd="sng" algn="ctr">
-                      <a:solidFill>
-                        <a:srgbClr val="D9E3EA"/>
-                      </a:solidFill>
-                      <a:prstDash val="solid"/>
-                      <a:round/>
-                      <a:headEnd type="none" w="med" len="med"/>
-                      <a:tailEnd type="none" w="med" len="med"/>
-                    </a:lnR>
-                    <a:lnT w="12700" cap="flat" cmpd="sng" algn="ctr">
-                      <a:solidFill>
-                        <a:srgbClr val="D9E3EA"/>
-                      </a:solidFill>
-                      <a:prstDash val="solid"/>
-                      <a:round/>
-                      <a:headEnd type="none" w="med" len="med"/>
-                      <a:tailEnd type="none" w="med" len="med"/>
-                    </a:lnT>
-                    <a:lnB w="12700" cap="flat" cmpd="sng" algn="ctr">
-                      <a:solidFill>
-                        <a:srgbClr val="D9E3EA"/>
-                      </a:solidFill>
-                      <a:prstDash val="solid"/>
-                      <a:round/>
-                      <a:headEnd type="none" w="med" len="med"/>
-                      <a:tailEnd type="none" w="med" len="med"/>
-                    </a:lnB>
-                    <a:solidFill>
-                      <a:srgbClr val="FFFFFF"/>
-                    </a:solidFill>
-                  </a:tcPr>
-                </a:tc>
-                <a:tc>
-                  <a:txBody>
-                    <a:bodyPr/>
-                    <a:lstStyle/>
-                    <a:p>
-                      <a:pPr indent="0" marL="0">
-                        <a:buNone/>
-                      </a:pPr>
-                      <a:r>
-                        <a:rPr lang="en-US" sz="1500" dirty="0">
-                          <a:solidFill>
-                            <a:srgbClr val="1B2730"/>
-                          </a:solidFill>
-                        </a:rPr>
-                        <a:t>Report prose</a:t>
-                      </a:r>
-                      <a:endParaRPr lang="en-US" sz="1500" dirty="0"/>
-                    </a:p>
-                  </a:txBody>
-                  <a:tcPr marL="76200" marR="76200" marT="38100" marB="38100" anchor="ctr">
-                    <a:lnL w="12700" cap="flat" cmpd="sng" algn="ctr">
-                      <a:solidFill>
-                        <a:srgbClr val="D9E3EA"/>
-                      </a:solidFill>
-                      <a:prstDash val="solid"/>
-                      <a:round/>
-                      <a:headEnd type="none" w="med" len="med"/>
-                      <a:tailEnd type="none" w="med" len="med"/>
-                    </a:lnL>
-                    <a:lnR w="12700" cap="flat" cmpd="sng" algn="ctr">
-                      <a:solidFill>
-                        <a:srgbClr val="D9E3EA"/>
-                      </a:solidFill>
-                      <a:prstDash val="solid"/>
-                      <a:round/>
-                      <a:headEnd type="none" w="med" len="med"/>
-                      <a:tailEnd type="none" w="med" len="med"/>
-                    </a:lnR>
-                    <a:lnT w="12700" cap="flat" cmpd="sng" algn="ctr">
-                      <a:solidFill>
-                        <a:srgbClr val="D9E3EA"/>
-                      </a:solidFill>
-                      <a:prstDash val="solid"/>
-                      <a:round/>
-                      <a:headEnd type="none" w="med" len="med"/>
-                      <a:tailEnd type="none" w="med" len="med"/>
-                    </a:lnT>
-                    <a:lnB w="12700" cap="flat" cmpd="sng" algn="ctr">
-                      <a:solidFill>
-                        <a:srgbClr val="D9E3EA"/>
-                      </a:solidFill>
-                      <a:prstDash val="solid"/>
-                      <a:round/>
-                      <a:headEnd type="none" w="med" len="med"/>
-                      <a:tailEnd type="none" w="med" len="med"/>
-                    </a:lnB>
-                    <a:solidFill>
-                      <a:srgbClr val="FFFFFF"/>
-                    </a:solidFill>
-                  </a:tcPr>
-                </a:tc>
-                <a:tc>
-                  <a:txBody>
-                    <a:bodyPr/>
-                    <a:lstStyle/>
-                    <a:p>
-                      <a:pPr indent="0" marL="0">
-                        <a:buNone/>
-                      </a:pPr>
-                      <a:r>
-                        <a:rPr lang="en-US" sz="1500" dirty="0">
-                          <a:solidFill>
-                            <a:srgbClr val="1B2730"/>
-                          </a:solidFill>
-                        </a:rPr>
-                        <a:t>Figures this system computed</a:t>
-                      </a:r>
-                      <a:endParaRPr lang="en-US" sz="1500" dirty="0"/>
-                    </a:p>
-                  </a:txBody>
-                  <a:tcPr marL="76200" marR="76200" marT="38100" marB="38100" anchor="ctr">
-                    <a:lnL w="12700" cap="flat" cmpd="sng" algn="ctr">
-                      <a:solidFill>
-                        <a:srgbClr val="D9E3EA"/>
-                      </a:solidFill>
-                      <a:prstDash val="solid"/>
-                      <a:round/>
-                      <a:headEnd type="none" w="med" len="med"/>
-                      <a:tailEnd type="none" w="med" len="med"/>
-                    </a:lnL>
-                    <a:lnR w="12700" cap="flat" cmpd="sng" algn="ctr">
-                      <a:solidFill>
-                        <a:srgbClr val="D9E3EA"/>
-                      </a:solidFill>
-                      <a:prstDash val="solid"/>
-                      <a:round/>
-                      <a:headEnd type="none" w="med" len="med"/>
-                      <a:tailEnd type="none" w="med" len="med"/>
-                    </a:lnR>
-                    <a:lnT w="12700" cap="flat" cmpd="sng" algn="ctr">
-                      <a:solidFill>
-                        <a:srgbClr val="D9E3EA"/>
-                      </a:solidFill>
-                      <a:prstDash val="solid"/>
-                      <a:round/>
-                      <a:headEnd type="none" w="med" len="med"/>
-                      <a:tailEnd type="none" w="med" len="med"/>
-                    </a:lnT>
-                    <a:lnB w="12700" cap="flat" cmpd="sng" algn="ctr">
-                      <a:solidFill>
-                        <a:srgbClr val="D9E3EA"/>
-                      </a:solidFill>
-                      <a:prstDash val="solid"/>
-                      <a:round/>
-                      <a:headEnd type="none" w="med" len="med"/>
-                      <a:tailEnd type="none" w="med" len="med"/>
-                    </a:lnB>
-                    <a:solidFill>
-                      <a:srgbClr val="FFFFFF"/>
-                    </a:solidFill>
-                  </a:tcPr>
-                </a:tc>
-              </a:tr>
-              <a:tr h="502920">
-                <a:tc>
-                  <a:txBody>
-                    <a:bodyPr/>
-                    <a:lstStyle/>
-                    <a:p>
-                      <a:pPr indent="0" marL="0">
-                        <a:buNone/>
-                      </a:pPr>
-                      <a:r>
-                        <a:rPr lang="en-US" sz="1500" b="1" dirty="0">
-                          <a:solidFill>
-                            <a:srgbClr val="24343F"/>
-                          </a:solidFill>
-                        </a:rPr>
-                        <a:t>Anomaly flagging</a:t>
-                      </a:r>
-                      <a:endParaRPr lang="en-US" sz="1500" dirty="0"/>
-                    </a:p>
-                  </a:txBody>
-                  <a:tcPr marL="76200" marR="76200" marT="38100" marB="38100" anchor="ctr">
-                    <a:lnL w="12700" cap="flat" cmpd="sng" algn="ctr">
-                      <a:solidFill>
-                        <a:srgbClr val="D9E3EA"/>
-                      </a:solidFill>
-                      <a:prstDash val="solid"/>
-                      <a:round/>
-                      <a:headEnd type="none" w="med" len="med"/>
-                      <a:tailEnd type="none" w="med" len="med"/>
-                    </a:lnL>
-                    <a:lnR w="12700" cap="flat" cmpd="sng" algn="ctr">
-                      <a:solidFill>
-                        <a:srgbClr val="D9E3EA"/>
-                      </a:solidFill>
-                      <a:prstDash val="solid"/>
-                      <a:round/>
-                      <a:headEnd type="none" w="med" len="med"/>
-                      <a:tailEnd type="none" w="med" len="med"/>
-                    </a:lnR>
-                    <a:lnT w="12700" cap="flat" cmpd="sng" algn="ctr">
-                      <a:solidFill>
-                        <a:srgbClr val="D9E3EA"/>
-                      </a:solidFill>
-                      <a:prstDash val="solid"/>
-                      <a:round/>
-                      <a:headEnd type="none" w="med" len="med"/>
-                      <a:tailEnd type="none" w="med" len="med"/>
-                    </a:lnT>
-                    <a:lnB w="12700" cap="flat" cmpd="sng" algn="ctr">
-                      <a:solidFill>
-                        <a:srgbClr val="D9E3EA"/>
-                      </a:solidFill>
-                      <a:prstDash val="solid"/>
-                      <a:round/>
-                      <a:headEnd type="none" w="med" len="med"/>
-                      <a:tailEnd type="none" w="med" len="med"/>
-                    </a:lnB>
-                    <a:solidFill>
-                      <a:srgbClr val="FFFFFF"/>
-                    </a:solidFill>
-                  </a:tcPr>
-                </a:tc>
-                <a:tc>
-                  <a:txBody>
-                    <a:bodyPr/>
-                    <a:lstStyle/>
-                    <a:p>
-                      <a:pPr indent="0" marL="0">
-                        <a:buNone/>
-                      </a:pPr>
-                      <a:r>
-                        <a:rPr lang="en-US" sz="1500" dirty="0">
-                          <a:solidFill>
-                            <a:srgbClr val="1B2730"/>
-                          </a:solidFill>
-                        </a:rPr>
-                        <a:t>An analyst case note</a:t>
-                      </a:r>
-                      <a:endParaRPr lang="en-US" sz="1500" dirty="0"/>
-                    </a:p>
-                  </a:txBody>
-                  <a:tcPr marL="76200" marR="76200" marT="38100" marB="38100" anchor="ctr">
-                    <a:lnL w="12700" cap="flat" cmpd="sng" algn="ctr">
-                      <a:solidFill>
-                        <a:srgbClr val="D9E3EA"/>
-                      </a:solidFill>
-                      <a:prstDash val="solid"/>
-                      <a:round/>
-                      <a:headEnd type="none" w="med" len="med"/>
-                      <a:tailEnd type="none" w="med" len="med"/>
-                    </a:lnL>
-                    <a:lnR w="12700" cap="flat" cmpd="sng" algn="ctr">
-                      <a:solidFill>
-                        <a:srgbClr val="D9E3EA"/>
-                      </a:solidFill>
-                      <a:prstDash val="solid"/>
-                      <a:round/>
-                      <a:headEnd type="none" w="med" len="med"/>
-                      <a:tailEnd type="none" w="med" len="med"/>
-                    </a:lnR>
-                    <a:lnT w="12700" cap="flat" cmpd="sng" algn="ctr">
-                      <a:solidFill>
-                        <a:srgbClr val="D9E3EA"/>
-                      </a:solidFill>
-                      <a:prstDash val="solid"/>
-                      <a:round/>
-                      <a:headEnd type="none" w="med" len="med"/>
-                      <a:tailEnd type="none" w="med" len="med"/>
-                    </a:lnT>
-                    <a:lnB w="12700" cap="flat" cmpd="sng" algn="ctr">
-                      <a:solidFill>
-                        <a:srgbClr val="D9E3EA"/>
-                      </a:solidFill>
-                      <a:prstDash val="solid"/>
-                      <a:round/>
-                      <a:headEnd type="none" w="med" len="med"/>
-                      <a:tailEnd type="none" w="med" len="med"/>
-                    </a:lnB>
-                    <a:solidFill>
-                      <a:srgbClr val="FFFFFF"/>
-                    </a:solidFill>
-                  </a:tcPr>
-                </a:tc>
-                <a:tc>
-                  <a:txBody>
-                    <a:bodyPr/>
-                    <a:lstStyle/>
-                    <a:p>
-                      <a:pPr indent="0" marL="0">
-                        <a:buNone/>
-                      </a:pPr>
-                      <a:r>
-                        <a:rPr lang="en-US" sz="1500" dirty="0">
-                          <a:solidFill>
-                            <a:srgbClr val="1B2730"/>
-                          </a:solidFill>
-                        </a:rPr>
-                        <a:t>The transaction's own values</a:t>
-                      </a:r>
-                      <a:endParaRPr lang="en-US" sz="1500" dirty="0"/>
-                    </a:p>
-                  </a:txBody>
-                  <a:tcPr marL="76200" marR="76200" marT="38100" marB="38100" anchor="ctr">
-                    <a:lnL w="12700" cap="flat" cmpd="sng" algn="ctr">
-                      <a:solidFill>
-                        <a:srgbClr val="D9E3EA"/>
-                      </a:solidFill>
-                      <a:prstDash val="solid"/>
-                      <a:round/>
-                      <a:headEnd type="none" w="med" len="med"/>
-                      <a:tailEnd type="none" w="med" len="med"/>
-                    </a:lnL>
-                    <a:lnR w="12700" cap="flat" cmpd="sng" algn="ctr">
-                      <a:solidFill>
-                        <a:srgbClr val="D9E3EA"/>
-                      </a:solidFill>
-                      <a:prstDash val="solid"/>
-                      <a:round/>
-                      <a:headEnd type="none" w="med" len="med"/>
-                      <a:tailEnd type="none" w="med" len="med"/>
-                    </a:lnR>
-                    <a:lnT w="12700" cap="flat" cmpd="sng" algn="ctr">
-                      <a:solidFill>
-                        <a:srgbClr val="D9E3EA"/>
-                      </a:solidFill>
-                      <a:prstDash val="solid"/>
-                      <a:round/>
-                      <a:headEnd type="none" w="med" len="med"/>
-                      <a:tailEnd type="none" w="med" len="med"/>
-                    </a:lnT>
-                    <a:lnB w="12700" cap="flat" cmpd="sng" algn="ctr">
-                      <a:solidFill>
-                        <a:srgbClr val="D9E3EA"/>
-                      </a:solidFill>
-                      <a:prstDash val="solid"/>
-                      <a:round/>
-                      <a:headEnd type="none" w="med" len="med"/>
-                      <a:tailEnd type="none" w="med" len="med"/>
-                    </a:lnB>
-                    <a:solidFill>
-                      <a:srgbClr val="FFFFFF"/>
-                    </a:solidFill>
-                  </a:tcPr>
-                </a:tc>
-              </a:tr>
-            </a:tbl>
-          </a:graphicData>
-        </a:graphic>
-      </p:graphicFrame>
-      <p:sp>
-        <p:nvSpPr>
-          <p:cNvPr id="21" name="Shape 17"/>
-          <p:cNvSpPr/>
-          <p:nvPr/>
-        </p:nvSpPr>
-        <p:spPr>
-          <a:xfrm>
-            <a:off x="566928" y="5559552"/>
-            <a:ext cx="11055096" cy="566928"/>
+              <a:t>A person decides</a:t>
+            </a:r>
+            <a:endParaRPr lang="en-US" sz="2400" dirty="0"/>
+          </a:p>
+        </p:txBody>
+      </p:sp>
+      <p:sp>
+        <p:nvSpPr>
+          <p:cNvPr id="20" name="Shape 17"/>
+          <p:cNvSpPr/>
+          <p:nvPr/>
+        </p:nvSpPr>
+        <p:spPr>
+          <a:xfrm>
+            <a:off x="566928" y="4032504"/>
+            <a:ext cx="11055096" cy="914400"/>
           </a:xfrm>
           <a:prstGeom prst="rect">
             <a:avLst/>
@@ -13814,14 +12048,14 @@
       </p:sp>
       <p:sp>
         <p:nvSpPr>
-          <p:cNvPr id="22" name="Shape 18"/>
-          <p:cNvSpPr/>
-          <p:nvPr/>
-        </p:nvSpPr>
-        <p:spPr>
-          <a:xfrm>
-            <a:off x="566928" y="5559552"/>
-            <a:ext cx="82296" cy="566928"/>
+          <p:cNvPr id="21" name="Shape 18"/>
+          <p:cNvSpPr/>
+          <p:nvPr/>
+        </p:nvSpPr>
+        <p:spPr>
+          <a:xfrm>
+            <a:off x="566928" y="4032504"/>
+            <a:ext cx="82296" cy="914400"/>
           </a:xfrm>
           <a:prstGeom prst="rect">
             <a:avLst/>
@@ -13834,14 +12068,14 @@
       </p:sp>
       <p:sp>
         <p:nvSpPr>
-          <p:cNvPr id="23" name="Text 19"/>
-          <p:cNvSpPr/>
-          <p:nvPr/>
-        </p:nvSpPr>
-        <p:spPr>
-          <a:xfrm>
-            <a:off x="822960" y="5559552"/>
-            <a:ext cx="10597896" cy="566928"/>
+          <p:cNvPr id="22" name="Text 19"/>
+          <p:cNvSpPr/>
+          <p:nvPr/>
+        </p:nvSpPr>
+        <p:spPr>
+          <a:xfrm>
+            <a:off x="822960" y="4032504"/>
+            <a:ext cx="10597896" cy="914400"/>
           </a:xfrm>
           <a:prstGeom prst="rect">
             <a:avLst/>
@@ -13857,31 +12091,96 @@
               <a:buNone/>
             </a:pPr>
             <a:r>
-              <a:rPr lang="en-US" sz="1700" dirty="0">
+              <a:rPr lang="en-US" sz="2400" b="1" dirty="0">
                 <a:solidFill>
-                  <a:srgbClr val="1B2730"/>
+                  <a:srgbClr val="000000"/>
                 </a:solidFill>
                 <a:latin typeface="Calibri" pitchFamily="34" charset="0"/>
                 <a:ea typeface="Calibri" pitchFamily="34" charset="-122"/>
                 <a:cs typeface="Calibri" pitchFamily="34" charset="-120"/>
               </a:rPr>
-              <a:t>One batch, three capabilities, three kinds of fabrication caught: </a:t>
-            </a:r>
+              <a:t>Only the evidence changes — a quote, a figure, a value.</a:t>
+            </a:r>
+            <a:endParaRPr lang="en-US" sz="2400" dirty="0"/>
+          </a:p>
+        </p:txBody>
+      </p:sp>
+      <p:sp>
+        <p:nvSpPr>
+          <p:cNvPr id="23" name="Shape 20"/>
+          <p:cNvSpPr/>
+          <p:nvPr/>
+        </p:nvSpPr>
+        <p:spPr>
+          <a:xfrm>
+            <a:off x="566928" y="5221224"/>
+            <a:ext cx="11055096" cy="914400"/>
+          </a:xfrm>
+          <a:prstGeom prst="rect">
+            <a:avLst/>
+          </a:prstGeom>
+          <a:solidFill>
+            <a:srgbClr val="24343F"/>
+          </a:solidFill>
+          <a:ln/>
+        </p:spPr>
+      </p:sp>
+      <p:sp>
+        <p:nvSpPr>
+          <p:cNvPr id="24" name="Shape 21"/>
+          <p:cNvSpPr/>
+          <p:nvPr/>
+        </p:nvSpPr>
+        <p:spPr>
+          <a:xfrm>
+            <a:off x="566928" y="5221224"/>
+            <a:ext cx="82296" cy="914400"/>
+          </a:xfrm>
+          <a:prstGeom prst="rect">
+            <a:avLst/>
+          </a:prstGeom>
+          <a:solidFill>
+            <a:srgbClr val="2A78D6"/>
+          </a:solidFill>
+          <a:ln/>
+        </p:spPr>
+      </p:sp>
+      <p:sp>
+        <p:nvSpPr>
+          <p:cNvPr id="25" name="Text 22"/>
+          <p:cNvSpPr/>
+          <p:nvPr/>
+        </p:nvSpPr>
+        <p:spPr>
+          <a:xfrm>
+            <a:off x="822960" y="5221224"/>
+            <a:ext cx="10597896" cy="914400"/>
+          </a:xfrm>
+          <a:prstGeom prst="rect">
+            <a:avLst/>
+          </a:prstGeom>
+          <a:noFill/>
+          <a:ln/>
+        </p:spPr>
+        <p:txBody>
+          <a:bodyPr wrap="square" lIns="0" tIns="0" rIns="0" bIns="0" rtlCol="0" anchor="ctr"/>
+          <a:lstStyle/>
+          <a:p>
             <a:pPr indent="0" marL="0">
               <a:buNone/>
             </a:pPr>
             <a:r>
-              <a:rPr lang="en-US" sz="1700" b="1" dirty="0">
+              <a:rPr lang="en-US" sz="2400" dirty="0">
                 <a:solidFill>
-                  <a:srgbClr val="24343F"/>
+                  <a:srgbClr val="FFFFFF"/>
                 </a:solidFill>
                 <a:latin typeface="Calibri" pitchFamily="34" charset="0"/>
                 <a:ea typeface="Calibri" pitchFamily="34" charset="-122"/>
                 <a:cs typeface="Calibri" pitchFamily="34" charset="-120"/>
               </a:rPr>
-              <a:t>2 invented quotes · 6 invented values · 1 uncomputed figure.</a:t>
-            </a:r>
-            <a:endParaRPr lang="en-US" sz="1700" dirty="0"/>
+              <a:t>Nothing routes, files or blocks by itself.</a:t>
+            </a:r>
+            <a:endParaRPr lang="en-US" sz="2400" dirty="0"/>
           </a:p>
         </p:txBody>
       </p:sp>
@@ -14048,7 +12347,7 @@
         <p:spPr>
           <a:xfrm>
             <a:off x="566928" y="1481328"/>
-            <a:ext cx="11055096" cy="676656"/>
+            <a:ext cx="11055096" cy="1078992"/>
           </a:xfrm>
           <a:prstGeom prst="rect">
             <a:avLst/>
@@ -14068,7 +12367,7 @@
         <p:spPr>
           <a:xfrm>
             <a:off x="566928" y="1481328"/>
-            <a:ext cx="82296" cy="676656"/>
+            <a:ext cx="82296" cy="1078992"/>
           </a:xfrm>
           <a:prstGeom prst="rect">
             <a:avLst/>
@@ -14088,7 +12387,7 @@
         <p:spPr>
           <a:xfrm>
             <a:off x="822960" y="1481328"/>
-            <a:ext cx="10597896" cy="676656"/>
+            <a:ext cx="10597896" cy="1078992"/>
           </a:xfrm>
           <a:prstGeom prst="rect">
             <a:avLst/>
@@ -14104,7 +12403,7 @@
               <a:buNone/>
             </a:pPr>
             <a:r>
-              <a:rPr lang="en-US" sz="1050" b="1" spc="100" kern="0" dirty="0">
+              <a:rPr lang="en-US" sz="2400" b="1" spc="100" kern="0" dirty="0">
                 <a:solidFill>
                   <a:srgbClr val="2A78D6"/>
                 </a:solidFill>
@@ -14118,7 +12417,7 @@
               <a:buNone/>
             </a:pPr>
             <a:r>
-              <a:rPr lang="en-US" sz="1300" dirty="0">
+              <a:rPr lang="en-US" sz="2400" dirty="0">
                 <a:solidFill>
                   <a:srgbClr val="1B2730"/>
                 </a:solidFill>
@@ -14126,9 +12425,9 @@
                 <a:ea typeface="Calibri" pitchFamily="34" charset="-122"/>
                 <a:cs typeface="Calibri" pitchFamily="34" charset="-120"/>
               </a:rPr>
-              <a:t>Nine steps, left to right. Green means it ran. It proposed a team, quoted your customer, and stopped.</a:t>
-            </a:r>
-            <a:endParaRPr lang="en-US" sz="1050" dirty="0"/>
+              <a:t>Nine steps, left to right. Green means it ran.</a:t>
+            </a:r>
+            <a:endParaRPr lang="en-US" sz="2400" dirty="0"/>
           </a:p>
         </p:txBody>
       </p:sp>
@@ -14238,8 +12537,8 @@
         </p:blipFill>
         <p:spPr>
           <a:xfrm>
-            <a:off x="1279904" y="2395728"/>
-            <a:ext cx="9629144" cy="3959352"/>
+            <a:off x="1826057" y="2798064"/>
+            <a:ext cx="8536838" cy="3557016"/>
           </a:xfrm>
           <a:prstGeom prst="rect">
             <a:avLst/>
@@ -14409,7 +12708,7 @@
         <p:spPr>
           <a:xfrm>
             <a:off x="566928" y="1481328"/>
-            <a:ext cx="11055096" cy="676656"/>
+            <a:ext cx="11055096" cy="1078992"/>
           </a:xfrm>
           <a:prstGeom prst="rect">
             <a:avLst/>
@@ -14429,7 +12728,7 @@
         <p:spPr>
           <a:xfrm>
             <a:off x="566928" y="1481328"/>
-            <a:ext cx="82296" cy="676656"/>
+            <a:ext cx="82296" cy="1078992"/>
           </a:xfrm>
           <a:prstGeom prst="rect">
             <a:avLst/>
@@ -14449,7 +12748,7 @@
         <p:spPr>
           <a:xfrm>
             <a:off x="822960" y="1481328"/>
-            <a:ext cx="10597896" cy="676656"/>
+            <a:ext cx="10597896" cy="1078992"/>
           </a:xfrm>
           <a:prstGeom prst="rect">
             <a:avLst/>
@@ -14465,7 +12764,7 @@
               <a:buNone/>
             </a:pPr>
             <a:r>
-              <a:rPr lang="en-US" sz="1050" b="1" spc="100" kern="0" dirty="0">
+              <a:rPr lang="en-US" sz="2400" b="1" spc="100" kern="0" dirty="0">
                 <a:solidFill>
                   <a:srgbClr val="2A78D6"/>
                 </a:solidFill>
@@ -14479,7 +12778,7 @@
               <a:buNone/>
             </a:pPr>
             <a:r>
-              <a:rPr lang="en-US" sz="1300" dirty="0">
+              <a:rPr lang="en-US" sz="2400" dirty="0">
                 <a:solidFill>
                   <a:srgbClr val="1B2730"/>
                 </a:solidFill>
@@ -14487,9 +12786,9 @@
                 <a:ea typeface="Calibri" pitchFamily="34" charset="-122"/>
                 <a:cs typeface="Calibri" pitchFamily="34" charset="-120"/>
               </a:rPr>
-              <a:t>A bespoke build does not pay back for a firm your size. −31% over 36 months, break-even in month 69.</a:t>
-            </a:r>
-            <a:endParaRPr lang="en-US" sz="1050" dirty="0"/>
+              <a:t>A bespoke build does not pay back at your size.</a:t>
+            </a:r>
+            <a:endParaRPr lang="en-US" sz="2400" dirty="0"/>
           </a:p>
         </p:txBody>
       </p:sp>
@@ -14598,7 +12897,7 @@
           </p:nvPr>
         </p:nvGraphicFramePr>
         <p:xfrm>
-          <a:off x="566928" y="2395728"/>
+          <a:off x="566928" y="2798064"/>
           <a:ext cx="11055096" cy="914400"/>
         </p:xfrm>
         <a:graphic>
@@ -14606,10 +12905,10 @@
             <a:tbl>
               <a:tblPr/>
               <a:tblGrid>
-                <a:gridCol w="3017520"/>
-                <a:gridCol w="8257032"/>
+                <a:gridCol w="7397496"/>
+                <a:gridCol w="3657600"/>
               </a:tblGrid>
-              <a:tr h="411480">
+              <a:tr h="475488">
                 <a:tc>
                   <a:txBody>
                     <a:bodyPr/>
@@ -14618,15 +12917,7 @@
                       <a:pPr indent="0" marL="0">
                         <a:buNone/>
                       </a:pPr>
-                      <a:r>
-                        <a:rPr lang="en-US" sz="1500" b="1" dirty="0">
-                          <a:solidFill>
-                            <a:srgbClr val="FFFFFF"/>
-                          </a:solidFill>
-                        </a:rPr>
-                        <a:t>36-month ROI</a:t>
-                      </a:r>
-                      <a:endParaRPr lang="en-US" sz="1500" dirty="0"/>
+                      <a:endParaRPr lang="en-US" sz="2400" dirty="0"/>
                     </a:p>
                   </a:txBody>
                   <a:tcPr marL="76200" marR="76200" marT="38100" marB="38100" anchor="ctr">
@@ -14680,14 +12971,14 @@
                         <a:buNone/>
                       </a:pPr>
                       <a:r>
-                        <a:rPr lang="en-US" sz="1500" b="1" dirty="0">
+                        <a:rPr lang="en-US" sz="2400" b="1" dirty="0">
                           <a:solidFill>
                             <a:srgbClr val="FFFFFF"/>
                           </a:solidFill>
                         </a:rPr>
-                        <a:t>What would have to change</a:t>
+                        <a:t>ROI AT 36 MONTHS</a:t>
                       </a:r>
-                      <a:endParaRPr lang="en-US" sz="1500" dirty="0"/>
+                      <a:endParaRPr lang="en-US" sz="2400" dirty="0"/>
                     </a:p>
                   </a:txBody>
                   <a:tcPr marL="76200" marR="76200" marT="38100" marB="38100" anchor="ctr">
@@ -14733,7 +13024,7 @@
                   </a:tcPr>
                 </a:tc>
               </a:tr>
-              <a:tr h="530352">
+              <a:tr h="603504">
                 <a:tc>
                   <a:txBody>
                     <a:bodyPr/>
@@ -14743,14 +13034,14 @@
                         <a:buNone/>
                       </a:pPr>
                       <a:r>
-                        <a:rPr lang="en-US" sz="1500" b="1" dirty="0">
+                        <a:rPr lang="en-US" sz="2400" b="1" dirty="0">
                           <a:solidFill>
                             <a:srgbClr val="24343F"/>
                           </a:solidFill>
                         </a:rPr>
-                        <a:t>−31.0%</a:t>
+                        <a:t>Bespoke build, as proposed</a:t>
                       </a:r>
-                      <a:endParaRPr lang="en-US" sz="1500" dirty="0"/>
+                      <a:endParaRPr lang="en-US" sz="2400" dirty="0"/>
                     </a:p>
                   </a:txBody>
                   <a:tcPr marL="76200" marR="76200" marT="38100" marB="38100" anchor="ctr">
@@ -14804,14 +13095,14 @@
                         <a:buNone/>
                       </a:pPr>
                       <a:r>
-                        <a:rPr lang="en-US" sz="1500" dirty="0">
+                        <a:rPr lang="en-US" sz="2400" dirty="0">
                           <a:solidFill>
                             <a:srgbClr val="1B2730"/>
                           </a:solidFill>
                         </a:rPr>
-                        <a:t>As proposed — bespoke build, consultant-run oversight</a:t>
+                        <a:t>−31.0%</a:t>
                       </a:r>
-                      <a:endParaRPr lang="en-US" sz="1500" dirty="0"/>
+                      <a:endParaRPr lang="en-US" sz="2400" dirty="0"/>
                     </a:p>
                   </a:txBody>
                   <a:tcPr marL="76200" marR="76200" marT="38100" marB="38100" anchor="ctr">
@@ -14857,7 +13148,7 @@
                   </a:tcPr>
                 </a:tc>
               </a:tr>
-              <a:tr h="530352">
+              <a:tr h="603504">
                 <a:tc>
                   <a:txBody>
                     <a:bodyPr/>
@@ -14867,14 +13158,14 @@
                         <a:buNone/>
                       </a:pPr>
                       <a:r>
-                        <a:rPr lang="en-US" sz="1500" b="1" dirty="0">
+                        <a:rPr lang="en-US" sz="2400" b="1" dirty="0">
                           <a:solidFill>
                             <a:srgbClr val="24343F"/>
                           </a:solidFill>
                         </a:rPr>
-                        <a:t>−9.4%</a:t>
+                        <a:t>Productised across five firms</a:t>
                       </a:r>
-                      <a:endParaRPr lang="en-US" sz="1500" dirty="0"/>
+                      <a:endParaRPr lang="en-US" sz="2400" dirty="0"/>
                     </a:p>
                   </a:txBody>
                   <a:tcPr marL="76200" marR="76200" marT="38100" marB="38100" anchor="ctr">
@@ -14928,14 +13219,14 @@
                         <a:buNone/>
                       </a:pPr>
                       <a:r>
-                        <a:rPr lang="en-US" sz="1500" dirty="0">
+                        <a:rPr lang="en-US" sz="2400" dirty="0">
                           <a:solidFill>
                             <a:srgbClr val="1B2730"/>
                           </a:solidFill>
                         </a:rPr>
-                        <a:t>Your team owns the quarterly review after handover</a:t>
+                        <a:t>+16.9%</a:t>
                       </a:r>
-                      <a:endParaRPr lang="en-US" sz="1500" dirty="0"/>
+                      <a:endParaRPr lang="en-US" sz="2400" dirty="0"/>
                     </a:p>
                   </a:txBody>
                   <a:tcPr marL="76200" marR="76200" marT="38100" marB="38100" anchor="ctr">
@@ -14981,7 +13272,7 @@
                   </a:tcPr>
                 </a:tc>
               </a:tr>
-              <a:tr h="530352">
+              <a:tr h="603504">
                 <a:tc>
                   <a:txBody>
                     <a:bodyPr/>
@@ -14991,14 +13282,14 @@
                         <a:buNone/>
                       </a:pPr>
                       <a:r>
-                        <a:rPr lang="en-US" sz="1500" b="1" dirty="0">
+                        <a:rPr lang="en-US" sz="2400" b="1" dirty="0">
                           <a:solidFill>
                             <a:srgbClr val="24343F"/>
                           </a:solidFill>
                         </a:rPr>
-                        <a:t>+16.9%</a:t>
+                        <a:t>…with oversight in-house</a:t>
                       </a:r>
-                      <a:endParaRPr lang="en-US" sz="1500" dirty="0"/>
+                      <a:endParaRPr lang="en-US" sz="2400" dirty="0"/>
                     </a:p>
                   </a:txBody>
                   <a:tcPr marL="76200" marR="76200" marT="38100" marB="38100" anchor="ctr">
@@ -15052,138 +13343,14 @@
                         <a:buNone/>
                       </a:pPr>
                       <a:r>
-                        <a:rPr lang="en-US" sz="1500" dirty="0">
+                        <a:rPr lang="en-US" sz="2400" dirty="0">
                           <a:solidFill>
                             <a:srgbClr val="1B2730"/>
                           </a:solidFill>
                         </a:rPr>
-                        <a:t>The build is paid for once and shared across five firms</a:t>
-                      </a:r>
-                      <a:endParaRPr lang="en-US" sz="1500" dirty="0"/>
-                    </a:p>
-                  </a:txBody>
-                  <a:tcPr marL="76200" marR="76200" marT="38100" marB="38100" anchor="ctr">
-                    <a:lnL w="12700" cap="flat" cmpd="sng" algn="ctr">
-                      <a:solidFill>
-                        <a:srgbClr val="D9E3EA"/>
-                      </a:solidFill>
-                      <a:prstDash val="solid"/>
-                      <a:round/>
-                      <a:headEnd type="none" w="med" len="med"/>
-                      <a:tailEnd type="none" w="med" len="med"/>
-                    </a:lnL>
-                    <a:lnR w="12700" cap="flat" cmpd="sng" algn="ctr">
-                      <a:solidFill>
-                        <a:srgbClr val="D9E3EA"/>
-                      </a:solidFill>
-                      <a:prstDash val="solid"/>
-                      <a:round/>
-                      <a:headEnd type="none" w="med" len="med"/>
-                      <a:tailEnd type="none" w="med" len="med"/>
-                    </a:lnR>
-                    <a:lnT w="12700" cap="flat" cmpd="sng" algn="ctr">
-                      <a:solidFill>
-                        <a:srgbClr val="D9E3EA"/>
-                      </a:solidFill>
-                      <a:prstDash val="solid"/>
-                      <a:round/>
-                      <a:headEnd type="none" w="med" len="med"/>
-                      <a:tailEnd type="none" w="med" len="med"/>
-                    </a:lnT>
-                    <a:lnB w="12700" cap="flat" cmpd="sng" algn="ctr">
-                      <a:solidFill>
-                        <a:srgbClr val="D9E3EA"/>
-                      </a:solidFill>
-                      <a:prstDash val="solid"/>
-                      <a:round/>
-                      <a:headEnd type="none" w="med" len="med"/>
-                      <a:tailEnd type="none" w="med" len="med"/>
-                    </a:lnB>
-                    <a:solidFill>
-                      <a:srgbClr val="FFFFFF"/>
-                    </a:solidFill>
-                  </a:tcPr>
-                </a:tc>
-              </a:tr>
-              <a:tr h="530352">
-                <a:tc>
-                  <a:txBody>
-                    <a:bodyPr/>
-                    <a:lstStyle/>
-                    <a:p>
-                      <a:pPr indent="0" marL="0">
-                        <a:buNone/>
-                      </a:pPr>
-                      <a:r>
-                        <a:rPr lang="en-US" sz="1500" b="1" dirty="0">
-                          <a:solidFill>
-                            <a:srgbClr val="24343F"/>
-                          </a:solidFill>
-                        </a:rPr>
                         <a:t>+96.6%</a:t>
                       </a:r>
-                      <a:endParaRPr lang="en-US" sz="1500" dirty="0"/>
-                    </a:p>
-                  </a:txBody>
-                  <a:tcPr marL="76200" marR="76200" marT="38100" marB="38100" anchor="ctr">
-                    <a:lnL w="12700" cap="flat" cmpd="sng" algn="ctr">
-                      <a:solidFill>
-                        <a:srgbClr val="D9E3EA"/>
-                      </a:solidFill>
-                      <a:prstDash val="solid"/>
-                      <a:round/>
-                      <a:headEnd type="none" w="med" len="med"/>
-                      <a:tailEnd type="none" w="med" len="med"/>
-                    </a:lnL>
-                    <a:lnR w="12700" cap="flat" cmpd="sng" algn="ctr">
-                      <a:solidFill>
-                        <a:srgbClr val="D9E3EA"/>
-                      </a:solidFill>
-                      <a:prstDash val="solid"/>
-                      <a:round/>
-                      <a:headEnd type="none" w="med" len="med"/>
-                      <a:tailEnd type="none" w="med" len="med"/>
-                    </a:lnR>
-                    <a:lnT w="12700" cap="flat" cmpd="sng" algn="ctr">
-                      <a:solidFill>
-                        <a:srgbClr val="D9E3EA"/>
-                      </a:solidFill>
-                      <a:prstDash val="solid"/>
-                      <a:round/>
-                      <a:headEnd type="none" w="med" len="med"/>
-                      <a:tailEnd type="none" w="med" len="med"/>
-                    </a:lnT>
-                    <a:lnB w="12700" cap="flat" cmpd="sng" algn="ctr">
-                      <a:solidFill>
-                        <a:srgbClr val="D9E3EA"/>
-                      </a:solidFill>
-                      <a:prstDash val="solid"/>
-                      <a:round/>
-                      <a:headEnd type="none" w="med" len="med"/>
-                      <a:tailEnd type="none" w="med" len="med"/>
-                    </a:lnB>
-                    <a:solidFill>
-                      <a:srgbClr val="FFFFFF"/>
-                    </a:solidFill>
-                  </a:tcPr>
-                </a:tc>
-                <a:tc>
-                  <a:txBody>
-                    <a:bodyPr/>
-                    <a:lstStyle/>
-                    <a:p>
-                      <a:pPr indent="0" marL="0">
-                        <a:buNone/>
-                      </a:pPr>
-                      <a:r>
-                        <a:rPr lang="en-US" sz="1500" dirty="0">
-                          <a:solidFill>
-                            <a:srgbClr val="1B2730"/>
-                          </a:solidFill>
-                        </a:rPr>
-                        <a:t>Both</a:t>
-                      </a:r>
-                      <a:endParaRPr lang="en-US" sz="1500" dirty="0"/>
+                      <a:endParaRPr lang="en-US" sz="2400" dirty="0"/>
                     </a:p>
                   </a:txBody>
                   <a:tcPr marL="76200" marR="76200" marT="38100" marB="38100" anchor="ctr">
@@ -15241,8 +13408,8 @@
         </p:nvSpPr>
         <p:spPr>
           <a:xfrm>
-            <a:off x="566928" y="5184648"/>
-            <a:ext cx="11055096" cy="640080"/>
+            <a:off x="566928" y="5321808"/>
+            <a:ext cx="11055096" cy="914400"/>
           </a:xfrm>
           <a:prstGeom prst="rect">
             <a:avLst/>
@@ -15261,8 +13428,8 @@
         </p:nvSpPr>
         <p:spPr>
           <a:xfrm>
-            <a:off x="566928" y="5184648"/>
-            <a:ext cx="82296" cy="640080"/>
+            <a:off x="566928" y="5321808"/>
+            <a:ext cx="82296" cy="914400"/>
           </a:xfrm>
           <a:prstGeom prst="rect">
             <a:avLst/>
@@ -15281,8 +13448,8 @@
         </p:nvSpPr>
         <p:spPr>
           <a:xfrm>
-            <a:off x="822960" y="5184648"/>
-            <a:ext cx="10597896" cy="640080"/>
+            <a:off x="822960" y="5321808"/>
+            <a:ext cx="10597896" cy="914400"/>
           </a:xfrm>
           <a:prstGeom prst="rect">
             <a:avLst/>
@@ -15298,21 +13465,7 @@
               <a:buNone/>
             </a:pPr>
             <a:r>
-              <a:rPr lang="en-US" sz="1700" b="1" dirty="0">
-                <a:solidFill>
-                  <a:srgbClr val="24343F"/>
-                </a:solidFill>
-                <a:latin typeface="Calibri" pitchFamily="34" charset="0"/>
-                <a:ea typeface="Calibri" pitchFamily="34" charset="-122"/>
-                <a:cs typeface="Calibri" pitchFamily="34" charset="-120"/>
-              </a:rPr>
-              <a:t>€18,200 buys a decision, not a deployment. </a:t>
-            </a:r>
-            <a:pPr indent="0" marL="0">
-              <a:buNone/>
-            </a:pPr>
-            <a:r>
-              <a:rPr lang="en-US" sz="1700" dirty="0">
+              <a:rPr lang="en-US" sz="2400" b="1" dirty="0">
                 <a:solidFill>
                   <a:srgbClr val="000000"/>
                 </a:solidFill>
@@ -15320,9 +13473,9 @@
                 <a:ea typeface="Calibri" pitchFamily="34" charset="-122"/>
                 <a:cs typeface="Calibri" pitchFamily="34" charset="-120"/>
               </a:rPr>
-              <a:t>The capability works. The commercial shape is what has to change.</a:t>
-            </a:r>
-            <a:endParaRPr lang="en-US" sz="1700" dirty="0"/>
+              <a:t>Break-even month 69. €18,200 buys a decision, not a deployment.</a:t>
+            </a:r>
+            <a:endParaRPr lang="en-US" sz="2400" dirty="0"/>
           </a:p>
         </p:txBody>
       </p:sp>
@@ -15489,7 +13642,7 @@
         <p:spPr>
           <a:xfrm>
             <a:off x="566928" y="1481328"/>
-            <a:ext cx="11055096" cy="676656"/>
+            <a:ext cx="11055096" cy="1078992"/>
           </a:xfrm>
           <a:prstGeom prst="rect">
             <a:avLst/>
@@ -15509,7 +13662,7 @@
         <p:spPr>
           <a:xfrm>
             <a:off x="566928" y="1481328"/>
-            <a:ext cx="82296" cy="676656"/>
+            <a:ext cx="82296" cy="1078992"/>
           </a:xfrm>
           <a:prstGeom prst="rect">
             <a:avLst/>
@@ -15529,7 +13682,7 @@
         <p:spPr>
           <a:xfrm>
             <a:off x="822960" y="1481328"/>
-            <a:ext cx="10597896" cy="676656"/>
+            <a:ext cx="10597896" cy="1078992"/>
           </a:xfrm>
           <a:prstGeom prst="rect">
             <a:avLst/>
@@ -15545,7 +13698,7 @@
               <a:buNone/>
             </a:pPr>
             <a:r>
-              <a:rPr lang="en-US" sz="1050" b="1" spc="100" kern="0" dirty="0">
+              <a:rPr lang="en-US" sz="2400" b="1" spc="100" kern="0" dirty="0">
                 <a:solidFill>
                   <a:srgbClr val="2A78D6"/>
                 </a:solidFill>
@@ -15559,7 +13712,7 @@
               <a:buNone/>
             </a:pPr>
             <a:r>
-              <a:rPr lang="en-US" sz="1300" dirty="0">
+              <a:rPr lang="en-US" sz="2400" dirty="0">
                 <a:solidFill>
                   <a:srgbClr val="1B2730"/>
                 </a:solidFill>
@@ -15567,9 +13720,9 @@
                 <a:ea typeface="Calibri" pitchFamily="34" charset="-122"/>
                 <a:cs typeface="Calibri" pitchFamily="34" charset="-120"/>
               </a:rPr>
-              <a:t>The two biggest are not technical. They are about how it is deployed and measured.</a:t>
-            </a:r>
-            <a:endParaRPr lang="en-US" sz="1050" dirty="0"/>
+              <a:t>The two biggest are not technical.</a:t>
+            </a:r>
+            <a:endParaRPr lang="en-US" sz="2400" dirty="0"/>
           </a:p>
         </p:txBody>
       </p:sp>
@@ -15678,7 +13831,7 @@
           </p:nvPr>
         </p:nvGraphicFramePr>
         <p:xfrm>
-          <a:off x="566928" y="2395728"/>
+          <a:off x="566928" y="2798064"/>
           <a:ext cx="11055096" cy="914400"/>
         </p:xfrm>
         <a:graphic>
@@ -15686,11 +13839,10 @@
             <a:tbl>
               <a:tblPr/>
               <a:tblGrid>
-                <a:gridCol w="3749040"/>
-                <a:gridCol w="1051560"/>
-                <a:gridCol w="6473952"/>
+                <a:gridCol w="4572000"/>
+                <a:gridCol w="6483096"/>
               </a:tblGrid>
-              <a:tr h="384048">
+              <a:tr h="475488">
                 <a:tc>
                   <a:txBody>
                     <a:bodyPr/>
@@ -15700,17 +13852,17 @@
                         <a:buNone/>
                       </a:pPr>
                       <a:r>
-                        <a:rPr lang="en-US" sz="1500" b="1" dirty="0">
+                        <a:rPr lang="en-US" sz="2400" b="1" spc="100" kern="0" dirty="0">
                           <a:solidFill>
                             <a:srgbClr val="FFFFFF"/>
                           </a:solidFill>
                         </a:rPr>
-                        <a:t>Risk</a:t>
+                        <a:t>RISK</a:t>
                       </a:r>
-                      <a:endParaRPr lang="en-US" sz="1500" dirty="0"/>
+                      <a:endParaRPr lang="en-US" sz="2400" dirty="0"/>
                     </a:p>
                   </a:txBody>
-                  <a:tcPr marL="76200" marR="76200" marT="38100" marB="38100" anchor="ctr">
+                  <a:tcPr marL="101600" marR="101600" marT="25400" marB="25400" anchor="ctr">
                     <a:lnL w="12700" cap="flat" cmpd="sng" algn="ctr">
                       <a:solidFill>
                         <a:srgbClr val="D9E3EA"/>
@@ -15761,17 +13913,17 @@
                         <a:buNone/>
                       </a:pPr>
                       <a:r>
-                        <a:rPr lang="en-US" sz="1500" b="1" dirty="0">
+                        <a:rPr lang="en-US" sz="2400" b="1" spc="100" kern="0" dirty="0">
                           <a:solidFill>
-                            <a:srgbClr val="FFFFFF"/>
+                            <a:srgbClr val="1D2A32"/>
                           </a:solidFill>
                         </a:rPr>
-                        <a:t>L × I</a:t>
+                        <a:t>MITIGATION</a:t>
                       </a:r>
-                      <a:endParaRPr lang="en-US" sz="1500" dirty="0"/>
+                      <a:endParaRPr lang="en-US" sz="2400" dirty="0"/>
                     </a:p>
                   </a:txBody>
-                  <a:tcPr marL="76200" marR="76200" marT="38100" marB="38100" anchor="ctr">
+                  <a:tcPr marL="101600" marR="101600" marT="25400" marB="25400" anchor="ctr">
                     <a:lnL w="12700" cap="flat" cmpd="sng" algn="ctr">
                       <a:solidFill>
                         <a:srgbClr val="D9E3EA"/>
@@ -15809,10 +13961,12 @@
                       <a:tailEnd type="none" w="med" len="med"/>
                     </a:lnB>
                     <a:solidFill>
-                      <a:srgbClr val="445A69"/>
+                      <a:srgbClr val="2A78D6"/>
                     </a:solidFill>
                   </a:tcPr>
                 </a:tc>
+              </a:tr>
+              <a:tr h="530352">
                 <a:tc>
                   <a:txBody>
                     <a:bodyPr/>
@@ -15822,80 +13976,17 @@
                         <a:buNone/>
                       </a:pPr>
                       <a:r>
-                        <a:rPr lang="en-US" sz="1500" b="1" dirty="0">
-                          <a:solidFill>
-                            <a:srgbClr val="FFFFFF"/>
-                          </a:solidFill>
-                        </a:rPr>
-                        <a:t>What we do about it</a:t>
-                      </a:r>
-                      <a:endParaRPr lang="en-US" sz="1500" dirty="0"/>
-                    </a:p>
-                  </a:txBody>
-                  <a:tcPr marL="76200" marR="76200" marT="38100" marB="38100" anchor="ctr">
-                    <a:lnL w="12700" cap="flat" cmpd="sng" algn="ctr">
-                      <a:solidFill>
-                        <a:srgbClr val="D9E3EA"/>
-                      </a:solidFill>
-                      <a:prstDash val="solid"/>
-                      <a:round/>
-                      <a:headEnd type="none" w="med" len="med"/>
-                      <a:tailEnd type="none" w="med" len="med"/>
-                    </a:lnL>
-                    <a:lnR w="12700" cap="flat" cmpd="sng" algn="ctr">
-                      <a:solidFill>
-                        <a:srgbClr val="D9E3EA"/>
-                      </a:solidFill>
-                      <a:prstDash val="solid"/>
-                      <a:round/>
-                      <a:headEnd type="none" w="med" len="med"/>
-                      <a:tailEnd type="none" w="med" len="med"/>
-                    </a:lnR>
-                    <a:lnT w="12700" cap="flat" cmpd="sng" algn="ctr">
-                      <a:solidFill>
-                        <a:srgbClr val="D9E3EA"/>
-                      </a:solidFill>
-                      <a:prstDash val="solid"/>
-                      <a:round/>
-                      <a:headEnd type="none" w="med" len="med"/>
-                      <a:tailEnd type="none" w="med" len="med"/>
-                    </a:lnT>
-                    <a:lnB w="12700" cap="flat" cmpd="sng" algn="ctr">
-                      <a:solidFill>
-                        <a:srgbClr val="D9E3EA"/>
-                      </a:solidFill>
-                      <a:prstDash val="solid"/>
-                      <a:round/>
-                      <a:headEnd type="none" w="med" len="med"/>
-                      <a:tailEnd type="none" w="med" len="med"/>
-                    </a:lnB>
-                    <a:solidFill>
-                      <a:srgbClr val="445A69"/>
-                    </a:solidFill>
-                  </a:tcPr>
-                </a:tc>
-              </a:tr>
-              <a:tr h="841248">
-                <a:tc>
-                  <a:txBody>
-                    <a:bodyPr/>
-                    <a:lstStyle/>
-                    <a:p>
-                      <a:pPr indent="0" marL="0">
-                        <a:buNone/>
-                      </a:pPr>
-                      <a:r>
-                        <a:rPr lang="en-US" sz="1500" b="1" dirty="0">
+                        <a:rPr lang="en-US" sz="2400" b="1" dirty="0">
                           <a:solidFill>
                             <a:srgbClr val="24343F"/>
                           </a:solidFill>
                         </a:rPr>
-                        <a:t>The value assumptions are wrong</a:t>
+                        <a:t>Value assumptions wrong  4×5</a:t>
                       </a:r>
-                      <a:endParaRPr lang="en-US" sz="1500" dirty="0"/>
+                      <a:endParaRPr lang="en-US" sz="2400" dirty="0"/>
                     </a:p>
                   </a:txBody>
-                  <a:tcPr marL="76200" marR="76200" marT="38100" marB="38100" anchor="ctr">
+                  <a:tcPr marL="101600" marR="101600" marT="25400" marB="25400" anchor="ctr">
                     <a:lnL w="12700" cap="flat" cmpd="sng" algn="ctr">
                       <a:solidFill>
                         <a:srgbClr val="D9E3EA"/>
@@ -15946,17 +14037,204 @@
                         <a:buNone/>
                       </a:pPr>
                       <a:r>
-                        <a:rPr lang="en-US" sz="1500" dirty="0">
+                        <a:rPr lang="en-US" sz="2400" dirty="0">
                           <a:solidFill>
                             <a:srgbClr val="1B2730"/>
                           </a:solidFill>
                         </a:rPr>
-                        <a:t>4 × 5</a:t>
+                        <a:t>The pilot measures it. Stop at €18,200</a:t>
                       </a:r>
-                      <a:endParaRPr lang="en-US" sz="1500" dirty="0"/>
+                      <a:endParaRPr lang="en-US" sz="2400" dirty="0"/>
                     </a:p>
                   </a:txBody>
-                  <a:tcPr marL="76200" marR="76200" marT="38100" marB="38100" anchor="ctr">
+                  <a:tcPr marL="101600" marR="101600" marT="25400" marB="25400" anchor="ctr">
+                    <a:lnL w="12700" cap="flat" cmpd="sng" algn="ctr">
+                      <a:solidFill>
+                        <a:srgbClr val="D9E3EA"/>
+                      </a:solidFill>
+                      <a:prstDash val="solid"/>
+                      <a:round/>
+                      <a:headEnd type="none" w="med" len="med"/>
+                      <a:tailEnd type="none" w="med" len="med"/>
+                    </a:lnL>
+                    <a:lnR w="12700" cap="flat" cmpd="sng" algn="ctr">
+                      <a:solidFill>
+                        <a:srgbClr val="D9E3EA"/>
+                      </a:solidFill>
+                      <a:prstDash val="solid"/>
+                      <a:round/>
+                      <a:headEnd type="none" w="med" len="med"/>
+                      <a:tailEnd type="none" w="med" len="med"/>
+                    </a:lnR>
+                    <a:lnT w="12700" cap="flat" cmpd="sng" algn="ctr">
+                      <a:solidFill>
+                        <a:srgbClr val="D9E3EA"/>
+                      </a:solidFill>
+                      <a:prstDash val="solid"/>
+                      <a:round/>
+                      <a:headEnd type="none" w="med" len="med"/>
+                      <a:tailEnd type="none" w="med" len="med"/>
+                    </a:lnT>
+                    <a:lnB w="12700" cap="flat" cmpd="sng" algn="ctr">
+                      <a:solidFill>
+                        <a:srgbClr val="D9E3EA"/>
+                      </a:solidFill>
+                      <a:prstDash val="solid"/>
+                      <a:round/>
+                      <a:headEnd type="none" w="med" len="med"/>
+                      <a:tailEnd type="none" w="med" len="med"/>
+                    </a:lnB>
+                    <a:solidFill>
+                      <a:srgbClr val="FFFFFF"/>
+                    </a:solidFill>
+                  </a:tcPr>
+                </a:tc>
+              </a:tr>
+              <a:tr h="530352">
+                <a:tc>
+                  <a:txBody>
+                    <a:bodyPr/>
+                    <a:lstStyle/>
+                    <a:p>
+                      <a:pPr indent="0" marL="0">
+                        <a:buNone/>
+                      </a:pPr>
+                      <a:r>
+                        <a:rPr lang="en-US" sz="2400" b="1" dirty="0">
+                          <a:solidFill>
+                            <a:srgbClr val="24343F"/>
+                          </a:solidFill>
+                        </a:rPr>
+                        <a:t>Handlers rubber-stamp  4×4</a:t>
+                      </a:r>
+                      <a:endParaRPr lang="en-US" sz="2400" dirty="0"/>
+                    </a:p>
+                  </a:txBody>
+                  <a:tcPr marL="101600" marR="101600" marT="25400" marB="25400" anchor="ctr">
+                    <a:lnL w="12700" cap="flat" cmpd="sng" algn="ctr">
+                      <a:solidFill>
+                        <a:srgbClr val="D9E3EA"/>
+                      </a:solidFill>
+                      <a:prstDash val="solid"/>
+                      <a:round/>
+                      <a:headEnd type="none" w="med" len="med"/>
+                      <a:tailEnd type="none" w="med" len="med"/>
+                    </a:lnL>
+                    <a:lnR w="12700" cap="flat" cmpd="sng" algn="ctr">
+                      <a:solidFill>
+                        <a:srgbClr val="D9E3EA"/>
+                      </a:solidFill>
+                      <a:prstDash val="solid"/>
+                      <a:round/>
+                      <a:headEnd type="none" w="med" len="med"/>
+                      <a:tailEnd type="none" w="med" len="med"/>
+                    </a:lnR>
+                    <a:lnT w="12700" cap="flat" cmpd="sng" algn="ctr">
+                      <a:solidFill>
+                        <a:srgbClr val="D9E3EA"/>
+                      </a:solidFill>
+                      <a:prstDash val="solid"/>
+                      <a:round/>
+                      <a:headEnd type="none" w="med" len="med"/>
+                      <a:tailEnd type="none" w="med" len="med"/>
+                    </a:lnT>
+                    <a:lnB w="12700" cap="flat" cmpd="sng" algn="ctr">
+                      <a:solidFill>
+                        <a:srgbClr val="D9E3EA"/>
+                      </a:solidFill>
+                      <a:prstDash val="solid"/>
+                      <a:round/>
+                      <a:headEnd type="none" w="med" len="med"/>
+                      <a:tailEnd type="none" w="med" len="med"/>
+                    </a:lnB>
+                    <a:solidFill>
+                      <a:srgbClr val="EFF5F9"/>
+                    </a:solidFill>
+                  </a:tcPr>
+                </a:tc>
+                <a:tc>
+                  <a:txBody>
+                    <a:bodyPr/>
+                    <a:lstStyle/>
+                    <a:p>
+                      <a:pPr indent="0" marL="0">
+                        <a:buNone/>
+                      </a:pPr>
+                      <a:r>
+                        <a:rPr lang="en-US" sz="2400" dirty="0">
+                          <a:solidFill>
+                            <a:srgbClr val="1B2730"/>
+                          </a:solidFill>
+                        </a:rPr>
+                        <a:t>Acceptance above 97% is a failure signal</a:t>
+                      </a:r>
+                      <a:endParaRPr lang="en-US" sz="2400" dirty="0"/>
+                    </a:p>
+                  </a:txBody>
+                  <a:tcPr marL="101600" marR="101600" marT="25400" marB="25400" anchor="ctr">
+                    <a:lnL w="12700" cap="flat" cmpd="sng" algn="ctr">
+                      <a:solidFill>
+                        <a:srgbClr val="D9E3EA"/>
+                      </a:solidFill>
+                      <a:prstDash val="solid"/>
+                      <a:round/>
+                      <a:headEnd type="none" w="med" len="med"/>
+                      <a:tailEnd type="none" w="med" len="med"/>
+                    </a:lnL>
+                    <a:lnR w="12700" cap="flat" cmpd="sng" algn="ctr">
+                      <a:solidFill>
+                        <a:srgbClr val="D9E3EA"/>
+                      </a:solidFill>
+                      <a:prstDash val="solid"/>
+                      <a:round/>
+                      <a:headEnd type="none" w="med" len="med"/>
+                      <a:tailEnd type="none" w="med" len="med"/>
+                    </a:lnR>
+                    <a:lnT w="12700" cap="flat" cmpd="sng" algn="ctr">
+                      <a:solidFill>
+                        <a:srgbClr val="D9E3EA"/>
+                      </a:solidFill>
+                      <a:prstDash val="solid"/>
+                      <a:round/>
+                      <a:headEnd type="none" w="med" len="med"/>
+                      <a:tailEnd type="none" w="med" len="med"/>
+                    </a:lnT>
+                    <a:lnB w="12700" cap="flat" cmpd="sng" algn="ctr">
+                      <a:solidFill>
+                        <a:srgbClr val="D9E3EA"/>
+                      </a:solidFill>
+                      <a:prstDash val="solid"/>
+                      <a:round/>
+                      <a:headEnd type="none" w="med" len="med"/>
+                      <a:tailEnd type="none" w="med" len="med"/>
+                    </a:lnB>
+                    <a:solidFill>
+                      <a:srgbClr val="EFF5F9"/>
+                    </a:solidFill>
+                  </a:tcPr>
+                </a:tc>
+              </a:tr>
+              <a:tr h="530352">
+                <a:tc>
+                  <a:txBody>
+                    <a:bodyPr/>
+                    <a:lstStyle/>
+                    <a:p>
+                      <a:pPr indent="0" marL="0">
+                        <a:buNone/>
+                      </a:pPr>
+                      <a:r>
+                        <a:rPr lang="en-US" sz="2400" b="1" dirty="0">
+                          <a:solidFill>
+                            <a:srgbClr val="24343F"/>
+                          </a:solidFill>
+                        </a:rPr>
+                        <a:t>Oversight costs more  3×4</a:t>
+                      </a:r>
+                      <a:endParaRPr lang="en-US" sz="2400" dirty="0"/>
+                    </a:p>
+                  </a:txBody>
+                  <a:tcPr marL="101600" marR="101600" marT="25400" marB="25400" anchor="ctr">
                     <a:lnL w="12700" cap="flat" cmpd="sng" algn="ctr">
                       <a:solidFill>
                         <a:srgbClr val="D9E3EA"/>
@@ -16007,387 +14285,17 @@
                         <a:buNone/>
                       </a:pPr>
                       <a:r>
-                        <a:rPr lang="en-US" sz="1500" dirty="0">
+                        <a:rPr lang="en-US" sz="2400" dirty="0">
                           <a:solidFill>
                             <a:srgbClr val="1B2730"/>
                           </a:solidFill>
                         </a:rPr>
-                        <a:t>The pilot measures those two numbers. Fixed fee per phase — you can stop at €18,200</a:t>
+                        <a:t>One spine, one review. Instrumented</a:t>
                       </a:r>
-                      <a:endParaRPr lang="en-US" sz="1500" dirty="0"/>
+                      <a:endParaRPr lang="en-US" sz="2400" dirty="0"/>
                     </a:p>
                   </a:txBody>
-                  <a:tcPr marL="76200" marR="76200" marT="38100" marB="38100" anchor="ctr">
-                    <a:lnL w="12700" cap="flat" cmpd="sng" algn="ctr">
-                      <a:solidFill>
-                        <a:srgbClr val="D9E3EA"/>
-                      </a:solidFill>
-                      <a:prstDash val="solid"/>
-                      <a:round/>
-                      <a:headEnd type="none" w="med" len="med"/>
-                      <a:tailEnd type="none" w="med" len="med"/>
-                    </a:lnL>
-                    <a:lnR w="12700" cap="flat" cmpd="sng" algn="ctr">
-                      <a:solidFill>
-                        <a:srgbClr val="D9E3EA"/>
-                      </a:solidFill>
-                      <a:prstDash val="solid"/>
-                      <a:round/>
-                      <a:headEnd type="none" w="med" len="med"/>
-                      <a:tailEnd type="none" w="med" len="med"/>
-                    </a:lnR>
-                    <a:lnT w="12700" cap="flat" cmpd="sng" algn="ctr">
-                      <a:solidFill>
-                        <a:srgbClr val="D9E3EA"/>
-                      </a:solidFill>
-                      <a:prstDash val="solid"/>
-                      <a:round/>
-                      <a:headEnd type="none" w="med" len="med"/>
-                      <a:tailEnd type="none" w="med" len="med"/>
-                    </a:lnT>
-                    <a:lnB w="12700" cap="flat" cmpd="sng" algn="ctr">
-                      <a:solidFill>
-                        <a:srgbClr val="D9E3EA"/>
-                      </a:solidFill>
-                      <a:prstDash val="solid"/>
-                      <a:round/>
-                      <a:headEnd type="none" w="med" len="med"/>
-                      <a:tailEnd type="none" w="med" len="med"/>
-                    </a:lnB>
-                    <a:solidFill>
-                      <a:srgbClr val="FFFFFF"/>
-                    </a:solidFill>
-                  </a:tcPr>
-                </a:tc>
-              </a:tr>
-              <a:tr h="841248">
-                <a:tc>
-                  <a:txBody>
-                    <a:bodyPr/>
-                    <a:lstStyle/>
-                    <a:p>
-                      <a:pPr indent="0" marL="0">
-                        <a:buNone/>
-                      </a:pPr>
-                      <a:r>
-                        <a:rPr lang="en-US" sz="1500" b="1" dirty="0">
-                          <a:solidFill>
-                            <a:srgbClr val="24343F"/>
-                          </a:solidFill>
-                        </a:rPr>
-                        <a:t>Handlers stop reading</a:t>
-                      </a:r>
-                      <a:endParaRPr lang="en-US" sz="1500" dirty="0"/>
-                    </a:p>
-                  </a:txBody>
-                  <a:tcPr marL="76200" marR="76200" marT="38100" marB="38100" anchor="ctr">
-                    <a:lnL w="12700" cap="flat" cmpd="sng" algn="ctr">
-                      <a:solidFill>
-                        <a:srgbClr val="D9E3EA"/>
-                      </a:solidFill>
-                      <a:prstDash val="solid"/>
-                      <a:round/>
-                      <a:headEnd type="none" w="med" len="med"/>
-                      <a:tailEnd type="none" w="med" len="med"/>
-                    </a:lnL>
-                    <a:lnR w="12700" cap="flat" cmpd="sng" algn="ctr">
-                      <a:solidFill>
-                        <a:srgbClr val="D9E3EA"/>
-                      </a:solidFill>
-                      <a:prstDash val="solid"/>
-                      <a:round/>
-                      <a:headEnd type="none" w="med" len="med"/>
-                      <a:tailEnd type="none" w="med" len="med"/>
-                    </a:lnR>
-                    <a:lnT w="12700" cap="flat" cmpd="sng" algn="ctr">
-                      <a:solidFill>
-                        <a:srgbClr val="D9E3EA"/>
-                      </a:solidFill>
-                      <a:prstDash val="solid"/>
-                      <a:round/>
-                      <a:headEnd type="none" w="med" len="med"/>
-                      <a:tailEnd type="none" w="med" len="med"/>
-                    </a:lnT>
-                    <a:lnB w="12700" cap="flat" cmpd="sng" algn="ctr">
-                      <a:solidFill>
-                        <a:srgbClr val="D9E3EA"/>
-                      </a:solidFill>
-                      <a:prstDash val="solid"/>
-                      <a:round/>
-                      <a:headEnd type="none" w="med" len="med"/>
-                      <a:tailEnd type="none" w="med" len="med"/>
-                    </a:lnB>
-                    <a:solidFill>
-                      <a:srgbClr val="FFFFFF"/>
-                    </a:solidFill>
-                  </a:tcPr>
-                </a:tc>
-                <a:tc>
-                  <a:txBody>
-                    <a:bodyPr/>
-                    <a:lstStyle/>
-                    <a:p>
-                      <a:pPr indent="0" marL="0">
-                        <a:buNone/>
-                      </a:pPr>
-                      <a:r>
-                        <a:rPr lang="en-US" sz="1500" dirty="0">
-                          <a:solidFill>
-                            <a:srgbClr val="1B2730"/>
-                          </a:solidFill>
-                        </a:rPr>
-                        <a:t>4 × 4</a:t>
-                      </a:r>
-                      <a:endParaRPr lang="en-US" sz="1500" dirty="0"/>
-                    </a:p>
-                  </a:txBody>
-                  <a:tcPr marL="76200" marR="76200" marT="38100" marB="38100" anchor="ctr">
-                    <a:lnL w="12700" cap="flat" cmpd="sng" algn="ctr">
-                      <a:solidFill>
-                        <a:srgbClr val="D9E3EA"/>
-                      </a:solidFill>
-                      <a:prstDash val="solid"/>
-                      <a:round/>
-                      <a:headEnd type="none" w="med" len="med"/>
-                      <a:tailEnd type="none" w="med" len="med"/>
-                    </a:lnL>
-                    <a:lnR w="12700" cap="flat" cmpd="sng" algn="ctr">
-                      <a:solidFill>
-                        <a:srgbClr val="D9E3EA"/>
-                      </a:solidFill>
-                      <a:prstDash val="solid"/>
-                      <a:round/>
-                      <a:headEnd type="none" w="med" len="med"/>
-                      <a:tailEnd type="none" w="med" len="med"/>
-                    </a:lnR>
-                    <a:lnT w="12700" cap="flat" cmpd="sng" algn="ctr">
-                      <a:solidFill>
-                        <a:srgbClr val="D9E3EA"/>
-                      </a:solidFill>
-                      <a:prstDash val="solid"/>
-                      <a:round/>
-                      <a:headEnd type="none" w="med" len="med"/>
-                      <a:tailEnd type="none" w="med" len="med"/>
-                    </a:lnT>
-                    <a:lnB w="12700" cap="flat" cmpd="sng" algn="ctr">
-                      <a:solidFill>
-                        <a:srgbClr val="D9E3EA"/>
-                      </a:solidFill>
-                      <a:prstDash val="solid"/>
-                      <a:round/>
-                      <a:headEnd type="none" w="med" len="med"/>
-                      <a:tailEnd type="none" w="med" len="med"/>
-                    </a:lnB>
-                    <a:solidFill>
-                      <a:srgbClr val="FFFFFF"/>
-                    </a:solidFill>
-                  </a:tcPr>
-                </a:tc>
-                <a:tc>
-                  <a:txBody>
-                    <a:bodyPr/>
-                    <a:lstStyle/>
-                    <a:p>
-                      <a:pPr indent="0" marL="0">
-                        <a:buNone/>
-                      </a:pPr>
-                      <a:r>
-                        <a:rPr lang="en-US" sz="1500" dirty="0">
-                          <a:solidFill>
-                            <a:srgbClr val="1B2730"/>
-                          </a:solidFill>
-                        </a:rPr>
-                        <a:t>Acceptance above 97% is a failure condition, not a success. Measured per handler</a:t>
-                      </a:r>
-                      <a:endParaRPr lang="en-US" sz="1500" dirty="0"/>
-                    </a:p>
-                  </a:txBody>
-                  <a:tcPr marL="76200" marR="76200" marT="38100" marB="38100" anchor="ctr">
-                    <a:lnL w="12700" cap="flat" cmpd="sng" algn="ctr">
-                      <a:solidFill>
-                        <a:srgbClr val="D9E3EA"/>
-                      </a:solidFill>
-                      <a:prstDash val="solid"/>
-                      <a:round/>
-                      <a:headEnd type="none" w="med" len="med"/>
-                      <a:tailEnd type="none" w="med" len="med"/>
-                    </a:lnL>
-                    <a:lnR w="12700" cap="flat" cmpd="sng" algn="ctr">
-                      <a:solidFill>
-                        <a:srgbClr val="D9E3EA"/>
-                      </a:solidFill>
-                      <a:prstDash val="solid"/>
-                      <a:round/>
-                      <a:headEnd type="none" w="med" len="med"/>
-                      <a:tailEnd type="none" w="med" len="med"/>
-                    </a:lnR>
-                    <a:lnT w="12700" cap="flat" cmpd="sng" algn="ctr">
-                      <a:solidFill>
-                        <a:srgbClr val="D9E3EA"/>
-                      </a:solidFill>
-                      <a:prstDash val="solid"/>
-                      <a:round/>
-                      <a:headEnd type="none" w="med" len="med"/>
-                      <a:tailEnd type="none" w="med" len="med"/>
-                    </a:lnT>
-                    <a:lnB w="12700" cap="flat" cmpd="sng" algn="ctr">
-                      <a:solidFill>
-                        <a:srgbClr val="D9E3EA"/>
-                      </a:solidFill>
-                      <a:prstDash val="solid"/>
-                      <a:round/>
-                      <a:headEnd type="none" w="med" len="med"/>
-                      <a:tailEnd type="none" w="med" len="med"/>
-                    </a:lnB>
-                    <a:solidFill>
-                      <a:srgbClr val="FFFFFF"/>
-                    </a:solidFill>
-                  </a:tcPr>
-                </a:tc>
-              </a:tr>
-              <a:tr h="841248">
-                <a:tc>
-                  <a:txBody>
-                    <a:bodyPr/>
-                    <a:lstStyle/>
-                    <a:p>
-                      <a:pPr indent="0" marL="0">
-                        <a:buNone/>
-                      </a:pPr>
-                      <a:r>
-                        <a:rPr lang="en-US" sz="1500" b="1" dirty="0">
-                          <a:solidFill>
-                            <a:srgbClr val="24343F"/>
-                          </a:solidFill>
-                        </a:rPr>
-                        <a:t>Oversight costs more than it saves</a:t>
-                      </a:r>
-                      <a:endParaRPr lang="en-US" sz="1500" dirty="0"/>
-                    </a:p>
-                  </a:txBody>
-                  <a:tcPr marL="76200" marR="76200" marT="38100" marB="38100" anchor="ctr">
-                    <a:lnL w="12700" cap="flat" cmpd="sng" algn="ctr">
-                      <a:solidFill>
-                        <a:srgbClr val="D9E3EA"/>
-                      </a:solidFill>
-                      <a:prstDash val="solid"/>
-                      <a:round/>
-                      <a:headEnd type="none" w="med" len="med"/>
-                      <a:tailEnd type="none" w="med" len="med"/>
-                    </a:lnL>
-                    <a:lnR w="12700" cap="flat" cmpd="sng" algn="ctr">
-                      <a:solidFill>
-                        <a:srgbClr val="D9E3EA"/>
-                      </a:solidFill>
-                      <a:prstDash val="solid"/>
-                      <a:round/>
-                      <a:headEnd type="none" w="med" len="med"/>
-                      <a:tailEnd type="none" w="med" len="med"/>
-                    </a:lnR>
-                    <a:lnT w="12700" cap="flat" cmpd="sng" algn="ctr">
-                      <a:solidFill>
-                        <a:srgbClr val="D9E3EA"/>
-                      </a:solidFill>
-                      <a:prstDash val="solid"/>
-                      <a:round/>
-                      <a:headEnd type="none" w="med" len="med"/>
-                      <a:tailEnd type="none" w="med" len="med"/>
-                    </a:lnT>
-                    <a:lnB w="12700" cap="flat" cmpd="sng" algn="ctr">
-                      <a:solidFill>
-                        <a:srgbClr val="D9E3EA"/>
-                      </a:solidFill>
-                      <a:prstDash val="solid"/>
-                      <a:round/>
-                      <a:headEnd type="none" w="med" len="med"/>
-                      <a:tailEnd type="none" w="med" len="med"/>
-                    </a:lnB>
-                    <a:solidFill>
-                      <a:srgbClr val="FFFFFF"/>
-                    </a:solidFill>
-                  </a:tcPr>
-                </a:tc>
-                <a:tc>
-                  <a:txBody>
-                    <a:bodyPr/>
-                    <a:lstStyle/>
-                    <a:p>
-                      <a:pPr indent="0" marL="0">
-                        <a:buNone/>
-                      </a:pPr>
-                      <a:r>
-                        <a:rPr lang="en-US" sz="1500" dirty="0">
-                          <a:solidFill>
-                            <a:srgbClr val="1B2730"/>
-                          </a:solidFill>
-                        </a:rPr>
-                        <a:t>3 × 4</a:t>
-                      </a:r>
-                      <a:endParaRPr lang="en-US" sz="1500" dirty="0"/>
-                    </a:p>
-                  </a:txBody>
-                  <a:tcPr marL="76200" marR="76200" marT="38100" marB="38100" anchor="ctr">
-                    <a:lnL w="12700" cap="flat" cmpd="sng" algn="ctr">
-                      <a:solidFill>
-                        <a:srgbClr val="D9E3EA"/>
-                      </a:solidFill>
-                      <a:prstDash val="solid"/>
-                      <a:round/>
-                      <a:headEnd type="none" w="med" len="med"/>
-                      <a:tailEnd type="none" w="med" len="med"/>
-                    </a:lnL>
-                    <a:lnR w="12700" cap="flat" cmpd="sng" algn="ctr">
-                      <a:solidFill>
-                        <a:srgbClr val="D9E3EA"/>
-                      </a:solidFill>
-                      <a:prstDash val="solid"/>
-                      <a:round/>
-                      <a:headEnd type="none" w="med" len="med"/>
-                      <a:tailEnd type="none" w="med" len="med"/>
-                    </a:lnR>
-                    <a:lnT w="12700" cap="flat" cmpd="sng" algn="ctr">
-                      <a:solidFill>
-                        <a:srgbClr val="D9E3EA"/>
-                      </a:solidFill>
-                      <a:prstDash val="solid"/>
-                      <a:round/>
-                      <a:headEnd type="none" w="med" len="med"/>
-                      <a:tailEnd type="none" w="med" len="med"/>
-                    </a:lnT>
-                    <a:lnB w="12700" cap="flat" cmpd="sng" algn="ctr">
-                      <a:solidFill>
-                        <a:srgbClr val="D9E3EA"/>
-                      </a:solidFill>
-                      <a:prstDash val="solid"/>
-                      <a:round/>
-                      <a:headEnd type="none" w="med" len="med"/>
-                      <a:tailEnd type="none" w="med" len="med"/>
-                    </a:lnB>
-                    <a:solidFill>
-                      <a:srgbClr val="FFFFFF"/>
-                    </a:solidFill>
-                  </a:tcPr>
-                </a:tc>
-                <a:tc>
-                  <a:txBody>
-                    <a:bodyPr/>
-                    <a:lstStyle/>
-                    <a:p>
-                      <a:pPr indent="0" marL="0">
-                        <a:buNone/>
-                      </a:pPr>
-                      <a:r>
-                        <a:rPr lang="en-US" sz="1500" dirty="0">
-                          <a:solidFill>
-                            <a:srgbClr val="1B2730"/>
-                          </a:solidFill>
-                        </a:rPr>
-                        <a:t>One spine, so one review covers all three. Instrumented from day one</a:t>
-                      </a:r>
-                      <a:endParaRPr lang="en-US" sz="1500" dirty="0"/>
-                    </a:p>
-                  </a:txBody>
-                  <a:tcPr marL="76200" marR="76200" marT="38100" marB="38100" anchor="ctr">
+                  <a:tcPr marL="101600" marR="101600" marT="25400" marB="25400" anchor="ctr">
                     <a:lnL w="12700" cap="flat" cmpd="sng" algn="ctr">
                       <a:solidFill>
                         <a:srgbClr val="D9E3EA"/>
@@ -16442,8 +14350,8 @@
         </p:nvSpPr>
         <p:spPr>
           <a:xfrm>
-            <a:off x="566928" y="5486400"/>
-            <a:ext cx="11055096" cy="566928"/>
+            <a:off x="566928" y="5102352"/>
+            <a:ext cx="11055096" cy="914400"/>
           </a:xfrm>
           <a:prstGeom prst="rect">
             <a:avLst/>
@@ -16462,8 +14370,8 @@
         </p:nvSpPr>
         <p:spPr>
           <a:xfrm>
-            <a:off x="566928" y="5486400"/>
-            <a:ext cx="82296" cy="566928"/>
+            <a:off x="566928" y="5102352"/>
+            <a:ext cx="82296" cy="914400"/>
           </a:xfrm>
           <a:prstGeom prst="rect">
             <a:avLst/>
@@ -16482,8 +14390,8 @@
         </p:nvSpPr>
         <p:spPr>
           <a:xfrm>
-            <a:off x="822960" y="5486400"/>
-            <a:ext cx="10597896" cy="566928"/>
+            <a:off x="822960" y="5102352"/>
+            <a:ext cx="10597896" cy="914400"/>
           </a:xfrm>
           <a:prstGeom prst="rect">
             <a:avLst/>
@@ -16499,7 +14407,7 @@
               <a:buNone/>
             </a:pPr>
             <a:r>
-              <a:rPr lang="en-US" sz="1700" dirty="0">
+              <a:rPr lang="en-US" sz="2400" b="1" dirty="0">
                 <a:solidFill>
                   <a:srgbClr val="000000"/>
                 </a:solidFill>
@@ -16507,9 +14415,9 @@
                 <a:ea typeface="Calibri" pitchFamily="34" charset="-122"/>
                 <a:cs typeface="Calibri" pitchFamily="34" charset="-120"/>
               </a:rPr>
-              <a:t>Twelve risks scored in full — regulatory, technical, ethical, operational. These are the top three.</a:t>
-            </a:r>
-            <a:endParaRPr lang="en-US" sz="1700" dirty="0"/>
+              <a:t>Twelve risks scored in full. These are the top three.</a:t>
+            </a:r>
+            <a:endParaRPr lang="en-US" sz="2400" dirty="0"/>
           </a:p>
         </p:txBody>
       </p:sp>
@@ -16676,7 +14584,7 @@
         <p:spPr>
           <a:xfrm>
             <a:off x="566928" y="1481328"/>
-            <a:ext cx="11055096" cy="676656"/>
+            <a:ext cx="11055096" cy="1078992"/>
           </a:xfrm>
           <a:prstGeom prst="rect">
             <a:avLst/>
@@ -16696,7 +14604,7 @@
         <p:spPr>
           <a:xfrm>
             <a:off x="566928" y="1481328"/>
-            <a:ext cx="82296" cy="676656"/>
+            <a:ext cx="82296" cy="1078992"/>
           </a:xfrm>
           <a:prstGeom prst="rect">
             <a:avLst/>
@@ -16716,7 +14624,7 @@
         <p:spPr>
           <a:xfrm>
             <a:off x="822960" y="1481328"/>
-            <a:ext cx="10597896" cy="676656"/>
+            <a:ext cx="10597896" cy="1078992"/>
           </a:xfrm>
           <a:prstGeom prst="rect">
             <a:avLst/>
@@ -16732,7 +14640,7 @@
               <a:buNone/>
             </a:pPr>
             <a:r>
-              <a:rPr lang="en-US" sz="1050" b="1" spc="100" kern="0" dirty="0">
+              <a:rPr lang="en-US" sz="2400" b="1" spc="100" kern="0" dirty="0">
                 <a:solidFill>
                   <a:srgbClr val="2A78D6"/>
                 </a:solidFill>
@@ -16746,7 +14654,7 @@
               <a:buNone/>
             </a:pPr>
             <a:r>
-              <a:rPr lang="en-US" sz="1300" dirty="0">
+              <a:rPr lang="en-US" sz="2400" dirty="0">
                 <a:solidFill>
                   <a:srgbClr val="1B2730"/>
                 </a:solidFill>
@@ -16754,9 +14662,9 @@
                 <a:ea typeface="Calibri" pitchFamily="34" charset="-122"/>
                 <a:cs typeface="Calibri" pitchFamily="34" charset="-120"/>
               </a:rPr>
-              <a:t>Not high-risk under the AI Act — and the reason matters more than the label.</a:t>
-            </a:r>
-            <a:endParaRPr lang="en-US" sz="1050" dirty="0"/>
+              <a:t>Not high-risk — and the reason matters more than the label.</a:t>
+            </a:r>
+            <a:endParaRPr lang="en-US" sz="2400" dirty="0"/>
           </a:p>
         </p:txBody>
       </p:sp>
@@ -16858,8 +14766,8 @@
         </p:nvSpPr>
         <p:spPr>
           <a:xfrm>
-            <a:off x="566928" y="2395728"/>
-            <a:ext cx="5390388" cy="2651760"/>
+            <a:off x="566928" y="2798064"/>
+            <a:ext cx="5390388" cy="2286000"/>
           </a:xfrm>
           <a:prstGeom prst="rect">
             <a:avLst/>
@@ -16890,8 +14798,8 @@
         </p:nvSpPr>
         <p:spPr>
           <a:xfrm>
-            <a:off x="566928" y="2395728"/>
-            <a:ext cx="5390388" cy="457200"/>
+            <a:off x="566928" y="2798064"/>
+            <a:ext cx="5390388" cy="566928"/>
           </a:xfrm>
           <a:prstGeom prst="rect">
             <a:avLst/>
@@ -16910,8 +14818,8 @@
         </p:nvSpPr>
         <p:spPr>
           <a:xfrm>
-            <a:off x="768096" y="2395728"/>
-            <a:ext cx="5024628" cy="457200"/>
+            <a:off x="768096" y="2798064"/>
+            <a:ext cx="5024628" cy="566928"/>
           </a:xfrm>
           <a:prstGeom prst="rect">
             <a:avLst/>
@@ -16927,7 +14835,7 @@
               <a:buNone/>
             </a:pPr>
             <a:r>
-              <a:rPr lang="en-US" sz="1900" b="1" spc="200" kern="0" dirty="0">
+              <a:rPr lang="en-US" sz="2400" b="1" spc="200" kern="0" dirty="0">
                 <a:solidFill>
                   <a:srgbClr val="FFFFFF"/>
                 </a:solidFill>
@@ -16937,7 +14845,7 @@
               </a:rPr>
               <a:t>EU AI ACT</a:t>
             </a:r>
-            <a:endParaRPr lang="en-US" sz="1900" dirty="0"/>
+            <a:endParaRPr lang="en-US" sz="2400" dirty="0"/>
           </a:p>
         </p:txBody>
       </p:sp>
@@ -16949,8 +14857,8 @@
         </p:nvSpPr>
         <p:spPr>
           <a:xfrm>
-            <a:off x="768096" y="2962656"/>
-            <a:ext cx="4988052" cy="1920240"/>
+            <a:off x="768096" y="3364992"/>
+            <a:ext cx="4988052" cy="1554480"/>
           </a:xfrm>
           <a:prstGeom prst="rect">
             <a:avLst/>
@@ -16964,13 +14872,13 @@
           <a:p>
             <a:pPr marL="152400" indent="-152400">
               <a:spcAft>
-                <a:spcPts val="900"/>
+                <a:spcPts val="600"/>
               </a:spcAft>
               <a:buSzPct val="100000"/>
               <a:buChar char="•"/>
             </a:pPr>
             <a:r>
-              <a:rPr lang="en-US" sz="1700" dirty="0">
+              <a:rPr lang="en-US" sz="2400" dirty="0">
                 <a:solidFill>
                   <a:srgbClr val="1B2730"/>
                 </a:solidFill>
@@ -16978,20 +14886,20 @@
                 <a:ea typeface="Calibri" pitchFamily="34" charset="-122"/>
                 <a:cs typeface="Calibri" pitchFamily="34" charset="-120"/>
               </a:rPr>
-              <a:t>Not Annex III. It never touches creditworthiness</a:t>
-            </a:r>
-            <a:endParaRPr lang="en-US" sz="1700" dirty="0"/>
+              <a:t>Not Annex III — never creditworthiness</a:t>
+            </a:r>
+            <a:endParaRPr lang="en-US" sz="2400" dirty="0"/>
           </a:p>
           <a:p>
             <a:pPr marL="152400" indent="-152400">
               <a:spcAft>
-                <a:spcPts val="900"/>
+                <a:spcPts val="600"/>
               </a:spcAft>
               <a:buSzPct val="100000"/>
               <a:buChar char="•"/>
             </a:pPr>
             <a:r>
-              <a:rPr lang="en-US" sz="1700" dirty="0">
+              <a:rPr lang="en-US" sz="2400" dirty="0">
                 <a:solidFill>
                   <a:srgbClr val="1B2730"/>
                 </a:solidFill>
@@ -16999,20 +14907,20 @@
                 <a:ea typeface="Calibri" pitchFamily="34" charset="-122"/>
                 <a:cs typeface="Calibri" pitchFamily="34" charset="-120"/>
               </a:rPr>
-              <a:t>Article 4 AI literacy applies today, whatever the tier</a:t>
-            </a:r>
-            <a:endParaRPr lang="en-US" sz="1700" dirty="0"/>
+              <a:t>Art. 50 transparency applies</a:t>
+            </a:r>
+            <a:endParaRPr lang="en-US" sz="2400" dirty="0"/>
           </a:p>
           <a:p>
             <a:pPr marL="152400" indent="-152400">
               <a:spcAft>
-                <a:spcPts val="900"/>
+                <a:spcPts val="600"/>
               </a:spcAft>
               <a:buSzPct val="100000"/>
               <a:buChar char="•"/>
             </a:pPr>
             <a:r>
-              <a:rPr lang="en-US" sz="1700" dirty="0">
+              <a:rPr lang="en-US" sz="2400" dirty="0">
                 <a:solidFill>
                   <a:srgbClr val="1B2730"/>
                 </a:solidFill>
@@ -17020,9 +14928,9 @@
                 <a:ea typeface="Calibri" pitchFamily="34" charset="-122"/>
                 <a:cs typeface="Calibri" pitchFamily="34" charset="-120"/>
               </a:rPr>
-              <a:t>Two questions for your counsel, both on anomaly flagging</a:t>
-            </a:r>
-            <a:endParaRPr lang="en-US" sz="1700" dirty="0"/>
+              <a:t>Art. 4 AI literacy applies today</a:t>
+            </a:r>
+            <a:endParaRPr lang="en-US" sz="2400" dirty="0"/>
           </a:p>
         </p:txBody>
       </p:sp>
@@ -17034,8 +14942,8 @@
         </p:nvSpPr>
         <p:spPr>
           <a:xfrm>
-            <a:off x="6231636" y="2395728"/>
-            <a:ext cx="5390388" cy="2651760"/>
+            <a:off x="6231636" y="2798064"/>
+            <a:ext cx="5390388" cy="2286000"/>
           </a:xfrm>
           <a:prstGeom prst="rect">
             <a:avLst/>
@@ -17066,8 +14974,8 @@
         </p:nvSpPr>
         <p:spPr>
           <a:xfrm>
-            <a:off x="6231636" y="2395728"/>
-            <a:ext cx="5390388" cy="457200"/>
+            <a:off x="6231636" y="2798064"/>
+            <a:ext cx="5390388" cy="566928"/>
           </a:xfrm>
           <a:prstGeom prst="rect">
             <a:avLst/>
@@ -17086,8 +14994,8 @@
         </p:nvSpPr>
         <p:spPr>
           <a:xfrm>
-            <a:off x="6432804" y="2395728"/>
-            <a:ext cx="5024628" cy="457200"/>
+            <a:off x="6432804" y="2798064"/>
+            <a:ext cx="5024628" cy="566928"/>
           </a:xfrm>
           <a:prstGeom prst="rect">
             <a:avLst/>
@@ -17103,7 +15011,7 @@
               <a:buNone/>
             </a:pPr>
             <a:r>
-              <a:rPr lang="en-US" sz="1900" b="1" spc="200" kern="0" dirty="0">
+              <a:rPr lang="en-US" sz="2400" b="1" spc="200" kern="0" dirty="0">
                 <a:solidFill>
                   <a:srgbClr val="FFFFFF"/>
                 </a:solidFill>
@@ -17113,7 +15021,7 @@
               </a:rPr>
               <a:t>GDPR</a:t>
             </a:r>
-            <a:endParaRPr lang="en-US" sz="1900" dirty="0"/>
+            <a:endParaRPr lang="en-US" sz="2400" dirty="0"/>
           </a:p>
         </p:txBody>
       </p:sp>
@@ -17125,8 +15033,8 @@
         </p:nvSpPr>
         <p:spPr>
           <a:xfrm>
-            <a:off x="6432804" y="2962656"/>
-            <a:ext cx="4988052" cy="1920240"/>
+            <a:off x="6432804" y="3364992"/>
+            <a:ext cx="4988052" cy="1554480"/>
           </a:xfrm>
           <a:prstGeom prst="rect">
             <a:avLst/>
@@ -17140,65 +15048,65 @@
           <a:p>
             <a:pPr marL="152400" indent="-152400">
               <a:spcAft>
-                <a:spcPts val="900"/>
+                <a:spcPts val="600"/>
               </a:spcAft>
               <a:buSzPct val="100000"/>
               <a:buChar char="•"/>
             </a:pPr>
             <a:r>
-              <a:rPr lang="en-US" sz="1700" dirty="0">
+              <a:rPr lang="en-US" sz="2400" dirty="0">
                 <a:solidFill>
-                  <a:srgbClr val="1B2730"/>
+                  <a:srgbClr val="6B7C88"/>
                 </a:solidFill>
                 <a:latin typeface="Calibri" pitchFamily="34" charset="0"/>
                 <a:ea typeface="Calibri" pitchFamily="34" charset="-122"/>
                 <a:cs typeface="Calibri" pitchFamily="34" charset="-120"/>
               </a:rPr>
-              <a:t>You are the controller, and also the provider</a:t>
-            </a:r>
-            <a:endParaRPr lang="en-US" sz="1700" dirty="0"/>
+              <a:t>You are controller and provider</a:t>
+            </a:r>
+            <a:endParaRPr lang="en-US" sz="2400" dirty="0"/>
           </a:p>
           <a:p>
             <a:pPr marL="152400" indent="-152400">
               <a:spcAft>
-                <a:spcPts val="900"/>
+                <a:spcPts val="600"/>
               </a:spcAft>
               <a:buSzPct val="100000"/>
               <a:buChar char="•"/>
             </a:pPr>
             <a:r>
-              <a:rPr lang="en-US" sz="1700" dirty="0">
+              <a:rPr lang="en-US" sz="2400" dirty="0">
                 <a:solidFill>
-                  <a:srgbClr val="1B2730"/>
+                  <a:srgbClr val="6B7C88"/>
                 </a:solidFill>
                 <a:latin typeface="Calibri" pitchFamily="34" charset="0"/>
                 <a:ea typeface="Calibri" pitchFamily="34" charset="-122"/>
                 <a:cs typeface="Calibri" pitchFamily="34" charset="-120"/>
               </a:rPr>
-              <a:t>The narrative goes to the model in full — pseudonyms protect the reference, not the content</a:t>
-            </a:r>
-            <a:endParaRPr lang="en-US" sz="1700" dirty="0"/>
+              <a:t>The narrative goes to the model in full</a:t>
+            </a:r>
+            <a:endParaRPr lang="en-US" sz="2400" dirty="0"/>
           </a:p>
           <a:p>
             <a:pPr marL="152400" indent="-152400">
               <a:spcAft>
-                <a:spcPts val="900"/>
+                <a:spcPts val="600"/>
               </a:spcAft>
               <a:buSzPct val="100000"/>
               <a:buChar char="•"/>
             </a:pPr>
             <a:r>
-              <a:rPr lang="en-US" sz="1700" dirty="0">
+              <a:rPr lang="en-US" sz="2400" dirty="0">
                 <a:solidFill>
-                  <a:srgbClr val="1B2730"/>
+                  <a:srgbClr val="6B7C88"/>
                 </a:solidFill>
                 <a:latin typeface="Calibri" pitchFamily="34" charset="0"/>
                 <a:ea typeface="Calibri" pitchFamily="34" charset="-122"/>
                 <a:cs typeface="Calibri" pitchFamily="34" charset="-120"/>
               </a:rPr>
-              <a:t>Transfer work is a gate before any pilot on real data</a:t>
-            </a:r>
-            <a:endParaRPr lang="en-US" sz="1700" dirty="0"/>
+              <a:t>Transfer work gates any pilot</a:t>
+            </a:r>
+            <a:endParaRPr lang="en-US" sz="2400" dirty="0"/>
           </a:p>
         </p:txBody>
       </p:sp>
@@ -17210,8 +15118,8 @@
         </p:nvSpPr>
         <p:spPr>
           <a:xfrm>
-            <a:off x="566928" y="5303520"/>
-            <a:ext cx="11055096" cy="640080"/>
+            <a:off x="566928" y="5321808"/>
+            <a:ext cx="11055096" cy="914400"/>
           </a:xfrm>
           <a:prstGeom prst="rect">
             <a:avLst/>
@@ -17230,8 +15138,8 @@
         </p:nvSpPr>
         <p:spPr>
           <a:xfrm>
-            <a:off x="566928" y="5303520"/>
-            <a:ext cx="82296" cy="640080"/>
+            <a:off x="566928" y="5321808"/>
+            <a:ext cx="82296" cy="914400"/>
           </a:xfrm>
           <a:prstGeom prst="rect">
             <a:avLst/>
@@ -17250,8 +15158,8 @@
         </p:nvSpPr>
         <p:spPr>
           <a:xfrm>
-            <a:off x="822960" y="5303520"/>
-            <a:ext cx="10597896" cy="640080"/>
+            <a:off x="822960" y="5321808"/>
+            <a:ext cx="10597896" cy="914400"/>
           </a:xfrm>
           <a:prstGeom prst="rect">
             <a:avLst/>
@@ -17267,31 +15175,17 @@
               <a:buNone/>
             </a:pPr>
             <a:r>
-              <a:rPr lang="en-US" sz="1700" dirty="0">
+              <a:rPr lang="en-US" sz="2400" b="1" dirty="0">
                 <a:solidFill>
-                  <a:srgbClr val="1B2730"/>
+                  <a:srgbClr val="000000"/>
                 </a:solidFill>
                 <a:latin typeface="Calibri" pitchFamily="34" charset="0"/>
                 <a:ea typeface="Calibri" pitchFamily="34" charset="-122"/>
                 <a:cs typeface="Calibri" pitchFamily="34" charset="-120"/>
               </a:rPr>
-              <a:t>What holds it out of the high-risk tier is a design property: </a:t>
-            </a:r>
-            <a:pPr indent="0" marL="0">
-              <a:buNone/>
-            </a:pPr>
-            <a:r>
-              <a:rPr lang="en-US" sz="1700" b="1" dirty="0">
-                <a:solidFill>
-                  <a:srgbClr val="24343F"/>
-                </a:solidFill>
-                <a:latin typeface="Calibri" pitchFamily="34" charset="0"/>
-                <a:ea typeface="Calibri" pitchFamily="34" charset="-122"/>
-                <a:cs typeface="Calibri" pitchFamily="34" charset="-120"/>
-              </a:rPr>
-              <a:t>it proposes, a person decides.</a:t>
-            </a:r>
-            <a:endParaRPr lang="en-US" sz="1700" dirty="0"/>
+              <a:t>It proposes, a person decides. That is what holds the tier.</a:t>
+            </a:r>
+            <a:endParaRPr lang="en-US" sz="2400" dirty="0"/>
           </a:p>
         </p:txBody>
       </p:sp>
@@ -17458,7 +15352,7 @@
         <p:spPr>
           <a:xfrm>
             <a:off x="566928" y="1481328"/>
-            <a:ext cx="11055096" cy="676656"/>
+            <a:ext cx="11055096" cy="1078992"/>
           </a:xfrm>
           <a:prstGeom prst="rect">
             <a:avLst/>
@@ -17478,7 +15372,7 @@
         <p:spPr>
           <a:xfrm>
             <a:off x="566928" y="1481328"/>
-            <a:ext cx="82296" cy="676656"/>
+            <a:ext cx="82296" cy="1078992"/>
           </a:xfrm>
           <a:prstGeom prst="rect">
             <a:avLst/>
@@ -17498,7 +15392,7 @@
         <p:spPr>
           <a:xfrm>
             <a:off x="822960" y="1481328"/>
-            <a:ext cx="10597896" cy="676656"/>
+            <a:ext cx="10597896" cy="1078992"/>
           </a:xfrm>
           <a:prstGeom prst="rect">
             <a:avLst/>
@@ -17514,7 +15408,7 @@
               <a:buNone/>
             </a:pPr>
             <a:r>
-              <a:rPr lang="en-US" sz="1050" b="1" spc="100" kern="0" dirty="0">
+              <a:rPr lang="en-US" sz="2400" b="1" spc="100" kern="0" dirty="0">
                 <a:solidFill>
                   <a:srgbClr val="2A78D6"/>
                 </a:solidFill>
@@ -17528,7 +15422,7 @@
               <a:buNone/>
             </a:pPr>
             <a:r>
-              <a:rPr lang="en-US" sz="1300" dirty="0">
+              <a:rPr lang="en-US" sz="2400" dirty="0">
                 <a:solidFill>
                   <a:srgbClr val="1B2730"/>
                 </a:solidFill>
@@ -17536,9 +15430,9 @@
                 <a:ea typeface="Calibri" pitchFamily="34" charset="-122"/>
                 <a:cs typeface="Calibri" pitchFamily="34" charset="-120"/>
               </a:rPr>
-              <a:t>Shadow mode first: it proposes alongside your team, nobody acts on it, and we measure the gap.</a:t>
-            </a:r>
-            <a:endParaRPr lang="en-US" sz="1050" dirty="0"/>
+              <a:t>Shadow mode first. Nobody acts on it.</a:t>
+            </a:r>
+            <a:endParaRPr lang="en-US" sz="2400" dirty="0"/>
           </a:p>
         </p:txBody>
       </p:sp>
@@ -17640,7 +15534,7 @@
         </p:nvSpPr>
         <p:spPr>
           <a:xfrm>
-            <a:off x="2348484" y="2779776"/>
+            <a:off x="2348484" y="3182112"/>
             <a:ext cx="7491984" cy="0"/>
           </a:xfrm>
           <a:prstGeom prst="line">
@@ -17663,7 +15557,7 @@
         </p:nvSpPr>
         <p:spPr>
           <a:xfrm>
-            <a:off x="1964436" y="2395728"/>
+            <a:off x="1964436" y="2798064"/>
             <a:ext cx="768096" cy="768096"/>
           </a:xfrm>
           <a:prstGeom prst="ellipse">
@@ -17688,7 +15582,7 @@
         </p:nvSpPr>
         <p:spPr>
           <a:xfrm>
-            <a:off x="1964436" y="2395728"/>
+            <a:off x="1964436" y="2798064"/>
             <a:ext cx="768096" cy="768096"/>
           </a:xfrm>
           <a:prstGeom prst="rect">
@@ -17705,7 +15599,7 @@
               <a:buNone/>
             </a:pPr>
             <a:r>
-              <a:rPr lang="en-US" sz="2200" b="1" dirty="0">
+              <a:rPr lang="en-US" sz="2400" b="1" dirty="0">
                 <a:solidFill>
                   <a:srgbClr val="1D2A32"/>
                 </a:solidFill>
@@ -17715,7 +15609,7 @@
               </a:rPr>
               <a:t>0</a:t>
             </a:r>
-            <a:endParaRPr lang="en-US" sz="2200" dirty="0"/>
+            <a:endParaRPr lang="en-US" sz="2400" dirty="0"/>
           </a:p>
         </p:txBody>
       </p:sp>
@@ -17727,8 +15621,8 @@
         </p:nvSpPr>
         <p:spPr>
           <a:xfrm>
-            <a:off x="566928" y="3355848"/>
-            <a:ext cx="3563112" cy="1554480"/>
+            <a:off x="566928" y="3758184"/>
+            <a:ext cx="3563112" cy="1325880"/>
           </a:xfrm>
           <a:prstGeom prst="rect">
             <a:avLst/>
@@ -17759,8 +15653,8 @@
         </p:nvSpPr>
         <p:spPr>
           <a:xfrm>
-            <a:off x="658368" y="3465576"/>
-            <a:ext cx="3380232" cy="640080"/>
+            <a:off x="658368" y="3867912"/>
+            <a:ext cx="3380232" cy="822960"/>
           </a:xfrm>
           <a:prstGeom prst="rect">
             <a:avLst/>
@@ -17776,7 +15670,7 @@
               <a:buNone/>
             </a:pPr>
             <a:r>
-              <a:rPr lang="en-US" sz="1700" b="1" dirty="0">
+              <a:rPr lang="en-US" sz="2400" b="1" dirty="0">
                 <a:solidFill>
                   <a:srgbClr val="24343F"/>
                 </a:solidFill>
@@ -17786,53 +15680,36 @@
               </a:rPr>
               <a:t>Discovery</a:t>
             </a:r>
-            <a:endParaRPr lang="en-US" sz="1700" dirty="0"/>
-          </a:p>
+            <a:endParaRPr lang="en-US" sz="2400" dirty="0"/>
+          </a:p>
+        </p:txBody>
+      </p:sp>
+      <p:sp>
+        <p:nvSpPr>
+          <p:cNvPr id="17" name="Text 14"/>
+          <p:cNvSpPr/>
+          <p:nvPr/>
+        </p:nvSpPr>
+        <p:spPr>
+          <a:xfrm>
+            <a:off x="676656" y="4361688"/>
+            <a:ext cx="3343656" cy="685800"/>
+          </a:xfrm>
+          <a:prstGeom prst="rect">
+            <a:avLst/>
+          </a:prstGeom>
+          <a:noFill/>
+          <a:ln/>
+        </p:spPr>
+        <p:txBody>
+          <a:bodyPr wrap="square" lIns="0" tIns="0" rIns="0" bIns="0" rtlCol="0" anchor="t"/>
+          <a:lstStyle/>
           <a:p>
             <a:pPr algn="ctr" indent="0" marL="0">
               <a:buNone/>
             </a:pPr>
             <a:r>
-              <a:rPr lang="en-US" sz="1700" b="1" dirty="0">
-                <a:solidFill>
-                  <a:srgbClr val="24343F"/>
-                </a:solidFill>
-                <a:latin typeface="Trebuchet MS" pitchFamily="34" charset="0"/>
-                <a:ea typeface="Trebuchet MS" pitchFamily="34" charset="-122"/>
-                <a:cs typeface="Trebuchet MS" pitchFamily="34" charset="-120"/>
-              </a:rPr>
-              <a:t>€5,600 · 4 weeks</a:t>
-            </a:r>
-            <a:endParaRPr lang="en-US" sz="1700" dirty="0"/>
-          </a:p>
-        </p:txBody>
-      </p:sp>
-      <p:sp>
-        <p:nvSpPr>
-          <p:cNvPr id="17" name="Text 14"/>
-          <p:cNvSpPr/>
-          <p:nvPr/>
-        </p:nvSpPr>
-        <p:spPr>
-          <a:xfrm>
-            <a:off x="676656" y="3959352"/>
-            <a:ext cx="3343656" cy="914400"/>
-          </a:xfrm>
-          <a:prstGeom prst="rect">
-            <a:avLst/>
-          </a:prstGeom>
-          <a:noFill/>
-          <a:ln/>
-        </p:spPr>
-        <p:txBody>
-          <a:bodyPr wrap="square" lIns="0" tIns="0" rIns="0" bIns="0" rtlCol="0" anchor="t"/>
-          <a:lstStyle/>
-          <a:p>
-            <a:pPr algn="ctr" indent="0" marL="0">
-              <a:buNone/>
-            </a:pPr>
-            <a:r>
-              <a:rPr lang="en-US" sz="1400" dirty="0">
+              <a:rPr lang="en-US" sz="2400" dirty="0">
                 <a:solidFill>
                   <a:srgbClr val="1B2730"/>
                 </a:solidFill>
@@ -17840,9 +15717,9 @@
                 <a:ea typeface="Calibri" pitchFamily="34" charset="-122"/>
                 <a:cs typeface="Calibri" pitchFamily="34" charset="-120"/>
               </a:rPr>
-              <a:t>Two of your handlers label 300 complaints. That ground truth is worth buying even if you never build this.</a:t>
-            </a:r>
-            <a:endParaRPr lang="en-US" sz="1400" dirty="0"/>
+              <a:t>€5,600 · 4 weeks</a:t>
+            </a:r>
+            <a:endParaRPr lang="en-US" sz="2400" dirty="0"/>
           </a:p>
         </p:txBody>
       </p:sp>
@@ -17854,7 +15731,7 @@
         </p:nvSpPr>
         <p:spPr>
           <a:xfrm>
-            <a:off x="5710428" y="2395728"/>
+            <a:off x="5710428" y="2798064"/>
             <a:ext cx="768096" cy="768096"/>
           </a:xfrm>
           <a:prstGeom prst="ellipse">
@@ -17879,7 +15756,7 @@
         </p:nvSpPr>
         <p:spPr>
           <a:xfrm>
-            <a:off x="5710428" y="2395728"/>
+            <a:off x="5710428" y="2798064"/>
             <a:ext cx="768096" cy="768096"/>
           </a:xfrm>
           <a:prstGeom prst="rect">
@@ -17896,7 +15773,7 @@
               <a:buNone/>
             </a:pPr>
             <a:r>
-              <a:rPr lang="en-US" sz="2200" b="1" dirty="0">
+              <a:rPr lang="en-US" sz="2400" b="1" dirty="0">
                 <a:solidFill>
                   <a:srgbClr val="FFFFFF"/>
                 </a:solidFill>
@@ -17906,7 +15783,7 @@
               </a:rPr>
               <a:t>1</a:t>
             </a:r>
-            <a:endParaRPr lang="en-US" sz="2200" dirty="0"/>
+            <a:endParaRPr lang="en-US" sz="2400" dirty="0"/>
           </a:p>
         </p:txBody>
       </p:sp>
@@ -17918,8 +15795,8 @@
         </p:nvSpPr>
         <p:spPr>
           <a:xfrm>
-            <a:off x="4312920" y="3355848"/>
-            <a:ext cx="3563112" cy="1554480"/>
+            <a:off x="4312920" y="3758184"/>
+            <a:ext cx="3563112" cy="1325880"/>
           </a:xfrm>
           <a:prstGeom prst="rect">
             <a:avLst/>
@@ -17950,8 +15827,8 @@
         </p:nvSpPr>
         <p:spPr>
           <a:xfrm>
-            <a:off x="4404360" y="3465576"/>
-            <a:ext cx="3380232" cy="640080"/>
+            <a:off x="4404360" y="3867912"/>
+            <a:ext cx="3380232" cy="822960"/>
           </a:xfrm>
           <a:prstGeom prst="rect">
             <a:avLst/>
@@ -17967,7 +15844,7 @@
               <a:buNone/>
             </a:pPr>
             <a:r>
-              <a:rPr lang="en-US" sz="1700" b="1" dirty="0">
+              <a:rPr lang="en-US" sz="2400" b="1" dirty="0">
                 <a:solidFill>
                   <a:srgbClr val="24343F"/>
                 </a:solidFill>
@@ -17977,53 +15854,36 @@
               </a:rPr>
               <a:t>Pilot</a:t>
             </a:r>
-            <a:endParaRPr lang="en-US" sz="1700" dirty="0"/>
-          </a:p>
+            <a:endParaRPr lang="en-US" sz="2400" dirty="0"/>
+          </a:p>
+        </p:txBody>
+      </p:sp>
+      <p:sp>
+        <p:nvSpPr>
+          <p:cNvPr id="22" name="Text 19"/>
+          <p:cNvSpPr/>
+          <p:nvPr/>
+        </p:nvSpPr>
+        <p:spPr>
+          <a:xfrm>
+            <a:off x="4422648" y="4361688"/>
+            <a:ext cx="3343656" cy="685800"/>
+          </a:xfrm>
+          <a:prstGeom prst="rect">
+            <a:avLst/>
+          </a:prstGeom>
+          <a:noFill/>
+          <a:ln/>
+        </p:spPr>
+        <p:txBody>
+          <a:bodyPr wrap="square" lIns="0" tIns="0" rIns="0" bIns="0" rtlCol="0" anchor="t"/>
+          <a:lstStyle/>
           <a:p>
             <a:pPr algn="ctr" indent="0" marL="0">
               <a:buNone/>
             </a:pPr>
             <a:r>
-              <a:rPr lang="en-US" sz="1700" b="1" dirty="0">
-                <a:solidFill>
-                  <a:srgbClr val="24343F"/>
-                </a:solidFill>
-                <a:latin typeface="Trebuchet MS" pitchFamily="34" charset="0"/>
-                <a:ea typeface="Trebuchet MS" pitchFamily="34" charset="-122"/>
-                <a:cs typeface="Trebuchet MS" pitchFamily="34" charset="-120"/>
-              </a:rPr>
-              <a:t>€12,600 · 12 weeks</a:t>
-            </a:r>
-            <a:endParaRPr lang="en-US" sz="1700" dirty="0"/>
-          </a:p>
-        </p:txBody>
-      </p:sp>
-      <p:sp>
-        <p:nvSpPr>
-          <p:cNvPr id="22" name="Text 19"/>
-          <p:cNvSpPr/>
-          <p:nvPr/>
-        </p:nvSpPr>
-        <p:spPr>
-          <a:xfrm>
-            <a:off x="4422648" y="3959352"/>
-            <a:ext cx="3343656" cy="914400"/>
-          </a:xfrm>
-          <a:prstGeom prst="rect">
-            <a:avLst/>
-          </a:prstGeom>
-          <a:noFill/>
-          <a:ln/>
-        </p:spPr>
-        <p:txBody>
-          <a:bodyPr wrap="square" lIns="0" tIns="0" rIns="0" bIns="0" rtlCol="0" anchor="t"/>
-          <a:lstStyle/>
-          <a:p>
-            <a:pPr algn="ctr" indent="0" marL="0">
-              <a:buNone/>
-            </a:pPr>
-            <a:r>
-              <a:rPr lang="en-US" sz="1400" dirty="0">
+              <a:rPr lang="en-US" sz="2400" dirty="0">
                 <a:solidFill>
                   <a:srgbClr val="1B2730"/>
                 </a:solidFill>
@@ -18031,9 +15891,9 @@
                 <a:ea typeface="Calibri" pitchFamily="34" charset="-122"/>
                 <a:cs typeface="Calibri" pitchFamily="34" charset="-120"/>
               </a:rPr>
-              <a:t>All three running in shadow for 60 days. Zero operational risk. Ends in a go / no-go.</a:t>
-            </a:r>
-            <a:endParaRPr lang="en-US" sz="1400" dirty="0"/>
+              <a:t>€12,600 · 12 weeks</a:t>
+            </a:r>
+            <a:endParaRPr lang="en-US" sz="2400" dirty="0"/>
           </a:p>
         </p:txBody>
       </p:sp>
@@ -18045,7 +15905,7 @@
         </p:nvSpPr>
         <p:spPr>
           <a:xfrm>
-            <a:off x="9456420" y="2395728"/>
+            <a:off x="9456420" y="2798064"/>
             <a:ext cx="768096" cy="768096"/>
           </a:xfrm>
           <a:prstGeom prst="ellipse">
@@ -18070,7 +15930,7 @@
         </p:nvSpPr>
         <p:spPr>
           <a:xfrm>
-            <a:off x="9456420" y="2395728"/>
+            <a:off x="9456420" y="2798064"/>
             <a:ext cx="768096" cy="768096"/>
           </a:xfrm>
           <a:prstGeom prst="rect">
@@ -18087,7 +15947,7 @@
               <a:buNone/>
             </a:pPr>
             <a:r>
-              <a:rPr lang="en-US" sz="2200" b="1" dirty="0">
+              <a:rPr lang="en-US" sz="2400" b="1" dirty="0">
                 <a:solidFill>
                   <a:srgbClr val="FFFFFF"/>
                 </a:solidFill>
@@ -18097,7 +15957,7 @@
               </a:rPr>
               <a:t>2</a:t>
             </a:r>
-            <a:endParaRPr lang="en-US" sz="2200" dirty="0"/>
+            <a:endParaRPr lang="en-US" sz="2400" dirty="0"/>
           </a:p>
         </p:txBody>
       </p:sp>
@@ -18109,8 +15969,8 @@
         </p:nvSpPr>
         <p:spPr>
           <a:xfrm>
-            <a:off x="8058912" y="3355848"/>
-            <a:ext cx="3563112" cy="1554480"/>
+            <a:off x="8058912" y="3758184"/>
+            <a:ext cx="3563112" cy="1325880"/>
           </a:xfrm>
           <a:prstGeom prst="rect">
             <a:avLst/>
@@ -18141,8 +16001,8 @@
         </p:nvSpPr>
         <p:spPr>
           <a:xfrm>
-            <a:off x="8150352" y="3465576"/>
-            <a:ext cx="3380232" cy="640080"/>
+            <a:off x="8150352" y="3867912"/>
+            <a:ext cx="3380232" cy="822960"/>
           </a:xfrm>
           <a:prstGeom prst="rect">
             <a:avLst/>
@@ -18158,7 +16018,7 @@
               <a:buNone/>
             </a:pPr>
             <a:r>
-              <a:rPr lang="en-US" sz="1700" b="1" dirty="0">
+              <a:rPr lang="en-US" sz="2400" b="1" dirty="0">
                 <a:solidFill>
                   <a:srgbClr val="24343F"/>
                 </a:solidFill>
@@ -18168,53 +16028,36 @@
               </a:rPr>
               <a:t>Deploy</a:t>
             </a:r>
-            <a:endParaRPr lang="en-US" sz="1700" dirty="0"/>
-          </a:p>
+            <a:endParaRPr lang="en-US" sz="2400" dirty="0"/>
+          </a:p>
+        </p:txBody>
+      </p:sp>
+      <p:sp>
+        <p:nvSpPr>
+          <p:cNvPr id="27" name="Text 24"/>
+          <p:cNvSpPr/>
+          <p:nvPr/>
+        </p:nvSpPr>
+        <p:spPr>
+          <a:xfrm>
+            <a:off x="8168640" y="4361688"/>
+            <a:ext cx="3343656" cy="685800"/>
+          </a:xfrm>
+          <a:prstGeom prst="rect">
+            <a:avLst/>
+          </a:prstGeom>
+          <a:noFill/>
+          <a:ln/>
+        </p:spPr>
+        <p:txBody>
+          <a:bodyPr wrap="square" lIns="0" tIns="0" rIns="0" bIns="0" rtlCol="0" anchor="t"/>
+          <a:lstStyle/>
           <a:p>
             <a:pPr algn="ctr" indent="0" marL="0">
               <a:buNone/>
             </a:pPr>
             <a:r>
-              <a:rPr lang="en-US" sz="1700" b="1" dirty="0">
-                <a:solidFill>
-                  <a:srgbClr val="24343F"/>
-                </a:solidFill>
-                <a:latin typeface="Trebuchet MS" pitchFamily="34" charset="0"/>
-                <a:ea typeface="Trebuchet MS" pitchFamily="34" charset="-122"/>
-                <a:cs typeface="Trebuchet MS" pitchFamily="34" charset="-120"/>
-              </a:rPr>
-              <a:t>€14,000 · 10 weeks</a:t>
-            </a:r>
-            <a:endParaRPr lang="en-US" sz="1700" dirty="0"/>
-          </a:p>
-        </p:txBody>
-      </p:sp>
-      <p:sp>
-        <p:nvSpPr>
-          <p:cNvPr id="27" name="Text 24"/>
-          <p:cNvSpPr/>
-          <p:nvPr/>
-        </p:nvSpPr>
-        <p:spPr>
-          <a:xfrm>
-            <a:off x="8168640" y="3959352"/>
-            <a:ext cx="3343656" cy="914400"/>
-          </a:xfrm>
-          <a:prstGeom prst="rect">
-            <a:avLst/>
-          </a:prstGeom>
-          <a:noFill/>
-          <a:ln/>
-        </p:spPr>
-        <p:txBody>
-          <a:bodyPr wrap="square" lIns="0" tIns="0" rIns="0" bIns="0" rtlCol="0" anchor="t"/>
-          <a:lstStyle/>
-          <a:p>
-            <a:pPr algn="ctr" indent="0" marL="0">
-              <a:buNone/>
-            </a:pPr>
-            <a:r>
-              <a:rPr lang="en-US" sz="1400" dirty="0">
+              <a:rPr lang="en-US" sz="2400" dirty="0">
                 <a:solidFill>
                   <a:srgbClr val="1B2730"/>
                 </a:solidFill>
@@ -18222,9 +16065,9 @@
                 <a:ea typeface="Calibri" pitchFamily="34" charset="-122"/>
                 <a:cs typeface="Calibri" pitchFamily="34" charset="-120"/>
               </a:rPr>
-              <a:t>Only if accuracy ≥80%, acceptance 75–97%, and zero ungrounded outputs reached a handler.</a:t>
-            </a:r>
-            <a:endParaRPr lang="en-US" sz="1400" dirty="0"/>
+              <a:t>€14,000 · 10 weeks</a:t>
+            </a:r>
+            <a:endParaRPr lang="en-US" sz="2400" dirty="0"/>
           </a:p>
         </p:txBody>
       </p:sp>
@@ -18236,8 +16079,8 @@
         </p:nvSpPr>
         <p:spPr>
           <a:xfrm>
-            <a:off x="566928" y="5138928"/>
-            <a:ext cx="11055096" cy="640080"/>
+            <a:off x="566928" y="5321808"/>
+            <a:ext cx="11055096" cy="914400"/>
           </a:xfrm>
           <a:prstGeom prst="rect">
             <a:avLst/>
@@ -18256,8 +16099,8 @@
         </p:nvSpPr>
         <p:spPr>
           <a:xfrm>
-            <a:off x="566928" y="5138928"/>
-            <a:ext cx="82296" cy="640080"/>
+            <a:off x="566928" y="5321808"/>
+            <a:ext cx="82296" cy="914400"/>
           </a:xfrm>
           <a:prstGeom prst="rect">
             <a:avLst/>
@@ -18276,8 +16119,8 @@
         </p:nvSpPr>
         <p:spPr>
           <a:xfrm>
-            <a:off x="822960" y="5138928"/>
-            <a:ext cx="10597896" cy="640080"/>
+            <a:off x="822960" y="5321808"/>
+            <a:ext cx="10597896" cy="914400"/>
           </a:xfrm>
           <a:prstGeom prst="rect">
             <a:avLst/>
@@ -18293,7 +16136,7 @@
               <a:buNone/>
             </a:pPr>
             <a:r>
-              <a:rPr lang="en-US" sz="1700" dirty="0">
+              <a:rPr lang="en-US" sz="2400" b="1" dirty="0">
                 <a:solidFill>
                   <a:srgbClr val="000000"/>
                 </a:solidFill>
@@ -18301,9 +16144,9 @@
                 <a:ea typeface="Calibri" pitchFamily="34" charset="-122"/>
                 <a:cs typeface="Calibri" pitchFamily="34" charset="-120"/>
               </a:rPr>
-              <a:t>Commercially: a licensed product implemented by consulting — not SaaS, not a bespoke build.</a:t>
-            </a:r>
-            <a:endParaRPr lang="en-US" sz="1700" dirty="0"/>
+              <a:t>Greenlight: accuracy ≥80%, acceptance 75–97%, zero ungrounded.</a:t>
+            </a:r>
+            <a:endParaRPr lang="en-US" sz="2400" dirty="0"/>
           </a:p>
         </p:txBody>
       </p:sp>

--- a/presentation.pptx
+++ b/presentation.pptx
@@ -4563,7 +4563,7 @@
                 <a:ea typeface="Calibri" pitchFamily="34" charset="-122"/>
                 <a:cs typeface="Calibri" pitchFamily="34" charset="-120"/>
               </a:rPr>
-              <a:t>Self-agreement, same input twice</a:t>
+              <a:t>Self-agreement, exact queue</a:t>
             </a:r>
             <a:endParaRPr lang="en-US" sz="2400" dirty="0"/>
           </a:p>
@@ -11289,6 +11289,45 @@
         <p:spPr>
           <a:xfrm>
             <a:off x="822960" y="4809744"/>
+            <a:ext cx="10545775" cy="475488"/>
+          </a:xfrm>
+          <a:prstGeom prst="rect">
+            <a:avLst/>
+          </a:prstGeom>
+          <a:noFill/>
+          <a:ln/>
+        </p:spPr>
+        <p:txBody>
+          <a:bodyPr wrap="square" lIns="0" tIns="0" rIns="0" bIns="0" rtlCol="0" anchor="t"/>
+          <a:lstStyle/>
+          <a:p>
+            <a:pPr indent="0" marL="0">
+              <a:buNone/>
+            </a:pPr>
+            <a:r>
+              <a:rPr lang="en-US" sz="2400" dirty="0">
+                <a:solidFill>
+                  <a:srgbClr val="1A1A1A"/>
+                </a:solidFill>
+                <a:latin typeface="Calibri" pitchFamily="34" charset="0"/>
+                <a:ea typeface="Calibri" pitchFamily="34" charset="-122"/>
+                <a:cs typeface="Calibri" pitchFamily="34" charset="-120"/>
+              </a:rPr>
+              <a:t>Phase 1 runs in shadow — nobody acts on it, nothing changes for a customer.</a:t>
+            </a:r>
+            <a:endParaRPr lang="en-US" sz="2400" dirty="0"/>
+          </a:p>
+        </p:txBody>
+      </p:sp>
+      <p:sp>
+        <p:nvSpPr>
+          <p:cNvPr id="19" name="Text 17"/>
+          <p:cNvSpPr/>
+          <p:nvPr/>
+        </p:nvSpPr>
+        <p:spPr>
+          <a:xfrm>
+            <a:off x="822960" y="5559552"/>
             <a:ext cx="10545775" cy="475488"/>
           </a:xfrm>
           <a:prstGeom prst="rect">

--- a/presentation.pptx
+++ b/presentation.pptx
@@ -967,6 +967,22 @@
           <a:p/>
           <a:p>
             <a:r>
+              <a:t>Fifty-seven per cent is the model we actually run, gpt-4o-mini. The bigger model gets sixty</a:t>
+            </a:r>
+          </a:p>
+          <a:p>
+            <a:r>
+              <a:t>and a half for nearly seventeen times the cost per complaint — three and a half points, and</a:t>
+            </a:r>
+          </a:p>
+          <a:p>
+            <a:r>
+              <a:t>the interval at this sample size is wider than that. So the bottleneck is not the model.</a:t>
+            </a:r>
+          </a:p>
+          <a:p/>
+          <a:p>
+            <a:r>
               <a:t>Ask it the same complaint twice and it answers the same way nine times in ten. So it's</a:t>
             </a:r>
           </a:p>
@@ -1086,7 +1102,7 @@
           <a:p/>
           <a:p>
             <a:r>
-              <a:t>It's the same trap as the sixty per cent, and I've bound the caveat to the figure in the</a:t>
+              <a:t>It's the same trap as the agreement figure, and I've bound the caveat to the figure in the</a:t>
             </a:r>
           </a:p>
           <a:p>
@@ -4198,7 +4214,7 @@
                 <a:ea typeface="Trebuchet MS" pitchFamily="34" charset="-122"/>
                 <a:cs typeface="Trebuchet MS" pitchFamily="34" charset="-120"/>
               </a:rPr>
-              <a:t>Why 60.5% is not accuracy</a:t>
+              <a:t>Why 56.8% is not accuracy</a:t>
             </a:r>
             <a:endParaRPr lang="en-US" sz="3200" dirty="0"/>
           </a:p>
@@ -4462,7 +4478,7 @@
                 <a:ea typeface="Calibri" pitchFamily="34" charset="-122"/>
                 <a:cs typeface="Calibri" pitchFamily="34" charset="-120"/>
               </a:rPr>
-              <a:t>Agreement with CFPB labels</a:t>
+              <a:t>Agreement with CFPB labels — gpt-4o-mini</a:t>
             </a:r>
             <a:endParaRPr lang="en-US" sz="2400" dirty="0"/>
           </a:p>
@@ -4501,7 +4517,7 @@
                 <a:ea typeface="Calibri" pitchFamily="34" charset="-122"/>
                 <a:cs typeface="Calibri" pitchFamily="34" charset="-120"/>
               </a:rPr>
-              <a:t>60.5%</a:t>
+              <a:t>56.8%</a:t>
             </a:r>
             <a:endParaRPr lang="en-US" sz="2400" dirty="0"/>
           </a:p>
@@ -4563,7 +4579,7 @@
                 <a:ea typeface="Calibri" pitchFamily="34" charset="-122"/>
                 <a:cs typeface="Calibri" pitchFamily="34" charset="-120"/>
               </a:rPr>
-              <a:t>Self-agreement, exact queue</a:t>
+              <a:t>The same on gpt-4o, at 16.7× the cost</a:t>
             </a:r>
             <a:endParaRPr lang="en-US" sz="2400" dirty="0"/>
           </a:p>
@@ -4602,7 +4618,7 @@
                 <a:ea typeface="Calibri" pitchFamily="34" charset="-122"/>
                 <a:cs typeface="Calibri" pitchFamily="34" charset="-120"/>
               </a:rPr>
-              <a:t>88.0%</a:t>
+              <a:t>60.5%</a:t>
             </a:r>
             <a:endParaRPr lang="en-US" sz="2400" dirty="0"/>
           </a:p>
@@ -4664,7 +4680,7 @@
                 <a:ea typeface="Calibri" pitchFamily="34" charset="-122"/>
                 <a:cs typeface="Calibri" pitchFamily="34" charset="-120"/>
               </a:rPr>
-              <a:t>Fabricated quotes caught</a:t>
+              <a:t>Self-agreement, same input — gpt-4o</a:t>
             </a:r>
             <a:endParaRPr lang="en-US" sz="2400" dirty="0"/>
           </a:p>
@@ -4703,6 +4719,107 @@
                 <a:ea typeface="Calibri" pitchFamily="34" charset="-122"/>
                 <a:cs typeface="Calibri" pitchFamily="34" charset="-120"/>
               </a:rPr>
+              <a:t>88.0%</a:t>
+            </a:r>
+            <a:endParaRPr lang="en-US" sz="2400" dirty="0"/>
+          </a:p>
+        </p:txBody>
+      </p:sp>
+      <p:sp>
+        <p:nvSpPr>
+          <p:cNvPr id="18" name="Shape 16"/>
+          <p:cNvSpPr/>
+          <p:nvPr/>
+        </p:nvSpPr>
+        <p:spPr>
+          <a:xfrm>
+            <a:off x="822960" y="4480560"/>
+            <a:ext cx="10545775" cy="0"/>
+          </a:xfrm>
+          <a:prstGeom prst="line">
+            <a:avLst/>
+          </a:prstGeom>
+          <a:noFill/>
+          <a:ln w="12700">
+            <a:solidFill>
+              <a:srgbClr val="E0E0E0"/>
+            </a:solidFill>
+            <a:prstDash val="solid"/>
+          </a:ln>
+        </p:spPr>
+      </p:sp>
+      <p:sp>
+        <p:nvSpPr>
+          <p:cNvPr id="19" name="Text 17"/>
+          <p:cNvSpPr/>
+          <p:nvPr/>
+        </p:nvSpPr>
+        <p:spPr>
+          <a:xfrm>
+            <a:off x="822960" y="4480560"/>
+            <a:ext cx="6960212" cy="713232"/>
+          </a:xfrm>
+          <a:prstGeom prst="rect">
+            <a:avLst/>
+          </a:prstGeom>
+          <a:noFill/>
+          <a:ln/>
+        </p:spPr>
+        <p:txBody>
+          <a:bodyPr wrap="square" lIns="0" tIns="0" rIns="0" bIns="0" rtlCol="0" anchor="ctr"/>
+          <a:lstStyle/>
+          <a:p>
+            <a:pPr indent="0" marL="0">
+              <a:buNone/>
+            </a:pPr>
+            <a:r>
+              <a:rPr lang="en-US" sz="2400" dirty="0">
+                <a:solidFill>
+                  <a:srgbClr val="1A1A1A"/>
+                </a:solidFill>
+                <a:latin typeface="Calibri" pitchFamily="34" charset="0"/>
+                <a:ea typeface="Calibri" pitchFamily="34" charset="-122"/>
+                <a:cs typeface="Calibri" pitchFamily="34" charset="-120"/>
+              </a:rPr>
+              <a:t>Fabricated quotes caught</a:t>
+            </a:r>
+            <a:endParaRPr lang="en-US" sz="2400" dirty="0"/>
+          </a:p>
+        </p:txBody>
+      </p:sp>
+      <p:sp>
+        <p:nvSpPr>
+          <p:cNvPr id="20" name="Text 18"/>
+          <p:cNvSpPr/>
+          <p:nvPr/>
+        </p:nvSpPr>
+        <p:spPr>
+          <a:xfrm>
+            <a:off x="7783172" y="4480560"/>
+            <a:ext cx="3585564" cy="713232"/>
+          </a:xfrm>
+          <a:prstGeom prst="rect">
+            <a:avLst/>
+          </a:prstGeom>
+          <a:noFill/>
+          <a:ln/>
+        </p:spPr>
+        <p:txBody>
+          <a:bodyPr wrap="square" lIns="0" tIns="0" rIns="0" bIns="0" rtlCol="0" anchor="ctr"/>
+          <a:lstStyle/>
+          <a:p>
+            <a:pPr algn="r" indent="0" marL="0">
+              <a:buNone/>
+            </a:pPr>
+            <a:r>
+              <a:rPr lang="en-US" sz="2400" b="1" dirty="0">
+                <a:solidFill>
+                  <a:srgbClr val="1A1A1A"/>
+                </a:solidFill>
+                <a:latin typeface="Calibri" pitchFamily="34" charset="0"/>
+                <a:ea typeface="Calibri" pitchFamily="34" charset="-122"/>
+                <a:cs typeface="Calibri" pitchFamily="34" charset="-120"/>
+              </a:rPr>
               <a:t>4 of 60</a:t>
             </a:r>
             <a:endParaRPr lang="en-US" sz="2400" dirty="0"/>
@@ -4711,13 +4828,13 @@
       </p:sp>
       <p:sp>
         <p:nvSpPr>
-          <p:cNvPr id="18" name="Text 16"/>
-          <p:cNvSpPr/>
-          <p:nvPr/>
-        </p:nvSpPr>
-        <p:spPr>
-          <a:xfrm>
-            <a:off x="822960" y="4864608"/>
+          <p:cNvPr id="21" name="Text 19"/>
+          <p:cNvSpPr/>
+          <p:nvPr/>
+        </p:nvSpPr>
+        <p:spPr>
+          <a:xfrm>
+            <a:off x="822960" y="5577840"/>
             <a:ext cx="10545775" cy="475488"/>
           </a:xfrm>
           <a:prstGeom prst="rect">
@@ -4742,7 +4859,7 @@
                 <a:ea typeface="Calibri" pitchFamily="34" charset="-122"/>
                 <a:cs typeface="Calibri" pitchFamily="34" charset="-120"/>
               </a:rPr>
-              <a:t>Those labels were picked by the complainant, not by an expert.</a:t>
+              <a:t>Consistent with itself, and the labels were picked by a complainant.</a:t>
             </a:r>
             <a:endParaRPr lang="en-US" sz="2400" dirty="0"/>
           </a:p>
@@ -5132,7 +5249,7 @@
                 <a:ea typeface="Calibri" pitchFamily="34" charset="-122"/>
                 <a:cs typeface="Calibri" pitchFamily="34" charset="-120"/>
               </a:rPr>
-              <a:t>Same trap as the 60.5%. Only a pilot on real traffic settles it.</a:t>
+              <a:t>Same trap as the agreement figure. Only a pilot settles it.</a:t>
             </a:r>
             <a:endParaRPr lang="en-US" sz="2400" dirty="0"/>
           </a:p>

--- a/presentation.pptx
+++ b/presentation.pptx
@@ -3780,7 +3780,7 @@
                 <a:ea typeface="Calibri"/>
                 <a:cs typeface="Calibri"/>
               </a:rPr>
-              <a:t>Agreement with complainant-selected labels · gpt-4o</a:t>
+              <a:t>Complainant labels · gpt-4o-mini (deployed) / gpt-4o</a:t>
             </a:r>
             <a:endParaRPr sz="2400"/>
           </a:p>
@@ -3826,7 +3826,7 @@
                 <a:ea typeface="Calibri"/>
                 <a:cs typeface="Calibri"/>
               </a:rPr>
-              <a:t>60.5%</a:t>
+              <a:t>56.8% / 60.5%</a:t>
             </a:r>
             <a:endParaRPr sz="2400"/>
           </a:p>
@@ -11189,7 +11189,7 @@
                 <a:ea typeface="Calibri"/>
                 <a:cs typeface="Calibri"/>
               </a:rPr>
-              <a:t>€18,200 reaches the deployment decision.</a:t>
+              <a:t>€18,200 reaches the deployment decision. Nobody acts on a suggestion in shadow.</a:t>
             </a:r>
             <a:endParaRPr sz="2400"/>
           </a:p>

--- a/presentation.pptx
+++ b/presentation.pptx
@@ -1561,7 +1561,7 @@
           <a:lstStyle xmlns:a="http://schemas.openxmlformats.org/drawingml/2006/main"/>
           <a:p xmlns:a="http://schemas.openxmlformats.org/drawingml/2006/main">
             <a:r>
-              <a:t>At 2,426 complaints a year, bespoke deployment returns minus 31 per cent over 36 months and breaks even in month 69. About 3,800 complaints are needed. Productising the build across five firms produces a positive 36-month return; moving oversight in-house improves it further. The pilot must prove value before deployment and avoid making one firm fund the entire build.</a:t>
+              <a:t>At 2,426 complaints a year, bespoke deployment returns minus 31 per cent over 36 months and breaks even in month 69. About 3,800 complaints are needed. Productising the build across five firms produces a positive 36-month return; moving oversight in-house improves it further. The pilot must prove value before deployment and avoid making one firm fund the entire build.  Of the 17,326 euro annual value, 9,918 is cash the firm does not spend: ombudsman case fees avoided at 650 pounds each, and fraud redress avoided by catching it earlier. The remaining 7,408 is displaced time, and displaced time is not a saving unless the hours are actually removed or redeployed. Three minutes on 2,426 complaints is 121 hours a year, which is seven per cent of one person. The model does not bank it. So the case rests on four avoided ombudsman referrals a year, and that is exactly what the shadow pilot is built to measure.</a:t>
             </a:r>
           </a:p>
           <a:p xmlns:a="http://schemas.openxmlformats.org/drawingml/2006/main">
@@ -9541,6 +9541,52 @@
           </a:p>
         </p:txBody>
       </p:sp>
+      <p:sp>
+        <p:nvSpPr>
+          <p:cNvPr id="19" name="Text 17">
+            <a:extLst xmlns:a="http://schemas.openxmlformats.org/drawingml/2006/main">
+              <a:ext uri="{FF2B5EF4-FFF2-40B4-BE49-F238E27FC236}">
+                <a16:creationId xmlns:a16="http://schemas.microsoft.com/office/drawing/2014/main" id="{ED24CD4C-9A82-4463-9BCD-BB4D966F4284}"/>
+              </a:ext>
+            </a:extLst>
+          </p:cNvPr>
+          <p:cNvSpPr>
+            <a:spLocks xmlns:a="http://schemas.openxmlformats.org/drawingml/2006/main" noGrp="1"/>
+          </p:cNvSpPr>
+          <p:nvPr/>
+        </p:nvSpPr>
+        <p:spPr>
+          <a:xfrm xmlns:a="http://schemas.openxmlformats.org/drawingml/2006/main">
+            <a:off x="822960" y="5806440"/>
+            <a:ext cx="10545775" cy="475488"/>
+          </a:xfrm>
+          <a:prstGeom xmlns:a="http://schemas.openxmlformats.org/drawingml/2006/main" prst="rect">
+            <a:avLst/>
+          </a:prstGeom>
+          <a:noFill xmlns:a="http://schemas.openxmlformats.org/drawingml/2006/main"/>
+        </p:spPr>
+        <p:txBody>
+          <a:bodyPr xmlns:a="http://schemas.openxmlformats.org/drawingml/2006/main" wrap="square" lIns="0" tIns="0" rIns="0" bIns="0" anchor="t"/>
+          <a:lstStyle xmlns:a="http://schemas.openxmlformats.org/drawingml/2006/main"/>
+          <a:p xmlns:a="http://schemas.openxmlformats.org/drawingml/2006/main">
+            <a:pPr marL="0" indent="0">
+              <a:buNone/>
+            </a:pPr>
+            <a:r>
+              <a:rPr sz="2400">
+                <a:solidFill>
+                  <a:srgbClr val="1A1A1A"/>
+                </a:solidFill>
+                <a:latin typeface="Calibri"/>
+                <a:ea typeface="Calibri"/>
+                <a:cs typeface="Calibri"/>
+              </a:rPr>
+              <a:t>€9,918 of €17,326 is cash — ombudsman fees and fraud losses, not saved time.</a:t>
+            </a:r>
+            <a:endParaRPr sz="2400"/>
+          </a:p>
+        </p:txBody>
+      </p:sp>
     </p:spTree>
     <p:extLst>
       <p:ext uri="{BB962C8B-B14F-4D97-AF65-F5344CB8AC3E}">

--- a/presentation.pptx
+++ b/presentation.pptx
@@ -4072,7 +4072,7 @@
                 <a:ea typeface="Calibri"/>
                 <a:cs typeface="Calibri"/>
               </a:rPr>
-              <a:t>97.1%</a:t>
+              <a:t>97.9%</a:t>
             </a:r>
             <a:endParaRPr sz="2400"/>
           </a:p>

--- a/presentation.pptx
+++ b/presentation.pptx
@@ -12,6 +12,7 @@
     <p:sldId xmlns:r="http://schemas.openxmlformats.org/officeDocument/2006/relationships" id="257" r:id="Rabd75e8a123942b8"/>
     <p:sldId xmlns:r="http://schemas.openxmlformats.org/officeDocument/2006/relationships" id="258" r:id="R73e0ab36edd44f16"/>
     <p:sldId xmlns:r="http://schemas.openxmlformats.org/officeDocument/2006/relationships" id="259" r:id="Rb88c45f22d35449a"/>
+    <p:sldId xmlns:ns0="http://schemas.openxmlformats.org/officeDocument/2006/relationships" id="271" ns0:id="rId22"/>
     <p:sldId xmlns:r="http://schemas.openxmlformats.org/officeDocument/2006/relationships" id="260" r:id="Rfa4ddc816b674769"/>
     <p:sldId xmlns:r="http://schemas.openxmlformats.org/officeDocument/2006/relationships" id="261" r:id="R79e21b5645694fab"/>
     <p:sldId xmlns:r="http://schemas.openxmlformats.org/officeDocument/2006/relationships" id="262" r:id="R516202b2ceff499b"/>
@@ -1127,6 +1128,115 @@
   </p:cSld>
   <p:clrMapOvr>
     <a:masterClrMapping xmlns:a="http://schemas.openxmlformats.org/drawingml/2006/main"/>
+  </p:clrMapOvr>
+</p:notes>
+</file>
+
+<file path=ppt/notesSlides/notesSlide16.xml><?xml version="1.0" encoding="utf-8"?>
+<p:notes xmlns:a="http://schemas.openxmlformats.org/drawingml/2006/main" xmlns:p="http://schemas.openxmlformats.org/presentationml/2006/main" xmlns:r="http://schemas.openxmlformats.org/officeDocument/2006/relationships">
+  <p:cSld>
+    <p:spTree>
+      <p:nvGrpSpPr>
+        <p:cNvPr id="1" name=""/>
+        <p:cNvGrpSpPr/>
+        <p:nvPr/>
+      </p:nvGrpSpPr>
+      <p:grpSpPr>
+        <a:xfrm>
+          <a:off x="0" y="0"/>
+          <a:ext cx="0" cy="0"/>
+          <a:chOff x="0" y="0"/>
+          <a:chExt cx="0" cy="0"/>
+        </a:xfrm>
+      </p:grpSpPr>
+      <p:sp>
+        <p:nvSpPr>
+          <p:cNvPr id="2" name="Slide Image Placeholder 1"/>
+          <p:cNvSpPr>
+            <a:spLocks noGrp="1"/>
+          </p:cNvSpPr>
+          <p:nvPr>
+            <p:ph type="sldImg" idx="2"/>
+          </p:nvPr>
+        </p:nvSpPr>
+        <p:spPr/>
+      </p:sp>
+      <p:sp>
+        <p:nvSpPr>
+          <p:cNvPr id="3" name="Notes Placeholder 2"/>
+          <p:cNvSpPr>
+            <a:spLocks noGrp="1"/>
+          </p:cNvSpPr>
+          <p:nvPr>
+            <p:ph type="body" idx="3" sz="quarter"/>
+          </p:nvPr>
+        </p:nvSpPr>
+        <p:spPr/>
+        <p:txBody>
+          <a:bodyPr/>
+          <a:lstStyle/>
+          <a:p>
+            <a:r>
+              <a:t>Read it left to right, one row at a time. Three jobs, three different reasons they are hard today, and three different ways a proposal gets made — the AI only chooses in triage. For anomalies rules pick the case and the AI explains it; for reporting the figures are computed and the AI writes them up. Two of the three proposals are not the AI's call at all.</a:t>
+            </a:r>
+          </a:p>
+          <a:p/>
+          <a:p>
+            <a:r>
+              <a:t>The third column is where it stops being a demo. Each capability has to prove its answer against something the system already holds: the customer's own sentence, the transaction record, the computed sheet. Same six checks, same order — only the proof differs.</a:t>
+            </a:r>
+          </a:p>
+          <a:p/>
+          <a:p>
+            <a:r>
+              <a:t>Then one person, for all three, and their decision is stored beside the proposal. That pairing is what makes agreement and override rates measurable later.</a:t>
+            </a:r>
+          </a:p>
+          <a:p/>
+          <a:p>
+            <a:r>
+              <a:t>[If asked which six checks] In scope, the model replied, the reply is readable, what it named exists, confident enough, evidence really there. It stops at the first failure, so a refusal always names exactly one reason.</a:t>
+            </a:r>
+          </a:p>
+          <a:p/>
+          <a:p>
+            <a:r>
+              <a:t>[Sources]</a:t>
+            </a:r>
+          </a:p>
+          <a:p>
+            <a:r>
+              <a:t>- `mvp/spine.py`, the six stages and twelve reason codes</a:t>
+            </a:r>
+          </a:p>
+          <a:p>
+            <a:r>
+              <a:t>- `mvp/capabilities/`, what each capability submits as evidence</a:t>
+            </a:r>
+          </a:p>
+          <a:p>
+            <a:r>
+              <a:t>- `use_case_definition.md`, the three problems named in column one</a:t>
+            </a:r>
+          </a:p>
+        </p:txBody>
+      </p:sp>
+      <p:sp>
+        <p:nvSpPr>
+          <p:cNvPr id="4" name="Slide Number Placeholder 3"/>
+          <p:cNvSpPr>
+            <a:spLocks noGrp="1"/>
+          </p:cNvSpPr>
+          <p:nvPr>
+            <p:ph type="sldNum" idx="5" sz="quarter"/>
+          </p:nvPr>
+        </p:nvSpPr>
+        <p:spPr/>
+      </p:sp>
+    </p:spTree>
+  </p:cSld>
+  <p:clrMapOvr>
+    <a:masterClrMapping/>
   </p:clrMapOvr>
 </p:notes>
 </file>
@@ -2759,7 +2869,7 @@
           <p:cNvPr id="2" name="Text 0">
             <a:extLst xmlns:a="http://schemas.openxmlformats.org/drawingml/2006/main">
               <a:ext uri="{FF2B5EF4-FFF2-40B4-BE49-F238E27FC236}">
-                <a16:creationId xmlns:a16="http://schemas.microsoft.com/office/drawing/2014/main" id="{308563F3-AA93-4360-A229-BE6CC75D800C}"/>
+                <a16:creationId xmlns:a16="http://schemas.microsoft.com/office/drawing/2014/main" id="{0AC23C2F-5DD1-4357-AA70-587A7DE6374B}"/>
               </a:ext>
             </a:extLst>
           </p:cNvPr>
@@ -2794,7 +2904,7 @@
                 <a:ea typeface="Trebuchet MS"/>
                 <a:cs typeface="Trebuchet MS"/>
               </a:rPr>
-              <a:t>The MVP makes every proposal accountable</a:t>
+              <a:t>The programme earns each next step</a:t>
             </a:r>
             <a:endParaRPr sz="3200"/>
           </a:p>
@@ -2805,7 +2915,7 @@
           <p:cNvPr id="3" name="Shape 1">
             <a:extLst xmlns:a="http://schemas.openxmlformats.org/drawingml/2006/main">
               <a:ext uri="{FF2B5EF4-FFF2-40B4-BE49-F238E27FC236}">
-                <a16:creationId xmlns:a16="http://schemas.microsoft.com/office/drawing/2014/main" id="{64B79335-1158-4015-89BD-D52A1020F851}"/>
+                <a16:creationId xmlns:a16="http://schemas.microsoft.com/office/drawing/2014/main" id="{3F6C2007-D7BE-46D2-9445-C55D9392A447}"/>
               </a:ext>
             </a:extLst>
           </p:cNvPr>
@@ -2836,7 +2946,7 @@
           <p:cNvPr id="4" name="Shape 2">
             <a:extLst xmlns:a="http://schemas.openxmlformats.org/drawingml/2006/main">
               <a:ext uri="{FF2B5EF4-FFF2-40B4-BE49-F238E27FC236}">
-                <a16:creationId xmlns:a16="http://schemas.microsoft.com/office/drawing/2014/main" id="{2283EF32-1CED-4A83-9177-95F4E178BB6A}"/>
+                <a16:creationId xmlns:a16="http://schemas.microsoft.com/office/drawing/2014/main" id="{891083A5-37F5-4952-BBAE-2A7B32228296}"/>
               </a:ext>
             </a:extLst>
           </p:cNvPr>
@@ -2867,7 +2977,7 @@
           <p:cNvPr id="5" name="Text 3">
             <a:extLst xmlns:a="http://schemas.openxmlformats.org/drawingml/2006/main">
               <a:ext uri="{FF2B5EF4-FFF2-40B4-BE49-F238E27FC236}">
-                <a16:creationId xmlns:a16="http://schemas.microsoft.com/office/drawing/2014/main" id="{18321AA6-144B-485E-A342-12869C04B26E}"/>
+                <a16:creationId xmlns:a16="http://schemas.microsoft.com/office/drawing/2014/main" id="{DA435F72-37F5-4464-B655-82F9C7FDFF94}"/>
               </a:ext>
             </a:extLst>
           </p:cNvPr>
@@ -2913,7 +3023,7 @@
           <p:cNvPr id="6" name="Text 4">
             <a:extLst xmlns:a="http://schemas.openxmlformats.org/drawingml/2006/main">
               <a:ext uri="{FF2B5EF4-FFF2-40B4-BE49-F238E27FC236}">
-                <a16:creationId xmlns:a16="http://schemas.microsoft.com/office/drawing/2014/main" id="{87A61F7A-A481-43D7-AB54-290F77813C44}"/>
+                <a16:creationId xmlns:a16="http://schemas.microsoft.com/office/drawing/2014/main" id="{A8FB78A4-8745-434B-AAA7-838895409356}"/>
               </a:ext>
             </a:extLst>
           </p:cNvPr>
@@ -2949,6 +3059,788 @@
                 <a:cs typeface="Calibri"/>
               </a:rPr>
               <a:t>9</a:t>
+            </a:r>
+            <a:endParaRPr sz="900"/>
+          </a:p>
+        </p:txBody>
+      </p:sp>
+      <p:sp>
+        <p:nvSpPr>
+          <p:cNvPr id="7" name="Text 5">
+            <a:extLst xmlns:a="http://schemas.openxmlformats.org/drawingml/2006/main">
+              <a:ext uri="{FF2B5EF4-FFF2-40B4-BE49-F238E27FC236}">
+                <a16:creationId xmlns:a16="http://schemas.microsoft.com/office/drawing/2014/main" id="{66ADF4B7-39F1-45F5-A0ED-3C53C700F125}"/>
+              </a:ext>
+            </a:extLst>
+          </p:cNvPr>
+          <p:cNvSpPr>
+            <a:spLocks xmlns:a="http://schemas.openxmlformats.org/drawingml/2006/main" noGrp="1"/>
+          </p:cNvSpPr>
+          <p:nvPr/>
+        </p:nvSpPr>
+        <p:spPr>
+          <a:xfrm xmlns:a="http://schemas.openxmlformats.org/drawingml/2006/main">
+            <a:off x="822960" y="1773936"/>
+            <a:ext cx="6327465" cy="402336"/>
+          </a:xfrm>
+          <a:prstGeom xmlns:a="http://schemas.openxmlformats.org/drawingml/2006/main" prst="rect">
+            <a:avLst/>
+          </a:prstGeom>
+          <a:noFill xmlns:a="http://schemas.openxmlformats.org/drawingml/2006/main"/>
+        </p:spPr>
+        <p:txBody>
+          <a:bodyPr xmlns:a="http://schemas.openxmlformats.org/drawingml/2006/main" wrap="square" lIns="0" tIns="0" rIns="0" bIns="0" anchor="ctr"/>
+          <a:lstStyle xmlns:a="http://schemas.openxmlformats.org/drawingml/2006/main"/>
+          <a:p xmlns:a="http://schemas.openxmlformats.org/drawingml/2006/main">
+            <a:pPr marL="0" indent="0">
+              <a:buNone/>
+            </a:pPr>
+            <a:r>
+              <a:rPr sz="2400" b="1" spc="100">
+                <a:solidFill>
+                  <a:srgbClr val="B0341F"/>
+                </a:solidFill>
+                <a:latin typeface="Calibri"/>
+                <a:ea typeface="Calibri"/>
+                <a:cs typeface="Calibri"/>
+              </a:rPr>
+              <a:t>PHASE · WHAT IT BUYS</a:t>
+            </a:r>
+            <a:endParaRPr sz="2400"/>
+          </a:p>
+        </p:txBody>
+      </p:sp>
+      <p:sp>
+        <p:nvSpPr>
+          <p:cNvPr id="8" name="Text 6">
+            <a:extLst xmlns:a="http://schemas.openxmlformats.org/drawingml/2006/main">
+              <a:ext uri="{FF2B5EF4-FFF2-40B4-BE49-F238E27FC236}">
+                <a16:creationId xmlns:a16="http://schemas.microsoft.com/office/drawing/2014/main" id="{9917ED35-A1CF-4979-8734-A2E7619ADBA5}"/>
+              </a:ext>
+            </a:extLst>
+          </p:cNvPr>
+          <p:cNvSpPr>
+            <a:spLocks xmlns:a="http://schemas.openxmlformats.org/drawingml/2006/main" noGrp="1"/>
+          </p:cNvSpPr>
+          <p:nvPr/>
+        </p:nvSpPr>
+        <p:spPr>
+          <a:xfrm xmlns:a="http://schemas.openxmlformats.org/drawingml/2006/main">
+            <a:off x="7150425" y="1773936"/>
+            <a:ext cx="4218310" cy="402336"/>
+          </a:xfrm>
+          <a:prstGeom xmlns:a="http://schemas.openxmlformats.org/drawingml/2006/main" prst="rect">
+            <a:avLst/>
+          </a:prstGeom>
+          <a:noFill xmlns:a="http://schemas.openxmlformats.org/drawingml/2006/main"/>
+        </p:spPr>
+        <p:txBody>
+          <a:bodyPr xmlns:a="http://schemas.openxmlformats.org/drawingml/2006/main" wrap="square" lIns="0" tIns="0" rIns="0" bIns="0" anchor="ctr"/>
+          <a:lstStyle xmlns:a="http://schemas.openxmlformats.org/drawingml/2006/main"/>
+          <a:p xmlns:a="http://schemas.openxmlformats.org/drawingml/2006/main">
+            <a:pPr marL="0" indent="0" algn="r">
+              <a:buNone/>
+            </a:pPr>
+            <a:r>
+              <a:rPr sz="2400" b="1" spc="100">
+                <a:solidFill>
+                  <a:srgbClr val="B0341F"/>
+                </a:solidFill>
+                <a:latin typeface="Calibri"/>
+                <a:ea typeface="Calibri"/>
+                <a:cs typeface="Calibri"/>
+              </a:rPr>
+              <a:t>FEE · EXIT</a:t>
+            </a:r>
+            <a:endParaRPr sz="2400"/>
+          </a:p>
+        </p:txBody>
+      </p:sp>
+      <p:sp>
+        <p:nvSpPr>
+          <p:cNvPr id="9" name="Shape 7">
+            <a:extLst xmlns:a="http://schemas.openxmlformats.org/drawingml/2006/main">
+              <a:ext uri="{FF2B5EF4-FFF2-40B4-BE49-F238E27FC236}">
+                <a16:creationId xmlns:a16="http://schemas.microsoft.com/office/drawing/2014/main" id="{C3025A76-167A-4DF6-8E7F-A19E7E59DA63}"/>
+              </a:ext>
+            </a:extLst>
+          </p:cNvPr>
+          <p:cNvSpPr>
+            <a:spLocks xmlns:a="http://schemas.openxmlformats.org/drawingml/2006/main" noGrp="1"/>
+          </p:cNvSpPr>
+          <p:nvPr/>
+        </p:nvSpPr>
+        <p:spPr>
+          <a:xfrm xmlns:a="http://schemas.openxmlformats.org/drawingml/2006/main">
+            <a:off x="822960" y="2212848"/>
+            <a:ext cx="10545775" cy="0"/>
+          </a:xfrm>
+          <a:prstGeom xmlns:a="http://schemas.openxmlformats.org/drawingml/2006/main" prst="line">
+            <a:avLst/>
+          </a:prstGeom>
+          <a:noFill xmlns:a="http://schemas.openxmlformats.org/drawingml/2006/main"/>
+          <a:ln xmlns:a="http://schemas.openxmlformats.org/drawingml/2006/main" w="12700">
+            <a:solidFill>
+              <a:srgbClr val="1A1A1A"/>
+            </a:solidFill>
+            <a:prstDash val="solid"/>
+          </a:ln>
+        </p:spPr>
+      </p:sp>
+      <p:sp>
+        <p:nvSpPr>
+          <p:cNvPr id="10" name="Text 8">
+            <a:extLst xmlns:a="http://schemas.openxmlformats.org/drawingml/2006/main">
+              <a:ext uri="{FF2B5EF4-FFF2-40B4-BE49-F238E27FC236}">
+                <a16:creationId xmlns:a16="http://schemas.microsoft.com/office/drawing/2014/main" id="{11753659-222F-4C71-8118-70BF22934537}"/>
+              </a:ext>
+            </a:extLst>
+          </p:cNvPr>
+          <p:cNvSpPr>
+            <a:spLocks xmlns:a="http://schemas.openxmlformats.org/drawingml/2006/main" noGrp="1"/>
+          </p:cNvSpPr>
+          <p:nvPr/>
+        </p:nvSpPr>
+        <p:spPr>
+          <a:xfrm xmlns:a="http://schemas.openxmlformats.org/drawingml/2006/main">
+            <a:off x="822960" y="2340864"/>
+            <a:ext cx="6327465" cy="713232"/>
+          </a:xfrm>
+          <a:prstGeom xmlns:a="http://schemas.openxmlformats.org/drawingml/2006/main" prst="rect">
+            <a:avLst/>
+          </a:prstGeom>
+          <a:noFill xmlns:a="http://schemas.openxmlformats.org/drawingml/2006/main"/>
+        </p:spPr>
+        <p:txBody>
+          <a:bodyPr xmlns:a="http://schemas.openxmlformats.org/drawingml/2006/main" wrap="square" lIns="0" tIns="0" rIns="0" bIns="0" anchor="ctr"/>
+          <a:lstStyle xmlns:a="http://schemas.openxmlformats.org/drawingml/2006/main"/>
+          <a:p xmlns:a="http://schemas.openxmlformats.org/drawingml/2006/main">
+            <a:pPr marL="0" indent="0">
+              <a:buNone/>
+            </a:pPr>
+            <a:r>
+              <a:rPr sz="2400">
+                <a:solidFill>
+                  <a:srgbClr val="1A1A1A"/>
+                </a:solidFill>
+                <a:latin typeface="Calibri"/>
+                <a:ea typeface="Calibri"/>
+                <a:cs typeface="Calibri"/>
+              </a:rPr>
+              <a:t>0 · Ground truth, baselines, legal closure</a:t>
+            </a:r>
+            <a:endParaRPr sz="2400"/>
+          </a:p>
+        </p:txBody>
+      </p:sp>
+      <p:sp>
+        <p:nvSpPr>
+          <p:cNvPr id="11" name="Text 9">
+            <a:extLst xmlns:a="http://schemas.openxmlformats.org/drawingml/2006/main">
+              <a:ext uri="{FF2B5EF4-FFF2-40B4-BE49-F238E27FC236}">
+                <a16:creationId xmlns:a16="http://schemas.microsoft.com/office/drawing/2014/main" id="{81253715-BDEB-4913-B940-E7CF247B6507}"/>
+              </a:ext>
+            </a:extLst>
+          </p:cNvPr>
+          <p:cNvSpPr>
+            <a:spLocks xmlns:a="http://schemas.openxmlformats.org/drawingml/2006/main" noGrp="1"/>
+          </p:cNvSpPr>
+          <p:nvPr/>
+        </p:nvSpPr>
+        <p:spPr>
+          <a:xfrm xmlns:a="http://schemas.openxmlformats.org/drawingml/2006/main">
+            <a:off x="7150425" y="2340864"/>
+            <a:ext cx="4218310" cy="713232"/>
+          </a:xfrm>
+          <a:prstGeom xmlns:a="http://schemas.openxmlformats.org/drawingml/2006/main" prst="rect">
+            <a:avLst/>
+          </a:prstGeom>
+          <a:noFill xmlns:a="http://schemas.openxmlformats.org/drawingml/2006/main"/>
+        </p:spPr>
+        <p:txBody>
+          <a:bodyPr xmlns:a="http://schemas.openxmlformats.org/drawingml/2006/main" wrap="square" lIns="0" tIns="0" rIns="0" bIns="0" anchor="ctr"/>
+          <a:lstStyle xmlns:a="http://schemas.openxmlformats.org/drawingml/2006/main"/>
+          <a:p xmlns:a="http://schemas.openxmlformats.org/drawingml/2006/main">
+            <a:pPr marL="0" indent="0" algn="r">
+              <a:buNone/>
+            </a:pPr>
+            <a:r>
+              <a:rPr sz="2400" b="1">
+                <a:solidFill>
+                  <a:srgbClr val="1A1A1A"/>
+                </a:solidFill>
+                <a:latin typeface="Calibri"/>
+                <a:ea typeface="Calibri"/>
+                <a:cs typeface="Calibri"/>
+              </a:rPr>
+              <a:t>€5,600 · go/no-go on pilot</a:t>
+            </a:r>
+            <a:endParaRPr sz="2400"/>
+          </a:p>
+        </p:txBody>
+      </p:sp>
+      <p:sp>
+        <p:nvSpPr>
+          <p:cNvPr id="12" name="Shape 10">
+            <a:extLst xmlns:a="http://schemas.openxmlformats.org/drawingml/2006/main">
+              <a:ext uri="{FF2B5EF4-FFF2-40B4-BE49-F238E27FC236}">
+                <a16:creationId xmlns:a16="http://schemas.microsoft.com/office/drawing/2014/main" id="{730D92FD-A2AE-49E1-9A09-9F9781456F2F}"/>
+              </a:ext>
+            </a:extLst>
+          </p:cNvPr>
+          <p:cNvSpPr>
+            <a:spLocks xmlns:a="http://schemas.openxmlformats.org/drawingml/2006/main" noGrp="1"/>
+          </p:cNvSpPr>
+          <p:nvPr/>
+        </p:nvSpPr>
+        <p:spPr>
+          <a:xfrm xmlns:a="http://schemas.openxmlformats.org/drawingml/2006/main">
+            <a:off x="822960" y="3054096"/>
+            <a:ext cx="10545775" cy="0"/>
+          </a:xfrm>
+          <a:prstGeom xmlns:a="http://schemas.openxmlformats.org/drawingml/2006/main" prst="line">
+            <a:avLst/>
+          </a:prstGeom>
+          <a:noFill xmlns:a="http://schemas.openxmlformats.org/drawingml/2006/main"/>
+          <a:ln xmlns:a="http://schemas.openxmlformats.org/drawingml/2006/main" w="12700">
+            <a:solidFill>
+              <a:srgbClr val="E0E0E0"/>
+            </a:solidFill>
+            <a:prstDash val="solid"/>
+          </a:ln>
+        </p:spPr>
+      </p:sp>
+      <p:sp>
+        <p:nvSpPr>
+          <p:cNvPr id="13" name="Text 11">
+            <a:extLst xmlns:a="http://schemas.openxmlformats.org/drawingml/2006/main">
+              <a:ext uri="{FF2B5EF4-FFF2-40B4-BE49-F238E27FC236}">
+                <a16:creationId xmlns:a16="http://schemas.microsoft.com/office/drawing/2014/main" id="{926EECE5-3C0D-4D64-95E6-34B2BA0793E1}"/>
+              </a:ext>
+            </a:extLst>
+          </p:cNvPr>
+          <p:cNvSpPr>
+            <a:spLocks xmlns:a="http://schemas.openxmlformats.org/drawingml/2006/main" noGrp="1"/>
+          </p:cNvSpPr>
+          <p:nvPr/>
+        </p:nvSpPr>
+        <p:spPr>
+          <a:xfrm xmlns:a="http://schemas.openxmlformats.org/drawingml/2006/main">
+            <a:off x="822960" y="3054096"/>
+            <a:ext cx="6327465" cy="713232"/>
+          </a:xfrm>
+          <a:prstGeom xmlns:a="http://schemas.openxmlformats.org/drawingml/2006/main" prst="rect">
+            <a:avLst/>
+          </a:prstGeom>
+          <a:noFill xmlns:a="http://schemas.openxmlformats.org/drawingml/2006/main"/>
+        </p:spPr>
+        <p:txBody>
+          <a:bodyPr xmlns:a="http://schemas.openxmlformats.org/drawingml/2006/main" wrap="square" lIns="0" tIns="0" rIns="0" bIns="0" anchor="ctr"/>
+          <a:lstStyle xmlns:a="http://schemas.openxmlformats.org/drawingml/2006/main"/>
+          <a:p xmlns:a="http://schemas.openxmlformats.org/drawingml/2006/main">
+            <a:pPr marL="0" indent="0">
+              <a:buNone/>
+            </a:pPr>
+            <a:r>
+              <a:rPr sz="2400">
+                <a:solidFill>
+                  <a:srgbClr val="1A1A1A"/>
+                </a:solidFill>
+                <a:latin typeface="Calibri"/>
+                <a:ea typeface="Calibri"/>
+                <a:cs typeface="Calibri"/>
+              </a:rPr>
+              <a:t>1 · Configuration + 60-day shadow run</a:t>
+            </a:r>
+            <a:endParaRPr sz="2400"/>
+          </a:p>
+        </p:txBody>
+      </p:sp>
+      <p:sp>
+        <p:nvSpPr>
+          <p:cNvPr id="14" name="Text 12">
+            <a:extLst xmlns:a="http://schemas.openxmlformats.org/drawingml/2006/main">
+              <a:ext uri="{FF2B5EF4-FFF2-40B4-BE49-F238E27FC236}">
+                <a16:creationId xmlns:a16="http://schemas.microsoft.com/office/drawing/2014/main" id="{598228BD-E4A1-466E-B72C-BAD12A29F0D6}"/>
+              </a:ext>
+            </a:extLst>
+          </p:cNvPr>
+          <p:cNvSpPr>
+            <a:spLocks xmlns:a="http://schemas.openxmlformats.org/drawingml/2006/main" noGrp="1"/>
+          </p:cNvSpPr>
+          <p:nvPr/>
+        </p:nvSpPr>
+        <p:spPr>
+          <a:xfrm xmlns:a="http://schemas.openxmlformats.org/drawingml/2006/main">
+            <a:off x="7150425" y="3054096"/>
+            <a:ext cx="4218310" cy="713232"/>
+          </a:xfrm>
+          <a:prstGeom xmlns:a="http://schemas.openxmlformats.org/drawingml/2006/main" prst="rect">
+            <a:avLst/>
+          </a:prstGeom>
+          <a:noFill xmlns:a="http://schemas.openxmlformats.org/drawingml/2006/main"/>
+        </p:spPr>
+        <p:txBody>
+          <a:bodyPr xmlns:a="http://schemas.openxmlformats.org/drawingml/2006/main" wrap="square" lIns="0" tIns="0" rIns="0" bIns="0" anchor="ctr"/>
+          <a:lstStyle xmlns:a="http://schemas.openxmlformats.org/drawingml/2006/main"/>
+          <a:p xmlns:a="http://schemas.openxmlformats.org/drawingml/2006/main">
+            <a:pPr marL="0" indent="0" algn="r">
+              <a:buNone/>
+            </a:pPr>
+            <a:r>
+              <a:rPr sz="2400" b="1">
+                <a:solidFill>
+                  <a:srgbClr val="1A1A1A"/>
+                </a:solidFill>
+                <a:latin typeface="Calibri"/>
+                <a:ea typeface="Calibri"/>
+                <a:cs typeface="Calibri"/>
+              </a:rPr>
+              <a:t>€12,600 · go/no-go on deployment</a:t>
+            </a:r>
+            <a:endParaRPr sz="2400"/>
+          </a:p>
+        </p:txBody>
+      </p:sp>
+      <p:sp>
+        <p:nvSpPr>
+          <p:cNvPr id="15" name="Shape 13">
+            <a:extLst xmlns:a="http://schemas.openxmlformats.org/drawingml/2006/main">
+              <a:ext uri="{FF2B5EF4-FFF2-40B4-BE49-F238E27FC236}">
+                <a16:creationId xmlns:a16="http://schemas.microsoft.com/office/drawing/2014/main" id="{35286158-A485-4199-A972-A7BEF4434C40}"/>
+              </a:ext>
+            </a:extLst>
+          </p:cNvPr>
+          <p:cNvSpPr>
+            <a:spLocks xmlns:a="http://schemas.openxmlformats.org/drawingml/2006/main" noGrp="1"/>
+          </p:cNvSpPr>
+          <p:nvPr/>
+        </p:nvSpPr>
+        <p:spPr>
+          <a:xfrm xmlns:a="http://schemas.openxmlformats.org/drawingml/2006/main">
+            <a:off x="822960" y="3767328"/>
+            <a:ext cx="10545775" cy="0"/>
+          </a:xfrm>
+          <a:prstGeom xmlns:a="http://schemas.openxmlformats.org/drawingml/2006/main" prst="line">
+            <a:avLst/>
+          </a:prstGeom>
+          <a:noFill xmlns:a="http://schemas.openxmlformats.org/drawingml/2006/main"/>
+          <a:ln xmlns:a="http://schemas.openxmlformats.org/drawingml/2006/main" w="12700">
+            <a:solidFill>
+              <a:srgbClr val="E0E0E0"/>
+            </a:solidFill>
+            <a:prstDash val="solid"/>
+          </a:ln>
+        </p:spPr>
+      </p:sp>
+      <p:sp>
+        <p:nvSpPr>
+          <p:cNvPr id="16" name="Text 14">
+            <a:extLst xmlns:a="http://schemas.openxmlformats.org/drawingml/2006/main">
+              <a:ext uri="{FF2B5EF4-FFF2-40B4-BE49-F238E27FC236}">
+                <a16:creationId xmlns:a16="http://schemas.microsoft.com/office/drawing/2014/main" id="{3C5609FB-D36B-491E-A331-FBBEA9127F41}"/>
+              </a:ext>
+            </a:extLst>
+          </p:cNvPr>
+          <p:cNvSpPr>
+            <a:spLocks xmlns:a="http://schemas.openxmlformats.org/drawingml/2006/main" noGrp="1"/>
+          </p:cNvSpPr>
+          <p:nvPr/>
+        </p:nvSpPr>
+        <p:spPr>
+          <a:xfrm xmlns:a="http://schemas.openxmlformats.org/drawingml/2006/main">
+            <a:off x="822960" y="3767328"/>
+            <a:ext cx="6327465" cy="713232"/>
+          </a:xfrm>
+          <a:prstGeom xmlns:a="http://schemas.openxmlformats.org/drawingml/2006/main" prst="rect">
+            <a:avLst/>
+          </a:prstGeom>
+          <a:noFill xmlns:a="http://schemas.openxmlformats.org/drawingml/2006/main"/>
+        </p:spPr>
+        <p:txBody>
+          <a:bodyPr xmlns:a="http://schemas.openxmlformats.org/drawingml/2006/main" wrap="square" lIns="0" tIns="0" rIns="0" bIns="0" anchor="ctr"/>
+          <a:lstStyle xmlns:a="http://schemas.openxmlformats.org/drawingml/2006/main"/>
+          <a:p xmlns:a="http://schemas.openxmlformats.org/drawingml/2006/main">
+            <a:pPr marL="0" indent="0">
+              <a:buNone/>
+            </a:pPr>
+            <a:r>
+              <a:rPr sz="2400">
+                <a:solidFill>
+                  <a:srgbClr val="1A1A1A"/>
+                </a:solidFill>
+                <a:latin typeface="Calibri"/>
+                <a:ea typeface="Calibri"/>
+                <a:cs typeface="Calibri"/>
+              </a:rPr>
+              <a:t>2 · Integration, training and handover</a:t>
+            </a:r>
+            <a:endParaRPr sz="2400"/>
+          </a:p>
+        </p:txBody>
+      </p:sp>
+      <p:sp>
+        <p:nvSpPr>
+          <p:cNvPr id="17" name="Text 15">
+            <a:extLst xmlns:a="http://schemas.openxmlformats.org/drawingml/2006/main">
+              <a:ext uri="{FF2B5EF4-FFF2-40B4-BE49-F238E27FC236}">
+                <a16:creationId xmlns:a16="http://schemas.microsoft.com/office/drawing/2014/main" id="{0364A474-D0DB-40F4-96D9-F098C96FE46C}"/>
+              </a:ext>
+            </a:extLst>
+          </p:cNvPr>
+          <p:cNvSpPr>
+            <a:spLocks xmlns:a="http://schemas.openxmlformats.org/drawingml/2006/main" noGrp="1"/>
+          </p:cNvSpPr>
+          <p:nvPr/>
+        </p:nvSpPr>
+        <p:spPr>
+          <a:xfrm xmlns:a="http://schemas.openxmlformats.org/drawingml/2006/main">
+            <a:off x="7150425" y="3767328"/>
+            <a:ext cx="4218310" cy="713232"/>
+          </a:xfrm>
+          <a:prstGeom xmlns:a="http://schemas.openxmlformats.org/drawingml/2006/main" prst="rect">
+            <a:avLst/>
+          </a:prstGeom>
+          <a:noFill xmlns:a="http://schemas.openxmlformats.org/drawingml/2006/main"/>
+        </p:spPr>
+        <p:txBody>
+          <a:bodyPr xmlns:a="http://schemas.openxmlformats.org/drawingml/2006/main" wrap="square" lIns="0" tIns="0" rIns="0" bIns="0" anchor="ctr"/>
+          <a:lstStyle xmlns:a="http://schemas.openxmlformats.org/drawingml/2006/main"/>
+          <a:p xmlns:a="http://schemas.openxmlformats.org/drawingml/2006/main">
+            <a:pPr marL="0" indent="0" algn="r">
+              <a:buNone/>
+            </a:pPr>
+            <a:r>
+              <a:rPr sz="2400" b="1">
+                <a:solidFill>
+                  <a:srgbClr val="1A1A1A"/>
+                </a:solidFill>
+                <a:latin typeface="Calibri"/>
+                <a:ea typeface="Calibri"/>
+                <a:cs typeface="Calibri"/>
+              </a:rPr>
+              <a:t>€14,000 · only if gates pass</a:t>
+            </a:r>
+            <a:endParaRPr sz="2400"/>
+          </a:p>
+        </p:txBody>
+      </p:sp>
+      <p:sp>
+        <p:nvSpPr>
+          <p:cNvPr id="18" name="Text 16">
+            <a:extLst xmlns:a="http://schemas.openxmlformats.org/drawingml/2006/main">
+              <a:ext uri="{FF2B5EF4-FFF2-40B4-BE49-F238E27FC236}">
+                <a16:creationId xmlns:a16="http://schemas.microsoft.com/office/drawing/2014/main" id="{9FE2B717-5068-4870-9CBA-3151C865FE72}"/>
+              </a:ext>
+            </a:extLst>
+          </p:cNvPr>
+          <p:cNvSpPr>
+            <a:spLocks xmlns:a="http://schemas.openxmlformats.org/drawingml/2006/main" noGrp="1"/>
+          </p:cNvSpPr>
+          <p:nvPr/>
+        </p:nvSpPr>
+        <p:spPr>
+          <a:xfrm xmlns:a="http://schemas.openxmlformats.org/drawingml/2006/main">
+            <a:off x="822960" y="4809744"/>
+            <a:ext cx="10545775" cy="475488"/>
+          </a:xfrm>
+          <a:prstGeom xmlns:a="http://schemas.openxmlformats.org/drawingml/2006/main" prst="rect">
+            <a:avLst/>
+          </a:prstGeom>
+          <a:noFill xmlns:a="http://schemas.openxmlformats.org/drawingml/2006/main"/>
+        </p:spPr>
+        <p:txBody>
+          <a:bodyPr xmlns:a="http://schemas.openxmlformats.org/drawingml/2006/main" wrap="square" lIns="0" tIns="0" rIns="0" bIns="0" anchor="t"/>
+          <a:lstStyle xmlns:a="http://schemas.openxmlformats.org/drawingml/2006/main"/>
+          <a:p xmlns:a="http://schemas.openxmlformats.org/drawingml/2006/main">
+            <a:pPr marL="0" indent="0">
+              <a:buNone/>
+            </a:pPr>
+            <a:r>
+              <a:rPr sz="2400">
+                <a:solidFill>
+                  <a:srgbClr val="1A1A1A"/>
+                </a:solidFill>
+                <a:latin typeface="Calibri"/>
+                <a:ea typeface="Calibri"/>
+                <a:cs typeface="Calibri"/>
+              </a:rPr>
+              <a:t>€18,200 reaches the deployment decision. Nobody acts on a suggestion in shadow.</a:t>
+            </a:r>
+            <a:endParaRPr sz="2400"/>
+          </a:p>
+        </p:txBody>
+      </p:sp>
+      <p:sp>
+        <p:nvSpPr>
+          <p:cNvPr id="19" name="Text 17">
+            <a:extLst xmlns:a="http://schemas.openxmlformats.org/drawingml/2006/main">
+              <a:ext uri="{FF2B5EF4-FFF2-40B4-BE49-F238E27FC236}">
+                <a16:creationId xmlns:a16="http://schemas.microsoft.com/office/drawing/2014/main" id="{2B05168D-C2C7-40C4-8D32-DD4EA667F053}"/>
+              </a:ext>
+            </a:extLst>
+          </p:cNvPr>
+          <p:cNvSpPr>
+            <a:spLocks xmlns:a="http://schemas.openxmlformats.org/drawingml/2006/main" noGrp="1"/>
+          </p:cNvSpPr>
+          <p:nvPr/>
+        </p:nvSpPr>
+        <p:spPr>
+          <a:xfrm xmlns:a="http://schemas.openxmlformats.org/drawingml/2006/main">
+            <a:off x="822960" y="5559552"/>
+            <a:ext cx="10545775" cy="475488"/>
+          </a:xfrm>
+          <a:prstGeom xmlns:a="http://schemas.openxmlformats.org/drawingml/2006/main" prst="rect">
+            <a:avLst/>
+          </a:prstGeom>
+          <a:noFill xmlns:a="http://schemas.openxmlformats.org/drawingml/2006/main"/>
+        </p:spPr>
+        <p:txBody>
+          <a:bodyPr xmlns:a="http://schemas.openxmlformats.org/drawingml/2006/main" wrap="square" lIns="0" tIns="0" rIns="0" bIns="0" anchor="t"/>
+          <a:lstStyle xmlns:a="http://schemas.openxmlformats.org/drawingml/2006/main"/>
+          <a:p xmlns:a="http://schemas.openxmlformats.org/drawingml/2006/main">
+            <a:pPr marL="0" indent="0">
+              <a:buNone/>
+            </a:pPr>
+            <a:r>
+              <a:rPr sz="2400">
+                <a:solidFill>
+                  <a:srgbClr val="1A1A1A"/>
+                </a:solidFill>
+                <a:latin typeface="Calibri"/>
+                <a:ea typeface="Calibri"/>
+                <a:cs typeface="Calibri"/>
+              </a:rPr>
+              <a:t>Hard gates: ≥80% accuracy · 75–97% acceptance · zero ungrounded outputs.</a:t>
+            </a:r>
+            <a:endParaRPr sz="2400"/>
+          </a:p>
+        </p:txBody>
+      </p:sp>
+    </p:spTree>
+    <p:extLst>
+      <p:ext uri="{BB962C8B-B14F-4D97-AF65-F5344CB8AC3E}">
+        <p14:creationId xmlns:p14="http://schemas.microsoft.com/office/powerpoint/2010/main" val="391381697"/>
+      </p:ext>
+    </p:extLst>
+  </p:cSld>
+</p:sld>
+</file>
+
+<file path=ppt/slides/slide11.xml><?xml version="1.0" encoding="utf-8"?>
+<p:sld xmlns:p="http://schemas.openxmlformats.org/presentationml/2006/main">
+  <p:cSld>
+    <p:bg>
+      <p:bgPr>
+        <a:solidFill xmlns:a="http://schemas.openxmlformats.org/drawingml/2006/main">
+          <a:srgbClr val="FFFFFF"/>
+        </a:solidFill>
+      </p:bgPr>
+    </p:bg>
+    <p:spTree>
+      <p:nvGrpSpPr>
+        <p:cNvPr id="1" name=""/>
+        <p:cNvGrpSpPr/>
+        <p:nvPr/>
+      </p:nvGrpSpPr>
+      <p:grpSpPr>
+        <a:xfrm xmlns:a="http://schemas.openxmlformats.org/drawingml/2006/main"/>
+      </p:grpSpPr>
+      <p:sp>
+        <p:nvSpPr>
+          <p:cNvPr id="2" name="Text 0">
+            <a:extLst xmlns:a="http://schemas.openxmlformats.org/drawingml/2006/main">
+              <a:ext uri="{FF2B5EF4-FFF2-40B4-BE49-F238E27FC236}">
+                <a16:creationId xmlns:a16="http://schemas.microsoft.com/office/drawing/2014/main" id="{308563F3-AA93-4360-A229-BE6CC75D800C}"/>
+              </a:ext>
+            </a:extLst>
+          </p:cNvPr>
+          <p:cNvSpPr>
+            <a:spLocks xmlns:a="http://schemas.openxmlformats.org/drawingml/2006/main" noGrp="1"/>
+          </p:cNvSpPr>
+          <p:nvPr/>
+        </p:nvSpPr>
+        <p:spPr>
+          <a:xfrm xmlns:a="http://schemas.openxmlformats.org/drawingml/2006/main">
+            <a:off x="822960" y="603504"/>
+            <a:ext cx="10545775" cy="731520"/>
+          </a:xfrm>
+          <a:prstGeom xmlns:a="http://schemas.openxmlformats.org/drawingml/2006/main" prst="rect">
+            <a:avLst/>
+          </a:prstGeom>
+          <a:noFill xmlns:a="http://schemas.openxmlformats.org/drawingml/2006/main"/>
+        </p:spPr>
+        <p:txBody>
+          <a:bodyPr xmlns:a="http://schemas.openxmlformats.org/drawingml/2006/main" wrap="square" lIns="0" tIns="0" rIns="0" bIns="0" anchor="ctr"/>
+          <a:lstStyle xmlns:a="http://schemas.openxmlformats.org/drawingml/2006/main"/>
+          <a:p xmlns:a="http://schemas.openxmlformats.org/drawingml/2006/main">
+            <a:pPr marL="0" indent="0">
+              <a:buNone/>
+            </a:pPr>
+            <a:r>
+              <a:rPr sz="3200" b="1">
+                <a:solidFill>
+                  <a:srgbClr val="1A1A1A"/>
+                </a:solidFill>
+                <a:latin typeface="Trebuchet MS"/>
+                <a:ea typeface="Trebuchet MS"/>
+                <a:cs typeface="Trebuchet MS"/>
+              </a:rPr>
+              <a:t>The MVP makes every proposal accountable</a:t>
+            </a:r>
+            <a:endParaRPr sz="3200"/>
+          </a:p>
+        </p:txBody>
+      </p:sp>
+      <p:sp>
+        <p:nvSpPr>
+          <p:cNvPr id="3" name="Shape 1">
+            <a:extLst xmlns:a="http://schemas.openxmlformats.org/drawingml/2006/main">
+              <a:ext uri="{FF2B5EF4-FFF2-40B4-BE49-F238E27FC236}">
+                <a16:creationId xmlns:a16="http://schemas.microsoft.com/office/drawing/2014/main" id="{64B79335-1158-4015-89BD-D52A1020F851}"/>
+              </a:ext>
+            </a:extLst>
+          </p:cNvPr>
+          <p:cNvSpPr>
+            <a:spLocks xmlns:a="http://schemas.openxmlformats.org/drawingml/2006/main" noGrp="1"/>
+          </p:cNvSpPr>
+          <p:nvPr/>
+        </p:nvSpPr>
+        <p:spPr>
+          <a:xfrm xmlns:a="http://schemas.openxmlformats.org/drawingml/2006/main">
+            <a:off x="822960" y="1444752"/>
+            <a:ext cx="1371600" cy="0"/>
+          </a:xfrm>
+          <a:prstGeom xmlns:a="http://schemas.openxmlformats.org/drawingml/2006/main" prst="line">
+            <a:avLst/>
+          </a:prstGeom>
+          <a:noFill xmlns:a="http://schemas.openxmlformats.org/drawingml/2006/main"/>
+          <a:ln xmlns:a="http://schemas.openxmlformats.org/drawingml/2006/main" w="25400">
+            <a:solidFill>
+              <a:srgbClr val="B0341F"/>
+            </a:solidFill>
+            <a:prstDash val="solid"/>
+          </a:ln>
+        </p:spPr>
+      </p:sp>
+      <p:sp>
+        <p:nvSpPr>
+          <p:cNvPr id="4" name="Shape 2">
+            <a:extLst xmlns:a="http://schemas.openxmlformats.org/drawingml/2006/main">
+              <a:ext uri="{FF2B5EF4-FFF2-40B4-BE49-F238E27FC236}">
+                <a16:creationId xmlns:a16="http://schemas.microsoft.com/office/drawing/2014/main" id="{2283EF32-1CED-4A83-9177-95F4E178BB6A}"/>
+              </a:ext>
+            </a:extLst>
+          </p:cNvPr>
+          <p:cNvSpPr>
+            <a:spLocks xmlns:a="http://schemas.openxmlformats.org/drawingml/2006/main" noGrp="1"/>
+          </p:cNvSpPr>
+          <p:nvPr/>
+        </p:nvSpPr>
+        <p:spPr>
+          <a:xfrm xmlns:a="http://schemas.openxmlformats.org/drawingml/2006/main">
+            <a:off x="822960" y="6355080"/>
+            <a:ext cx="10545775" cy="0"/>
+          </a:xfrm>
+          <a:prstGeom xmlns:a="http://schemas.openxmlformats.org/drawingml/2006/main" prst="line">
+            <a:avLst/>
+          </a:prstGeom>
+          <a:noFill xmlns:a="http://schemas.openxmlformats.org/drawingml/2006/main"/>
+          <a:ln xmlns:a="http://schemas.openxmlformats.org/drawingml/2006/main" w="12700">
+            <a:solidFill>
+              <a:srgbClr val="E0E0E0"/>
+            </a:solidFill>
+            <a:prstDash val="solid"/>
+          </a:ln>
+        </p:spPr>
+      </p:sp>
+      <p:sp>
+        <p:nvSpPr>
+          <p:cNvPr id="5" name="Text 3">
+            <a:extLst xmlns:a="http://schemas.openxmlformats.org/drawingml/2006/main">
+              <a:ext uri="{FF2B5EF4-FFF2-40B4-BE49-F238E27FC236}">
+                <a16:creationId xmlns:a16="http://schemas.microsoft.com/office/drawing/2014/main" id="{18321AA6-144B-485E-A342-12869C04B26E}"/>
+              </a:ext>
+            </a:extLst>
+          </p:cNvPr>
+          <p:cNvSpPr>
+            <a:spLocks xmlns:a="http://schemas.openxmlformats.org/drawingml/2006/main" noGrp="1"/>
+          </p:cNvSpPr>
+          <p:nvPr/>
+        </p:nvSpPr>
+        <p:spPr>
+          <a:xfrm xmlns:a="http://schemas.openxmlformats.org/drawingml/2006/main">
+            <a:off x="822960" y="6400800"/>
+            <a:ext cx="5486400" cy="274320"/>
+          </a:xfrm>
+          <a:prstGeom xmlns:a="http://schemas.openxmlformats.org/drawingml/2006/main" prst="rect">
+            <a:avLst/>
+          </a:prstGeom>
+          <a:noFill xmlns:a="http://schemas.openxmlformats.org/drawingml/2006/main"/>
+        </p:spPr>
+        <p:txBody>
+          <a:bodyPr xmlns:a="http://schemas.openxmlformats.org/drawingml/2006/main" wrap="square" lIns="0" tIns="0" rIns="0" bIns="0" anchor="ctr"/>
+          <a:lstStyle xmlns:a="http://schemas.openxmlformats.org/drawingml/2006/main"/>
+          <a:p xmlns:a="http://schemas.openxmlformats.org/drawingml/2006/main">
+            <a:pPr marL="0" indent="0">
+              <a:buNone/>
+            </a:pPr>
+            <a:r>
+              <a:rPr sz="900">
+                <a:solidFill>
+                  <a:srgbClr val="6B6B6B"/>
+                </a:solidFill>
+                <a:latin typeface="Calibri"/>
+                <a:ea typeface="Calibri"/>
+                <a:cs typeface="Calibri"/>
+              </a:rPr>
+              <a:t>Capstone Round 2  ·  Assist</a:t>
+            </a:r>
+            <a:endParaRPr sz="900"/>
+          </a:p>
+        </p:txBody>
+      </p:sp>
+      <p:sp>
+        <p:nvSpPr>
+          <p:cNvPr id="6" name="Text 4">
+            <a:extLst xmlns:a="http://schemas.openxmlformats.org/drawingml/2006/main">
+              <a:ext uri="{FF2B5EF4-FFF2-40B4-BE49-F238E27FC236}">
+                <a16:creationId xmlns:a16="http://schemas.microsoft.com/office/drawing/2014/main" id="{87A61F7A-A481-43D7-AB54-290F77813C44}"/>
+              </a:ext>
+            </a:extLst>
+          </p:cNvPr>
+          <p:cNvSpPr>
+            <a:spLocks xmlns:a="http://schemas.openxmlformats.org/drawingml/2006/main" noGrp="1"/>
+          </p:cNvSpPr>
+          <p:nvPr/>
+        </p:nvSpPr>
+        <p:spPr>
+          <a:xfrm xmlns:a="http://schemas.openxmlformats.org/drawingml/2006/main">
+            <a:off x="10454335" y="6400800"/>
+            <a:ext cx="914400" cy="274320"/>
+          </a:xfrm>
+          <a:prstGeom xmlns:a="http://schemas.openxmlformats.org/drawingml/2006/main" prst="rect">
+            <a:avLst/>
+          </a:prstGeom>
+          <a:noFill xmlns:a="http://schemas.openxmlformats.org/drawingml/2006/main"/>
+        </p:spPr>
+        <p:txBody>
+          <a:bodyPr xmlns:a="http://schemas.openxmlformats.org/drawingml/2006/main" wrap="square" lIns="0" tIns="0" rIns="0" bIns="0" anchor="ctr"/>
+          <a:lstStyle xmlns:a="http://schemas.openxmlformats.org/drawingml/2006/main"/>
+          <a:p xmlns:a="http://schemas.openxmlformats.org/drawingml/2006/main">
+            <a:pPr marL="0" indent="0" algn="r">
+              <a:buNone/>
+            </a:pPr>
+            <a:r>
+              <a:rPr sz="900">
+                <a:solidFill>
+                  <a:srgbClr val="6B6B6B"/>
+                </a:solidFill>
+                <a:latin typeface="Calibri"/>
+                <a:ea typeface="Calibri"/>
+                <a:cs typeface="Calibri"/>
+              </a:rPr>
+              <a:t>10</a:t>
             </a:r>
             <a:endParaRPr sz="900"/>
           </a:p>
@@ -3034,7 +3926,7 @@
 </p:sld>
 </file>
 
-<file path=ppt/slides/slide11.xml><?xml version="1.0" encoding="utf-8"?>
+<file path=ppt/slides/slide12.xml><?xml version="1.0" encoding="utf-8"?>
 <p:sld xmlns:p="http://schemas.openxmlformats.org/presentationml/2006/main">
   <p:cSld>
     <p:bg>
@@ -3382,7 +4274,7 @@
                 <a:ea typeface="Calibri"/>
                 <a:cs typeface="Calibri"/>
               </a:rPr>
-              <a:t>10</a:t>
+              <a:t>11</a:t>
             </a:r>
             <a:endParaRPr sz="900"/>
           </a:p>
@@ -3392,865 +4284,6 @@
     <p:extLst>
       <p:ext uri="{BB962C8B-B14F-4D97-AF65-F5344CB8AC3E}">
         <p14:creationId xmlns:p14="http://schemas.microsoft.com/office/powerpoint/2010/main" val="743248801"/>
-      </p:ext>
-    </p:extLst>
-  </p:cSld>
-</p:sld>
-</file>
-
-<file path=ppt/slides/slide12.xml><?xml version="1.0" encoding="utf-8"?>
-<p:sld xmlns:p="http://schemas.openxmlformats.org/presentationml/2006/main">
-  <p:cSld>
-    <p:bg>
-      <p:bgPr>
-        <a:solidFill xmlns:a="http://schemas.openxmlformats.org/drawingml/2006/main">
-          <a:srgbClr val="FFFFFF"/>
-        </a:solidFill>
-      </p:bgPr>
-    </p:bg>
-    <p:spTree>
-      <p:nvGrpSpPr>
-        <p:cNvPr id="1" name=""/>
-        <p:cNvGrpSpPr/>
-        <p:nvPr/>
-      </p:nvGrpSpPr>
-      <p:grpSpPr>
-        <a:xfrm xmlns:a="http://schemas.openxmlformats.org/drawingml/2006/main"/>
-      </p:grpSpPr>
-      <p:sp>
-        <p:nvSpPr>
-          <p:cNvPr id="2" name="Text 0">
-            <a:extLst xmlns:a="http://schemas.openxmlformats.org/drawingml/2006/main">
-              <a:ext uri="{FF2B5EF4-FFF2-40B4-BE49-F238E27FC236}">
-                <a16:creationId xmlns:a16="http://schemas.microsoft.com/office/drawing/2014/main" id="{78422AB6-69AB-4E2D-A86A-F00D8B7FB6DE}"/>
-              </a:ext>
-            </a:extLst>
-          </p:cNvPr>
-          <p:cNvSpPr>
-            <a:spLocks xmlns:a="http://schemas.openxmlformats.org/drawingml/2006/main" noGrp="1"/>
-          </p:cNvSpPr>
-          <p:nvPr/>
-        </p:nvSpPr>
-        <p:spPr>
-          <a:xfrm xmlns:a="http://schemas.openxmlformats.org/drawingml/2006/main">
-            <a:off x="822960" y="603504"/>
-            <a:ext cx="10545775" cy="731520"/>
-          </a:xfrm>
-          <a:prstGeom xmlns:a="http://schemas.openxmlformats.org/drawingml/2006/main" prst="rect">
-            <a:avLst/>
-          </a:prstGeom>
-          <a:noFill xmlns:a="http://schemas.openxmlformats.org/drawingml/2006/main"/>
-        </p:spPr>
-        <p:txBody>
-          <a:bodyPr xmlns:a="http://schemas.openxmlformats.org/drawingml/2006/main" wrap="square" lIns="0" tIns="0" rIns="0" bIns="0" anchor="ctr"/>
-          <a:lstStyle xmlns:a="http://schemas.openxmlformats.org/drawingml/2006/main"/>
-          <a:p xmlns:a="http://schemas.openxmlformats.org/drawingml/2006/main">
-            <a:pPr marL="0" indent="0">
-              <a:buNone/>
-            </a:pPr>
-            <a:r>
-              <a:rPr sz="3200" b="1">
-                <a:solidFill>
-                  <a:srgbClr val="1A1A1A"/>
-                </a:solidFill>
-                <a:latin typeface="Trebuchet MS"/>
-                <a:ea typeface="Trebuchet MS"/>
-                <a:cs typeface="Trebuchet MS"/>
-              </a:rPr>
-              <a:t>The POC has not yet proved client performance</a:t>
-            </a:r>
-            <a:endParaRPr sz="3200"/>
-          </a:p>
-        </p:txBody>
-      </p:sp>
-      <p:sp>
-        <p:nvSpPr>
-          <p:cNvPr id="3" name="Shape 1">
-            <a:extLst xmlns:a="http://schemas.openxmlformats.org/drawingml/2006/main">
-              <a:ext uri="{FF2B5EF4-FFF2-40B4-BE49-F238E27FC236}">
-                <a16:creationId xmlns:a16="http://schemas.microsoft.com/office/drawing/2014/main" id="{C6752D99-6392-427D-BD31-4522D9E17AC3}"/>
-              </a:ext>
-            </a:extLst>
-          </p:cNvPr>
-          <p:cNvSpPr>
-            <a:spLocks xmlns:a="http://schemas.openxmlformats.org/drawingml/2006/main" noGrp="1"/>
-          </p:cNvSpPr>
-          <p:nvPr/>
-        </p:nvSpPr>
-        <p:spPr>
-          <a:xfrm xmlns:a="http://schemas.openxmlformats.org/drawingml/2006/main">
-            <a:off x="822960" y="1444752"/>
-            <a:ext cx="1371600" cy="0"/>
-          </a:xfrm>
-          <a:prstGeom xmlns:a="http://schemas.openxmlformats.org/drawingml/2006/main" prst="line">
-            <a:avLst/>
-          </a:prstGeom>
-          <a:noFill xmlns:a="http://schemas.openxmlformats.org/drawingml/2006/main"/>
-          <a:ln xmlns:a="http://schemas.openxmlformats.org/drawingml/2006/main" w="25400">
-            <a:solidFill>
-              <a:srgbClr val="B0341F"/>
-            </a:solidFill>
-            <a:prstDash val="solid"/>
-          </a:ln>
-        </p:spPr>
-      </p:sp>
-      <p:sp>
-        <p:nvSpPr>
-          <p:cNvPr id="4" name="Shape 2">
-            <a:extLst xmlns:a="http://schemas.openxmlformats.org/drawingml/2006/main">
-              <a:ext uri="{FF2B5EF4-FFF2-40B4-BE49-F238E27FC236}">
-                <a16:creationId xmlns:a16="http://schemas.microsoft.com/office/drawing/2014/main" id="{78909DCB-12F8-4F1C-8906-A536B0DEB644}"/>
-              </a:ext>
-            </a:extLst>
-          </p:cNvPr>
-          <p:cNvSpPr>
-            <a:spLocks xmlns:a="http://schemas.openxmlformats.org/drawingml/2006/main" noGrp="1"/>
-          </p:cNvSpPr>
-          <p:nvPr/>
-        </p:nvSpPr>
-        <p:spPr>
-          <a:xfrm xmlns:a="http://schemas.openxmlformats.org/drawingml/2006/main">
-            <a:off x="822960" y="6355080"/>
-            <a:ext cx="10545775" cy="0"/>
-          </a:xfrm>
-          <a:prstGeom xmlns:a="http://schemas.openxmlformats.org/drawingml/2006/main" prst="line">
-            <a:avLst/>
-          </a:prstGeom>
-          <a:noFill xmlns:a="http://schemas.openxmlformats.org/drawingml/2006/main"/>
-          <a:ln xmlns:a="http://schemas.openxmlformats.org/drawingml/2006/main" w="12700">
-            <a:solidFill>
-              <a:srgbClr val="E0E0E0"/>
-            </a:solidFill>
-            <a:prstDash val="solid"/>
-          </a:ln>
-        </p:spPr>
-      </p:sp>
-      <p:sp>
-        <p:nvSpPr>
-          <p:cNvPr id="5" name="Text 3">
-            <a:extLst xmlns:a="http://schemas.openxmlformats.org/drawingml/2006/main">
-              <a:ext uri="{FF2B5EF4-FFF2-40B4-BE49-F238E27FC236}">
-                <a16:creationId xmlns:a16="http://schemas.microsoft.com/office/drawing/2014/main" id="{47A30F48-AD83-4DC0-9256-7FD2FD48A98F}"/>
-              </a:ext>
-            </a:extLst>
-          </p:cNvPr>
-          <p:cNvSpPr>
-            <a:spLocks xmlns:a="http://schemas.openxmlformats.org/drawingml/2006/main" noGrp="1"/>
-          </p:cNvSpPr>
-          <p:nvPr/>
-        </p:nvSpPr>
-        <p:spPr>
-          <a:xfrm xmlns:a="http://schemas.openxmlformats.org/drawingml/2006/main">
-            <a:off x="822960" y="6400800"/>
-            <a:ext cx="5486400" cy="274320"/>
-          </a:xfrm>
-          <a:prstGeom xmlns:a="http://schemas.openxmlformats.org/drawingml/2006/main" prst="rect">
-            <a:avLst/>
-          </a:prstGeom>
-          <a:noFill xmlns:a="http://schemas.openxmlformats.org/drawingml/2006/main"/>
-        </p:spPr>
-        <p:txBody>
-          <a:bodyPr xmlns:a="http://schemas.openxmlformats.org/drawingml/2006/main" wrap="square" lIns="0" tIns="0" rIns="0" bIns="0" anchor="ctr"/>
-          <a:lstStyle xmlns:a="http://schemas.openxmlformats.org/drawingml/2006/main"/>
-          <a:p xmlns:a="http://schemas.openxmlformats.org/drawingml/2006/main">
-            <a:pPr marL="0" indent="0">
-              <a:buNone/>
-            </a:pPr>
-            <a:r>
-              <a:rPr sz="900">
-                <a:solidFill>
-                  <a:srgbClr val="6B6B6B"/>
-                </a:solidFill>
-                <a:latin typeface="Calibri"/>
-                <a:ea typeface="Calibri"/>
-                <a:cs typeface="Calibri"/>
-              </a:rPr>
-              <a:t>Capstone Round 2  ·  Assist</a:t>
-            </a:r>
-            <a:endParaRPr sz="900"/>
-          </a:p>
-        </p:txBody>
-      </p:sp>
-      <p:sp>
-        <p:nvSpPr>
-          <p:cNvPr id="6" name="Text 4">
-            <a:extLst xmlns:a="http://schemas.openxmlformats.org/drawingml/2006/main">
-              <a:ext uri="{FF2B5EF4-FFF2-40B4-BE49-F238E27FC236}">
-                <a16:creationId xmlns:a16="http://schemas.microsoft.com/office/drawing/2014/main" id="{D5E9AACA-7F44-468B-84BD-58BBB4CA8B49}"/>
-              </a:ext>
-            </a:extLst>
-          </p:cNvPr>
-          <p:cNvSpPr>
-            <a:spLocks xmlns:a="http://schemas.openxmlformats.org/drawingml/2006/main" noGrp="1"/>
-          </p:cNvSpPr>
-          <p:nvPr/>
-        </p:nvSpPr>
-        <p:spPr>
-          <a:xfrm xmlns:a="http://schemas.openxmlformats.org/drawingml/2006/main">
-            <a:off x="10454335" y="6400800"/>
-            <a:ext cx="914400" cy="274320"/>
-          </a:xfrm>
-          <a:prstGeom xmlns:a="http://schemas.openxmlformats.org/drawingml/2006/main" prst="rect">
-            <a:avLst/>
-          </a:prstGeom>
-          <a:noFill xmlns:a="http://schemas.openxmlformats.org/drawingml/2006/main"/>
-        </p:spPr>
-        <p:txBody>
-          <a:bodyPr xmlns:a="http://schemas.openxmlformats.org/drawingml/2006/main" wrap="square" lIns="0" tIns="0" rIns="0" bIns="0" anchor="ctr"/>
-          <a:lstStyle xmlns:a="http://schemas.openxmlformats.org/drawingml/2006/main"/>
-          <a:p xmlns:a="http://schemas.openxmlformats.org/drawingml/2006/main">
-            <a:pPr marL="0" indent="0" algn="r">
-              <a:buNone/>
-            </a:pPr>
-            <a:r>
-              <a:rPr sz="900">
-                <a:solidFill>
-                  <a:srgbClr val="6B6B6B"/>
-                </a:solidFill>
-                <a:latin typeface="Calibri"/>
-                <a:ea typeface="Calibri"/>
-                <a:cs typeface="Calibri"/>
-              </a:rPr>
-              <a:t>11</a:t>
-            </a:r>
-            <a:endParaRPr sz="900"/>
-          </a:p>
-        </p:txBody>
-      </p:sp>
-      <p:sp>
-        <p:nvSpPr>
-          <p:cNvPr id="7" name="Text 5">
-            <a:extLst xmlns:a="http://schemas.openxmlformats.org/drawingml/2006/main">
-              <a:ext uri="{FF2B5EF4-FFF2-40B4-BE49-F238E27FC236}">
-                <a16:creationId xmlns:a16="http://schemas.microsoft.com/office/drawing/2014/main" id="{D04DB212-D7C1-40FB-BAA0-42A391891DD5}"/>
-              </a:ext>
-            </a:extLst>
-          </p:cNvPr>
-          <p:cNvSpPr>
-            <a:spLocks xmlns:a="http://schemas.openxmlformats.org/drawingml/2006/main" noGrp="1"/>
-          </p:cNvSpPr>
-          <p:nvPr/>
-        </p:nvSpPr>
-        <p:spPr>
-          <a:xfrm xmlns:a="http://schemas.openxmlformats.org/drawingml/2006/main">
-            <a:off x="822960" y="1773936"/>
-            <a:ext cx="6960212" cy="402336"/>
-          </a:xfrm>
-          <a:prstGeom xmlns:a="http://schemas.openxmlformats.org/drawingml/2006/main" prst="rect">
-            <a:avLst/>
-          </a:prstGeom>
-          <a:noFill xmlns:a="http://schemas.openxmlformats.org/drawingml/2006/main"/>
-        </p:spPr>
-        <p:txBody>
-          <a:bodyPr xmlns:a="http://schemas.openxmlformats.org/drawingml/2006/main" wrap="square" lIns="0" tIns="0" rIns="0" bIns="0" anchor="ctr"/>
-          <a:lstStyle xmlns:a="http://schemas.openxmlformats.org/drawingml/2006/main"/>
-          <a:p xmlns:a="http://schemas.openxmlformats.org/drawingml/2006/main">
-            <a:pPr marL="0" indent="0">
-              <a:buNone/>
-            </a:pPr>
-            <a:r>
-              <a:rPr sz="2400" b="1" spc="100">
-                <a:solidFill>
-                  <a:srgbClr val="B0341F"/>
-                </a:solidFill>
-                <a:latin typeface="Calibri"/>
-                <a:ea typeface="Calibri"/>
-                <a:cs typeface="Calibri"/>
-              </a:rPr>
-              <a:t>MEASURE</a:t>
-            </a:r>
-            <a:endParaRPr sz="2400"/>
-          </a:p>
-        </p:txBody>
-      </p:sp>
-      <p:sp>
-        <p:nvSpPr>
-          <p:cNvPr id="8" name="Text 6">
-            <a:extLst xmlns:a="http://schemas.openxmlformats.org/drawingml/2006/main">
-              <a:ext uri="{FF2B5EF4-FFF2-40B4-BE49-F238E27FC236}">
-                <a16:creationId xmlns:a16="http://schemas.microsoft.com/office/drawing/2014/main" id="{CAA9D526-2D34-4925-94E6-4BF2F62F0C24}"/>
-              </a:ext>
-            </a:extLst>
-          </p:cNvPr>
-          <p:cNvSpPr>
-            <a:spLocks xmlns:a="http://schemas.openxmlformats.org/drawingml/2006/main" noGrp="1"/>
-          </p:cNvSpPr>
-          <p:nvPr/>
-        </p:nvSpPr>
-        <p:spPr>
-          <a:xfrm xmlns:a="http://schemas.openxmlformats.org/drawingml/2006/main">
-            <a:off x="7783172" y="1773936"/>
-            <a:ext cx="3585564" cy="402336"/>
-          </a:xfrm>
-          <a:prstGeom xmlns:a="http://schemas.openxmlformats.org/drawingml/2006/main" prst="rect">
-            <a:avLst/>
-          </a:prstGeom>
-          <a:noFill xmlns:a="http://schemas.openxmlformats.org/drawingml/2006/main"/>
-        </p:spPr>
-        <p:txBody>
-          <a:bodyPr xmlns:a="http://schemas.openxmlformats.org/drawingml/2006/main" wrap="square" lIns="0" tIns="0" rIns="0" bIns="0" anchor="ctr"/>
-          <a:lstStyle xmlns:a="http://schemas.openxmlformats.org/drawingml/2006/main"/>
-          <a:p xmlns:a="http://schemas.openxmlformats.org/drawingml/2006/main">
-            <a:pPr marL="0" indent="0" algn="r">
-              <a:buNone/>
-            </a:pPr>
-            <a:r>
-              <a:rPr sz="2400" b="1" spc="100">
-                <a:solidFill>
-                  <a:srgbClr val="B0341F"/>
-                </a:solidFill>
-                <a:latin typeface="Calibri"/>
-                <a:ea typeface="Calibri"/>
-                <a:cs typeface="Calibri"/>
-              </a:rPr>
-              <a:t>RESULT</a:t>
-            </a:r>
-            <a:endParaRPr sz="2400"/>
-          </a:p>
-        </p:txBody>
-      </p:sp>
-      <p:sp>
-        <p:nvSpPr>
-          <p:cNvPr id="9" name="Shape 7">
-            <a:extLst xmlns:a="http://schemas.openxmlformats.org/drawingml/2006/main">
-              <a:ext uri="{FF2B5EF4-FFF2-40B4-BE49-F238E27FC236}">
-                <a16:creationId xmlns:a16="http://schemas.microsoft.com/office/drawing/2014/main" id="{FEDC68E5-AC3A-4C6D-8082-8F6AC44C8802}"/>
-              </a:ext>
-            </a:extLst>
-          </p:cNvPr>
-          <p:cNvSpPr>
-            <a:spLocks xmlns:a="http://schemas.openxmlformats.org/drawingml/2006/main" noGrp="1"/>
-          </p:cNvSpPr>
-          <p:nvPr/>
-        </p:nvSpPr>
-        <p:spPr>
-          <a:xfrm xmlns:a="http://schemas.openxmlformats.org/drawingml/2006/main">
-            <a:off x="822960" y="2212848"/>
-            <a:ext cx="10545775" cy="0"/>
-          </a:xfrm>
-          <a:prstGeom xmlns:a="http://schemas.openxmlformats.org/drawingml/2006/main" prst="line">
-            <a:avLst/>
-          </a:prstGeom>
-          <a:noFill xmlns:a="http://schemas.openxmlformats.org/drawingml/2006/main"/>
-          <a:ln xmlns:a="http://schemas.openxmlformats.org/drawingml/2006/main" w="12700">
-            <a:solidFill>
-              <a:srgbClr val="1A1A1A"/>
-            </a:solidFill>
-            <a:prstDash val="solid"/>
-          </a:ln>
-        </p:spPr>
-      </p:sp>
-      <p:sp>
-        <p:nvSpPr>
-          <p:cNvPr id="10" name="Text 8">
-            <a:extLst xmlns:a="http://schemas.openxmlformats.org/drawingml/2006/main">
-              <a:ext uri="{FF2B5EF4-FFF2-40B4-BE49-F238E27FC236}">
-                <a16:creationId xmlns:a16="http://schemas.microsoft.com/office/drawing/2014/main" id="{9D62BC10-5949-40EC-9751-7931C8CBA186}"/>
-              </a:ext>
-            </a:extLst>
-          </p:cNvPr>
-          <p:cNvSpPr>
-            <a:spLocks xmlns:a="http://schemas.openxmlformats.org/drawingml/2006/main" noGrp="1"/>
-          </p:cNvSpPr>
-          <p:nvPr/>
-        </p:nvSpPr>
-        <p:spPr>
-          <a:xfrm xmlns:a="http://schemas.openxmlformats.org/drawingml/2006/main">
-            <a:off x="822960" y="2340864"/>
-            <a:ext cx="6960212" cy="713232"/>
-          </a:xfrm>
-          <a:prstGeom xmlns:a="http://schemas.openxmlformats.org/drawingml/2006/main" prst="rect">
-            <a:avLst/>
-          </a:prstGeom>
-          <a:noFill xmlns:a="http://schemas.openxmlformats.org/drawingml/2006/main"/>
-        </p:spPr>
-        <p:txBody>
-          <a:bodyPr xmlns:a="http://schemas.openxmlformats.org/drawingml/2006/main" wrap="square" lIns="0" tIns="0" rIns="0" bIns="0" anchor="ctr"/>
-          <a:lstStyle xmlns:a="http://schemas.openxmlformats.org/drawingml/2006/main"/>
-          <a:p xmlns:a="http://schemas.openxmlformats.org/drawingml/2006/main">
-            <a:pPr marL="0" indent="0">
-              <a:buNone/>
-            </a:pPr>
-            <a:r>
-              <a:rPr sz="2400">
-                <a:solidFill>
-                  <a:srgbClr val="1A1A1A"/>
-                </a:solidFill>
-                <a:latin typeface="Calibri"/>
-                <a:ea typeface="Calibri"/>
-                <a:cs typeface="Calibri"/>
-              </a:rPr>
-              <a:t>Complainant labels · gpt-4o-mini (deployed) / gpt-4o</a:t>
-            </a:r>
-            <a:endParaRPr sz="2400"/>
-          </a:p>
-        </p:txBody>
-      </p:sp>
-      <p:sp>
-        <p:nvSpPr>
-          <p:cNvPr id="11" name="Text 9">
-            <a:extLst xmlns:a="http://schemas.openxmlformats.org/drawingml/2006/main">
-              <a:ext uri="{FF2B5EF4-FFF2-40B4-BE49-F238E27FC236}">
-                <a16:creationId xmlns:a16="http://schemas.microsoft.com/office/drawing/2014/main" id="{6D73736A-612D-46BC-9C3E-A018D495686B}"/>
-              </a:ext>
-            </a:extLst>
-          </p:cNvPr>
-          <p:cNvSpPr>
-            <a:spLocks xmlns:a="http://schemas.openxmlformats.org/drawingml/2006/main" noGrp="1"/>
-          </p:cNvSpPr>
-          <p:nvPr/>
-        </p:nvSpPr>
-        <p:spPr>
-          <a:xfrm xmlns:a="http://schemas.openxmlformats.org/drawingml/2006/main">
-            <a:off x="7783172" y="2340864"/>
-            <a:ext cx="3585564" cy="713232"/>
-          </a:xfrm>
-          <a:prstGeom xmlns:a="http://schemas.openxmlformats.org/drawingml/2006/main" prst="rect">
-            <a:avLst/>
-          </a:prstGeom>
-          <a:noFill xmlns:a="http://schemas.openxmlformats.org/drawingml/2006/main"/>
-        </p:spPr>
-        <p:txBody>
-          <a:bodyPr xmlns:a="http://schemas.openxmlformats.org/drawingml/2006/main" wrap="square" lIns="0" tIns="0" rIns="0" bIns="0" anchor="ctr"/>
-          <a:lstStyle xmlns:a="http://schemas.openxmlformats.org/drawingml/2006/main"/>
-          <a:p xmlns:a="http://schemas.openxmlformats.org/drawingml/2006/main">
-            <a:pPr marL="0" indent="0" algn="r">
-              <a:buNone/>
-            </a:pPr>
-            <a:r>
-              <a:rPr sz="2400" b="1">
-                <a:solidFill>
-                  <a:srgbClr val="1A1A1A"/>
-                </a:solidFill>
-                <a:latin typeface="Calibri"/>
-                <a:ea typeface="Calibri"/>
-                <a:cs typeface="Calibri"/>
-              </a:rPr>
-              <a:t>56.8% / 60.5%</a:t>
-            </a:r>
-            <a:endParaRPr sz="2400"/>
-          </a:p>
-        </p:txBody>
-      </p:sp>
-      <p:sp>
-        <p:nvSpPr>
-          <p:cNvPr id="12" name="Shape 10">
-            <a:extLst xmlns:a="http://schemas.openxmlformats.org/drawingml/2006/main">
-              <a:ext uri="{FF2B5EF4-FFF2-40B4-BE49-F238E27FC236}">
-                <a16:creationId xmlns:a16="http://schemas.microsoft.com/office/drawing/2014/main" id="{82FE88FC-EF42-4265-BF12-1BF806FC8DFA}"/>
-              </a:ext>
-            </a:extLst>
-          </p:cNvPr>
-          <p:cNvSpPr>
-            <a:spLocks xmlns:a="http://schemas.openxmlformats.org/drawingml/2006/main" noGrp="1"/>
-          </p:cNvSpPr>
-          <p:nvPr/>
-        </p:nvSpPr>
-        <p:spPr>
-          <a:xfrm xmlns:a="http://schemas.openxmlformats.org/drawingml/2006/main">
-            <a:off x="822960" y="3054096"/>
-            <a:ext cx="10545775" cy="0"/>
-          </a:xfrm>
-          <a:prstGeom xmlns:a="http://schemas.openxmlformats.org/drawingml/2006/main" prst="line">
-            <a:avLst/>
-          </a:prstGeom>
-          <a:noFill xmlns:a="http://schemas.openxmlformats.org/drawingml/2006/main"/>
-          <a:ln xmlns:a="http://schemas.openxmlformats.org/drawingml/2006/main" w="12700">
-            <a:solidFill>
-              <a:srgbClr val="E0E0E0"/>
-            </a:solidFill>
-            <a:prstDash val="solid"/>
-          </a:ln>
-        </p:spPr>
-      </p:sp>
-      <p:sp>
-        <p:nvSpPr>
-          <p:cNvPr id="13" name="Text 11">
-            <a:extLst xmlns:a="http://schemas.openxmlformats.org/drawingml/2006/main">
-              <a:ext uri="{FF2B5EF4-FFF2-40B4-BE49-F238E27FC236}">
-                <a16:creationId xmlns:a16="http://schemas.microsoft.com/office/drawing/2014/main" id="{DB2D7215-A526-4FCA-8EC4-2DDE373820D6}"/>
-              </a:ext>
-            </a:extLst>
-          </p:cNvPr>
-          <p:cNvSpPr>
-            <a:spLocks xmlns:a="http://schemas.openxmlformats.org/drawingml/2006/main" noGrp="1"/>
-          </p:cNvSpPr>
-          <p:nvPr/>
-        </p:nvSpPr>
-        <p:spPr>
-          <a:xfrm xmlns:a="http://schemas.openxmlformats.org/drawingml/2006/main">
-            <a:off x="822960" y="3054096"/>
-            <a:ext cx="6960212" cy="713232"/>
-          </a:xfrm>
-          <a:prstGeom xmlns:a="http://schemas.openxmlformats.org/drawingml/2006/main" prst="rect">
-            <a:avLst/>
-          </a:prstGeom>
-          <a:noFill xmlns:a="http://schemas.openxmlformats.org/drawingml/2006/main"/>
-        </p:spPr>
-        <p:txBody>
-          <a:bodyPr xmlns:a="http://schemas.openxmlformats.org/drawingml/2006/main" wrap="square" lIns="0" tIns="0" rIns="0" bIns="0" anchor="ctr"/>
-          <a:lstStyle xmlns:a="http://schemas.openxmlformats.org/drawingml/2006/main"/>
-          <a:p xmlns:a="http://schemas.openxmlformats.org/drawingml/2006/main">
-            <a:pPr marL="0" indent="0">
-              <a:buNone/>
-            </a:pPr>
-            <a:r>
-              <a:rPr sz="2400">
-                <a:solidFill>
-                  <a:srgbClr val="1A1A1A"/>
-                </a:solidFill>
-                <a:latin typeface="Calibri"/>
-                <a:ea typeface="Calibri"/>
-                <a:cs typeface="Calibri"/>
-              </a:rPr>
-              <a:t>Self-agreement on the same input · gpt-4o</a:t>
-            </a:r>
-            <a:endParaRPr sz="2400"/>
-          </a:p>
-        </p:txBody>
-      </p:sp>
-      <p:sp>
-        <p:nvSpPr>
-          <p:cNvPr id="14" name="Text 12">
-            <a:extLst xmlns:a="http://schemas.openxmlformats.org/drawingml/2006/main">
-              <a:ext uri="{FF2B5EF4-FFF2-40B4-BE49-F238E27FC236}">
-                <a16:creationId xmlns:a16="http://schemas.microsoft.com/office/drawing/2014/main" id="{63022B1F-9273-4916-A6AC-2A198E97A232}"/>
-              </a:ext>
-            </a:extLst>
-          </p:cNvPr>
-          <p:cNvSpPr>
-            <a:spLocks xmlns:a="http://schemas.openxmlformats.org/drawingml/2006/main" noGrp="1"/>
-          </p:cNvSpPr>
-          <p:nvPr/>
-        </p:nvSpPr>
-        <p:spPr>
-          <a:xfrm xmlns:a="http://schemas.openxmlformats.org/drawingml/2006/main">
-            <a:off x="7783172" y="3054096"/>
-            <a:ext cx="3585564" cy="713232"/>
-          </a:xfrm>
-          <a:prstGeom xmlns:a="http://schemas.openxmlformats.org/drawingml/2006/main" prst="rect">
-            <a:avLst/>
-          </a:prstGeom>
-          <a:noFill xmlns:a="http://schemas.openxmlformats.org/drawingml/2006/main"/>
-        </p:spPr>
-        <p:txBody>
-          <a:bodyPr xmlns:a="http://schemas.openxmlformats.org/drawingml/2006/main" wrap="square" lIns="0" tIns="0" rIns="0" bIns="0" anchor="ctr"/>
-          <a:lstStyle xmlns:a="http://schemas.openxmlformats.org/drawingml/2006/main"/>
-          <a:p xmlns:a="http://schemas.openxmlformats.org/drawingml/2006/main">
-            <a:pPr marL="0" indent="0" algn="r">
-              <a:buNone/>
-            </a:pPr>
-            <a:r>
-              <a:rPr sz="2400" b="1">
-                <a:solidFill>
-                  <a:srgbClr val="1A1A1A"/>
-                </a:solidFill>
-                <a:latin typeface="Calibri"/>
-                <a:ea typeface="Calibri"/>
-                <a:cs typeface="Calibri"/>
-              </a:rPr>
-              <a:t>88.0%</a:t>
-            </a:r>
-            <a:endParaRPr sz="2400"/>
-          </a:p>
-        </p:txBody>
-      </p:sp>
-      <p:sp>
-        <p:nvSpPr>
-          <p:cNvPr id="15" name="Shape 13">
-            <a:extLst xmlns:a="http://schemas.openxmlformats.org/drawingml/2006/main">
-              <a:ext uri="{FF2B5EF4-FFF2-40B4-BE49-F238E27FC236}">
-                <a16:creationId xmlns:a16="http://schemas.microsoft.com/office/drawing/2014/main" id="{153FC865-0651-4EB3-B28C-2D953EA83B80}"/>
-              </a:ext>
-            </a:extLst>
-          </p:cNvPr>
-          <p:cNvSpPr>
-            <a:spLocks xmlns:a="http://schemas.openxmlformats.org/drawingml/2006/main" noGrp="1"/>
-          </p:cNvSpPr>
-          <p:nvPr/>
-        </p:nvSpPr>
-        <p:spPr>
-          <a:xfrm xmlns:a="http://schemas.openxmlformats.org/drawingml/2006/main">
-            <a:off x="822960" y="3767328"/>
-            <a:ext cx="10545775" cy="0"/>
-          </a:xfrm>
-          <a:prstGeom xmlns:a="http://schemas.openxmlformats.org/drawingml/2006/main" prst="line">
-            <a:avLst/>
-          </a:prstGeom>
-          <a:noFill xmlns:a="http://schemas.openxmlformats.org/drawingml/2006/main"/>
-          <a:ln xmlns:a="http://schemas.openxmlformats.org/drawingml/2006/main" w="12700">
-            <a:solidFill>
-              <a:srgbClr val="E0E0E0"/>
-            </a:solidFill>
-            <a:prstDash val="solid"/>
-          </a:ln>
-        </p:spPr>
-      </p:sp>
-      <p:sp>
-        <p:nvSpPr>
-          <p:cNvPr id="16" name="Text 14">
-            <a:extLst xmlns:a="http://schemas.openxmlformats.org/drawingml/2006/main">
-              <a:ext uri="{FF2B5EF4-FFF2-40B4-BE49-F238E27FC236}">
-                <a16:creationId xmlns:a16="http://schemas.microsoft.com/office/drawing/2014/main" id="{28F90436-1D1C-4058-A535-6469D1026AA8}"/>
-              </a:ext>
-            </a:extLst>
-          </p:cNvPr>
-          <p:cNvSpPr>
-            <a:spLocks xmlns:a="http://schemas.openxmlformats.org/drawingml/2006/main" noGrp="1"/>
-          </p:cNvSpPr>
-          <p:nvPr/>
-        </p:nvSpPr>
-        <p:spPr>
-          <a:xfrm xmlns:a="http://schemas.openxmlformats.org/drawingml/2006/main">
-            <a:off x="822960" y="3767328"/>
-            <a:ext cx="6960212" cy="713232"/>
-          </a:xfrm>
-          <a:prstGeom xmlns:a="http://schemas.openxmlformats.org/drawingml/2006/main" prst="rect">
-            <a:avLst/>
-          </a:prstGeom>
-          <a:noFill xmlns:a="http://schemas.openxmlformats.org/drawingml/2006/main"/>
-        </p:spPr>
-        <p:txBody>
-          <a:bodyPr xmlns:a="http://schemas.openxmlformats.org/drawingml/2006/main" wrap="square" lIns="0" tIns="0" rIns="0" bIns="0" anchor="ctr"/>
-          <a:lstStyle xmlns:a="http://schemas.openxmlformats.org/drawingml/2006/main"/>
-          <a:p xmlns:a="http://schemas.openxmlformats.org/drawingml/2006/main">
-            <a:pPr marL="0" indent="0">
-              <a:buNone/>
-            </a:pPr>
-            <a:r>
-              <a:rPr sz="2400">
-                <a:solidFill>
-                  <a:srgbClr val="1A1A1A"/>
-                </a:solidFill>
-                <a:latin typeface="Calibri"/>
-                <a:ea typeface="Calibri"/>
-                <a:cs typeface="Calibri"/>
-              </a:rPr>
-              <a:t>Synthetic anomaly precision</a:t>
-            </a:r>
-            <a:endParaRPr sz="2400"/>
-          </a:p>
-        </p:txBody>
-      </p:sp>
-      <p:sp>
-        <p:nvSpPr>
-          <p:cNvPr id="17" name="Text 15">
-            <a:extLst xmlns:a="http://schemas.openxmlformats.org/drawingml/2006/main">
-              <a:ext uri="{FF2B5EF4-FFF2-40B4-BE49-F238E27FC236}">
-                <a16:creationId xmlns:a16="http://schemas.microsoft.com/office/drawing/2014/main" id="{D7C139B0-6FE4-4B7A-95F5-5572E5C7F64A}"/>
-              </a:ext>
-            </a:extLst>
-          </p:cNvPr>
-          <p:cNvSpPr>
-            <a:spLocks xmlns:a="http://schemas.openxmlformats.org/drawingml/2006/main" noGrp="1"/>
-          </p:cNvSpPr>
-          <p:nvPr/>
-        </p:nvSpPr>
-        <p:spPr>
-          <a:xfrm xmlns:a="http://schemas.openxmlformats.org/drawingml/2006/main">
-            <a:off x="7783172" y="3767328"/>
-            <a:ext cx="3585564" cy="713232"/>
-          </a:xfrm>
-          <a:prstGeom xmlns:a="http://schemas.openxmlformats.org/drawingml/2006/main" prst="rect">
-            <a:avLst/>
-          </a:prstGeom>
-          <a:noFill xmlns:a="http://schemas.openxmlformats.org/drawingml/2006/main"/>
-        </p:spPr>
-        <p:txBody>
-          <a:bodyPr xmlns:a="http://schemas.openxmlformats.org/drawingml/2006/main" wrap="square" lIns="0" tIns="0" rIns="0" bIns="0" anchor="ctr"/>
-          <a:lstStyle xmlns:a="http://schemas.openxmlformats.org/drawingml/2006/main"/>
-          <a:p xmlns:a="http://schemas.openxmlformats.org/drawingml/2006/main">
-            <a:pPr marL="0" indent="0" algn="r">
-              <a:buNone/>
-            </a:pPr>
-            <a:r>
-              <a:rPr sz="2400" b="1">
-                <a:solidFill>
-                  <a:srgbClr val="1A1A1A"/>
-                </a:solidFill>
-                <a:latin typeface="Calibri"/>
-                <a:ea typeface="Calibri"/>
-                <a:cs typeface="Calibri"/>
-              </a:rPr>
-              <a:t>97.9%</a:t>
-            </a:r>
-            <a:endParaRPr sz="2400"/>
-          </a:p>
-        </p:txBody>
-      </p:sp>
-      <p:sp>
-        <p:nvSpPr>
-          <p:cNvPr id="18" name="Shape 16">
-            <a:extLst xmlns:a="http://schemas.openxmlformats.org/drawingml/2006/main">
-              <a:ext uri="{FF2B5EF4-FFF2-40B4-BE49-F238E27FC236}">
-                <a16:creationId xmlns:a16="http://schemas.microsoft.com/office/drawing/2014/main" id="{D4943C01-22A6-4B70-BFBA-789AE3CDCC22}"/>
-              </a:ext>
-            </a:extLst>
-          </p:cNvPr>
-          <p:cNvSpPr>
-            <a:spLocks xmlns:a="http://schemas.openxmlformats.org/drawingml/2006/main" noGrp="1"/>
-          </p:cNvSpPr>
-          <p:nvPr/>
-        </p:nvSpPr>
-        <p:spPr>
-          <a:xfrm xmlns:a="http://schemas.openxmlformats.org/drawingml/2006/main">
-            <a:off x="822960" y="4480560"/>
-            <a:ext cx="10545775" cy="0"/>
-          </a:xfrm>
-          <a:prstGeom xmlns:a="http://schemas.openxmlformats.org/drawingml/2006/main" prst="line">
-            <a:avLst/>
-          </a:prstGeom>
-          <a:noFill xmlns:a="http://schemas.openxmlformats.org/drawingml/2006/main"/>
-          <a:ln xmlns:a="http://schemas.openxmlformats.org/drawingml/2006/main" w="12700">
-            <a:solidFill>
-              <a:srgbClr val="E0E0E0"/>
-            </a:solidFill>
-            <a:prstDash val="solid"/>
-          </a:ln>
-        </p:spPr>
-      </p:sp>
-      <p:sp>
-        <p:nvSpPr>
-          <p:cNvPr id="19" name="Text 17">
-            <a:extLst xmlns:a="http://schemas.openxmlformats.org/drawingml/2006/main">
-              <a:ext uri="{FF2B5EF4-FFF2-40B4-BE49-F238E27FC236}">
-                <a16:creationId xmlns:a16="http://schemas.microsoft.com/office/drawing/2014/main" id="{C174BB8A-BC1C-4206-AAD8-D7BCBCD824FD}"/>
-              </a:ext>
-            </a:extLst>
-          </p:cNvPr>
-          <p:cNvSpPr>
-            <a:spLocks xmlns:a="http://schemas.openxmlformats.org/drawingml/2006/main" noGrp="1"/>
-          </p:cNvSpPr>
-          <p:nvPr/>
-        </p:nvSpPr>
-        <p:spPr>
-          <a:xfrm xmlns:a="http://schemas.openxmlformats.org/drawingml/2006/main">
-            <a:off x="822960" y="4480560"/>
-            <a:ext cx="6960212" cy="713232"/>
-          </a:xfrm>
-          <a:prstGeom xmlns:a="http://schemas.openxmlformats.org/drawingml/2006/main" prst="rect">
-            <a:avLst/>
-          </a:prstGeom>
-          <a:noFill xmlns:a="http://schemas.openxmlformats.org/drawingml/2006/main"/>
-        </p:spPr>
-        <p:txBody>
-          <a:bodyPr xmlns:a="http://schemas.openxmlformats.org/drawingml/2006/main" wrap="square" lIns="0" tIns="0" rIns="0" bIns="0" anchor="ctr"/>
-          <a:lstStyle xmlns:a="http://schemas.openxmlformats.org/drawingml/2006/main"/>
-          <a:p xmlns:a="http://schemas.openxmlformats.org/drawingml/2006/main">
-            <a:pPr marL="0" indent="0">
-              <a:buNone/>
-            </a:pPr>
-            <a:r>
-              <a:rPr sz="2400">
-                <a:solidFill>
-                  <a:srgbClr val="1A1A1A"/>
-                </a:solidFill>
-                <a:latin typeface="Calibri"/>
-                <a:ea typeface="Calibri"/>
-                <a:cs typeface="Calibri"/>
-              </a:rPr>
-              <a:t>Accuracy / anomaly precision on client data</a:t>
-            </a:r>
-            <a:endParaRPr sz="2400"/>
-          </a:p>
-        </p:txBody>
-      </p:sp>
-      <p:sp>
-        <p:nvSpPr>
-          <p:cNvPr id="20" name="Text 18">
-            <a:extLst xmlns:a="http://schemas.openxmlformats.org/drawingml/2006/main">
-              <a:ext uri="{FF2B5EF4-FFF2-40B4-BE49-F238E27FC236}">
-                <a16:creationId xmlns:a16="http://schemas.microsoft.com/office/drawing/2014/main" id="{82FC1976-FC10-4E9A-9AB2-79DCE8DDF4B2}"/>
-              </a:ext>
-            </a:extLst>
-          </p:cNvPr>
-          <p:cNvSpPr>
-            <a:spLocks xmlns:a="http://schemas.openxmlformats.org/drawingml/2006/main" noGrp="1"/>
-          </p:cNvSpPr>
-          <p:nvPr/>
-        </p:nvSpPr>
-        <p:spPr>
-          <a:xfrm xmlns:a="http://schemas.openxmlformats.org/drawingml/2006/main">
-            <a:off x="7783172" y="4480560"/>
-            <a:ext cx="3585564" cy="713232"/>
-          </a:xfrm>
-          <a:prstGeom xmlns:a="http://schemas.openxmlformats.org/drawingml/2006/main" prst="rect">
-            <a:avLst/>
-          </a:prstGeom>
-          <a:noFill xmlns:a="http://schemas.openxmlformats.org/drawingml/2006/main"/>
-        </p:spPr>
-        <p:txBody>
-          <a:bodyPr xmlns:a="http://schemas.openxmlformats.org/drawingml/2006/main" wrap="square" lIns="0" tIns="0" rIns="0" bIns="0" anchor="ctr"/>
-          <a:lstStyle xmlns:a="http://schemas.openxmlformats.org/drawingml/2006/main"/>
-          <a:p xmlns:a="http://schemas.openxmlformats.org/drawingml/2006/main">
-            <a:pPr marL="0" indent="0" algn="r">
-              <a:buNone/>
-            </a:pPr>
-            <a:r>
-              <a:rPr sz="2400" b="1">
-                <a:solidFill>
-                  <a:srgbClr val="1A1A1A"/>
-                </a:solidFill>
-                <a:latin typeface="Calibri"/>
-                <a:ea typeface="Calibri"/>
-                <a:cs typeface="Calibri"/>
-              </a:rPr>
-              <a:t>Not measured</a:t>
-            </a:r>
-            <a:endParaRPr sz="2400"/>
-          </a:p>
-        </p:txBody>
-      </p:sp>
-      <p:sp>
-        <p:nvSpPr>
-          <p:cNvPr id="21" name="Text 19">
-            <a:extLst xmlns:a="http://schemas.openxmlformats.org/drawingml/2006/main">
-              <a:ext uri="{FF2B5EF4-FFF2-40B4-BE49-F238E27FC236}">
-                <a16:creationId xmlns:a16="http://schemas.microsoft.com/office/drawing/2014/main" id="{158B7E2B-223D-481E-87FB-25C12AB2DDC3}"/>
-              </a:ext>
-            </a:extLst>
-          </p:cNvPr>
-          <p:cNvSpPr>
-            <a:spLocks xmlns:a="http://schemas.openxmlformats.org/drawingml/2006/main" noGrp="1"/>
-          </p:cNvSpPr>
-          <p:nvPr/>
-        </p:nvSpPr>
-        <p:spPr>
-          <a:xfrm xmlns:a="http://schemas.openxmlformats.org/drawingml/2006/main">
-            <a:off x="822960" y="5577840"/>
-            <a:ext cx="10545775" cy="475488"/>
-          </a:xfrm>
-          <a:prstGeom xmlns:a="http://schemas.openxmlformats.org/drawingml/2006/main" prst="rect">
-            <a:avLst/>
-          </a:prstGeom>
-          <a:noFill xmlns:a="http://schemas.openxmlformats.org/drawingml/2006/main"/>
-        </p:spPr>
-        <p:txBody>
-          <a:bodyPr xmlns:a="http://schemas.openxmlformats.org/drawingml/2006/main" wrap="square" lIns="0" tIns="0" rIns="0" bIns="0" anchor="t"/>
-          <a:lstStyle xmlns:a="http://schemas.openxmlformats.org/drawingml/2006/main"/>
-          <a:p xmlns:a="http://schemas.openxmlformats.org/drawingml/2006/main">
-            <a:pPr marL="0" indent="0">
-              <a:buNone/>
-            </a:pPr>
-            <a:r>
-              <a:rPr sz="2400">
-                <a:solidFill>
-                  <a:srgbClr val="1A1A1A"/>
-                </a:solidFill>
-                <a:latin typeface="Calibri"/>
-                <a:ea typeface="Calibri"/>
-                <a:cs typeface="Calibri"/>
-              </a:rPr>
-              <a:t>Phase 0 creates expert labels; the shadow pilot tests real-world usefulness.</a:t>
-            </a:r>
-            <a:endParaRPr sz="2400"/>
-          </a:p>
-        </p:txBody>
-      </p:sp>
-    </p:spTree>
-    <p:extLst>
-      <p:ext uri="{BB962C8B-B14F-4D97-AF65-F5344CB8AC3E}">
-        <p14:creationId xmlns:p14="http://schemas.microsoft.com/office/powerpoint/2010/main" val="1574449820"/>
       </p:ext>
     </p:extLst>
   </p:cSld>
@@ -4281,7 +4314,7 @@
           <p:cNvPr id="2" name="Text 0">
             <a:extLst xmlns:a="http://schemas.openxmlformats.org/drawingml/2006/main">
               <a:ext uri="{FF2B5EF4-FFF2-40B4-BE49-F238E27FC236}">
-                <a16:creationId xmlns:a16="http://schemas.microsoft.com/office/drawing/2014/main" id="{CEC17690-454C-40A8-A7CC-C86880C7FDB2}"/>
+                <a16:creationId xmlns:a16="http://schemas.microsoft.com/office/drawing/2014/main" id="{78422AB6-69AB-4E2D-A86A-F00D8B7FB6DE}"/>
               </a:ext>
             </a:extLst>
           </p:cNvPr>
@@ -4316,7 +4349,7 @@
                 <a:ea typeface="Trebuchet MS"/>
                 <a:cs typeface="Trebuchet MS"/>
               </a:rPr>
-              <a:t>UC-1 and UC-3 are not high-risk; UC-2 needs counsel</a:t>
+              <a:t>The POC has not yet proved client performance</a:t>
             </a:r>
             <a:endParaRPr sz="3200"/>
           </a:p>
@@ -4327,7 +4360,7 @@
           <p:cNvPr id="3" name="Shape 1">
             <a:extLst xmlns:a="http://schemas.openxmlformats.org/drawingml/2006/main">
               <a:ext uri="{FF2B5EF4-FFF2-40B4-BE49-F238E27FC236}">
-                <a16:creationId xmlns:a16="http://schemas.microsoft.com/office/drawing/2014/main" id="{2483294B-C978-4325-BB89-2725619D695B}"/>
+                <a16:creationId xmlns:a16="http://schemas.microsoft.com/office/drawing/2014/main" id="{C6752D99-6392-427D-BD31-4522D9E17AC3}"/>
               </a:ext>
             </a:extLst>
           </p:cNvPr>
@@ -4358,7 +4391,7 @@
           <p:cNvPr id="4" name="Shape 2">
             <a:extLst xmlns:a="http://schemas.openxmlformats.org/drawingml/2006/main">
               <a:ext uri="{FF2B5EF4-FFF2-40B4-BE49-F238E27FC236}">
-                <a16:creationId xmlns:a16="http://schemas.microsoft.com/office/drawing/2014/main" id="{D3556923-0666-4F02-A5C7-37AD396D59EC}"/>
+                <a16:creationId xmlns:a16="http://schemas.microsoft.com/office/drawing/2014/main" id="{78909DCB-12F8-4F1C-8906-A536B0DEB644}"/>
               </a:ext>
             </a:extLst>
           </p:cNvPr>
@@ -4389,7 +4422,7 @@
           <p:cNvPr id="5" name="Text 3">
             <a:extLst xmlns:a="http://schemas.openxmlformats.org/drawingml/2006/main">
               <a:ext uri="{FF2B5EF4-FFF2-40B4-BE49-F238E27FC236}">
-                <a16:creationId xmlns:a16="http://schemas.microsoft.com/office/drawing/2014/main" id="{7FA4FA30-72B8-44D5-8C21-F12D304E85D9}"/>
+                <a16:creationId xmlns:a16="http://schemas.microsoft.com/office/drawing/2014/main" id="{47A30F48-AD83-4DC0-9256-7FD2FD48A98F}"/>
               </a:ext>
             </a:extLst>
           </p:cNvPr>
@@ -4435,7 +4468,7 @@
           <p:cNvPr id="6" name="Text 4">
             <a:extLst xmlns:a="http://schemas.openxmlformats.org/drawingml/2006/main">
               <a:ext uri="{FF2B5EF4-FFF2-40B4-BE49-F238E27FC236}">
-                <a16:creationId xmlns:a16="http://schemas.microsoft.com/office/drawing/2014/main" id="{F3DB20CF-909D-41D2-8B36-A2CB4570CC32}"/>
+                <a16:creationId xmlns:a16="http://schemas.microsoft.com/office/drawing/2014/main" id="{D5E9AACA-7F44-468B-84BD-58BBB4CA8B49}"/>
               </a:ext>
             </a:extLst>
           </p:cNvPr>
@@ -4481,7 +4514,7 @@
           <p:cNvPr id="7" name="Text 5">
             <a:extLst xmlns:a="http://schemas.openxmlformats.org/drawingml/2006/main">
               <a:ext uri="{FF2B5EF4-FFF2-40B4-BE49-F238E27FC236}">
-                <a16:creationId xmlns:a16="http://schemas.microsoft.com/office/drawing/2014/main" id="{BD40C905-8690-4398-9DE7-6847CC63BA65}"/>
+                <a16:creationId xmlns:a16="http://schemas.microsoft.com/office/drawing/2014/main" id="{D04DB212-D7C1-40FB-BAA0-42A391891DD5}"/>
               </a:ext>
             </a:extLst>
           </p:cNvPr>
@@ -4493,7 +4526,7 @@
         <p:spPr>
           <a:xfrm xmlns:a="http://schemas.openxmlformats.org/drawingml/2006/main">
             <a:off x="822960" y="1773936"/>
-            <a:ext cx="6327465" cy="402336"/>
+            <a:ext cx="6960212" cy="402336"/>
           </a:xfrm>
           <a:prstGeom xmlns:a="http://schemas.openxmlformats.org/drawingml/2006/main" prst="rect">
             <a:avLst/>
@@ -4516,7 +4549,7 @@
                 <a:ea typeface="Calibri"/>
                 <a:cs typeface="Calibri"/>
               </a:rPr>
-              <a:t>STEP</a:t>
+              <a:t>MEASURE</a:t>
             </a:r>
             <a:endParaRPr sz="2400"/>
           </a:p>
@@ -4527,19 +4560,19 @@
           <p:cNvPr id="8" name="Text 6">
             <a:extLst xmlns:a="http://schemas.openxmlformats.org/drawingml/2006/main">
               <a:ext uri="{FF2B5EF4-FFF2-40B4-BE49-F238E27FC236}">
-                <a16:creationId xmlns:a16="http://schemas.microsoft.com/office/drawing/2014/main" id="{53800C3A-F707-497F-8CE4-ECCE421B5F1A}"/>
-              </a:ext>
-            </a:extLst>
-          </p:cNvPr>
-          <p:cNvSpPr>
-            <a:spLocks xmlns:a="http://schemas.openxmlformats.org/drawingml/2006/main" noGrp="1"/>
-          </p:cNvSpPr>
-          <p:nvPr/>
-        </p:nvSpPr>
-        <p:spPr>
-          <a:xfrm xmlns:a="http://schemas.openxmlformats.org/drawingml/2006/main">
-            <a:off x="7150425" y="1773936"/>
-            <a:ext cx="4218310" cy="402336"/>
+                <a16:creationId xmlns:a16="http://schemas.microsoft.com/office/drawing/2014/main" id="{CAA9D526-2D34-4925-94E6-4BF2F62F0C24}"/>
+              </a:ext>
+            </a:extLst>
+          </p:cNvPr>
+          <p:cNvSpPr>
+            <a:spLocks xmlns:a="http://schemas.openxmlformats.org/drawingml/2006/main" noGrp="1"/>
+          </p:cNvSpPr>
+          <p:nvPr/>
+        </p:nvSpPr>
+        <p:spPr>
+          <a:xfrm xmlns:a="http://schemas.openxmlformats.org/drawingml/2006/main">
+            <a:off x="7783172" y="1773936"/>
+            <a:ext cx="3585564" cy="402336"/>
           </a:xfrm>
           <a:prstGeom xmlns:a="http://schemas.openxmlformats.org/drawingml/2006/main" prst="rect">
             <a:avLst/>
@@ -4562,7 +4595,7 @@
                 <a:ea typeface="Calibri"/>
                 <a:cs typeface="Calibri"/>
               </a:rPr>
-              <a:t>FINDING</a:t>
+              <a:t>RESULT</a:t>
             </a:r>
             <a:endParaRPr sz="2400"/>
           </a:p>
@@ -4573,7 +4606,7 @@
           <p:cNvPr id="9" name="Shape 7">
             <a:extLst xmlns:a="http://schemas.openxmlformats.org/drawingml/2006/main">
               <a:ext uri="{FF2B5EF4-FFF2-40B4-BE49-F238E27FC236}">
-                <a16:creationId xmlns:a16="http://schemas.microsoft.com/office/drawing/2014/main" id="{6577D523-FC5A-4690-9F3B-56BA1F4120A6}"/>
+                <a16:creationId xmlns:a16="http://schemas.microsoft.com/office/drawing/2014/main" id="{FEDC68E5-AC3A-4C6D-8082-8F6AC44C8802}"/>
               </a:ext>
             </a:extLst>
           </p:cNvPr>
@@ -4604,7 +4637,7 @@
           <p:cNvPr id="10" name="Text 8">
             <a:extLst xmlns:a="http://schemas.openxmlformats.org/drawingml/2006/main">
               <a:ext uri="{FF2B5EF4-FFF2-40B4-BE49-F238E27FC236}">
-                <a16:creationId xmlns:a16="http://schemas.microsoft.com/office/drawing/2014/main" id="{8B12870D-F924-468E-9412-C611C2EB2550}"/>
+                <a16:creationId xmlns:a16="http://schemas.microsoft.com/office/drawing/2014/main" id="{9D62BC10-5949-40EC-9751-7931C8CBA186}"/>
               </a:ext>
             </a:extLst>
           </p:cNvPr>
@@ -4616,7 +4649,7 @@
         <p:spPr>
           <a:xfrm xmlns:a="http://schemas.openxmlformats.org/drawingml/2006/main">
             <a:off x="822960" y="2340864"/>
-            <a:ext cx="6327465" cy="713232"/>
+            <a:ext cx="6960212" cy="713232"/>
           </a:xfrm>
           <a:prstGeom xmlns:a="http://schemas.openxmlformats.org/drawingml/2006/main" prst="rect">
             <a:avLst/>
@@ -4639,7 +4672,7 @@
                 <a:ea typeface="Calibri"/>
                 <a:cs typeface="Calibri"/>
               </a:rPr>
-              <a:t>1 · AI system under Art. 3(1)</a:t>
+              <a:t>Complainant labels · gpt-4o-mini (deployed) / gpt-4o</a:t>
             </a:r>
             <a:endParaRPr sz="2400"/>
           </a:p>
@@ -4650,19 +4683,19 @@
           <p:cNvPr id="11" name="Text 9">
             <a:extLst xmlns:a="http://schemas.openxmlformats.org/drawingml/2006/main">
               <a:ext uri="{FF2B5EF4-FFF2-40B4-BE49-F238E27FC236}">
-                <a16:creationId xmlns:a16="http://schemas.microsoft.com/office/drawing/2014/main" id="{EFA8E50E-D4C6-4B11-941E-6A5661A1188D}"/>
-              </a:ext>
-            </a:extLst>
-          </p:cNvPr>
-          <p:cNvSpPr>
-            <a:spLocks xmlns:a="http://schemas.openxmlformats.org/drawingml/2006/main" noGrp="1"/>
-          </p:cNvSpPr>
-          <p:nvPr/>
-        </p:nvSpPr>
-        <p:spPr>
-          <a:xfrm xmlns:a="http://schemas.openxmlformats.org/drawingml/2006/main">
-            <a:off x="7150425" y="2340864"/>
-            <a:ext cx="4218310" cy="713232"/>
+                <a16:creationId xmlns:a16="http://schemas.microsoft.com/office/drawing/2014/main" id="{6D73736A-612D-46BC-9C3E-A018D495686B}"/>
+              </a:ext>
+            </a:extLst>
+          </p:cNvPr>
+          <p:cNvSpPr>
+            <a:spLocks xmlns:a="http://schemas.openxmlformats.org/drawingml/2006/main" noGrp="1"/>
+          </p:cNvSpPr>
+          <p:nvPr/>
+        </p:nvSpPr>
+        <p:spPr>
+          <a:xfrm xmlns:a="http://schemas.openxmlformats.org/drawingml/2006/main">
+            <a:off x="7783172" y="2340864"/>
+            <a:ext cx="3585564" cy="713232"/>
           </a:xfrm>
           <a:prstGeom xmlns:a="http://schemas.openxmlformats.org/drawingml/2006/main" prst="rect">
             <a:avLst/>
@@ -4685,7 +4718,7 @@
                 <a:ea typeface="Calibri"/>
                 <a:cs typeface="Calibri"/>
               </a:rPr>
-              <a:t>Yes</a:t>
+              <a:t>56.8% / 60.5%</a:t>
             </a:r>
             <a:endParaRPr sz="2400"/>
           </a:p>
@@ -4696,7 +4729,7 @@
           <p:cNvPr id="12" name="Shape 10">
             <a:extLst xmlns:a="http://schemas.openxmlformats.org/drawingml/2006/main">
               <a:ext uri="{FF2B5EF4-FFF2-40B4-BE49-F238E27FC236}">
-                <a16:creationId xmlns:a16="http://schemas.microsoft.com/office/drawing/2014/main" id="{3136BD7E-CC79-401A-B4CF-2E96416B3A61}"/>
+                <a16:creationId xmlns:a16="http://schemas.microsoft.com/office/drawing/2014/main" id="{82FE88FC-EF42-4265-BF12-1BF806FC8DFA}"/>
               </a:ext>
             </a:extLst>
           </p:cNvPr>
@@ -4727,7 +4760,7 @@
           <p:cNvPr id="13" name="Text 11">
             <a:extLst xmlns:a="http://schemas.openxmlformats.org/drawingml/2006/main">
               <a:ext uri="{FF2B5EF4-FFF2-40B4-BE49-F238E27FC236}">
-                <a16:creationId xmlns:a16="http://schemas.microsoft.com/office/drawing/2014/main" id="{4B5E5B96-66E1-4CEE-8892-886EEF0DA313}"/>
+                <a16:creationId xmlns:a16="http://schemas.microsoft.com/office/drawing/2014/main" id="{DB2D7215-A526-4FCA-8EC4-2DDE373820D6}"/>
               </a:ext>
             </a:extLst>
           </p:cNvPr>
@@ -4739,7 +4772,7 @@
         <p:spPr>
           <a:xfrm xmlns:a="http://schemas.openxmlformats.org/drawingml/2006/main">
             <a:off x="822960" y="3054096"/>
-            <a:ext cx="6327465" cy="713232"/>
+            <a:ext cx="6960212" cy="713232"/>
           </a:xfrm>
           <a:prstGeom xmlns:a="http://schemas.openxmlformats.org/drawingml/2006/main" prst="rect">
             <a:avLst/>
@@ -4762,7 +4795,7 @@
                 <a:ea typeface="Calibri"/>
                 <a:cs typeface="Calibri"/>
               </a:rPr>
-              <a:t>2 · Prohibited practice under Art. 5</a:t>
+              <a:t>Self-agreement on the same input · gpt-4o</a:t>
             </a:r>
             <a:endParaRPr sz="2400"/>
           </a:p>
@@ -4773,19 +4806,19 @@
           <p:cNvPr id="14" name="Text 12">
             <a:extLst xmlns:a="http://schemas.openxmlformats.org/drawingml/2006/main">
               <a:ext uri="{FF2B5EF4-FFF2-40B4-BE49-F238E27FC236}">
-                <a16:creationId xmlns:a16="http://schemas.microsoft.com/office/drawing/2014/main" id="{56050B06-AD53-4265-AE63-5B52C9DB213E}"/>
-              </a:ext>
-            </a:extLst>
-          </p:cNvPr>
-          <p:cNvSpPr>
-            <a:spLocks xmlns:a="http://schemas.openxmlformats.org/drawingml/2006/main" noGrp="1"/>
-          </p:cNvSpPr>
-          <p:nvPr/>
-        </p:nvSpPr>
-        <p:spPr>
-          <a:xfrm xmlns:a="http://schemas.openxmlformats.org/drawingml/2006/main">
-            <a:off x="7150425" y="3054096"/>
-            <a:ext cx="4218310" cy="713232"/>
+                <a16:creationId xmlns:a16="http://schemas.microsoft.com/office/drawing/2014/main" id="{63022B1F-9273-4916-A6AC-2A198E97A232}"/>
+              </a:ext>
+            </a:extLst>
+          </p:cNvPr>
+          <p:cNvSpPr>
+            <a:spLocks xmlns:a="http://schemas.openxmlformats.org/drawingml/2006/main" noGrp="1"/>
+          </p:cNvSpPr>
+          <p:nvPr/>
+        </p:nvSpPr>
+        <p:spPr>
+          <a:xfrm xmlns:a="http://schemas.openxmlformats.org/drawingml/2006/main">
+            <a:off x="7783172" y="3054096"/>
+            <a:ext cx="3585564" cy="713232"/>
           </a:xfrm>
           <a:prstGeom xmlns:a="http://schemas.openxmlformats.org/drawingml/2006/main" prst="rect">
             <a:avLst/>
@@ -4808,7 +4841,7 @@
                 <a:ea typeface="Calibri"/>
                 <a:cs typeface="Calibri"/>
               </a:rPr>
-              <a:t>None identified</a:t>
+              <a:t>88.0%</a:t>
             </a:r>
             <a:endParaRPr sz="2400"/>
           </a:p>
@@ -4819,7 +4852,7 @@
           <p:cNvPr id="15" name="Shape 13">
             <a:extLst xmlns:a="http://schemas.openxmlformats.org/drawingml/2006/main">
               <a:ext uri="{FF2B5EF4-FFF2-40B4-BE49-F238E27FC236}">
-                <a16:creationId xmlns:a16="http://schemas.microsoft.com/office/drawing/2014/main" id="{A8720165-05BB-4C9F-BFDB-EB5C33D39BEE}"/>
+                <a16:creationId xmlns:a16="http://schemas.microsoft.com/office/drawing/2014/main" id="{153FC865-0651-4EB3-B28C-2D953EA83B80}"/>
               </a:ext>
             </a:extLst>
           </p:cNvPr>
@@ -4850,7 +4883,7 @@
           <p:cNvPr id="16" name="Text 14">
             <a:extLst xmlns:a="http://schemas.openxmlformats.org/drawingml/2006/main">
               <a:ext uri="{FF2B5EF4-FFF2-40B4-BE49-F238E27FC236}">
-                <a16:creationId xmlns:a16="http://schemas.microsoft.com/office/drawing/2014/main" id="{87E0FB0C-36A9-46DF-A617-3553209DDF3B}"/>
+                <a16:creationId xmlns:a16="http://schemas.microsoft.com/office/drawing/2014/main" id="{28F90436-1D1C-4058-A535-6469D1026AA8}"/>
               </a:ext>
             </a:extLst>
           </p:cNvPr>
@@ -4862,7 +4895,7 @@
         <p:spPr>
           <a:xfrm xmlns:a="http://schemas.openxmlformats.org/drawingml/2006/main">
             <a:off x="822960" y="3767328"/>
-            <a:ext cx="6327465" cy="713232"/>
+            <a:ext cx="6960212" cy="713232"/>
           </a:xfrm>
           <a:prstGeom xmlns:a="http://schemas.openxmlformats.org/drawingml/2006/main" prst="rect">
             <a:avLst/>
@@ -4885,7 +4918,7 @@
                 <a:ea typeface="Calibri"/>
                 <a:cs typeface="Calibri"/>
               </a:rPr>
-              <a:t>4 · Annex III high-risk use</a:t>
+              <a:t>Synthetic anomaly precision</a:t>
             </a:r>
             <a:endParaRPr sz="2400"/>
           </a:p>
@@ -4896,19 +4929,19 @@
           <p:cNvPr id="17" name="Text 15">
             <a:extLst xmlns:a="http://schemas.openxmlformats.org/drawingml/2006/main">
               <a:ext uri="{FF2B5EF4-FFF2-40B4-BE49-F238E27FC236}">
-                <a16:creationId xmlns:a16="http://schemas.microsoft.com/office/drawing/2014/main" id="{EDFB7362-E7EB-4DBF-B6A7-86709998E259}"/>
-              </a:ext>
-            </a:extLst>
-          </p:cNvPr>
-          <p:cNvSpPr>
-            <a:spLocks xmlns:a="http://schemas.openxmlformats.org/drawingml/2006/main" noGrp="1"/>
-          </p:cNvSpPr>
-          <p:nvPr/>
-        </p:nvSpPr>
-        <p:spPr>
-          <a:xfrm xmlns:a="http://schemas.openxmlformats.org/drawingml/2006/main">
-            <a:off x="7150425" y="3767328"/>
-            <a:ext cx="4218310" cy="713232"/>
+                <a16:creationId xmlns:a16="http://schemas.microsoft.com/office/drawing/2014/main" id="{D7C139B0-6FE4-4B7A-95F5-5572E5C7F64A}"/>
+              </a:ext>
+            </a:extLst>
+          </p:cNvPr>
+          <p:cNvSpPr>
+            <a:spLocks xmlns:a="http://schemas.openxmlformats.org/drawingml/2006/main" noGrp="1"/>
+          </p:cNvSpPr>
+          <p:nvPr/>
+        </p:nvSpPr>
+        <p:spPr>
+          <a:xfrm xmlns:a="http://schemas.openxmlformats.org/drawingml/2006/main">
+            <a:off x="7783172" y="3767328"/>
+            <a:ext cx="3585564" cy="713232"/>
           </a:xfrm>
           <a:prstGeom xmlns:a="http://schemas.openxmlformats.org/drawingml/2006/main" prst="rect">
             <a:avLst/>
@@ -4931,7 +4964,7 @@
                 <a:ea typeface="Calibri"/>
                 <a:cs typeface="Calibri"/>
               </a:rPr>
-              <a:t>UC-1/3: no · UC-2: counsel</a:t>
+              <a:t>97.9%</a:t>
             </a:r>
             <a:endParaRPr sz="2400"/>
           </a:p>
@@ -4942,7 +4975,7 @@
           <p:cNvPr id="18" name="Shape 16">
             <a:extLst xmlns:a="http://schemas.openxmlformats.org/drawingml/2006/main">
               <a:ext uri="{FF2B5EF4-FFF2-40B4-BE49-F238E27FC236}">
-                <a16:creationId xmlns:a16="http://schemas.microsoft.com/office/drawing/2014/main" id="{8BD2B58A-5CC4-4C6C-9671-7EE017732800}"/>
+                <a16:creationId xmlns:a16="http://schemas.microsoft.com/office/drawing/2014/main" id="{D4943C01-22A6-4B70-BFBA-789AE3CDCC22}"/>
               </a:ext>
             </a:extLst>
           </p:cNvPr>
@@ -4973,7 +5006,7 @@
           <p:cNvPr id="19" name="Text 17">
             <a:extLst xmlns:a="http://schemas.openxmlformats.org/drawingml/2006/main">
               <a:ext uri="{FF2B5EF4-FFF2-40B4-BE49-F238E27FC236}">
-                <a16:creationId xmlns:a16="http://schemas.microsoft.com/office/drawing/2014/main" id="{E28757EC-F8A7-454D-8B7C-F64237A77F74}"/>
+                <a16:creationId xmlns:a16="http://schemas.microsoft.com/office/drawing/2014/main" id="{C174BB8A-BC1C-4206-AAD8-D7BCBCD824FD}"/>
               </a:ext>
             </a:extLst>
           </p:cNvPr>
@@ -4985,7 +5018,7 @@
         <p:spPr>
           <a:xfrm xmlns:a="http://schemas.openxmlformats.org/drawingml/2006/main">
             <a:off x="822960" y="4480560"/>
-            <a:ext cx="6327465" cy="713232"/>
+            <a:ext cx="6960212" cy="713232"/>
           </a:xfrm>
           <a:prstGeom xmlns:a="http://schemas.openxmlformats.org/drawingml/2006/main" prst="rect">
             <a:avLst/>
@@ -5008,7 +5041,7 @@
                 <a:ea typeface="Calibri"/>
                 <a:cs typeface="Calibri"/>
               </a:rPr>
-              <a:t>Articles 50 and 4</a:t>
+              <a:t>Accuracy / anomaly precision on client data</a:t>
             </a:r>
             <a:endParaRPr sz="2400"/>
           </a:p>
@@ -5019,19 +5052,19 @@
           <p:cNvPr id="20" name="Text 18">
             <a:extLst xmlns:a="http://schemas.openxmlformats.org/drawingml/2006/main">
               <a:ext uri="{FF2B5EF4-FFF2-40B4-BE49-F238E27FC236}">
-                <a16:creationId xmlns:a16="http://schemas.microsoft.com/office/drawing/2014/main" id="{478F1A60-0315-49B4-95F2-DDCCB89E53F7}"/>
-              </a:ext>
-            </a:extLst>
-          </p:cNvPr>
-          <p:cNvSpPr>
-            <a:spLocks xmlns:a="http://schemas.openxmlformats.org/drawingml/2006/main" noGrp="1"/>
-          </p:cNvSpPr>
-          <p:nvPr/>
-        </p:nvSpPr>
-        <p:spPr>
-          <a:xfrm xmlns:a="http://schemas.openxmlformats.org/drawingml/2006/main">
-            <a:off x="7150425" y="4480560"/>
-            <a:ext cx="4218310" cy="713232"/>
+                <a16:creationId xmlns:a16="http://schemas.microsoft.com/office/drawing/2014/main" id="{82FC1976-FC10-4E9A-9AB2-79DCE8DDF4B2}"/>
+              </a:ext>
+            </a:extLst>
+          </p:cNvPr>
+          <p:cNvSpPr>
+            <a:spLocks xmlns:a="http://schemas.openxmlformats.org/drawingml/2006/main" noGrp="1"/>
+          </p:cNvSpPr>
+          <p:nvPr/>
+        </p:nvSpPr>
+        <p:spPr>
+          <a:xfrm xmlns:a="http://schemas.openxmlformats.org/drawingml/2006/main">
+            <a:off x="7783172" y="4480560"/>
+            <a:ext cx="3585564" cy="713232"/>
           </a:xfrm>
           <a:prstGeom xmlns:a="http://schemas.openxmlformats.org/drawingml/2006/main" prst="rect">
             <a:avLst/>
@@ -5054,7 +5087,7 @@
                 <a:ea typeface="Calibri"/>
                 <a:cs typeface="Calibri"/>
               </a:rPr>
-              <a:t>Marking + AI literacy</a:t>
+              <a:t>Not measured</a:t>
             </a:r>
             <a:endParaRPr sz="2400"/>
           </a:p>
@@ -5065,18 +5098,18 @@
           <p:cNvPr id="21" name="Text 19">
             <a:extLst xmlns:a="http://schemas.openxmlformats.org/drawingml/2006/main">
               <a:ext uri="{FF2B5EF4-FFF2-40B4-BE49-F238E27FC236}">
-                <a16:creationId xmlns:a16="http://schemas.microsoft.com/office/drawing/2014/main" id="{5029C092-4B67-4349-8ED4-300417E741F3}"/>
-              </a:ext>
-            </a:extLst>
-          </p:cNvPr>
-          <p:cNvSpPr>
-            <a:spLocks xmlns:a="http://schemas.openxmlformats.org/drawingml/2006/main" noGrp="1"/>
-          </p:cNvSpPr>
-          <p:nvPr/>
-        </p:nvSpPr>
-        <p:spPr>
-          <a:xfrm xmlns:a="http://schemas.openxmlformats.org/drawingml/2006/main">
-            <a:off x="822960" y="5504688"/>
+                <a16:creationId xmlns:a16="http://schemas.microsoft.com/office/drawing/2014/main" id="{158B7E2B-223D-481E-87FB-25C12AB2DDC3}"/>
+              </a:ext>
+            </a:extLst>
+          </p:cNvPr>
+          <p:cNvSpPr>
+            <a:spLocks xmlns:a="http://schemas.openxmlformats.org/drawingml/2006/main" noGrp="1"/>
+          </p:cNvSpPr>
+          <p:nvPr/>
+        </p:nvSpPr>
+        <p:spPr>
+          <a:xfrm xmlns:a="http://schemas.openxmlformats.org/drawingml/2006/main">
+            <a:off x="822960" y="5577840"/>
             <a:ext cx="10545775" cy="475488"/>
           </a:xfrm>
           <a:prstGeom xmlns:a="http://schemas.openxmlformats.org/drawingml/2006/main" prst="rect">
@@ -5100,7 +5133,7 @@
                 <a:ea typeface="Calibri"/>
                 <a:cs typeface="Calibri"/>
               </a:rPr>
-              <a:t>The intended use and human decision boundary drive the classification.</a:t>
+              <a:t>Phase 0 creates expert labels; the shadow pilot tests real-world usefulness.</a:t>
             </a:r>
             <a:endParaRPr sz="2400"/>
           </a:p>
@@ -5109,7 +5142,7 @@
     </p:spTree>
     <p:extLst>
       <p:ext uri="{BB962C8B-B14F-4D97-AF65-F5344CB8AC3E}">
-        <p14:creationId xmlns:p14="http://schemas.microsoft.com/office/powerpoint/2010/main" val="737733090"/>
+        <p14:creationId xmlns:p14="http://schemas.microsoft.com/office/powerpoint/2010/main" val="1574449820"/>
       </p:ext>
     </p:extLst>
   </p:cSld>
@@ -5140,7 +5173,7 @@
           <p:cNvPr id="2" name="Text 0">
             <a:extLst xmlns:a="http://schemas.openxmlformats.org/drawingml/2006/main">
               <a:ext uri="{FF2B5EF4-FFF2-40B4-BE49-F238E27FC236}">
-                <a16:creationId xmlns:a16="http://schemas.microsoft.com/office/drawing/2014/main" id="{B34DA4A5-8BDD-46DA-AD5B-46A0CB21AC16}"/>
+                <a16:creationId xmlns:a16="http://schemas.microsoft.com/office/drawing/2014/main" id="{CEC17690-454C-40A8-A7CC-C86880C7FDB2}"/>
               </a:ext>
             </a:extLst>
           </p:cNvPr>
@@ -5175,7 +5208,7 @@
                 <a:ea typeface="Trebuchet MS"/>
                 <a:cs typeface="Trebuchet MS"/>
               </a:rPr>
-              <a:t>The full complaint narrative still leaves the bank</a:t>
+              <a:t>UC-1 and UC-3 are not high-risk; UC-2 needs counsel</a:t>
             </a:r>
             <a:endParaRPr sz="3200"/>
           </a:p>
@@ -5186,7 +5219,7 @@
           <p:cNvPr id="3" name="Shape 1">
             <a:extLst xmlns:a="http://schemas.openxmlformats.org/drawingml/2006/main">
               <a:ext uri="{FF2B5EF4-FFF2-40B4-BE49-F238E27FC236}">
-                <a16:creationId xmlns:a16="http://schemas.microsoft.com/office/drawing/2014/main" id="{5EFC6F71-B1C4-4D05-9B22-A6BEC9930817}"/>
+                <a16:creationId xmlns:a16="http://schemas.microsoft.com/office/drawing/2014/main" id="{2483294B-C978-4325-BB89-2725619D695B}"/>
               </a:ext>
             </a:extLst>
           </p:cNvPr>
@@ -5217,7 +5250,7 @@
           <p:cNvPr id="4" name="Shape 2">
             <a:extLst xmlns:a="http://schemas.openxmlformats.org/drawingml/2006/main">
               <a:ext uri="{FF2B5EF4-FFF2-40B4-BE49-F238E27FC236}">
-                <a16:creationId xmlns:a16="http://schemas.microsoft.com/office/drawing/2014/main" id="{E70DB046-4075-45D7-8926-9EF4DA517DC9}"/>
+                <a16:creationId xmlns:a16="http://schemas.microsoft.com/office/drawing/2014/main" id="{D3556923-0666-4F02-A5C7-37AD396D59EC}"/>
               </a:ext>
             </a:extLst>
           </p:cNvPr>
@@ -5248,7 +5281,7 @@
           <p:cNvPr id="5" name="Text 3">
             <a:extLst xmlns:a="http://schemas.openxmlformats.org/drawingml/2006/main">
               <a:ext uri="{FF2B5EF4-FFF2-40B4-BE49-F238E27FC236}">
-                <a16:creationId xmlns:a16="http://schemas.microsoft.com/office/drawing/2014/main" id="{68598553-5967-4109-BB6D-04E9B65C6049}"/>
+                <a16:creationId xmlns:a16="http://schemas.microsoft.com/office/drawing/2014/main" id="{7FA4FA30-72B8-44D5-8C21-F12D304E85D9}"/>
               </a:ext>
             </a:extLst>
           </p:cNvPr>
@@ -5294,7 +5327,7 @@
           <p:cNvPr id="6" name="Text 4">
             <a:extLst xmlns:a="http://schemas.openxmlformats.org/drawingml/2006/main">
               <a:ext uri="{FF2B5EF4-FFF2-40B4-BE49-F238E27FC236}">
-                <a16:creationId xmlns:a16="http://schemas.microsoft.com/office/drawing/2014/main" id="{19972238-66CB-4169-ABBF-E2D4C1B67F77}"/>
+                <a16:creationId xmlns:a16="http://schemas.microsoft.com/office/drawing/2014/main" id="{F3DB20CF-909D-41D2-8B36-A2CB4570CC32}"/>
               </a:ext>
             </a:extLst>
           </p:cNvPr>
@@ -5340,7 +5373,7 @@
           <p:cNvPr id="7" name="Text 5">
             <a:extLst xmlns:a="http://schemas.openxmlformats.org/drawingml/2006/main">
               <a:ext uri="{FF2B5EF4-FFF2-40B4-BE49-F238E27FC236}">
-                <a16:creationId xmlns:a16="http://schemas.microsoft.com/office/drawing/2014/main" id="{702931D2-077F-44C2-A027-BD3C26440E99}"/>
+                <a16:creationId xmlns:a16="http://schemas.microsoft.com/office/drawing/2014/main" id="{BD40C905-8690-4398-9DE7-6847CC63BA65}"/>
               </a:ext>
             </a:extLst>
           </p:cNvPr>
@@ -5352,7 +5385,7 @@
         <p:spPr>
           <a:xfrm xmlns:a="http://schemas.openxmlformats.org/drawingml/2006/main">
             <a:off x="822960" y="1773936"/>
-            <a:ext cx="4640141" cy="402336"/>
+            <a:ext cx="6327465" cy="402336"/>
           </a:xfrm>
           <a:prstGeom xmlns:a="http://schemas.openxmlformats.org/drawingml/2006/main" prst="rect">
             <a:avLst/>
@@ -5375,7 +5408,7 @@
                 <a:ea typeface="Calibri"/>
                 <a:cs typeface="Calibri"/>
               </a:rPr>
-              <a:t>WHAT</a:t>
+              <a:t>STEP</a:t>
             </a:r>
             <a:endParaRPr sz="2400"/>
           </a:p>
@@ -5386,19 +5419,19 @@
           <p:cNvPr id="8" name="Text 6">
             <a:extLst xmlns:a="http://schemas.openxmlformats.org/drawingml/2006/main">
               <a:ext uri="{FF2B5EF4-FFF2-40B4-BE49-F238E27FC236}">
-                <a16:creationId xmlns:a16="http://schemas.microsoft.com/office/drawing/2014/main" id="{93E6417C-1648-4119-8679-D68D6F5C86E4}"/>
-              </a:ext>
-            </a:extLst>
-          </p:cNvPr>
-          <p:cNvSpPr>
-            <a:spLocks xmlns:a="http://schemas.openxmlformats.org/drawingml/2006/main" noGrp="1"/>
-          </p:cNvSpPr>
-          <p:nvPr/>
-        </p:nvSpPr>
-        <p:spPr>
-          <a:xfrm xmlns:a="http://schemas.openxmlformats.org/drawingml/2006/main">
-            <a:off x="5463101" y="1773936"/>
-            <a:ext cx="5905634" cy="402336"/>
+                <a16:creationId xmlns:a16="http://schemas.microsoft.com/office/drawing/2014/main" id="{53800C3A-F707-497F-8CE4-ECCE421B5F1A}"/>
+              </a:ext>
+            </a:extLst>
+          </p:cNvPr>
+          <p:cNvSpPr>
+            <a:spLocks xmlns:a="http://schemas.openxmlformats.org/drawingml/2006/main" noGrp="1"/>
+          </p:cNvSpPr>
+          <p:nvPr/>
+        </p:nvSpPr>
+        <p:spPr>
+          <a:xfrm xmlns:a="http://schemas.openxmlformats.org/drawingml/2006/main">
+            <a:off x="7150425" y="1773936"/>
+            <a:ext cx="4218310" cy="402336"/>
           </a:xfrm>
           <a:prstGeom xmlns:a="http://schemas.openxmlformats.org/drawingml/2006/main" prst="rect">
             <a:avLst/>
@@ -5421,7 +5454,7 @@
                 <a:ea typeface="Calibri"/>
                 <a:cs typeface="Calibri"/>
               </a:rPr>
-              <a:t>WHERE IT GOES</a:t>
+              <a:t>FINDING</a:t>
             </a:r>
             <a:endParaRPr sz="2400"/>
           </a:p>
@@ -5432,7 +5465,7 @@
           <p:cNvPr id="9" name="Shape 7">
             <a:extLst xmlns:a="http://schemas.openxmlformats.org/drawingml/2006/main">
               <a:ext uri="{FF2B5EF4-FFF2-40B4-BE49-F238E27FC236}">
-                <a16:creationId xmlns:a16="http://schemas.microsoft.com/office/drawing/2014/main" id="{7AB3A231-77EE-416C-8CDF-5C2D5B0E8300}"/>
+                <a16:creationId xmlns:a16="http://schemas.microsoft.com/office/drawing/2014/main" id="{6577D523-FC5A-4690-9F3B-56BA1F4120A6}"/>
               </a:ext>
             </a:extLst>
           </p:cNvPr>
@@ -5463,7 +5496,7 @@
           <p:cNvPr id="10" name="Text 8">
             <a:extLst xmlns:a="http://schemas.openxmlformats.org/drawingml/2006/main">
               <a:ext uri="{FF2B5EF4-FFF2-40B4-BE49-F238E27FC236}">
-                <a16:creationId xmlns:a16="http://schemas.microsoft.com/office/drawing/2014/main" id="{CB85DE6D-24CE-46FC-8437-2818B9A24421}"/>
+                <a16:creationId xmlns:a16="http://schemas.microsoft.com/office/drawing/2014/main" id="{8B12870D-F924-468E-9412-C611C2EB2550}"/>
               </a:ext>
             </a:extLst>
           </p:cNvPr>
@@ -5475,7 +5508,7 @@
         <p:spPr>
           <a:xfrm xmlns:a="http://schemas.openxmlformats.org/drawingml/2006/main">
             <a:off x="822960" y="2340864"/>
-            <a:ext cx="4640141" cy="713232"/>
+            <a:ext cx="6327465" cy="713232"/>
           </a:xfrm>
           <a:prstGeom xmlns:a="http://schemas.openxmlformats.org/drawingml/2006/main" prst="rect">
             <a:avLst/>
@@ -5498,7 +5531,7 @@
                 <a:ea typeface="Calibri"/>
                 <a:cs typeface="Calibri"/>
               </a:rPr>
-              <a:t>Complaint identifier</a:t>
+              <a:t>1 · AI system under Art. 3(1)</a:t>
             </a:r>
             <a:endParaRPr sz="2400"/>
           </a:p>
@@ -5509,19 +5542,19 @@
           <p:cNvPr id="11" name="Text 9">
             <a:extLst xmlns:a="http://schemas.openxmlformats.org/drawingml/2006/main">
               <a:ext uri="{FF2B5EF4-FFF2-40B4-BE49-F238E27FC236}">
-                <a16:creationId xmlns:a16="http://schemas.microsoft.com/office/drawing/2014/main" id="{7CDDE7B8-12FD-4DB6-AF13-C2664BCA166F}"/>
-              </a:ext>
-            </a:extLst>
-          </p:cNvPr>
-          <p:cNvSpPr>
-            <a:spLocks xmlns:a="http://schemas.openxmlformats.org/drawingml/2006/main" noGrp="1"/>
-          </p:cNvSpPr>
-          <p:nvPr/>
-        </p:nvSpPr>
-        <p:spPr>
-          <a:xfrm xmlns:a="http://schemas.openxmlformats.org/drawingml/2006/main">
-            <a:off x="5463101" y="2340864"/>
-            <a:ext cx="5905634" cy="713232"/>
+                <a16:creationId xmlns:a16="http://schemas.microsoft.com/office/drawing/2014/main" id="{EFA8E50E-D4C6-4B11-941E-6A5661A1188D}"/>
+              </a:ext>
+            </a:extLst>
+          </p:cNvPr>
+          <p:cNvSpPr>
+            <a:spLocks xmlns:a="http://schemas.openxmlformats.org/drawingml/2006/main" noGrp="1"/>
+          </p:cNvSpPr>
+          <p:nvPr/>
+        </p:nvSpPr>
+        <p:spPr>
+          <a:xfrm xmlns:a="http://schemas.openxmlformats.org/drawingml/2006/main">
+            <a:off x="7150425" y="2340864"/>
+            <a:ext cx="4218310" cy="713232"/>
           </a:xfrm>
           <a:prstGeom xmlns:a="http://schemas.openxmlformats.org/drawingml/2006/main" prst="rect">
             <a:avLst/>
@@ -5544,7 +5577,7 @@
                 <a:ea typeface="Calibri"/>
                 <a:cs typeface="Calibri"/>
               </a:rPr>
-              <a:t>No · replaced before the model call</a:t>
+              <a:t>Yes</a:t>
             </a:r>
             <a:endParaRPr sz="2400"/>
           </a:p>
@@ -5555,7 +5588,7 @@
           <p:cNvPr id="12" name="Shape 10">
             <a:extLst xmlns:a="http://schemas.openxmlformats.org/drawingml/2006/main">
               <a:ext uri="{FF2B5EF4-FFF2-40B4-BE49-F238E27FC236}">
-                <a16:creationId xmlns:a16="http://schemas.microsoft.com/office/drawing/2014/main" id="{34C38A68-C907-4951-A0CC-C8C55675235E}"/>
+                <a16:creationId xmlns:a16="http://schemas.microsoft.com/office/drawing/2014/main" id="{3136BD7E-CC79-401A-B4CF-2E96416B3A61}"/>
               </a:ext>
             </a:extLst>
           </p:cNvPr>
@@ -5586,7 +5619,7 @@
           <p:cNvPr id="13" name="Text 11">
             <a:extLst xmlns:a="http://schemas.openxmlformats.org/drawingml/2006/main">
               <a:ext uri="{FF2B5EF4-FFF2-40B4-BE49-F238E27FC236}">
-                <a16:creationId xmlns:a16="http://schemas.microsoft.com/office/drawing/2014/main" id="{7E61DC08-BCC5-4289-9CB2-B6270239A64D}"/>
+                <a16:creationId xmlns:a16="http://schemas.microsoft.com/office/drawing/2014/main" id="{4B5E5B96-66E1-4CEE-8892-886EEF0DA313}"/>
               </a:ext>
             </a:extLst>
           </p:cNvPr>
@@ -5598,7 +5631,7 @@
         <p:spPr>
           <a:xfrm xmlns:a="http://schemas.openxmlformats.org/drawingml/2006/main">
             <a:off x="822960" y="3054096"/>
-            <a:ext cx="4640141" cy="713232"/>
+            <a:ext cx="6327465" cy="713232"/>
           </a:xfrm>
           <a:prstGeom xmlns:a="http://schemas.openxmlformats.org/drawingml/2006/main" prst="rect">
             <a:avLst/>
@@ -5621,7 +5654,7 @@
                 <a:ea typeface="Calibri"/>
                 <a:cs typeface="Calibri"/>
               </a:rPr>
-              <a:t>Complaint narrative</a:t>
+              <a:t>2 · Prohibited practice under Art. 5</a:t>
             </a:r>
             <a:endParaRPr sz="2400"/>
           </a:p>
@@ -5632,19 +5665,19 @@
           <p:cNvPr id="14" name="Text 12">
             <a:extLst xmlns:a="http://schemas.openxmlformats.org/drawingml/2006/main">
               <a:ext uri="{FF2B5EF4-FFF2-40B4-BE49-F238E27FC236}">
-                <a16:creationId xmlns:a16="http://schemas.microsoft.com/office/drawing/2014/main" id="{BF1416F2-DBBF-4683-B428-CD255AF58024}"/>
-              </a:ext>
-            </a:extLst>
-          </p:cNvPr>
-          <p:cNvSpPr>
-            <a:spLocks xmlns:a="http://schemas.openxmlformats.org/drawingml/2006/main" noGrp="1"/>
-          </p:cNvSpPr>
-          <p:nvPr/>
-        </p:nvSpPr>
-        <p:spPr>
-          <a:xfrm xmlns:a="http://schemas.openxmlformats.org/drawingml/2006/main">
-            <a:off x="5463101" y="3054096"/>
-            <a:ext cx="5905634" cy="713232"/>
+                <a16:creationId xmlns:a16="http://schemas.microsoft.com/office/drawing/2014/main" id="{56050B06-AD53-4265-AE63-5B52C9DB213E}"/>
+              </a:ext>
+            </a:extLst>
+          </p:cNvPr>
+          <p:cNvSpPr>
+            <a:spLocks xmlns:a="http://schemas.openxmlformats.org/drawingml/2006/main" noGrp="1"/>
+          </p:cNvSpPr>
+          <p:nvPr/>
+        </p:nvSpPr>
+        <p:spPr>
+          <a:xfrm xmlns:a="http://schemas.openxmlformats.org/drawingml/2006/main">
+            <a:off x="7150425" y="3054096"/>
+            <a:ext cx="4218310" cy="713232"/>
           </a:xfrm>
           <a:prstGeom xmlns:a="http://schemas.openxmlformats.org/drawingml/2006/main" prst="rect">
             <a:avLst/>
@@ -5667,7 +5700,7 @@
                 <a:ea typeface="Calibri"/>
                 <a:cs typeface="Calibri"/>
               </a:rPr>
-              <a:t>Yes · sent to the provider in full</a:t>
+              <a:t>None identified</a:t>
             </a:r>
             <a:endParaRPr sz="2400"/>
           </a:p>
@@ -5678,7 +5711,7 @@
           <p:cNvPr id="15" name="Shape 13">
             <a:extLst xmlns:a="http://schemas.openxmlformats.org/drawingml/2006/main">
               <a:ext uri="{FF2B5EF4-FFF2-40B4-BE49-F238E27FC236}">
-                <a16:creationId xmlns:a16="http://schemas.microsoft.com/office/drawing/2014/main" id="{7CDAC841-3869-42E9-988D-53136F3F2A19}"/>
+                <a16:creationId xmlns:a16="http://schemas.microsoft.com/office/drawing/2014/main" id="{A8720165-05BB-4C9F-BFDB-EB5C33D39BEE}"/>
               </a:ext>
             </a:extLst>
           </p:cNvPr>
@@ -5709,7 +5742,7 @@
           <p:cNvPr id="16" name="Text 14">
             <a:extLst xmlns:a="http://schemas.openxmlformats.org/drawingml/2006/main">
               <a:ext uri="{FF2B5EF4-FFF2-40B4-BE49-F238E27FC236}">
-                <a16:creationId xmlns:a16="http://schemas.microsoft.com/office/drawing/2014/main" id="{00872AE0-0305-4A6A-B142-502C768A7FEB}"/>
+                <a16:creationId xmlns:a16="http://schemas.microsoft.com/office/drawing/2014/main" id="{87E0FB0C-36A9-46DF-A617-3553209DDF3B}"/>
               </a:ext>
             </a:extLst>
           </p:cNvPr>
@@ -5721,7 +5754,7 @@
         <p:spPr>
           <a:xfrm xmlns:a="http://schemas.openxmlformats.org/drawingml/2006/main">
             <a:off x="822960" y="3767328"/>
-            <a:ext cx="4640141" cy="713232"/>
+            <a:ext cx="6327465" cy="713232"/>
           </a:xfrm>
           <a:prstGeom xmlns:a="http://schemas.openxmlformats.org/drawingml/2006/main" prst="rect">
             <a:avLst/>
@@ -5744,7 +5777,7 @@
                 <a:ea typeface="Calibri"/>
                 <a:cs typeface="Calibri"/>
               </a:rPr>
-              <a:t>Evidence + pseudonymous reference</a:t>
+              <a:t>4 · Annex III high-risk use</a:t>
             </a:r>
             <a:endParaRPr sz="2400"/>
           </a:p>
@@ -5755,19 +5788,19 @@
           <p:cNvPr id="17" name="Text 15">
             <a:extLst xmlns:a="http://schemas.openxmlformats.org/drawingml/2006/main">
               <a:ext uri="{FF2B5EF4-FFF2-40B4-BE49-F238E27FC236}">
-                <a16:creationId xmlns:a16="http://schemas.microsoft.com/office/drawing/2014/main" id="{A0B897EC-9AD3-49F8-9EE6-2B3143C245EC}"/>
-              </a:ext>
-            </a:extLst>
-          </p:cNvPr>
-          <p:cNvSpPr>
-            <a:spLocks xmlns:a="http://schemas.openxmlformats.org/drawingml/2006/main" noGrp="1"/>
-          </p:cNvSpPr>
-          <p:nvPr/>
-        </p:nvSpPr>
-        <p:spPr>
-          <a:xfrm xmlns:a="http://schemas.openxmlformats.org/drawingml/2006/main">
-            <a:off x="5463101" y="3767328"/>
-            <a:ext cx="5905634" cy="713232"/>
+                <a16:creationId xmlns:a16="http://schemas.microsoft.com/office/drawing/2014/main" id="{EDFB7362-E7EB-4DBF-B6A7-86709998E259}"/>
+              </a:ext>
+            </a:extLst>
+          </p:cNvPr>
+          <p:cNvSpPr>
+            <a:spLocks xmlns:a="http://schemas.openxmlformats.org/drawingml/2006/main" noGrp="1"/>
+          </p:cNvSpPr>
+          <p:nvPr/>
+        </p:nvSpPr>
+        <p:spPr>
+          <a:xfrm xmlns:a="http://schemas.openxmlformats.org/drawingml/2006/main">
+            <a:off x="7150425" y="3767328"/>
+            <a:ext cx="4218310" cy="713232"/>
           </a:xfrm>
           <a:prstGeom xmlns:a="http://schemas.openxmlformats.org/drawingml/2006/main" prst="rect">
             <a:avLst/>
@@ -5790,7 +5823,7 @@
                 <a:ea typeface="Calibri"/>
                 <a:cs typeface="Calibri"/>
               </a:rPr>
-              <a:t>Stored in monitoring</a:t>
+              <a:t>UC-1/3: no · UC-2: counsel</a:t>
             </a:r>
             <a:endParaRPr sz="2400"/>
           </a:p>
@@ -5798,21 +5831,144 @@
       </p:sp>
       <p:sp>
         <p:nvSpPr>
-          <p:cNvPr id="18" name="Text 16">
-            <a:extLst xmlns:a="http://schemas.openxmlformats.org/drawingml/2006/main">
-              <a:ext uri="{FF2B5EF4-FFF2-40B4-BE49-F238E27FC236}">
-                <a16:creationId xmlns:a16="http://schemas.microsoft.com/office/drawing/2014/main" id="{B041204B-8134-499D-9CCF-DCDAB38615CA}"/>
-              </a:ext>
-            </a:extLst>
-          </p:cNvPr>
-          <p:cNvSpPr>
-            <a:spLocks xmlns:a="http://schemas.openxmlformats.org/drawingml/2006/main" noGrp="1"/>
-          </p:cNvSpPr>
-          <p:nvPr/>
-        </p:nvSpPr>
-        <p:spPr>
-          <a:xfrm xmlns:a="http://schemas.openxmlformats.org/drawingml/2006/main">
-            <a:off x="822960" y="4864608"/>
+          <p:cNvPr id="18" name="Shape 16">
+            <a:extLst xmlns:a="http://schemas.openxmlformats.org/drawingml/2006/main">
+              <a:ext uri="{FF2B5EF4-FFF2-40B4-BE49-F238E27FC236}">
+                <a16:creationId xmlns:a16="http://schemas.microsoft.com/office/drawing/2014/main" id="{8BD2B58A-5CC4-4C6C-9671-7EE017732800}"/>
+              </a:ext>
+            </a:extLst>
+          </p:cNvPr>
+          <p:cNvSpPr>
+            <a:spLocks xmlns:a="http://schemas.openxmlformats.org/drawingml/2006/main" noGrp="1"/>
+          </p:cNvSpPr>
+          <p:nvPr/>
+        </p:nvSpPr>
+        <p:spPr>
+          <a:xfrm xmlns:a="http://schemas.openxmlformats.org/drawingml/2006/main">
+            <a:off x="822960" y="4480560"/>
+            <a:ext cx="10545775" cy="0"/>
+          </a:xfrm>
+          <a:prstGeom xmlns:a="http://schemas.openxmlformats.org/drawingml/2006/main" prst="line">
+            <a:avLst/>
+          </a:prstGeom>
+          <a:noFill xmlns:a="http://schemas.openxmlformats.org/drawingml/2006/main"/>
+          <a:ln xmlns:a="http://schemas.openxmlformats.org/drawingml/2006/main" w="12700">
+            <a:solidFill>
+              <a:srgbClr val="E0E0E0"/>
+            </a:solidFill>
+            <a:prstDash val="solid"/>
+          </a:ln>
+        </p:spPr>
+      </p:sp>
+      <p:sp>
+        <p:nvSpPr>
+          <p:cNvPr id="19" name="Text 17">
+            <a:extLst xmlns:a="http://schemas.openxmlformats.org/drawingml/2006/main">
+              <a:ext uri="{FF2B5EF4-FFF2-40B4-BE49-F238E27FC236}">
+                <a16:creationId xmlns:a16="http://schemas.microsoft.com/office/drawing/2014/main" id="{E28757EC-F8A7-454D-8B7C-F64237A77F74}"/>
+              </a:ext>
+            </a:extLst>
+          </p:cNvPr>
+          <p:cNvSpPr>
+            <a:spLocks xmlns:a="http://schemas.openxmlformats.org/drawingml/2006/main" noGrp="1"/>
+          </p:cNvSpPr>
+          <p:nvPr/>
+        </p:nvSpPr>
+        <p:spPr>
+          <a:xfrm xmlns:a="http://schemas.openxmlformats.org/drawingml/2006/main">
+            <a:off x="822960" y="4480560"/>
+            <a:ext cx="6327465" cy="713232"/>
+          </a:xfrm>
+          <a:prstGeom xmlns:a="http://schemas.openxmlformats.org/drawingml/2006/main" prst="rect">
+            <a:avLst/>
+          </a:prstGeom>
+          <a:noFill xmlns:a="http://schemas.openxmlformats.org/drawingml/2006/main"/>
+        </p:spPr>
+        <p:txBody>
+          <a:bodyPr xmlns:a="http://schemas.openxmlformats.org/drawingml/2006/main" wrap="square" lIns="0" tIns="0" rIns="0" bIns="0" anchor="ctr"/>
+          <a:lstStyle xmlns:a="http://schemas.openxmlformats.org/drawingml/2006/main"/>
+          <a:p xmlns:a="http://schemas.openxmlformats.org/drawingml/2006/main">
+            <a:pPr marL="0" indent="0">
+              <a:buNone/>
+            </a:pPr>
+            <a:r>
+              <a:rPr sz="2400">
+                <a:solidFill>
+                  <a:srgbClr val="1A1A1A"/>
+                </a:solidFill>
+                <a:latin typeface="Calibri"/>
+                <a:ea typeface="Calibri"/>
+                <a:cs typeface="Calibri"/>
+              </a:rPr>
+              <a:t>Articles 50 and 4</a:t>
+            </a:r>
+            <a:endParaRPr sz="2400"/>
+          </a:p>
+        </p:txBody>
+      </p:sp>
+      <p:sp>
+        <p:nvSpPr>
+          <p:cNvPr id="20" name="Text 18">
+            <a:extLst xmlns:a="http://schemas.openxmlformats.org/drawingml/2006/main">
+              <a:ext uri="{FF2B5EF4-FFF2-40B4-BE49-F238E27FC236}">
+                <a16:creationId xmlns:a16="http://schemas.microsoft.com/office/drawing/2014/main" id="{478F1A60-0315-49B4-95F2-DDCCB89E53F7}"/>
+              </a:ext>
+            </a:extLst>
+          </p:cNvPr>
+          <p:cNvSpPr>
+            <a:spLocks xmlns:a="http://schemas.openxmlformats.org/drawingml/2006/main" noGrp="1"/>
+          </p:cNvSpPr>
+          <p:nvPr/>
+        </p:nvSpPr>
+        <p:spPr>
+          <a:xfrm xmlns:a="http://schemas.openxmlformats.org/drawingml/2006/main">
+            <a:off x="7150425" y="4480560"/>
+            <a:ext cx="4218310" cy="713232"/>
+          </a:xfrm>
+          <a:prstGeom xmlns:a="http://schemas.openxmlformats.org/drawingml/2006/main" prst="rect">
+            <a:avLst/>
+          </a:prstGeom>
+          <a:noFill xmlns:a="http://schemas.openxmlformats.org/drawingml/2006/main"/>
+        </p:spPr>
+        <p:txBody>
+          <a:bodyPr xmlns:a="http://schemas.openxmlformats.org/drawingml/2006/main" wrap="square" lIns="0" tIns="0" rIns="0" bIns="0" anchor="ctr"/>
+          <a:lstStyle xmlns:a="http://schemas.openxmlformats.org/drawingml/2006/main"/>
+          <a:p xmlns:a="http://schemas.openxmlformats.org/drawingml/2006/main">
+            <a:pPr marL="0" indent="0" algn="r">
+              <a:buNone/>
+            </a:pPr>
+            <a:r>
+              <a:rPr sz="2400" b="1">
+                <a:solidFill>
+                  <a:srgbClr val="1A1A1A"/>
+                </a:solidFill>
+                <a:latin typeface="Calibri"/>
+                <a:ea typeface="Calibri"/>
+                <a:cs typeface="Calibri"/>
+              </a:rPr>
+              <a:t>Marking + AI literacy</a:t>
+            </a:r>
+            <a:endParaRPr sz="2400"/>
+          </a:p>
+        </p:txBody>
+      </p:sp>
+      <p:sp>
+        <p:nvSpPr>
+          <p:cNvPr id="21" name="Text 19">
+            <a:extLst xmlns:a="http://schemas.openxmlformats.org/drawingml/2006/main">
+              <a:ext uri="{FF2B5EF4-FFF2-40B4-BE49-F238E27FC236}">
+                <a16:creationId xmlns:a16="http://schemas.microsoft.com/office/drawing/2014/main" id="{5029C092-4B67-4349-8ED4-300417E741F3}"/>
+              </a:ext>
+            </a:extLst>
+          </p:cNvPr>
+          <p:cNvSpPr>
+            <a:spLocks xmlns:a="http://schemas.openxmlformats.org/drawingml/2006/main" noGrp="1"/>
+          </p:cNvSpPr>
+          <p:nvPr/>
+        </p:nvSpPr>
+        <p:spPr>
+          <a:xfrm xmlns:a="http://schemas.openxmlformats.org/drawingml/2006/main">
+            <a:off x="822960" y="5504688"/>
             <a:ext cx="10545775" cy="475488"/>
           </a:xfrm>
           <a:prstGeom xmlns:a="http://schemas.openxmlformats.org/drawingml/2006/main" prst="rect">
@@ -5836,7 +5992,7 @@
                 <a:ea typeface="Calibri"/>
                 <a:cs typeface="Calibri"/>
               </a:rPr>
-              <a:t>Pseudonymisation protects the reference, not the content. Transfer controls are the gate.</a:t>
+              <a:t>The intended use and human decision boundary drive the classification.</a:t>
             </a:r>
             <a:endParaRPr sz="2400"/>
           </a:p>
@@ -5845,7 +6001,7 @@
     </p:spTree>
     <p:extLst>
       <p:ext uri="{BB962C8B-B14F-4D97-AF65-F5344CB8AC3E}">
-        <p14:creationId xmlns:p14="http://schemas.microsoft.com/office/powerpoint/2010/main" val="127619783"/>
+        <p14:creationId xmlns:p14="http://schemas.microsoft.com/office/powerpoint/2010/main" val="737733090"/>
       </p:ext>
     </p:extLst>
   </p:cSld>
@@ -5876,7 +6032,7 @@
           <p:cNvPr id="2" name="Text 0">
             <a:extLst xmlns:a="http://schemas.openxmlformats.org/drawingml/2006/main">
               <a:ext uri="{FF2B5EF4-FFF2-40B4-BE49-F238E27FC236}">
-                <a16:creationId xmlns:a16="http://schemas.microsoft.com/office/drawing/2014/main" id="{58B95A86-D9CB-4681-8168-2FBC311755D6}"/>
+                <a16:creationId xmlns:a16="http://schemas.microsoft.com/office/drawing/2014/main" id="{B34DA4A5-8BDD-46DA-AD5B-46A0CB21AC16}"/>
               </a:ext>
             </a:extLst>
           </p:cNvPr>
@@ -5911,7 +6067,7 @@
                 <a:ea typeface="Trebuchet MS"/>
                 <a:cs typeface="Trebuchet MS"/>
               </a:rPr>
-              <a:t>Every pilot threshold must pass before deployment</a:t>
+              <a:t>The full complaint narrative still leaves the bank</a:t>
             </a:r>
             <a:endParaRPr sz="3200"/>
           </a:p>
@@ -5922,7 +6078,7 @@
           <p:cNvPr id="3" name="Shape 1">
             <a:extLst xmlns:a="http://schemas.openxmlformats.org/drawingml/2006/main">
               <a:ext uri="{FF2B5EF4-FFF2-40B4-BE49-F238E27FC236}">
-                <a16:creationId xmlns:a16="http://schemas.microsoft.com/office/drawing/2014/main" id="{E298F8BE-1544-42A8-9CDD-CE89373E0F8B}"/>
+                <a16:creationId xmlns:a16="http://schemas.microsoft.com/office/drawing/2014/main" id="{5EFC6F71-B1C4-4D05-9B22-A6BEC9930817}"/>
               </a:ext>
             </a:extLst>
           </p:cNvPr>
@@ -5953,7 +6109,7 @@
           <p:cNvPr id="4" name="Shape 2">
             <a:extLst xmlns:a="http://schemas.openxmlformats.org/drawingml/2006/main">
               <a:ext uri="{FF2B5EF4-FFF2-40B4-BE49-F238E27FC236}">
-                <a16:creationId xmlns:a16="http://schemas.microsoft.com/office/drawing/2014/main" id="{C84C2600-AB7B-4E60-984F-47BCA9619AF9}"/>
+                <a16:creationId xmlns:a16="http://schemas.microsoft.com/office/drawing/2014/main" id="{E70DB046-4075-45D7-8926-9EF4DA517DC9}"/>
               </a:ext>
             </a:extLst>
           </p:cNvPr>
@@ -5984,7 +6140,7 @@
           <p:cNvPr id="5" name="Text 3">
             <a:extLst xmlns:a="http://schemas.openxmlformats.org/drawingml/2006/main">
               <a:ext uri="{FF2B5EF4-FFF2-40B4-BE49-F238E27FC236}">
-                <a16:creationId xmlns:a16="http://schemas.microsoft.com/office/drawing/2014/main" id="{1AB0B1E9-AC5C-41A6-BBB6-7DB173FDB90E}"/>
+                <a16:creationId xmlns:a16="http://schemas.microsoft.com/office/drawing/2014/main" id="{68598553-5967-4109-BB6D-04E9B65C6049}"/>
               </a:ext>
             </a:extLst>
           </p:cNvPr>
@@ -6030,7 +6186,7 @@
           <p:cNvPr id="6" name="Text 4">
             <a:extLst xmlns:a="http://schemas.openxmlformats.org/drawingml/2006/main">
               <a:ext uri="{FF2B5EF4-FFF2-40B4-BE49-F238E27FC236}">
-                <a16:creationId xmlns:a16="http://schemas.microsoft.com/office/drawing/2014/main" id="{45E83587-0FEB-4372-90ED-6B63804E1BF7}"/>
+                <a16:creationId xmlns:a16="http://schemas.microsoft.com/office/drawing/2014/main" id="{19972238-66CB-4169-ABBF-E2D4C1B67F77}"/>
               </a:ext>
             </a:extLst>
           </p:cNvPr>
@@ -6066,6 +6222,742 @@
                 <a:cs typeface="Calibri"/>
               </a:rPr>
               <a:t>14</a:t>
+            </a:r>
+            <a:endParaRPr sz="900"/>
+          </a:p>
+        </p:txBody>
+      </p:sp>
+      <p:sp>
+        <p:nvSpPr>
+          <p:cNvPr id="7" name="Text 5">
+            <a:extLst xmlns:a="http://schemas.openxmlformats.org/drawingml/2006/main">
+              <a:ext uri="{FF2B5EF4-FFF2-40B4-BE49-F238E27FC236}">
+                <a16:creationId xmlns:a16="http://schemas.microsoft.com/office/drawing/2014/main" id="{702931D2-077F-44C2-A027-BD3C26440E99}"/>
+              </a:ext>
+            </a:extLst>
+          </p:cNvPr>
+          <p:cNvSpPr>
+            <a:spLocks xmlns:a="http://schemas.openxmlformats.org/drawingml/2006/main" noGrp="1"/>
+          </p:cNvSpPr>
+          <p:nvPr/>
+        </p:nvSpPr>
+        <p:spPr>
+          <a:xfrm xmlns:a="http://schemas.openxmlformats.org/drawingml/2006/main">
+            <a:off x="822960" y="1773936"/>
+            <a:ext cx="4640141" cy="402336"/>
+          </a:xfrm>
+          <a:prstGeom xmlns:a="http://schemas.openxmlformats.org/drawingml/2006/main" prst="rect">
+            <a:avLst/>
+          </a:prstGeom>
+          <a:noFill xmlns:a="http://schemas.openxmlformats.org/drawingml/2006/main"/>
+        </p:spPr>
+        <p:txBody>
+          <a:bodyPr xmlns:a="http://schemas.openxmlformats.org/drawingml/2006/main" wrap="square" lIns="0" tIns="0" rIns="0" bIns="0" anchor="ctr"/>
+          <a:lstStyle xmlns:a="http://schemas.openxmlformats.org/drawingml/2006/main"/>
+          <a:p xmlns:a="http://schemas.openxmlformats.org/drawingml/2006/main">
+            <a:pPr marL="0" indent="0">
+              <a:buNone/>
+            </a:pPr>
+            <a:r>
+              <a:rPr sz="2400" b="1" spc="100">
+                <a:solidFill>
+                  <a:srgbClr val="B0341F"/>
+                </a:solidFill>
+                <a:latin typeface="Calibri"/>
+                <a:ea typeface="Calibri"/>
+                <a:cs typeface="Calibri"/>
+              </a:rPr>
+              <a:t>WHAT</a:t>
+            </a:r>
+            <a:endParaRPr sz="2400"/>
+          </a:p>
+        </p:txBody>
+      </p:sp>
+      <p:sp>
+        <p:nvSpPr>
+          <p:cNvPr id="8" name="Text 6">
+            <a:extLst xmlns:a="http://schemas.openxmlformats.org/drawingml/2006/main">
+              <a:ext uri="{FF2B5EF4-FFF2-40B4-BE49-F238E27FC236}">
+                <a16:creationId xmlns:a16="http://schemas.microsoft.com/office/drawing/2014/main" id="{93E6417C-1648-4119-8679-D68D6F5C86E4}"/>
+              </a:ext>
+            </a:extLst>
+          </p:cNvPr>
+          <p:cNvSpPr>
+            <a:spLocks xmlns:a="http://schemas.openxmlformats.org/drawingml/2006/main" noGrp="1"/>
+          </p:cNvSpPr>
+          <p:nvPr/>
+        </p:nvSpPr>
+        <p:spPr>
+          <a:xfrm xmlns:a="http://schemas.openxmlformats.org/drawingml/2006/main">
+            <a:off x="5463101" y="1773936"/>
+            <a:ext cx="5905634" cy="402336"/>
+          </a:xfrm>
+          <a:prstGeom xmlns:a="http://schemas.openxmlformats.org/drawingml/2006/main" prst="rect">
+            <a:avLst/>
+          </a:prstGeom>
+          <a:noFill xmlns:a="http://schemas.openxmlformats.org/drawingml/2006/main"/>
+        </p:spPr>
+        <p:txBody>
+          <a:bodyPr xmlns:a="http://schemas.openxmlformats.org/drawingml/2006/main" wrap="square" lIns="0" tIns="0" rIns="0" bIns="0" anchor="ctr"/>
+          <a:lstStyle xmlns:a="http://schemas.openxmlformats.org/drawingml/2006/main"/>
+          <a:p xmlns:a="http://schemas.openxmlformats.org/drawingml/2006/main">
+            <a:pPr marL="0" indent="0" algn="r">
+              <a:buNone/>
+            </a:pPr>
+            <a:r>
+              <a:rPr sz="2400" b="1" spc="100">
+                <a:solidFill>
+                  <a:srgbClr val="B0341F"/>
+                </a:solidFill>
+                <a:latin typeface="Calibri"/>
+                <a:ea typeface="Calibri"/>
+                <a:cs typeface="Calibri"/>
+              </a:rPr>
+              <a:t>WHERE IT GOES</a:t>
+            </a:r>
+            <a:endParaRPr sz="2400"/>
+          </a:p>
+        </p:txBody>
+      </p:sp>
+      <p:sp>
+        <p:nvSpPr>
+          <p:cNvPr id="9" name="Shape 7">
+            <a:extLst xmlns:a="http://schemas.openxmlformats.org/drawingml/2006/main">
+              <a:ext uri="{FF2B5EF4-FFF2-40B4-BE49-F238E27FC236}">
+                <a16:creationId xmlns:a16="http://schemas.microsoft.com/office/drawing/2014/main" id="{7AB3A231-77EE-416C-8CDF-5C2D5B0E8300}"/>
+              </a:ext>
+            </a:extLst>
+          </p:cNvPr>
+          <p:cNvSpPr>
+            <a:spLocks xmlns:a="http://schemas.openxmlformats.org/drawingml/2006/main" noGrp="1"/>
+          </p:cNvSpPr>
+          <p:nvPr/>
+        </p:nvSpPr>
+        <p:spPr>
+          <a:xfrm xmlns:a="http://schemas.openxmlformats.org/drawingml/2006/main">
+            <a:off x="822960" y="2212848"/>
+            <a:ext cx="10545775" cy="0"/>
+          </a:xfrm>
+          <a:prstGeom xmlns:a="http://schemas.openxmlformats.org/drawingml/2006/main" prst="line">
+            <a:avLst/>
+          </a:prstGeom>
+          <a:noFill xmlns:a="http://schemas.openxmlformats.org/drawingml/2006/main"/>
+          <a:ln xmlns:a="http://schemas.openxmlformats.org/drawingml/2006/main" w="12700">
+            <a:solidFill>
+              <a:srgbClr val="1A1A1A"/>
+            </a:solidFill>
+            <a:prstDash val="solid"/>
+          </a:ln>
+        </p:spPr>
+      </p:sp>
+      <p:sp>
+        <p:nvSpPr>
+          <p:cNvPr id="10" name="Text 8">
+            <a:extLst xmlns:a="http://schemas.openxmlformats.org/drawingml/2006/main">
+              <a:ext uri="{FF2B5EF4-FFF2-40B4-BE49-F238E27FC236}">
+                <a16:creationId xmlns:a16="http://schemas.microsoft.com/office/drawing/2014/main" id="{CB85DE6D-24CE-46FC-8437-2818B9A24421}"/>
+              </a:ext>
+            </a:extLst>
+          </p:cNvPr>
+          <p:cNvSpPr>
+            <a:spLocks xmlns:a="http://schemas.openxmlformats.org/drawingml/2006/main" noGrp="1"/>
+          </p:cNvSpPr>
+          <p:nvPr/>
+        </p:nvSpPr>
+        <p:spPr>
+          <a:xfrm xmlns:a="http://schemas.openxmlformats.org/drawingml/2006/main">
+            <a:off x="822960" y="2340864"/>
+            <a:ext cx="4640141" cy="713232"/>
+          </a:xfrm>
+          <a:prstGeom xmlns:a="http://schemas.openxmlformats.org/drawingml/2006/main" prst="rect">
+            <a:avLst/>
+          </a:prstGeom>
+          <a:noFill xmlns:a="http://schemas.openxmlformats.org/drawingml/2006/main"/>
+        </p:spPr>
+        <p:txBody>
+          <a:bodyPr xmlns:a="http://schemas.openxmlformats.org/drawingml/2006/main" wrap="square" lIns="0" tIns="0" rIns="0" bIns="0" anchor="ctr"/>
+          <a:lstStyle xmlns:a="http://schemas.openxmlformats.org/drawingml/2006/main"/>
+          <a:p xmlns:a="http://schemas.openxmlformats.org/drawingml/2006/main">
+            <a:pPr marL="0" indent="0">
+              <a:buNone/>
+            </a:pPr>
+            <a:r>
+              <a:rPr sz="2400">
+                <a:solidFill>
+                  <a:srgbClr val="1A1A1A"/>
+                </a:solidFill>
+                <a:latin typeface="Calibri"/>
+                <a:ea typeface="Calibri"/>
+                <a:cs typeface="Calibri"/>
+              </a:rPr>
+              <a:t>Complaint identifier</a:t>
+            </a:r>
+            <a:endParaRPr sz="2400"/>
+          </a:p>
+        </p:txBody>
+      </p:sp>
+      <p:sp>
+        <p:nvSpPr>
+          <p:cNvPr id="11" name="Text 9">
+            <a:extLst xmlns:a="http://schemas.openxmlformats.org/drawingml/2006/main">
+              <a:ext uri="{FF2B5EF4-FFF2-40B4-BE49-F238E27FC236}">
+                <a16:creationId xmlns:a16="http://schemas.microsoft.com/office/drawing/2014/main" id="{7CDDE7B8-12FD-4DB6-AF13-C2664BCA166F}"/>
+              </a:ext>
+            </a:extLst>
+          </p:cNvPr>
+          <p:cNvSpPr>
+            <a:spLocks xmlns:a="http://schemas.openxmlformats.org/drawingml/2006/main" noGrp="1"/>
+          </p:cNvSpPr>
+          <p:nvPr/>
+        </p:nvSpPr>
+        <p:spPr>
+          <a:xfrm xmlns:a="http://schemas.openxmlformats.org/drawingml/2006/main">
+            <a:off x="5463101" y="2340864"/>
+            <a:ext cx="5905634" cy="713232"/>
+          </a:xfrm>
+          <a:prstGeom xmlns:a="http://schemas.openxmlformats.org/drawingml/2006/main" prst="rect">
+            <a:avLst/>
+          </a:prstGeom>
+          <a:noFill xmlns:a="http://schemas.openxmlformats.org/drawingml/2006/main"/>
+        </p:spPr>
+        <p:txBody>
+          <a:bodyPr xmlns:a="http://schemas.openxmlformats.org/drawingml/2006/main" wrap="square" lIns="0" tIns="0" rIns="0" bIns="0" anchor="ctr"/>
+          <a:lstStyle xmlns:a="http://schemas.openxmlformats.org/drawingml/2006/main"/>
+          <a:p xmlns:a="http://schemas.openxmlformats.org/drawingml/2006/main">
+            <a:pPr marL="0" indent="0" algn="r">
+              <a:buNone/>
+            </a:pPr>
+            <a:r>
+              <a:rPr sz="2400" b="1">
+                <a:solidFill>
+                  <a:srgbClr val="1A1A1A"/>
+                </a:solidFill>
+                <a:latin typeface="Calibri"/>
+                <a:ea typeface="Calibri"/>
+                <a:cs typeface="Calibri"/>
+              </a:rPr>
+              <a:t>No · replaced before the model call</a:t>
+            </a:r>
+            <a:endParaRPr sz="2400"/>
+          </a:p>
+        </p:txBody>
+      </p:sp>
+      <p:sp>
+        <p:nvSpPr>
+          <p:cNvPr id="12" name="Shape 10">
+            <a:extLst xmlns:a="http://schemas.openxmlformats.org/drawingml/2006/main">
+              <a:ext uri="{FF2B5EF4-FFF2-40B4-BE49-F238E27FC236}">
+                <a16:creationId xmlns:a16="http://schemas.microsoft.com/office/drawing/2014/main" id="{34C38A68-C907-4951-A0CC-C8C55675235E}"/>
+              </a:ext>
+            </a:extLst>
+          </p:cNvPr>
+          <p:cNvSpPr>
+            <a:spLocks xmlns:a="http://schemas.openxmlformats.org/drawingml/2006/main" noGrp="1"/>
+          </p:cNvSpPr>
+          <p:nvPr/>
+        </p:nvSpPr>
+        <p:spPr>
+          <a:xfrm xmlns:a="http://schemas.openxmlformats.org/drawingml/2006/main">
+            <a:off x="822960" y="3054096"/>
+            <a:ext cx="10545775" cy="0"/>
+          </a:xfrm>
+          <a:prstGeom xmlns:a="http://schemas.openxmlformats.org/drawingml/2006/main" prst="line">
+            <a:avLst/>
+          </a:prstGeom>
+          <a:noFill xmlns:a="http://schemas.openxmlformats.org/drawingml/2006/main"/>
+          <a:ln xmlns:a="http://schemas.openxmlformats.org/drawingml/2006/main" w="12700">
+            <a:solidFill>
+              <a:srgbClr val="E0E0E0"/>
+            </a:solidFill>
+            <a:prstDash val="solid"/>
+          </a:ln>
+        </p:spPr>
+      </p:sp>
+      <p:sp>
+        <p:nvSpPr>
+          <p:cNvPr id="13" name="Text 11">
+            <a:extLst xmlns:a="http://schemas.openxmlformats.org/drawingml/2006/main">
+              <a:ext uri="{FF2B5EF4-FFF2-40B4-BE49-F238E27FC236}">
+                <a16:creationId xmlns:a16="http://schemas.microsoft.com/office/drawing/2014/main" id="{7E61DC08-BCC5-4289-9CB2-B6270239A64D}"/>
+              </a:ext>
+            </a:extLst>
+          </p:cNvPr>
+          <p:cNvSpPr>
+            <a:spLocks xmlns:a="http://schemas.openxmlformats.org/drawingml/2006/main" noGrp="1"/>
+          </p:cNvSpPr>
+          <p:nvPr/>
+        </p:nvSpPr>
+        <p:spPr>
+          <a:xfrm xmlns:a="http://schemas.openxmlformats.org/drawingml/2006/main">
+            <a:off x="822960" y="3054096"/>
+            <a:ext cx="4640141" cy="713232"/>
+          </a:xfrm>
+          <a:prstGeom xmlns:a="http://schemas.openxmlformats.org/drawingml/2006/main" prst="rect">
+            <a:avLst/>
+          </a:prstGeom>
+          <a:noFill xmlns:a="http://schemas.openxmlformats.org/drawingml/2006/main"/>
+        </p:spPr>
+        <p:txBody>
+          <a:bodyPr xmlns:a="http://schemas.openxmlformats.org/drawingml/2006/main" wrap="square" lIns="0" tIns="0" rIns="0" bIns="0" anchor="ctr"/>
+          <a:lstStyle xmlns:a="http://schemas.openxmlformats.org/drawingml/2006/main"/>
+          <a:p xmlns:a="http://schemas.openxmlformats.org/drawingml/2006/main">
+            <a:pPr marL="0" indent="0">
+              <a:buNone/>
+            </a:pPr>
+            <a:r>
+              <a:rPr sz="2400">
+                <a:solidFill>
+                  <a:srgbClr val="1A1A1A"/>
+                </a:solidFill>
+                <a:latin typeface="Calibri"/>
+                <a:ea typeface="Calibri"/>
+                <a:cs typeface="Calibri"/>
+              </a:rPr>
+              <a:t>Complaint narrative</a:t>
+            </a:r>
+            <a:endParaRPr sz="2400"/>
+          </a:p>
+        </p:txBody>
+      </p:sp>
+      <p:sp>
+        <p:nvSpPr>
+          <p:cNvPr id="14" name="Text 12">
+            <a:extLst xmlns:a="http://schemas.openxmlformats.org/drawingml/2006/main">
+              <a:ext uri="{FF2B5EF4-FFF2-40B4-BE49-F238E27FC236}">
+                <a16:creationId xmlns:a16="http://schemas.microsoft.com/office/drawing/2014/main" id="{BF1416F2-DBBF-4683-B428-CD255AF58024}"/>
+              </a:ext>
+            </a:extLst>
+          </p:cNvPr>
+          <p:cNvSpPr>
+            <a:spLocks xmlns:a="http://schemas.openxmlformats.org/drawingml/2006/main" noGrp="1"/>
+          </p:cNvSpPr>
+          <p:nvPr/>
+        </p:nvSpPr>
+        <p:spPr>
+          <a:xfrm xmlns:a="http://schemas.openxmlformats.org/drawingml/2006/main">
+            <a:off x="5463101" y="3054096"/>
+            <a:ext cx="5905634" cy="713232"/>
+          </a:xfrm>
+          <a:prstGeom xmlns:a="http://schemas.openxmlformats.org/drawingml/2006/main" prst="rect">
+            <a:avLst/>
+          </a:prstGeom>
+          <a:noFill xmlns:a="http://schemas.openxmlformats.org/drawingml/2006/main"/>
+        </p:spPr>
+        <p:txBody>
+          <a:bodyPr xmlns:a="http://schemas.openxmlformats.org/drawingml/2006/main" wrap="square" lIns="0" tIns="0" rIns="0" bIns="0" anchor="ctr"/>
+          <a:lstStyle xmlns:a="http://schemas.openxmlformats.org/drawingml/2006/main"/>
+          <a:p xmlns:a="http://schemas.openxmlformats.org/drawingml/2006/main">
+            <a:pPr marL="0" indent="0" algn="r">
+              <a:buNone/>
+            </a:pPr>
+            <a:r>
+              <a:rPr sz="2400" b="1">
+                <a:solidFill>
+                  <a:srgbClr val="1A1A1A"/>
+                </a:solidFill>
+                <a:latin typeface="Calibri"/>
+                <a:ea typeface="Calibri"/>
+                <a:cs typeface="Calibri"/>
+              </a:rPr>
+              <a:t>Yes · sent to the provider in full</a:t>
+            </a:r>
+            <a:endParaRPr sz="2400"/>
+          </a:p>
+        </p:txBody>
+      </p:sp>
+      <p:sp>
+        <p:nvSpPr>
+          <p:cNvPr id="15" name="Shape 13">
+            <a:extLst xmlns:a="http://schemas.openxmlformats.org/drawingml/2006/main">
+              <a:ext uri="{FF2B5EF4-FFF2-40B4-BE49-F238E27FC236}">
+                <a16:creationId xmlns:a16="http://schemas.microsoft.com/office/drawing/2014/main" id="{7CDAC841-3869-42E9-988D-53136F3F2A19}"/>
+              </a:ext>
+            </a:extLst>
+          </p:cNvPr>
+          <p:cNvSpPr>
+            <a:spLocks xmlns:a="http://schemas.openxmlformats.org/drawingml/2006/main" noGrp="1"/>
+          </p:cNvSpPr>
+          <p:nvPr/>
+        </p:nvSpPr>
+        <p:spPr>
+          <a:xfrm xmlns:a="http://schemas.openxmlformats.org/drawingml/2006/main">
+            <a:off x="822960" y="3767328"/>
+            <a:ext cx="10545775" cy="0"/>
+          </a:xfrm>
+          <a:prstGeom xmlns:a="http://schemas.openxmlformats.org/drawingml/2006/main" prst="line">
+            <a:avLst/>
+          </a:prstGeom>
+          <a:noFill xmlns:a="http://schemas.openxmlformats.org/drawingml/2006/main"/>
+          <a:ln xmlns:a="http://schemas.openxmlformats.org/drawingml/2006/main" w="12700">
+            <a:solidFill>
+              <a:srgbClr val="E0E0E0"/>
+            </a:solidFill>
+            <a:prstDash val="solid"/>
+          </a:ln>
+        </p:spPr>
+      </p:sp>
+      <p:sp>
+        <p:nvSpPr>
+          <p:cNvPr id="16" name="Text 14">
+            <a:extLst xmlns:a="http://schemas.openxmlformats.org/drawingml/2006/main">
+              <a:ext uri="{FF2B5EF4-FFF2-40B4-BE49-F238E27FC236}">
+                <a16:creationId xmlns:a16="http://schemas.microsoft.com/office/drawing/2014/main" id="{00872AE0-0305-4A6A-B142-502C768A7FEB}"/>
+              </a:ext>
+            </a:extLst>
+          </p:cNvPr>
+          <p:cNvSpPr>
+            <a:spLocks xmlns:a="http://schemas.openxmlformats.org/drawingml/2006/main" noGrp="1"/>
+          </p:cNvSpPr>
+          <p:nvPr/>
+        </p:nvSpPr>
+        <p:spPr>
+          <a:xfrm xmlns:a="http://schemas.openxmlformats.org/drawingml/2006/main">
+            <a:off x="822960" y="3767328"/>
+            <a:ext cx="4640141" cy="713232"/>
+          </a:xfrm>
+          <a:prstGeom xmlns:a="http://schemas.openxmlformats.org/drawingml/2006/main" prst="rect">
+            <a:avLst/>
+          </a:prstGeom>
+          <a:noFill xmlns:a="http://schemas.openxmlformats.org/drawingml/2006/main"/>
+        </p:spPr>
+        <p:txBody>
+          <a:bodyPr xmlns:a="http://schemas.openxmlformats.org/drawingml/2006/main" wrap="square" lIns="0" tIns="0" rIns="0" bIns="0" anchor="ctr"/>
+          <a:lstStyle xmlns:a="http://schemas.openxmlformats.org/drawingml/2006/main"/>
+          <a:p xmlns:a="http://schemas.openxmlformats.org/drawingml/2006/main">
+            <a:pPr marL="0" indent="0">
+              <a:buNone/>
+            </a:pPr>
+            <a:r>
+              <a:rPr sz="2400">
+                <a:solidFill>
+                  <a:srgbClr val="1A1A1A"/>
+                </a:solidFill>
+                <a:latin typeface="Calibri"/>
+                <a:ea typeface="Calibri"/>
+                <a:cs typeface="Calibri"/>
+              </a:rPr>
+              <a:t>Evidence + pseudonymous reference</a:t>
+            </a:r>
+            <a:endParaRPr sz="2400"/>
+          </a:p>
+        </p:txBody>
+      </p:sp>
+      <p:sp>
+        <p:nvSpPr>
+          <p:cNvPr id="17" name="Text 15">
+            <a:extLst xmlns:a="http://schemas.openxmlformats.org/drawingml/2006/main">
+              <a:ext uri="{FF2B5EF4-FFF2-40B4-BE49-F238E27FC236}">
+                <a16:creationId xmlns:a16="http://schemas.microsoft.com/office/drawing/2014/main" id="{A0B897EC-9AD3-49F8-9EE6-2B3143C245EC}"/>
+              </a:ext>
+            </a:extLst>
+          </p:cNvPr>
+          <p:cNvSpPr>
+            <a:spLocks xmlns:a="http://schemas.openxmlformats.org/drawingml/2006/main" noGrp="1"/>
+          </p:cNvSpPr>
+          <p:nvPr/>
+        </p:nvSpPr>
+        <p:spPr>
+          <a:xfrm xmlns:a="http://schemas.openxmlformats.org/drawingml/2006/main">
+            <a:off x="5463101" y="3767328"/>
+            <a:ext cx="5905634" cy="713232"/>
+          </a:xfrm>
+          <a:prstGeom xmlns:a="http://schemas.openxmlformats.org/drawingml/2006/main" prst="rect">
+            <a:avLst/>
+          </a:prstGeom>
+          <a:noFill xmlns:a="http://schemas.openxmlformats.org/drawingml/2006/main"/>
+        </p:spPr>
+        <p:txBody>
+          <a:bodyPr xmlns:a="http://schemas.openxmlformats.org/drawingml/2006/main" wrap="square" lIns="0" tIns="0" rIns="0" bIns="0" anchor="ctr"/>
+          <a:lstStyle xmlns:a="http://schemas.openxmlformats.org/drawingml/2006/main"/>
+          <a:p xmlns:a="http://schemas.openxmlformats.org/drawingml/2006/main">
+            <a:pPr marL="0" indent="0" algn="r">
+              <a:buNone/>
+            </a:pPr>
+            <a:r>
+              <a:rPr sz="2400" b="1">
+                <a:solidFill>
+                  <a:srgbClr val="1A1A1A"/>
+                </a:solidFill>
+                <a:latin typeface="Calibri"/>
+                <a:ea typeface="Calibri"/>
+                <a:cs typeface="Calibri"/>
+              </a:rPr>
+              <a:t>Stored in monitoring</a:t>
+            </a:r>
+            <a:endParaRPr sz="2400"/>
+          </a:p>
+        </p:txBody>
+      </p:sp>
+      <p:sp>
+        <p:nvSpPr>
+          <p:cNvPr id="18" name="Text 16">
+            <a:extLst xmlns:a="http://schemas.openxmlformats.org/drawingml/2006/main">
+              <a:ext uri="{FF2B5EF4-FFF2-40B4-BE49-F238E27FC236}">
+                <a16:creationId xmlns:a16="http://schemas.microsoft.com/office/drawing/2014/main" id="{B041204B-8134-499D-9CCF-DCDAB38615CA}"/>
+              </a:ext>
+            </a:extLst>
+          </p:cNvPr>
+          <p:cNvSpPr>
+            <a:spLocks xmlns:a="http://schemas.openxmlformats.org/drawingml/2006/main" noGrp="1"/>
+          </p:cNvSpPr>
+          <p:nvPr/>
+        </p:nvSpPr>
+        <p:spPr>
+          <a:xfrm xmlns:a="http://schemas.openxmlformats.org/drawingml/2006/main">
+            <a:off x="822960" y="4864608"/>
+            <a:ext cx="10545775" cy="475488"/>
+          </a:xfrm>
+          <a:prstGeom xmlns:a="http://schemas.openxmlformats.org/drawingml/2006/main" prst="rect">
+            <a:avLst/>
+          </a:prstGeom>
+          <a:noFill xmlns:a="http://schemas.openxmlformats.org/drawingml/2006/main"/>
+        </p:spPr>
+        <p:txBody>
+          <a:bodyPr xmlns:a="http://schemas.openxmlformats.org/drawingml/2006/main" wrap="square" lIns="0" tIns="0" rIns="0" bIns="0" anchor="t"/>
+          <a:lstStyle xmlns:a="http://schemas.openxmlformats.org/drawingml/2006/main"/>
+          <a:p xmlns:a="http://schemas.openxmlformats.org/drawingml/2006/main">
+            <a:pPr marL="0" indent="0">
+              <a:buNone/>
+            </a:pPr>
+            <a:r>
+              <a:rPr sz="2400">
+                <a:solidFill>
+                  <a:srgbClr val="1A1A1A"/>
+                </a:solidFill>
+                <a:latin typeface="Calibri"/>
+                <a:ea typeface="Calibri"/>
+                <a:cs typeface="Calibri"/>
+              </a:rPr>
+              <a:t>Pseudonymisation protects the reference, not the content. Transfer controls are the gate.</a:t>
+            </a:r>
+            <a:endParaRPr sz="2400"/>
+          </a:p>
+        </p:txBody>
+      </p:sp>
+    </p:spTree>
+    <p:extLst>
+      <p:ext uri="{BB962C8B-B14F-4D97-AF65-F5344CB8AC3E}">
+        <p14:creationId xmlns:p14="http://schemas.microsoft.com/office/powerpoint/2010/main" val="127619783"/>
+      </p:ext>
+    </p:extLst>
+  </p:cSld>
+</p:sld>
+</file>
+
+<file path=ppt/slides/slide16.xml><?xml version="1.0" encoding="utf-8"?>
+<p:sld xmlns:p="http://schemas.openxmlformats.org/presentationml/2006/main">
+  <p:cSld>
+    <p:bg>
+      <p:bgPr>
+        <a:solidFill xmlns:a="http://schemas.openxmlformats.org/drawingml/2006/main">
+          <a:srgbClr val="FFFFFF"/>
+        </a:solidFill>
+      </p:bgPr>
+    </p:bg>
+    <p:spTree>
+      <p:nvGrpSpPr>
+        <p:cNvPr id="1" name=""/>
+        <p:cNvGrpSpPr/>
+        <p:nvPr/>
+      </p:nvGrpSpPr>
+      <p:grpSpPr>
+        <a:xfrm xmlns:a="http://schemas.openxmlformats.org/drawingml/2006/main"/>
+      </p:grpSpPr>
+      <p:sp>
+        <p:nvSpPr>
+          <p:cNvPr id="2" name="Text 0">
+            <a:extLst xmlns:a="http://schemas.openxmlformats.org/drawingml/2006/main">
+              <a:ext uri="{FF2B5EF4-FFF2-40B4-BE49-F238E27FC236}">
+                <a16:creationId xmlns:a16="http://schemas.microsoft.com/office/drawing/2014/main" id="{58B95A86-D9CB-4681-8168-2FBC311755D6}"/>
+              </a:ext>
+            </a:extLst>
+          </p:cNvPr>
+          <p:cNvSpPr>
+            <a:spLocks xmlns:a="http://schemas.openxmlformats.org/drawingml/2006/main" noGrp="1"/>
+          </p:cNvSpPr>
+          <p:nvPr/>
+        </p:nvSpPr>
+        <p:spPr>
+          <a:xfrm xmlns:a="http://schemas.openxmlformats.org/drawingml/2006/main">
+            <a:off x="822960" y="603504"/>
+            <a:ext cx="10545775" cy="731520"/>
+          </a:xfrm>
+          <a:prstGeom xmlns:a="http://schemas.openxmlformats.org/drawingml/2006/main" prst="rect">
+            <a:avLst/>
+          </a:prstGeom>
+          <a:noFill xmlns:a="http://schemas.openxmlformats.org/drawingml/2006/main"/>
+        </p:spPr>
+        <p:txBody>
+          <a:bodyPr xmlns:a="http://schemas.openxmlformats.org/drawingml/2006/main" wrap="square" lIns="0" tIns="0" rIns="0" bIns="0" anchor="ctr"/>
+          <a:lstStyle xmlns:a="http://schemas.openxmlformats.org/drawingml/2006/main"/>
+          <a:p xmlns:a="http://schemas.openxmlformats.org/drawingml/2006/main">
+            <a:pPr marL="0" indent="0">
+              <a:buNone/>
+            </a:pPr>
+            <a:r>
+              <a:rPr sz="3200" b="1">
+                <a:solidFill>
+                  <a:srgbClr val="1A1A1A"/>
+                </a:solidFill>
+                <a:latin typeface="Trebuchet MS"/>
+                <a:ea typeface="Trebuchet MS"/>
+                <a:cs typeface="Trebuchet MS"/>
+              </a:rPr>
+              <a:t>Every pilot threshold must pass before deployment</a:t>
+            </a:r>
+            <a:endParaRPr sz="3200"/>
+          </a:p>
+        </p:txBody>
+      </p:sp>
+      <p:sp>
+        <p:nvSpPr>
+          <p:cNvPr id="3" name="Shape 1">
+            <a:extLst xmlns:a="http://schemas.openxmlformats.org/drawingml/2006/main">
+              <a:ext uri="{FF2B5EF4-FFF2-40B4-BE49-F238E27FC236}">
+                <a16:creationId xmlns:a16="http://schemas.microsoft.com/office/drawing/2014/main" id="{E298F8BE-1544-42A8-9CDD-CE89373E0F8B}"/>
+              </a:ext>
+            </a:extLst>
+          </p:cNvPr>
+          <p:cNvSpPr>
+            <a:spLocks xmlns:a="http://schemas.openxmlformats.org/drawingml/2006/main" noGrp="1"/>
+          </p:cNvSpPr>
+          <p:nvPr/>
+        </p:nvSpPr>
+        <p:spPr>
+          <a:xfrm xmlns:a="http://schemas.openxmlformats.org/drawingml/2006/main">
+            <a:off x="822960" y="1444752"/>
+            <a:ext cx="1371600" cy="0"/>
+          </a:xfrm>
+          <a:prstGeom xmlns:a="http://schemas.openxmlformats.org/drawingml/2006/main" prst="line">
+            <a:avLst/>
+          </a:prstGeom>
+          <a:noFill xmlns:a="http://schemas.openxmlformats.org/drawingml/2006/main"/>
+          <a:ln xmlns:a="http://schemas.openxmlformats.org/drawingml/2006/main" w="25400">
+            <a:solidFill>
+              <a:srgbClr val="B0341F"/>
+            </a:solidFill>
+            <a:prstDash val="solid"/>
+          </a:ln>
+        </p:spPr>
+      </p:sp>
+      <p:sp>
+        <p:nvSpPr>
+          <p:cNvPr id="4" name="Shape 2">
+            <a:extLst xmlns:a="http://schemas.openxmlformats.org/drawingml/2006/main">
+              <a:ext uri="{FF2B5EF4-FFF2-40B4-BE49-F238E27FC236}">
+                <a16:creationId xmlns:a16="http://schemas.microsoft.com/office/drawing/2014/main" id="{C84C2600-AB7B-4E60-984F-47BCA9619AF9}"/>
+              </a:ext>
+            </a:extLst>
+          </p:cNvPr>
+          <p:cNvSpPr>
+            <a:spLocks xmlns:a="http://schemas.openxmlformats.org/drawingml/2006/main" noGrp="1"/>
+          </p:cNvSpPr>
+          <p:nvPr/>
+        </p:nvSpPr>
+        <p:spPr>
+          <a:xfrm xmlns:a="http://schemas.openxmlformats.org/drawingml/2006/main">
+            <a:off x="822960" y="6355080"/>
+            <a:ext cx="10545775" cy="0"/>
+          </a:xfrm>
+          <a:prstGeom xmlns:a="http://schemas.openxmlformats.org/drawingml/2006/main" prst="line">
+            <a:avLst/>
+          </a:prstGeom>
+          <a:noFill xmlns:a="http://schemas.openxmlformats.org/drawingml/2006/main"/>
+          <a:ln xmlns:a="http://schemas.openxmlformats.org/drawingml/2006/main" w="12700">
+            <a:solidFill>
+              <a:srgbClr val="E0E0E0"/>
+            </a:solidFill>
+            <a:prstDash val="solid"/>
+          </a:ln>
+        </p:spPr>
+      </p:sp>
+      <p:sp>
+        <p:nvSpPr>
+          <p:cNvPr id="5" name="Text 3">
+            <a:extLst xmlns:a="http://schemas.openxmlformats.org/drawingml/2006/main">
+              <a:ext uri="{FF2B5EF4-FFF2-40B4-BE49-F238E27FC236}">
+                <a16:creationId xmlns:a16="http://schemas.microsoft.com/office/drawing/2014/main" id="{1AB0B1E9-AC5C-41A6-BBB6-7DB173FDB90E}"/>
+              </a:ext>
+            </a:extLst>
+          </p:cNvPr>
+          <p:cNvSpPr>
+            <a:spLocks xmlns:a="http://schemas.openxmlformats.org/drawingml/2006/main" noGrp="1"/>
+          </p:cNvSpPr>
+          <p:nvPr/>
+        </p:nvSpPr>
+        <p:spPr>
+          <a:xfrm xmlns:a="http://schemas.openxmlformats.org/drawingml/2006/main">
+            <a:off x="822960" y="6400800"/>
+            <a:ext cx="5486400" cy="274320"/>
+          </a:xfrm>
+          <a:prstGeom xmlns:a="http://schemas.openxmlformats.org/drawingml/2006/main" prst="rect">
+            <a:avLst/>
+          </a:prstGeom>
+          <a:noFill xmlns:a="http://schemas.openxmlformats.org/drawingml/2006/main"/>
+        </p:spPr>
+        <p:txBody>
+          <a:bodyPr xmlns:a="http://schemas.openxmlformats.org/drawingml/2006/main" wrap="square" lIns="0" tIns="0" rIns="0" bIns="0" anchor="ctr"/>
+          <a:lstStyle xmlns:a="http://schemas.openxmlformats.org/drawingml/2006/main"/>
+          <a:p xmlns:a="http://schemas.openxmlformats.org/drawingml/2006/main">
+            <a:pPr marL="0" indent="0">
+              <a:buNone/>
+            </a:pPr>
+            <a:r>
+              <a:rPr sz="900">
+                <a:solidFill>
+                  <a:srgbClr val="6B6B6B"/>
+                </a:solidFill>
+                <a:latin typeface="Calibri"/>
+                <a:ea typeface="Calibri"/>
+                <a:cs typeface="Calibri"/>
+              </a:rPr>
+              <a:t>Capstone Round 2  ·  Assist</a:t>
+            </a:r>
+            <a:endParaRPr sz="900"/>
+          </a:p>
+        </p:txBody>
+      </p:sp>
+      <p:sp>
+        <p:nvSpPr>
+          <p:cNvPr id="6" name="Text 4">
+            <a:extLst xmlns:a="http://schemas.openxmlformats.org/drawingml/2006/main">
+              <a:ext uri="{FF2B5EF4-FFF2-40B4-BE49-F238E27FC236}">
+                <a16:creationId xmlns:a16="http://schemas.microsoft.com/office/drawing/2014/main" id="{45E83587-0FEB-4372-90ED-6B63804E1BF7}"/>
+              </a:ext>
+            </a:extLst>
+          </p:cNvPr>
+          <p:cNvSpPr>
+            <a:spLocks xmlns:a="http://schemas.openxmlformats.org/drawingml/2006/main" noGrp="1"/>
+          </p:cNvSpPr>
+          <p:nvPr/>
+        </p:nvSpPr>
+        <p:spPr>
+          <a:xfrm xmlns:a="http://schemas.openxmlformats.org/drawingml/2006/main">
+            <a:off x="10454335" y="6400800"/>
+            <a:ext cx="914400" cy="274320"/>
+          </a:xfrm>
+          <a:prstGeom xmlns:a="http://schemas.openxmlformats.org/drawingml/2006/main" prst="rect">
+            <a:avLst/>
+          </a:prstGeom>
+          <a:noFill xmlns:a="http://schemas.openxmlformats.org/drawingml/2006/main"/>
+        </p:spPr>
+        <p:txBody>
+          <a:bodyPr xmlns:a="http://schemas.openxmlformats.org/drawingml/2006/main" wrap="square" lIns="0" tIns="0" rIns="0" bIns="0" anchor="ctr"/>
+          <a:lstStyle xmlns:a="http://schemas.openxmlformats.org/drawingml/2006/main"/>
+          <a:p xmlns:a="http://schemas.openxmlformats.org/drawingml/2006/main">
+            <a:pPr marL="0" indent="0" algn="r">
+              <a:buNone/>
+            </a:pPr>
+            <a:r>
+              <a:rPr sz="900">
+                <a:solidFill>
+                  <a:srgbClr val="6B6B6B"/>
+                </a:solidFill>
+                <a:latin typeface="Calibri"/>
+                <a:ea typeface="Calibri"/>
+                <a:cs typeface="Calibri"/>
+              </a:rPr>
+              <a:t>15</a:t>
             </a:r>
             <a:endParaRPr sz="900"/>
           </a:p>
@@ -8511,125 +9403,63 @@
 </file>
 
 <file path=ppt/slides/slide5.xml><?xml version="1.0" encoding="utf-8"?>
-<p:sld xmlns:p="http://schemas.openxmlformats.org/presentationml/2006/main">
+<p:sld xmlns:a="http://schemas.openxmlformats.org/drawingml/2006/main" xmlns:p="http://schemas.openxmlformats.org/presentationml/2006/main" xmlns:r="http://schemas.openxmlformats.org/officeDocument/2006/relationships">
   <p:cSld>
-    <p:bg>
-      <p:bgPr>
-        <a:solidFill xmlns:a="http://schemas.openxmlformats.org/drawingml/2006/main">
-          <a:srgbClr val="FFFFFF"/>
-        </a:solidFill>
-      </p:bgPr>
-    </p:bg>
     <p:spTree>
       <p:nvGrpSpPr>
         <p:cNvPr id="1" name=""/>
         <p:cNvGrpSpPr/>
         <p:nvPr/>
       </p:nvGrpSpPr>
-      <p:grpSpPr>
-        <a:xfrm xmlns:a="http://schemas.openxmlformats.org/drawingml/2006/main"/>
-      </p:grpSpPr>
-      <p:sp>
-        <p:nvSpPr>
-          <p:cNvPr id="2" name="Text 0">
-            <a:extLst xmlns:a="http://schemas.openxmlformats.org/drawingml/2006/main">
-              <a:ext uri="{FF2B5EF4-FFF2-40B4-BE49-F238E27FC236}">
-                <a16:creationId xmlns:a16="http://schemas.microsoft.com/office/drawing/2014/main" id="{38A28D43-32B7-4C19-B734-D3A6F1E2F6BF}"/>
-              </a:ext>
-            </a:extLst>
-          </p:cNvPr>
-          <p:cNvSpPr>
-            <a:spLocks xmlns:a="http://schemas.openxmlformats.org/drawingml/2006/main" noGrp="1"/>
-          </p:cNvSpPr>
-          <p:nvPr/>
-        </p:nvSpPr>
-        <p:spPr>
-          <a:xfrm xmlns:a="http://schemas.openxmlformats.org/drawingml/2006/main">
-            <a:off x="822960" y="603504"/>
-            <a:ext cx="10545775" cy="731520"/>
-          </a:xfrm>
-          <a:prstGeom xmlns:a="http://schemas.openxmlformats.org/drawingml/2006/main" prst="rect">
-            <a:avLst/>
-          </a:prstGeom>
-          <a:noFill xmlns:a="http://schemas.openxmlformats.org/drawingml/2006/main"/>
-        </p:spPr>
-        <p:txBody>
-          <a:bodyPr xmlns:a="http://schemas.openxmlformats.org/drawingml/2006/main" wrap="square" lIns="0" tIns="0" rIns="0" bIns="0" anchor="ctr"/>
-          <a:lstStyle xmlns:a="http://schemas.openxmlformats.org/drawingml/2006/main"/>
-          <a:p xmlns:a="http://schemas.openxmlformats.org/drawingml/2006/main">
-            <a:pPr marL="0" indent="0">
-              <a:buNone/>
-            </a:pPr>
-            <a:r>
-              <a:rPr sz="3200" b="1">
-                <a:solidFill>
-                  <a:srgbClr val="1A1A1A"/>
-                </a:solidFill>
-                <a:latin typeface="Trebuchet MS"/>
-                <a:ea typeface="Trebuchet MS"/>
-                <a:cs typeface="Trebuchet MS"/>
-              </a:rPr>
-              <a:t>The POC proves the mechanism — not accuracy</a:t>
-            </a:r>
-            <a:endParaRPr sz="3200"/>
-          </a:p>
-        </p:txBody>
-      </p:sp>
-      <p:sp>
-        <p:nvSpPr>
-          <p:cNvPr id="3" name="Shape 1">
-            <a:extLst xmlns:a="http://schemas.openxmlformats.org/drawingml/2006/main">
-              <a:ext uri="{FF2B5EF4-FFF2-40B4-BE49-F238E27FC236}">
-                <a16:creationId xmlns:a16="http://schemas.microsoft.com/office/drawing/2014/main" id="{C43CF5C8-89B6-43F6-AF3F-9E4920F00150}"/>
-              </a:ext>
-            </a:extLst>
-          </p:cNvPr>
-          <p:cNvSpPr>
-            <a:spLocks xmlns:a="http://schemas.openxmlformats.org/drawingml/2006/main" noGrp="1"/>
-          </p:cNvSpPr>
-          <p:nvPr/>
-        </p:nvSpPr>
-        <p:spPr>
-          <a:xfrm xmlns:a="http://schemas.openxmlformats.org/drawingml/2006/main">
-            <a:off x="822960" y="1444752"/>
-            <a:ext cx="1371600" cy="0"/>
-          </a:xfrm>
-          <a:prstGeom xmlns:a="http://schemas.openxmlformats.org/drawingml/2006/main" prst="line">
-            <a:avLst/>
-          </a:prstGeom>
-          <a:noFill xmlns:a="http://schemas.openxmlformats.org/drawingml/2006/main"/>
-          <a:ln xmlns:a="http://schemas.openxmlformats.org/drawingml/2006/main" w="25400">
-            <a:solidFill>
-              <a:srgbClr val="B0341F"/>
-            </a:solidFill>
-            <a:prstDash val="solid"/>
-          </a:ln>
-        </p:spPr>
-      </p:sp>
+      <p:grpSpPr/>
+      <p:pic>
+        <p:nvPicPr>
+          <p:cNvPr id="2" name="Picture 1" descr="spine_band.png"/>
+          <p:cNvPicPr>
+            <a:picLocks noChangeAspect="1"/>
+          </p:cNvPicPr>
+          <p:nvPr/>
+        </p:nvPicPr>
+        <p:blipFill>
+          <a:blip r:embed="rId2"/>
+          <a:stretch>
+            <a:fillRect/>
+          </a:stretch>
+        </p:blipFill>
+        <p:spPr>
+          <a:xfrm>
+            <a:off x="0" y="0"/>
+            <a:ext cx="12191695" cy="6355080"/>
+          </a:xfrm>
+          <a:prstGeom prst="rect">
+            <a:avLst/>
+          </a:prstGeom>
+        </p:spPr>
+      </p:pic>
       <p:sp>
         <p:nvSpPr>
           <p:cNvPr id="4" name="Shape 2">
-            <a:extLst xmlns:a="http://schemas.openxmlformats.org/drawingml/2006/main">
+            <a:extLst>
               <a:ext uri="{FF2B5EF4-FFF2-40B4-BE49-F238E27FC236}">
                 <a16:creationId xmlns:a16="http://schemas.microsoft.com/office/drawing/2014/main" id="{233529F4-9A82-4A8D-8FA5-8DABE5CA27A9}"/>
               </a:ext>
             </a:extLst>
           </p:cNvPr>
           <p:cNvSpPr>
-            <a:spLocks xmlns:a="http://schemas.openxmlformats.org/drawingml/2006/main" noGrp="1"/>
-          </p:cNvSpPr>
-          <p:nvPr/>
-        </p:nvSpPr>
-        <p:spPr>
-          <a:xfrm xmlns:a="http://schemas.openxmlformats.org/drawingml/2006/main">
+            <a:spLocks noGrp="1"/>
+          </p:cNvSpPr>
+          <p:nvPr/>
+        </p:nvSpPr>
+        <p:spPr>
+          <a:xfrm>
             <a:off x="822960" y="6355080"/>
             <a:ext cx="10545775" cy="0"/>
           </a:xfrm>
-          <a:prstGeom xmlns:a="http://schemas.openxmlformats.org/drawingml/2006/main" prst="line">
-            <a:avLst/>
-          </a:prstGeom>
-          <a:noFill xmlns:a="http://schemas.openxmlformats.org/drawingml/2006/main"/>
-          <a:ln xmlns:a="http://schemas.openxmlformats.org/drawingml/2006/main" w="12700">
+          <a:prstGeom prst="line">
+            <a:avLst/>
+          </a:prstGeom>
+          <a:noFill/>
+          <a:ln w="12700">
             <a:solidFill>
               <a:srgbClr val="E0E0E0"/>
             </a:solidFill>
@@ -8640,31 +9470,31 @@
       <p:sp>
         <p:nvSpPr>
           <p:cNvPr id="5" name="Text 3">
-            <a:extLst xmlns:a="http://schemas.openxmlformats.org/drawingml/2006/main">
+            <a:extLst>
               <a:ext uri="{FF2B5EF4-FFF2-40B4-BE49-F238E27FC236}">
                 <a16:creationId xmlns:a16="http://schemas.microsoft.com/office/drawing/2014/main" id="{A2942C5E-0ADF-4D08-A40A-E228D34A4710}"/>
               </a:ext>
             </a:extLst>
           </p:cNvPr>
           <p:cNvSpPr>
-            <a:spLocks xmlns:a="http://schemas.openxmlformats.org/drawingml/2006/main" noGrp="1"/>
-          </p:cNvSpPr>
-          <p:nvPr/>
-        </p:nvSpPr>
-        <p:spPr>
-          <a:xfrm xmlns:a="http://schemas.openxmlformats.org/drawingml/2006/main">
+            <a:spLocks noGrp="1"/>
+          </p:cNvSpPr>
+          <p:nvPr/>
+        </p:nvSpPr>
+        <p:spPr>
+          <a:xfrm>
             <a:off x="822960" y="6400800"/>
             <a:ext cx="5486400" cy="274320"/>
           </a:xfrm>
-          <a:prstGeom xmlns:a="http://schemas.openxmlformats.org/drawingml/2006/main" prst="rect">
-            <a:avLst/>
-          </a:prstGeom>
-          <a:noFill xmlns:a="http://schemas.openxmlformats.org/drawingml/2006/main"/>
-        </p:spPr>
-        <p:txBody>
-          <a:bodyPr xmlns:a="http://schemas.openxmlformats.org/drawingml/2006/main" wrap="square" lIns="0" tIns="0" rIns="0" bIns="0" anchor="ctr"/>
-          <a:lstStyle xmlns:a="http://schemas.openxmlformats.org/drawingml/2006/main"/>
-          <a:p xmlns:a="http://schemas.openxmlformats.org/drawingml/2006/main">
+          <a:prstGeom prst="rect">
+            <a:avLst/>
+          </a:prstGeom>
+          <a:noFill/>
+        </p:spPr>
+        <p:txBody>
+          <a:bodyPr wrap="square" lIns="0" tIns="0" rIns="0" bIns="0" anchor="ctr"/>
+          <a:lstStyle/>
+          <a:p>
             <a:pPr marL="0" indent="0">
               <a:buNone/>
             </a:pPr>
@@ -8686,31 +9516,31 @@
       <p:sp>
         <p:nvSpPr>
           <p:cNvPr id="6" name="Text 4">
-            <a:extLst xmlns:a="http://schemas.openxmlformats.org/drawingml/2006/main">
+            <a:extLst>
               <a:ext uri="{FF2B5EF4-FFF2-40B4-BE49-F238E27FC236}">
                 <a16:creationId xmlns:a16="http://schemas.microsoft.com/office/drawing/2014/main" id="{2A3DB2A2-CF25-4557-9B0C-54687E4FA0D1}"/>
               </a:ext>
             </a:extLst>
           </p:cNvPr>
           <p:cNvSpPr>
-            <a:spLocks xmlns:a="http://schemas.openxmlformats.org/drawingml/2006/main" noGrp="1"/>
-          </p:cNvSpPr>
-          <p:nvPr/>
-        </p:nvSpPr>
-        <p:spPr>
-          <a:xfrm xmlns:a="http://schemas.openxmlformats.org/drawingml/2006/main">
+            <a:spLocks noGrp="1"/>
+          </p:cNvSpPr>
+          <p:nvPr/>
+        </p:nvSpPr>
+        <p:spPr>
+          <a:xfrm>
             <a:off x="10454335" y="6400800"/>
             <a:ext cx="914400" cy="274320"/>
           </a:xfrm>
-          <a:prstGeom xmlns:a="http://schemas.openxmlformats.org/drawingml/2006/main" prst="rect">
-            <a:avLst/>
-          </a:prstGeom>
-          <a:noFill xmlns:a="http://schemas.openxmlformats.org/drawingml/2006/main"/>
-        </p:spPr>
-        <p:txBody>
-          <a:bodyPr xmlns:a="http://schemas.openxmlformats.org/drawingml/2006/main" wrap="square" lIns="0" tIns="0" rIns="0" bIns="0" anchor="ctr"/>
-          <a:lstStyle xmlns:a="http://schemas.openxmlformats.org/drawingml/2006/main"/>
-          <a:p xmlns:a="http://schemas.openxmlformats.org/drawingml/2006/main">
+          <a:prstGeom prst="rect">
+            <a:avLst/>
+          </a:prstGeom>
+          <a:noFill/>
+        </p:spPr>
+        <p:txBody>
+          <a:bodyPr wrap="square" lIns="0" tIns="0" rIns="0" bIns="0" anchor="ctr"/>
+          <a:lstStyle/>
+          <a:p>
             <a:pPr marL="0" indent="0" algn="r">
               <a:buNone/>
             </a:pPr>
@@ -8729,100 +9559,11 @@
           </a:p>
         </p:txBody>
       </p:sp>
-      <p:sp>
-        <p:nvSpPr>
-          <p:cNvPr id="7" name="Text 5">
-            <a:extLst xmlns:a="http://schemas.openxmlformats.org/drawingml/2006/main">
-              <a:ext uri="{FF2B5EF4-FFF2-40B4-BE49-F238E27FC236}">
-                <a16:creationId xmlns:a16="http://schemas.microsoft.com/office/drawing/2014/main" id="{10F72280-FEB7-4077-9BCE-B00740543F64}"/>
-              </a:ext>
-            </a:extLst>
-          </p:cNvPr>
-          <p:cNvSpPr>
-            <a:spLocks xmlns:a="http://schemas.openxmlformats.org/drawingml/2006/main" noGrp="1"/>
-          </p:cNvSpPr>
-          <p:nvPr/>
-        </p:nvSpPr>
-        <p:spPr>
-          <a:xfrm xmlns:a="http://schemas.openxmlformats.org/drawingml/2006/main">
-            <a:off x="822960" y="1773936"/>
-            <a:ext cx="10545775" cy="475488"/>
-          </a:xfrm>
-          <a:prstGeom xmlns:a="http://schemas.openxmlformats.org/drawingml/2006/main" prst="rect">
-            <a:avLst/>
-          </a:prstGeom>
-          <a:noFill xmlns:a="http://schemas.openxmlformats.org/drawingml/2006/main"/>
-        </p:spPr>
-        <p:txBody>
-          <a:bodyPr xmlns:a="http://schemas.openxmlformats.org/drawingml/2006/main" wrap="square" lIns="0" tIns="0" rIns="0" bIns="0" anchor="t"/>
-          <a:lstStyle xmlns:a="http://schemas.openxmlformats.org/drawingml/2006/main"/>
-          <a:p xmlns:a="http://schemas.openxmlformats.org/drawingml/2006/main">
-            <a:pPr marL="0" indent="0">
-              <a:buNone/>
-            </a:pPr>
-            <a:r>
-              <a:rPr sz="2600">
-                <a:solidFill>
-                  <a:srgbClr val="1A1A1A"/>
-                </a:solidFill>
-                <a:latin typeface="Calibri"/>
-                <a:ea typeface="Calibri"/>
-                <a:cs typeface="Calibri"/>
-              </a:rPr>
-              <a:t>Proves: the workflow can propose, cite evidence and stop safely.</a:t>
-            </a:r>
-            <a:endParaRPr sz="2600"/>
-          </a:p>
-          <a:p xmlns:a="http://schemas.openxmlformats.org/drawingml/2006/main">
-            <a:pPr marL="0" indent="0">
-              <a:buNone/>
-            </a:pPr>
-            <a:r>
-              <a:rPr sz="2600">
-                <a:solidFill>
-                  <a:srgbClr val="1A1A1A"/>
-                </a:solidFill>
-                <a:latin typeface="Calibri"/>
-                <a:ea typeface="Calibri"/>
-                <a:cs typeface="Calibri"/>
-              </a:rPr>
-              <a:t>Does not prove: client performance or value.</a:t>
-            </a:r>
-            <a:endParaRPr sz="2600"/>
-          </a:p>
-        </p:txBody>
-      </p:sp>
-      <p:pic>
-        <p:nvPicPr>
-          <p:cNvPr id="15" name="Image 0"/>
-          <p:cNvPicPr>
-            <a:picLocks xmlns:a="http://schemas.openxmlformats.org/drawingml/2006/main" noChangeAspect="1"/>
-          </p:cNvPicPr>
-          <p:nvPr/>
-        </p:nvPicPr>
-        <p:blipFill>
-          <a:blip xmlns:r="http://schemas.openxmlformats.org/officeDocument/2006/relationships" xmlns:a="http://schemas.openxmlformats.org/drawingml/2006/main" r:embed="R60ccecb54d0a4c09"/>
-          <a:stretch xmlns:a="http://schemas.openxmlformats.org/drawingml/2006/main">
-            <a:fillRect l="0" t="0" r="0" b="0"/>
-          </a:stretch>
-        </p:blipFill>
-        <p:spPr>
-          <a:xfrm xmlns:a="http://schemas.openxmlformats.org/drawingml/2006/main">
-            <a:off x="1750619" y="2523744"/>
-            <a:ext cx="8690458" cy="3621024"/>
-          </a:xfrm>
-          <a:prstGeom xmlns:a="http://schemas.openxmlformats.org/drawingml/2006/main" prst="rect">
-            <a:avLst/>
-          </a:prstGeom>
-        </p:spPr>
-      </p:pic>
     </p:spTree>
-    <p:extLst>
-      <p:ext uri="{BB962C8B-B14F-4D97-AF65-F5344CB8AC3E}">
-        <p14:creationId xmlns:p14="http://schemas.microsoft.com/office/powerpoint/2010/main" val="1271321080"/>
-      </p:ext>
-    </p:extLst>
   </p:cSld>
+  <p:clrMapOvr>
+    <a:masterClrMapping/>
+  </p:clrMapOvr>
 </p:sld>
 </file>
 
@@ -8850,7 +9591,7 @@
           <p:cNvPr id="2" name="Text 0">
             <a:extLst xmlns:a="http://schemas.openxmlformats.org/drawingml/2006/main">
               <a:ext uri="{FF2B5EF4-FFF2-40B4-BE49-F238E27FC236}">
-                <a16:creationId xmlns:a16="http://schemas.microsoft.com/office/drawing/2014/main" id="{A7A448E3-6A25-437D-A56B-7B353879B3D0}"/>
+                <a16:creationId xmlns:a16="http://schemas.microsoft.com/office/drawing/2014/main" id="{38A28D43-32B7-4C19-B734-D3A6F1E2F6BF}"/>
               </a:ext>
             </a:extLst>
           </p:cNvPr>
@@ -8885,7 +9626,7 @@
                 <a:ea typeface="Trebuchet MS"/>
                 <a:cs typeface="Trebuchet MS"/>
               </a:rPr>
-              <a:t>The system works; the bespoke economics do not</a:t>
+              <a:t>The POC proves the mechanism — not accuracy</a:t>
             </a:r>
             <a:endParaRPr sz="3200"/>
           </a:p>
@@ -8896,7 +9637,7 @@
           <p:cNvPr id="3" name="Shape 1">
             <a:extLst xmlns:a="http://schemas.openxmlformats.org/drawingml/2006/main">
               <a:ext uri="{FF2B5EF4-FFF2-40B4-BE49-F238E27FC236}">
-                <a16:creationId xmlns:a16="http://schemas.microsoft.com/office/drawing/2014/main" id="{EE382AC9-C458-4448-A028-F7B0B6B2FAC7}"/>
+                <a16:creationId xmlns:a16="http://schemas.microsoft.com/office/drawing/2014/main" id="{C43CF5C8-89B6-43F6-AF3F-9E4920F00150}"/>
               </a:ext>
             </a:extLst>
           </p:cNvPr>
@@ -8927,7 +9668,7 @@
           <p:cNvPr id="4" name="Shape 2">
             <a:extLst xmlns:a="http://schemas.openxmlformats.org/drawingml/2006/main">
               <a:ext uri="{FF2B5EF4-FFF2-40B4-BE49-F238E27FC236}">
-                <a16:creationId xmlns:a16="http://schemas.microsoft.com/office/drawing/2014/main" id="{501AF663-098B-4908-968B-95F5B4657296}"/>
+                <a16:creationId xmlns:a16="http://schemas.microsoft.com/office/drawing/2014/main" id="{233529F4-9A82-4A8D-8FA5-8DABE5CA27A9}"/>
               </a:ext>
             </a:extLst>
           </p:cNvPr>
@@ -8958,7 +9699,7 @@
           <p:cNvPr id="5" name="Text 3">
             <a:extLst xmlns:a="http://schemas.openxmlformats.org/drawingml/2006/main">
               <a:ext uri="{FF2B5EF4-FFF2-40B4-BE49-F238E27FC236}">
-                <a16:creationId xmlns:a16="http://schemas.microsoft.com/office/drawing/2014/main" id="{18F2D69B-0177-45A2-8C12-991E90DE47D1}"/>
+                <a16:creationId xmlns:a16="http://schemas.microsoft.com/office/drawing/2014/main" id="{A2942C5E-0ADF-4D08-A40A-E228D34A4710}"/>
               </a:ext>
             </a:extLst>
           </p:cNvPr>
@@ -9004,7 +9745,7 @@
           <p:cNvPr id="6" name="Text 4">
             <a:extLst xmlns:a="http://schemas.openxmlformats.org/drawingml/2006/main">
               <a:ext uri="{FF2B5EF4-FFF2-40B4-BE49-F238E27FC236}">
-                <a16:creationId xmlns:a16="http://schemas.microsoft.com/office/drawing/2014/main" id="{64B11649-53EB-4BEC-85F8-E6C2A082E2E9}"/>
+                <a16:creationId xmlns:a16="http://schemas.microsoft.com/office/drawing/2014/main" id="{2A3DB2A2-CF25-4557-9B0C-54687E4FA0D1}"/>
               </a:ext>
             </a:extLst>
           </p:cNvPr>
@@ -9050,7 +9791,7 @@
           <p:cNvPr id="7" name="Text 5">
             <a:extLst xmlns:a="http://schemas.openxmlformats.org/drawingml/2006/main">
               <a:ext uri="{FF2B5EF4-FFF2-40B4-BE49-F238E27FC236}">
-                <a16:creationId xmlns:a16="http://schemas.microsoft.com/office/drawing/2014/main" id="{D2A18EE2-A32A-450F-B7C4-43229A318274}"/>
+                <a16:creationId xmlns:a16="http://schemas.microsoft.com/office/drawing/2014/main" id="{10F72280-FEB7-4077-9BCE-B00740543F64}"/>
               </a:ext>
             </a:extLst>
           </p:cNvPr>
@@ -9062,134 +9803,39 @@
         <p:spPr>
           <a:xfrm xmlns:a="http://schemas.openxmlformats.org/drawingml/2006/main">
             <a:off x="822960" y="1773936"/>
-            <a:ext cx="6960212" cy="402336"/>
-          </a:xfrm>
-          <a:prstGeom xmlns:a="http://schemas.openxmlformats.org/drawingml/2006/main" prst="rect">
-            <a:avLst/>
-          </a:prstGeom>
-          <a:noFill xmlns:a="http://schemas.openxmlformats.org/drawingml/2006/main"/>
-        </p:spPr>
-        <p:txBody>
-          <a:bodyPr xmlns:a="http://schemas.openxmlformats.org/drawingml/2006/main" wrap="square" lIns="0" tIns="0" rIns="0" bIns="0" anchor="ctr"/>
+            <a:ext cx="10545775" cy="475488"/>
+          </a:xfrm>
+          <a:prstGeom xmlns:a="http://schemas.openxmlformats.org/drawingml/2006/main" prst="rect">
+            <a:avLst/>
+          </a:prstGeom>
+          <a:noFill xmlns:a="http://schemas.openxmlformats.org/drawingml/2006/main"/>
+        </p:spPr>
+        <p:txBody>
+          <a:bodyPr xmlns:a="http://schemas.openxmlformats.org/drawingml/2006/main" wrap="square" lIns="0" tIns="0" rIns="0" bIns="0" anchor="t"/>
           <a:lstStyle xmlns:a="http://schemas.openxmlformats.org/drawingml/2006/main"/>
           <a:p xmlns:a="http://schemas.openxmlformats.org/drawingml/2006/main">
             <a:pPr marL="0" indent="0">
               <a:buNone/>
             </a:pPr>
-            <a:endParaRPr sz="2400"/>
-          </a:p>
-        </p:txBody>
-      </p:sp>
-      <p:sp>
-        <p:nvSpPr>
-          <p:cNvPr id="8" name="Text 6">
-            <a:extLst xmlns:a="http://schemas.openxmlformats.org/drawingml/2006/main">
-              <a:ext uri="{FF2B5EF4-FFF2-40B4-BE49-F238E27FC236}">
-                <a16:creationId xmlns:a16="http://schemas.microsoft.com/office/drawing/2014/main" id="{A8FD200E-F12A-46BE-93F4-CE4AA98F851F}"/>
-              </a:ext>
-            </a:extLst>
-          </p:cNvPr>
-          <p:cNvSpPr>
-            <a:spLocks xmlns:a="http://schemas.openxmlformats.org/drawingml/2006/main" noGrp="1"/>
-          </p:cNvSpPr>
-          <p:nvPr/>
-        </p:nvSpPr>
-        <p:spPr>
-          <a:xfrm xmlns:a="http://schemas.openxmlformats.org/drawingml/2006/main">
-            <a:off x="7783172" y="1773936"/>
-            <a:ext cx="3585564" cy="402336"/>
-          </a:xfrm>
-          <a:prstGeom xmlns:a="http://schemas.openxmlformats.org/drawingml/2006/main" prst="rect">
-            <a:avLst/>
-          </a:prstGeom>
-          <a:noFill xmlns:a="http://schemas.openxmlformats.org/drawingml/2006/main"/>
-        </p:spPr>
-        <p:txBody>
-          <a:bodyPr xmlns:a="http://schemas.openxmlformats.org/drawingml/2006/main" wrap="square" lIns="0" tIns="0" rIns="0" bIns="0" anchor="ctr"/>
-          <a:lstStyle xmlns:a="http://schemas.openxmlformats.org/drawingml/2006/main"/>
-          <a:p xmlns:a="http://schemas.openxmlformats.org/drawingml/2006/main">
-            <a:pPr marL="0" indent="0" algn="r">
-              <a:buNone/>
-            </a:pPr>
-            <a:r>
-              <a:rPr sz="2400" b="1" spc="100">
-                <a:solidFill>
-                  <a:srgbClr val="B0341F"/>
-                </a:solidFill>
-                <a:latin typeface="Calibri"/>
-                <a:ea typeface="Calibri"/>
-                <a:cs typeface="Calibri"/>
-              </a:rPr>
-              <a:t>36-MONTH ROI</a:t>
-            </a:r>
-            <a:endParaRPr sz="2400"/>
-          </a:p>
-        </p:txBody>
-      </p:sp>
-      <p:sp>
-        <p:nvSpPr>
-          <p:cNvPr id="9" name="Shape 7">
-            <a:extLst xmlns:a="http://schemas.openxmlformats.org/drawingml/2006/main">
-              <a:ext uri="{FF2B5EF4-FFF2-40B4-BE49-F238E27FC236}">
-                <a16:creationId xmlns:a16="http://schemas.microsoft.com/office/drawing/2014/main" id="{FD68561A-C904-488E-8E56-97E3E3242655}"/>
-              </a:ext>
-            </a:extLst>
-          </p:cNvPr>
-          <p:cNvSpPr>
-            <a:spLocks xmlns:a="http://schemas.openxmlformats.org/drawingml/2006/main" noGrp="1"/>
-          </p:cNvSpPr>
-          <p:nvPr/>
-        </p:nvSpPr>
-        <p:spPr>
-          <a:xfrm xmlns:a="http://schemas.openxmlformats.org/drawingml/2006/main">
-            <a:off x="822960" y="2212848"/>
-            <a:ext cx="10545775" cy="0"/>
-          </a:xfrm>
-          <a:prstGeom xmlns:a="http://schemas.openxmlformats.org/drawingml/2006/main" prst="line">
-            <a:avLst/>
-          </a:prstGeom>
-          <a:noFill xmlns:a="http://schemas.openxmlformats.org/drawingml/2006/main"/>
-          <a:ln xmlns:a="http://schemas.openxmlformats.org/drawingml/2006/main" w="12700">
-            <a:solidFill>
-              <a:srgbClr val="1A1A1A"/>
-            </a:solidFill>
-            <a:prstDash val="solid"/>
-          </a:ln>
-        </p:spPr>
-      </p:sp>
-      <p:sp>
-        <p:nvSpPr>
-          <p:cNvPr id="10" name="Text 8">
-            <a:extLst xmlns:a="http://schemas.openxmlformats.org/drawingml/2006/main">
-              <a:ext uri="{FF2B5EF4-FFF2-40B4-BE49-F238E27FC236}">
-                <a16:creationId xmlns:a16="http://schemas.microsoft.com/office/drawing/2014/main" id="{B90C5254-85DB-4E27-AB9B-23BC2C6694DD}"/>
-              </a:ext>
-            </a:extLst>
-          </p:cNvPr>
-          <p:cNvSpPr>
-            <a:spLocks xmlns:a="http://schemas.openxmlformats.org/drawingml/2006/main" noGrp="1"/>
-          </p:cNvSpPr>
-          <p:nvPr/>
-        </p:nvSpPr>
-        <p:spPr>
-          <a:xfrm xmlns:a="http://schemas.openxmlformats.org/drawingml/2006/main">
-            <a:off x="822960" y="2340864"/>
-            <a:ext cx="6960212" cy="713232"/>
-          </a:xfrm>
-          <a:prstGeom xmlns:a="http://schemas.openxmlformats.org/drawingml/2006/main" prst="rect">
-            <a:avLst/>
-          </a:prstGeom>
-          <a:noFill xmlns:a="http://schemas.openxmlformats.org/drawingml/2006/main"/>
-        </p:spPr>
-        <p:txBody>
-          <a:bodyPr xmlns:a="http://schemas.openxmlformats.org/drawingml/2006/main" wrap="square" lIns="0" tIns="0" rIns="0" bIns="0" anchor="ctr"/>
-          <a:lstStyle xmlns:a="http://schemas.openxmlformats.org/drawingml/2006/main"/>
+            <a:r>
+              <a:rPr sz="2600">
+                <a:solidFill>
+                  <a:srgbClr val="1A1A1A"/>
+                </a:solidFill>
+                <a:latin typeface="Calibri"/>
+                <a:ea typeface="Calibri"/>
+                <a:cs typeface="Calibri"/>
+              </a:rPr>
+              <a:t>Proves: the workflow can propose, cite evidence and stop safely.</a:t>
+            </a:r>
+            <a:endParaRPr sz="2600"/>
+          </a:p>
           <a:p xmlns:a="http://schemas.openxmlformats.org/drawingml/2006/main">
             <a:pPr marL="0" indent="0">
               <a:buNone/>
             </a:pPr>
             <a:r>
-              <a:rPr sz="2400">
+              <a:rPr sz="2600">
                 <a:solidFill>
                   <a:srgbClr val="1A1A1A"/>
                 </a:solidFill>
@@ -9197,400 +9843,40 @@
                 <a:ea typeface="Calibri"/>
                 <a:cs typeface="Calibri"/>
               </a:rPr>
-              <a:t>Bespoke build · consultant oversight</a:t>
-            </a:r>
-            <a:endParaRPr sz="2400"/>
-          </a:p>
-        </p:txBody>
-      </p:sp>
-      <p:sp>
-        <p:nvSpPr>
-          <p:cNvPr id="11" name="Text 9">
-            <a:extLst xmlns:a="http://schemas.openxmlformats.org/drawingml/2006/main">
-              <a:ext uri="{FF2B5EF4-FFF2-40B4-BE49-F238E27FC236}">
-                <a16:creationId xmlns:a16="http://schemas.microsoft.com/office/drawing/2014/main" id="{6B90C47C-24F6-4C4B-BC7D-5C561395C68E}"/>
-              </a:ext>
-            </a:extLst>
-          </p:cNvPr>
-          <p:cNvSpPr>
-            <a:spLocks xmlns:a="http://schemas.openxmlformats.org/drawingml/2006/main" noGrp="1"/>
-          </p:cNvSpPr>
-          <p:nvPr/>
-        </p:nvSpPr>
-        <p:spPr>
-          <a:xfrm xmlns:a="http://schemas.openxmlformats.org/drawingml/2006/main">
-            <a:off x="7783172" y="2340864"/>
-            <a:ext cx="3585564" cy="713232"/>
-          </a:xfrm>
-          <a:prstGeom xmlns:a="http://schemas.openxmlformats.org/drawingml/2006/main" prst="rect">
-            <a:avLst/>
-          </a:prstGeom>
-          <a:noFill xmlns:a="http://schemas.openxmlformats.org/drawingml/2006/main"/>
-        </p:spPr>
-        <p:txBody>
-          <a:bodyPr xmlns:a="http://schemas.openxmlformats.org/drawingml/2006/main" wrap="square" lIns="0" tIns="0" rIns="0" bIns="0" anchor="ctr"/>
-          <a:lstStyle xmlns:a="http://schemas.openxmlformats.org/drawingml/2006/main"/>
-          <a:p xmlns:a="http://schemas.openxmlformats.org/drawingml/2006/main">
-            <a:pPr marL="0" indent="0" algn="r">
-              <a:buNone/>
-            </a:pPr>
-            <a:r>
-              <a:rPr sz="2400" b="1">
-                <a:solidFill>
-                  <a:srgbClr val="1A1A1A"/>
-                </a:solidFill>
-                <a:latin typeface="Calibri"/>
-                <a:ea typeface="Calibri"/>
-                <a:cs typeface="Calibri"/>
-              </a:rPr>
-              <a:t>−31.0%</a:t>
-            </a:r>
-            <a:endParaRPr sz="2400"/>
-          </a:p>
-        </p:txBody>
-      </p:sp>
-      <p:sp>
-        <p:nvSpPr>
-          <p:cNvPr id="12" name="Shape 10">
-            <a:extLst xmlns:a="http://schemas.openxmlformats.org/drawingml/2006/main">
-              <a:ext uri="{FF2B5EF4-FFF2-40B4-BE49-F238E27FC236}">
-                <a16:creationId xmlns:a16="http://schemas.microsoft.com/office/drawing/2014/main" id="{A6D95D2A-7880-4259-927B-FBAE6B103E0F}"/>
-              </a:ext>
-            </a:extLst>
-          </p:cNvPr>
-          <p:cNvSpPr>
-            <a:spLocks xmlns:a="http://schemas.openxmlformats.org/drawingml/2006/main" noGrp="1"/>
-          </p:cNvSpPr>
-          <p:nvPr/>
-        </p:nvSpPr>
-        <p:spPr>
-          <a:xfrm xmlns:a="http://schemas.openxmlformats.org/drawingml/2006/main">
-            <a:off x="822960" y="3054096"/>
-            <a:ext cx="10545775" cy="0"/>
-          </a:xfrm>
-          <a:prstGeom xmlns:a="http://schemas.openxmlformats.org/drawingml/2006/main" prst="line">
-            <a:avLst/>
-          </a:prstGeom>
-          <a:noFill xmlns:a="http://schemas.openxmlformats.org/drawingml/2006/main"/>
-          <a:ln xmlns:a="http://schemas.openxmlformats.org/drawingml/2006/main" w="12700">
-            <a:solidFill>
-              <a:srgbClr val="E0E0E0"/>
-            </a:solidFill>
-            <a:prstDash val="solid"/>
-          </a:ln>
-        </p:spPr>
-      </p:sp>
-      <p:sp>
-        <p:nvSpPr>
-          <p:cNvPr id="13" name="Text 11">
-            <a:extLst xmlns:a="http://schemas.openxmlformats.org/drawingml/2006/main">
-              <a:ext uri="{FF2B5EF4-FFF2-40B4-BE49-F238E27FC236}">
-                <a16:creationId xmlns:a16="http://schemas.microsoft.com/office/drawing/2014/main" id="{D23E153E-2C02-40B3-9A38-1B1EB3F2F263}"/>
-              </a:ext>
-            </a:extLst>
-          </p:cNvPr>
-          <p:cNvSpPr>
-            <a:spLocks xmlns:a="http://schemas.openxmlformats.org/drawingml/2006/main" noGrp="1"/>
-          </p:cNvSpPr>
-          <p:nvPr/>
-        </p:nvSpPr>
-        <p:spPr>
-          <a:xfrm xmlns:a="http://schemas.openxmlformats.org/drawingml/2006/main">
-            <a:off x="822960" y="3054096"/>
-            <a:ext cx="6960212" cy="713232"/>
-          </a:xfrm>
-          <a:prstGeom xmlns:a="http://schemas.openxmlformats.org/drawingml/2006/main" prst="rect">
-            <a:avLst/>
-          </a:prstGeom>
-          <a:noFill xmlns:a="http://schemas.openxmlformats.org/drawingml/2006/main"/>
-        </p:spPr>
-        <p:txBody>
-          <a:bodyPr xmlns:a="http://schemas.openxmlformats.org/drawingml/2006/main" wrap="square" lIns="0" tIns="0" rIns="0" bIns="0" anchor="ctr"/>
-          <a:lstStyle xmlns:a="http://schemas.openxmlformats.org/drawingml/2006/main"/>
-          <a:p xmlns:a="http://schemas.openxmlformats.org/drawingml/2006/main">
-            <a:pPr marL="0" indent="0">
-              <a:buNone/>
-            </a:pPr>
-            <a:r>
-              <a:rPr sz="2400">
-                <a:solidFill>
-                  <a:srgbClr val="1A1A1A"/>
-                </a:solidFill>
-                <a:latin typeface="Calibri"/>
-                <a:ea typeface="Calibri"/>
-                <a:cs typeface="Calibri"/>
-              </a:rPr>
-              <a:t>Productised across five firms</a:t>
-            </a:r>
-            <a:endParaRPr sz="2400"/>
-          </a:p>
-        </p:txBody>
-      </p:sp>
-      <p:sp>
-        <p:nvSpPr>
-          <p:cNvPr id="14" name="Text 12">
-            <a:extLst xmlns:a="http://schemas.openxmlformats.org/drawingml/2006/main">
-              <a:ext uri="{FF2B5EF4-FFF2-40B4-BE49-F238E27FC236}">
-                <a16:creationId xmlns:a16="http://schemas.microsoft.com/office/drawing/2014/main" id="{F2B7E80B-E4B9-49B6-9B8F-91FEA9C3CD95}"/>
-              </a:ext>
-            </a:extLst>
-          </p:cNvPr>
-          <p:cNvSpPr>
-            <a:spLocks xmlns:a="http://schemas.openxmlformats.org/drawingml/2006/main" noGrp="1"/>
-          </p:cNvSpPr>
-          <p:nvPr/>
-        </p:nvSpPr>
-        <p:spPr>
-          <a:xfrm xmlns:a="http://schemas.openxmlformats.org/drawingml/2006/main">
-            <a:off x="7783172" y="3054096"/>
-            <a:ext cx="3585564" cy="713232"/>
-          </a:xfrm>
-          <a:prstGeom xmlns:a="http://schemas.openxmlformats.org/drawingml/2006/main" prst="rect">
-            <a:avLst/>
-          </a:prstGeom>
-          <a:noFill xmlns:a="http://schemas.openxmlformats.org/drawingml/2006/main"/>
-        </p:spPr>
-        <p:txBody>
-          <a:bodyPr xmlns:a="http://schemas.openxmlformats.org/drawingml/2006/main" wrap="square" lIns="0" tIns="0" rIns="0" bIns="0" anchor="ctr"/>
-          <a:lstStyle xmlns:a="http://schemas.openxmlformats.org/drawingml/2006/main"/>
-          <a:p xmlns:a="http://schemas.openxmlformats.org/drawingml/2006/main">
-            <a:pPr marL="0" indent="0" algn="r">
-              <a:buNone/>
-            </a:pPr>
-            <a:r>
-              <a:rPr sz="2400" b="1">
-                <a:solidFill>
-                  <a:srgbClr val="1A1A1A"/>
-                </a:solidFill>
-                <a:latin typeface="Calibri"/>
-                <a:ea typeface="Calibri"/>
-                <a:cs typeface="Calibri"/>
-              </a:rPr>
-              <a:t>+16.9%</a:t>
-            </a:r>
-            <a:endParaRPr sz="2400"/>
-          </a:p>
-        </p:txBody>
-      </p:sp>
-      <p:sp>
-        <p:nvSpPr>
-          <p:cNvPr id="15" name="Shape 13">
-            <a:extLst xmlns:a="http://schemas.openxmlformats.org/drawingml/2006/main">
-              <a:ext uri="{FF2B5EF4-FFF2-40B4-BE49-F238E27FC236}">
-                <a16:creationId xmlns:a16="http://schemas.microsoft.com/office/drawing/2014/main" id="{53EB53A7-E320-435A-ADC2-FA9CB0283D3D}"/>
-              </a:ext>
-            </a:extLst>
-          </p:cNvPr>
-          <p:cNvSpPr>
-            <a:spLocks xmlns:a="http://schemas.openxmlformats.org/drawingml/2006/main" noGrp="1"/>
-          </p:cNvSpPr>
-          <p:nvPr/>
-        </p:nvSpPr>
-        <p:spPr>
-          <a:xfrm xmlns:a="http://schemas.openxmlformats.org/drawingml/2006/main">
-            <a:off x="822960" y="3767328"/>
-            <a:ext cx="10545775" cy="0"/>
-          </a:xfrm>
-          <a:prstGeom xmlns:a="http://schemas.openxmlformats.org/drawingml/2006/main" prst="line">
-            <a:avLst/>
-          </a:prstGeom>
-          <a:noFill xmlns:a="http://schemas.openxmlformats.org/drawingml/2006/main"/>
-          <a:ln xmlns:a="http://schemas.openxmlformats.org/drawingml/2006/main" w="12700">
-            <a:solidFill>
-              <a:srgbClr val="E0E0E0"/>
-            </a:solidFill>
-            <a:prstDash val="solid"/>
-          </a:ln>
-        </p:spPr>
-      </p:sp>
-      <p:sp>
-        <p:nvSpPr>
-          <p:cNvPr id="16" name="Text 14">
-            <a:extLst xmlns:a="http://schemas.openxmlformats.org/drawingml/2006/main">
-              <a:ext uri="{FF2B5EF4-FFF2-40B4-BE49-F238E27FC236}">
-                <a16:creationId xmlns:a16="http://schemas.microsoft.com/office/drawing/2014/main" id="{68D789EC-727C-41DE-B802-79CF85117834}"/>
-              </a:ext>
-            </a:extLst>
-          </p:cNvPr>
-          <p:cNvSpPr>
-            <a:spLocks xmlns:a="http://schemas.openxmlformats.org/drawingml/2006/main" noGrp="1"/>
-          </p:cNvSpPr>
-          <p:nvPr/>
-        </p:nvSpPr>
-        <p:spPr>
-          <a:xfrm xmlns:a="http://schemas.openxmlformats.org/drawingml/2006/main">
-            <a:off x="822960" y="3767328"/>
-            <a:ext cx="6960212" cy="713232"/>
-          </a:xfrm>
-          <a:prstGeom xmlns:a="http://schemas.openxmlformats.org/drawingml/2006/main" prst="rect">
-            <a:avLst/>
-          </a:prstGeom>
-          <a:noFill xmlns:a="http://schemas.openxmlformats.org/drawingml/2006/main"/>
-        </p:spPr>
-        <p:txBody>
-          <a:bodyPr xmlns:a="http://schemas.openxmlformats.org/drawingml/2006/main" wrap="square" lIns="0" tIns="0" rIns="0" bIns="0" anchor="ctr"/>
-          <a:lstStyle xmlns:a="http://schemas.openxmlformats.org/drawingml/2006/main"/>
-          <a:p xmlns:a="http://schemas.openxmlformats.org/drawingml/2006/main">
-            <a:pPr marL="0" indent="0">
-              <a:buNone/>
-            </a:pPr>
-            <a:r>
-              <a:rPr sz="2400">
-                <a:solidFill>
-                  <a:srgbClr val="1A1A1A"/>
-                </a:solidFill>
-                <a:latin typeface="Calibri"/>
-                <a:ea typeface="Calibri"/>
-                <a:cs typeface="Calibri"/>
-              </a:rPr>
-              <a:t>Productised · oversight in-house</a:t>
-            </a:r>
-            <a:endParaRPr sz="2400"/>
-          </a:p>
-        </p:txBody>
-      </p:sp>
-      <p:sp>
-        <p:nvSpPr>
-          <p:cNvPr id="17" name="Text 15">
-            <a:extLst xmlns:a="http://schemas.openxmlformats.org/drawingml/2006/main">
-              <a:ext uri="{FF2B5EF4-FFF2-40B4-BE49-F238E27FC236}">
-                <a16:creationId xmlns:a16="http://schemas.microsoft.com/office/drawing/2014/main" id="{54E3E406-7F37-4FD0-8525-409866F41113}"/>
-              </a:ext>
-            </a:extLst>
-          </p:cNvPr>
-          <p:cNvSpPr>
-            <a:spLocks xmlns:a="http://schemas.openxmlformats.org/drawingml/2006/main" noGrp="1"/>
-          </p:cNvSpPr>
-          <p:nvPr/>
-        </p:nvSpPr>
-        <p:spPr>
-          <a:xfrm xmlns:a="http://schemas.openxmlformats.org/drawingml/2006/main">
-            <a:off x="7783172" y="3767328"/>
-            <a:ext cx="3585564" cy="713232"/>
-          </a:xfrm>
-          <a:prstGeom xmlns:a="http://schemas.openxmlformats.org/drawingml/2006/main" prst="rect">
-            <a:avLst/>
-          </a:prstGeom>
-          <a:noFill xmlns:a="http://schemas.openxmlformats.org/drawingml/2006/main"/>
-        </p:spPr>
-        <p:txBody>
-          <a:bodyPr xmlns:a="http://schemas.openxmlformats.org/drawingml/2006/main" wrap="square" lIns="0" tIns="0" rIns="0" bIns="0" anchor="ctr"/>
-          <a:lstStyle xmlns:a="http://schemas.openxmlformats.org/drawingml/2006/main"/>
-          <a:p xmlns:a="http://schemas.openxmlformats.org/drawingml/2006/main">
-            <a:pPr marL="0" indent="0" algn="r">
-              <a:buNone/>
-            </a:pPr>
-            <a:r>
-              <a:rPr sz="2400" b="1">
-                <a:solidFill>
-                  <a:srgbClr val="1A1A1A"/>
-                </a:solidFill>
-                <a:latin typeface="Calibri"/>
-                <a:ea typeface="Calibri"/>
-                <a:cs typeface="Calibri"/>
-              </a:rPr>
-              <a:t>+96.6%</a:t>
-            </a:r>
-            <a:endParaRPr sz="2400"/>
-          </a:p>
-        </p:txBody>
-      </p:sp>
-      <p:sp>
-        <p:nvSpPr>
-          <p:cNvPr id="18" name="Text 16">
-            <a:extLst xmlns:a="http://schemas.openxmlformats.org/drawingml/2006/main">
-              <a:ext uri="{FF2B5EF4-FFF2-40B4-BE49-F238E27FC236}">
-                <a16:creationId xmlns:a16="http://schemas.microsoft.com/office/drawing/2014/main" id="{ED24CD4C-9A82-4463-9BCD-BB4D966F4283}"/>
-              </a:ext>
-            </a:extLst>
-          </p:cNvPr>
-          <p:cNvSpPr>
-            <a:spLocks xmlns:a="http://schemas.openxmlformats.org/drawingml/2006/main" noGrp="1"/>
-          </p:cNvSpPr>
-          <p:nvPr/>
-        </p:nvSpPr>
-        <p:spPr>
-          <a:xfrm xmlns:a="http://schemas.openxmlformats.org/drawingml/2006/main">
-            <a:off x="822960" y="4864608"/>
-            <a:ext cx="10545775" cy="475488"/>
-          </a:xfrm>
-          <a:prstGeom xmlns:a="http://schemas.openxmlformats.org/drawingml/2006/main" prst="rect">
-            <a:avLst/>
-          </a:prstGeom>
-          <a:noFill xmlns:a="http://schemas.openxmlformats.org/drawingml/2006/main"/>
-        </p:spPr>
-        <p:txBody>
-          <a:bodyPr xmlns:a="http://schemas.openxmlformats.org/drawingml/2006/main" wrap="square" lIns="0" tIns="0" rIns="0" bIns="0" anchor="t"/>
-          <a:lstStyle xmlns:a="http://schemas.openxmlformats.org/drawingml/2006/main"/>
-          <a:p xmlns:a="http://schemas.openxmlformats.org/drawingml/2006/main">
-            <a:pPr marL="0" indent="0">
-              <a:buNone/>
-            </a:pPr>
-            <a:r>
-              <a:rPr sz="2600">
-                <a:solidFill>
-                  <a:srgbClr val="1A1A1A"/>
-                </a:solidFill>
-                <a:latin typeface="Calibri"/>
-                <a:ea typeface="Calibri"/>
-                <a:cs typeface="Calibri"/>
-              </a:rPr>
-              <a:t>At 2,426 complaints a year, bespoke deployment breaks even in month 69. Approximately 3,800 are needed.</a:t>
+              <a:t>Does not prove: client performance or value.</a:t>
             </a:r>
             <a:endParaRPr sz="2600"/>
           </a:p>
         </p:txBody>
       </p:sp>
-      <p:sp>
-        <p:nvSpPr>
-          <p:cNvPr id="19" name="Text 17">
-            <a:extLst xmlns:a="http://schemas.openxmlformats.org/drawingml/2006/main">
-              <a:ext uri="{FF2B5EF4-FFF2-40B4-BE49-F238E27FC236}">
-                <a16:creationId xmlns:a16="http://schemas.microsoft.com/office/drawing/2014/main" id="{ED24CD4C-9A82-4463-9BCD-BB4D966F4284}"/>
-              </a:ext>
-            </a:extLst>
-          </p:cNvPr>
-          <p:cNvSpPr>
-            <a:spLocks xmlns:a="http://schemas.openxmlformats.org/drawingml/2006/main" noGrp="1"/>
-          </p:cNvSpPr>
-          <p:nvPr/>
-        </p:nvSpPr>
-        <p:spPr>
-          <a:xfrm xmlns:a="http://schemas.openxmlformats.org/drawingml/2006/main">
-            <a:off x="822960" y="5806440"/>
-            <a:ext cx="10545775" cy="475488"/>
-          </a:xfrm>
-          <a:prstGeom xmlns:a="http://schemas.openxmlformats.org/drawingml/2006/main" prst="rect">
-            <a:avLst/>
-          </a:prstGeom>
-          <a:noFill xmlns:a="http://schemas.openxmlformats.org/drawingml/2006/main"/>
-        </p:spPr>
-        <p:txBody>
-          <a:bodyPr xmlns:a="http://schemas.openxmlformats.org/drawingml/2006/main" wrap="square" lIns="0" tIns="0" rIns="0" bIns="0" anchor="t"/>
-          <a:lstStyle xmlns:a="http://schemas.openxmlformats.org/drawingml/2006/main"/>
-          <a:p xmlns:a="http://schemas.openxmlformats.org/drawingml/2006/main">
-            <a:pPr marL="0" indent="0">
-              <a:buNone/>
-            </a:pPr>
-            <a:r>
-              <a:rPr sz="2400">
-                <a:solidFill>
-                  <a:srgbClr val="1A1A1A"/>
-                </a:solidFill>
-                <a:latin typeface="Calibri"/>
-                <a:ea typeface="Calibri"/>
-                <a:cs typeface="Calibri"/>
-              </a:rPr>
-              <a:t>€9,918 of €17,326 is cash — ombudsman fees and fraud losses, not saved time.</a:t>
-            </a:r>
-            <a:endParaRPr sz="2400"/>
-          </a:p>
-        </p:txBody>
-      </p:sp>
+      <p:pic>
+        <p:nvPicPr>
+          <p:cNvPr id="15" name="Image 0"/>
+          <p:cNvPicPr>
+            <a:picLocks xmlns:a="http://schemas.openxmlformats.org/drawingml/2006/main" noChangeAspect="1"/>
+          </p:cNvPicPr>
+          <p:nvPr/>
+        </p:nvPicPr>
+        <p:blipFill>
+          <a:blip xmlns:r="http://schemas.openxmlformats.org/officeDocument/2006/relationships" xmlns:a="http://schemas.openxmlformats.org/drawingml/2006/main" r:embed="R60ccecb54d0a4c09"/>
+          <a:stretch xmlns:a="http://schemas.openxmlformats.org/drawingml/2006/main">
+            <a:fillRect l="0" t="0" r="0" b="0"/>
+          </a:stretch>
+        </p:blipFill>
+        <p:spPr>
+          <a:xfrm xmlns:a="http://schemas.openxmlformats.org/drawingml/2006/main">
+            <a:off x="1750619" y="2523744"/>
+            <a:ext cx="8690458" cy="3621024"/>
+          </a:xfrm>
+          <a:prstGeom xmlns:a="http://schemas.openxmlformats.org/drawingml/2006/main" prst="rect">
+            <a:avLst/>
+          </a:prstGeom>
+        </p:spPr>
+      </p:pic>
     </p:spTree>
     <p:extLst>
       <p:ext uri="{BB962C8B-B14F-4D97-AF65-F5344CB8AC3E}">
-        <p14:creationId xmlns:p14="http://schemas.microsoft.com/office/powerpoint/2010/main" val="296018473"/>
+        <p14:creationId xmlns:p14="http://schemas.microsoft.com/office/powerpoint/2010/main" val="1271321080"/>
       </p:ext>
     </p:extLst>
   </p:cSld>
@@ -9621,7 +9907,7 @@
           <p:cNvPr id="2" name="Text 0">
             <a:extLst xmlns:a="http://schemas.openxmlformats.org/drawingml/2006/main">
               <a:ext uri="{FF2B5EF4-FFF2-40B4-BE49-F238E27FC236}">
-                <a16:creationId xmlns:a16="http://schemas.microsoft.com/office/drawing/2014/main" id="{7AA92469-DF26-465E-AFC2-660C24768F2E}"/>
+                <a16:creationId xmlns:a16="http://schemas.microsoft.com/office/drawing/2014/main" id="{A7A448E3-6A25-437D-A56B-7B353879B3D0}"/>
               </a:ext>
             </a:extLst>
           </p:cNvPr>
@@ -9656,7 +9942,7 @@
                 <a:ea typeface="Trebuchet MS"/>
                 <a:cs typeface="Trebuchet MS"/>
               </a:rPr>
-              <a:t>Three risks decide whether a pilot is defensible</a:t>
+              <a:t>The system works; the bespoke economics do not</a:t>
             </a:r>
             <a:endParaRPr sz="3200"/>
           </a:p>
@@ -9667,7 +9953,7 @@
           <p:cNvPr id="3" name="Shape 1">
             <a:extLst xmlns:a="http://schemas.openxmlformats.org/drawingml/2006/main">
               <a:ext uri="{FF2B5EF4-FFF2-40B4-BE49-F238E27FC236}">
-                <a16:creationId xmlns:a16="http://schemas.microsoft.com/office/drawing/2014/main" id="{5EB15278-A8A7-4A83-8739-79F3608EBE0A}"/>
+                <a16:creationId xmlns:a16="http://schemas.microsoft.com/office/drawing/2014/main" id="{EE382AC9-C458-4448-A028-F7B0B6B2FAC7}"/>
               </a:ext>
             </a:extLst>
           </p:cNvPr>
@@ -9698,7 +9984,7 @@
           <p:cNvPr id="4" name="Shape 2">
             <a:extLst xmlns:a="http://schemas.openxmlformats.org/drawingml/2006/main">
               <a:ext uri="{FF2B5EF4-FFF2-40B4-BE49-F238E27FC236}">
-                <a16:creationId xmlns:a16="http://schemas.microsoft.com/office/drawing/2014/main" id="{1DC6D1FB-83CB-4EB1-B1E8-91F5BD6AF115}"/>
+                <a16:creationId xmlns:a16="http://schemas.microsoft.com/office/drawing/2014/main" id="{501AF663-098B-4908-968B-95F5B4657296}"/>
               </a:ext>
             </a:extLst>
           </p:cNvPr>
@@ -9729,7 +10015,7 @@
           <p:cNvPr id="5" name="Text 3">
             <a:extLst xmlns:a="http://schemas.openxmlformats.org/drawingml/2006/main">
               <a:ext uri="{FF2B5EF4-FFF2-40B4-BE49-F238E27FC236}">
-                <a16:creationId xmlns:a16="http://schemas.microsoft.com/office/drawing/2014/main" id="{C1C7628B-63B9-4871-AFC6-FBC6F1031E8C}"/>
+                <a16:creationId xmlns:a16="http://schemas.microsoft.com/office/drawing/2014/main" id="{18F2D69B-0177-45A2-8C12-991E90DE47D1}"/>
               </a:ext>
             </a:extLst>
           </p:cNvPr>
@@ -9775,7 +10061,7 @@
           <p:cNvPr id="6" name="Text 4">
             <a:extLst xmlns:a="http://schemas.openxmlformats.org/drawingml/2006/main">
               <a:ext uri="{FF2B5EF4-FFF2-40B4-BE49-F238E27FC236}">
-                <a16:creationId xmlns:a16="http://schemas.microsoft.com/office/drawing/2014/main" id="{0E31CB3C-6E5D-46A0-903A-FE524E9E44D0}"/>
+                <a16:creationId xmlns:a16="http://schemas.microsoft.com/office/drawing/2014/main" id="{64B11649-53EB-4BEC-85F8-E6C2A082E2E9}"/>
               </a:ext>
             </a:extLst>
           </p:cNvPr>
@@ -9821,7 +10107,7 @@
           <p:cNvPr id="7" name="Text 5">
             <a:extLst xmlns:a="http://schemas.openxmlformats.org/drawingml/2006/main">
               <a:ext uri="{FF2B5EF4-FFF2-40B4-BE49-F238E27FC236}">
-                <a16:creationId xmlns:a16="http://schemas.microsoft.com/office/drawing/2014/main" id="{AC773AE0-99DC-4CCC-949D-EB1D44646FF5}"/>
+                <a16:creationId xmlns:a16="http://schemas.microsoft.com/office/drawing/2014/main" id="{D2A18EE2-A32A-450F-B7C4-43229A318274}"/>
               </a:ext>
             </a:extLst>
           </p:cNvPr>
@@ -9833,6 +10119,456 @@
         <p:spPr>
           <a:xfrm xmlns:a="http://schemas.openxmlformats.org/drawingml/2006/main">
             <a:off x="822960" y="1773936"/>
+            <a:ext cx="6960212" cy="402336"/>
+          </a:xfrm>
+          <a:prstGeom xmlns:a="http://schemas.openxmlformats.org/drawingml/2006/main" prst="rect">
+            <a:avLst/>
+          </a:prstGeom>
+          <a:noFill xmlns:a="http://schemas.openxmlformats.org/drawingml/2006/main"/>
+        </p:spPr>
+        <p:txBody>
+          <a:bodyPr xmlns:a="http://schemas.openxmlformats.org/drawingml/2006/main" wrap="square" lIns="0" tIns="0" rIns="0" bIns="0" anchor="ctr"/>
+          <a:lstStyle xmlns:a="http://schemas.openxmlformats.org/drawingml/2006/main"/>
+          <a:p xmlns:a="http://schemas.openxmlformats.org/drawingml/2006/main">
+            <a:pPr marL="0" indent="0">
+              <a:buNone/>
+            </a:pPr>
+            <a:endParaRPr sz="2400"/>
+          </a:p>
+        </p:txBody>
+      </p:sp>
+      <p:sp>
+        <p:nvSpPr>
+          <p:cNvPr id="8" name="Text 6">
+            <a:extLst xmlns:a="http://schemas.openxmlformats.org/drawingml/2006/main">
+              <a:ext uri="{FF2B5EF4-FFF2-40B4-BE49-F238E27FC236}">
+                <a16:creationId xmlns:a16="http://schemas.microsoft.com/office/drawing/2014/main" id="{A8FD200E-F12A-46BE-93F4-CE4AA98F851F}"/>
+              </a:ext>
+            </a:extLst>
+          </p:cNvPr>
+          <p:cNvSpPr>
+            <a:spLocks xmlns:a="http://schemas.openxmlformats.org/drawingml/2006/main" noGrp="1"/>
+          </p:cNvSpPr>
+          <p:nvPr/>
+        </p:nvSpPr>
+        <p:spPr>
+          <a:xfrm xmlns:a="http://schemas.openxmlformats.org/drawingml/2006/main">
+            <a:off x="7783172" y="1773936"/>
+            <a:ext cx="3585564" cy="402336"/>
+          </a:xfrm>
+          <a:prstGeom xmlns:a="http://schemas.openxmlformats.org/drawingml/2006/main" prst="rect">
+            <a:avLst/>
+          </a:prstGeom>
+          <a:noFill xmlns:a="http://schemas.openxmlformats.org/drawingml/2006/main"/>
+        </p:spPr>
+        <p:txBody>
+          <a:bodyPr xmlns:a="http://schemas.openxmlformats.org/drawingml/2006/main" wrap="square" lIns="0" tIns="0" rIns="0" bIns="0" anchor="ctr"/>
+          <a:lstStyle xmlns:a="http://schemas.openxmlformats.org/drawingml/2006/main"/>
+          <a:p xmlns:a="http://schemas.openxmlformats.org/drawingml/2006/main">
+            <a:pPr marL="0" indent="0" algn="r">
+              <a:buNone/>
+            </a:pPr>
+            <a:r>
+              <a:rPr sz="2400" b="1" spc="100">
+                <a:solidFill>
+                  <a:srgbClr val="B0341F"/>
+                </a:solidFill>
+                <a:latin typeface="Calibri"/>
+                <a:ea typeface="Calibri"/>
+                <a:cs typeface="Calibri"/>
+              </a:rPr>
+              <a:t>36-MONTH ROI</a:t>
+            </a:r>
+            <a:endParaRPr sz="2400"/>
+          </a:p>
+        </p:txBody>
+      </p:sp>
+      <p:sp>
+        <p:nvSpPr>
+          <p:cNvPr id="9" name="Shape 7">
+            <a:extLst xmlns:a="http://schemas.openxmlformats.org/drawingml/2006/main">
+              <a:ext uri="{FF2B5EF4-FFF2-40B4-BE49-F238E27FC236}">
+                <a16:creationId xmlns:a16="http://schemas.microsoft.com/office/drawing/2014/main" id="{FD68561A-C904-488E-8E56-97E3E3242655}"/>
+              </a:ext>
+            </a:extLst>
+          </p:cNvPr>
+          <p:cNvSpPr>
+            <a:spLocks xmlns:a="http://schemas.openxmlformats.org/drawingml/2006/main" noGrp="1"/>
+          </p:cNvSpPr>
+          <p:nvPr/>
+        </p:nvSpPr>
+        <p:spPr>
+          <a:xfrm xmlns:a="http://schemas.openxmlformats.org/drawingml/2006/main">
+            <a:off x="822960" y="2212848"/>
+            <a:ext cx="10545775" cy="0"/>
+          </a:xfrm>
+          <a:prstGeom xmlns:a="http://schemas.openxmlformats.org/drawingml/2006/main" prst="line">
+            <a:avLst/>
+          </a:prstGeom>
+          <a:noFill xmlns:a="http://schemas.openxmlformats.org/drawingml/2006/main"/>
+          <a:ln xmlns:a="http://schemas.openxmlformats.org/drawingml/2006/main" w="12700">
+            <a:solidFill>
+              <a:srgbClr val="1A1A1A"/>
+            </a:solidFill>
+            <a:prstDash val="solid"/>
+          </a:ln>
+        </p:spPr>
+      </p:sp>
+      <p:sp>
+        <p:nvSpPr>
+          <p:cNvPr id="10" name="Text 8">
+            <a:extLst xmlns:a="http://schemas.openxmlformats.org/drawingml/2006/main">
+              <a:ext uri="{FF2B5EF4-FFF2-40B4-BE49-F238E27FC236}">
+                <a16:creationId xmlns:a16="http://schemas.microsoft.com/office/drawing/2014/main" id="{B90C5254-85DB-4E27-AB9B-23BC2C6694DD}"/>
+              </a:ext>
+            </a:extLst>
+          </p:cNvPr>
+          <p:cNvSpPr>
+            <a:spLocks xmlns:a="http://schemas.openxmlformats.org/drawingml/2006/main" noGrp="1"/>
+          </p:cNvSpPr>
+          <p:nvPr/>
+        </p:nvSpPr>
+        <p:spPr>
+          <a:xfrm xmlns:a="http://schemas.openxmlformats.org/drawingml/2006/main">
+            <a:off x="822960" y="2340864"/>
+            <a:ext cx="6960212" cy="713232"/>
+          </a:xfrm>
+          <a:prstGeom xmlns:a="http://schemas.openxmlformats.org/drawingml/2006/main" prst="rect">
+            <a:avLst/>
+          </a:prstGeom>
+          <a:noFill xmlns:a="http://schemas.openxmlformats.org/drawingml/2006/main"/>
+        </p:spPr>
+        <p:txBody>
+          <a:bodyPr xmlns:a="http://schemas.openxmlformats.org/drawingml/2006/main" wrap="square" lIns="0" tIns="0" rIns="0" bIns="0" anchor="ctr"/>
+          <a:lstStyle xmlns:a="http://schemas.openxmlformats.org/drawingml/2006/main"/>
+          <a:p xmlns:a="http://schemas.openxmlformats.org/drawingml/2006/main">
+            <a:pPr marL="0" indent="0">
+              <a:buNone/>
+            </a:pPr>
+            <a:r>
+              <a:rPr sz="2400">
+                <a:solidFill>
+                  <a:srgbClr val="1A1A1A"/>
+                </a:solidFill>
+                <a:latin typeface="Calibri"/>
+                <a:ea typeface="Calibri"/>
+                <a:cs typeface="Calibri"/>
+              </a:rPr>
+              <a:t>Bespoke build · consultant oversight</a:t>
+            </a:r>
+            <a:endParaRPr sz="2400"/>
+          </a:p>
+        </p:txBody>
+      </p:sp>
+      <p:sp>
+        <p:nvSpPr>
+          <p:cNvPr id="11" name="Text 9">
+            <a:extLst xmlns:a="http://schemas.openxmlformats.org/drawingml/2006/main">
+              <a:ext uri="{FF2B5EF4-FFF2-40B4-BE49-F238E27FC236}">
+                <a16:creationId xmlns:a16="http://schemas.microsoft.com/office/drawing/2014/main" id="{6B90C47C-24F6-4C4B-BC7D-5C561395C68E}"/>
+              </a:ext>
+            </a:extLst>
+          </p:cNvPr>
+          <p:cNvSpPr>
+            <a:spLocks xmlns:a="http://schemas.openxmlformats.org/drawingml/2006/main" noGrp="1"/>
+          </p:cNvSpPr>
+          <p:nvPr/>
+        </p:nvSpPr>
+        <p:spPr>
+          <a:xfrm xmlns:a="http://schemas.openxmlformats.org/drawingml/2006/main">
+            <a:off x="7783172" y="2340864"/>
+            <a:ext cx="3585564" cy="713232"/>
+          </a:xfrm>
+          <a:prstGeom xmlns:a="http://schemas.openxmlformats.org/drawingml/2006/main" prst="rect">
+            <a:avLst/>
+          </a:prstGeom>
+          <a:noFill xmlns:a="http://schemas.openxmlformats.org/drawingml/2006/main"/>
+        </p:spPr>
+        <p:txBody>
+          <a:bodyPr xmlns:a="http://schemas.openxmlformats.org/drawingml/2006/main" wrap="square" lIns="0" tIns="0" rIns="0" bIns="0" anchor="ctr"/>
+          <a:lstStyle xmlns:a="http://schemas.openxmlformats.org/drawingml/2006/main"/>
+          <a:p xmlns:a="http://schemas.openxmlformats.org/drawingml/2006/main">
+            <a:pPr marL="0" indent="0" algn="r">
+              <a:buNone/>
+            </a:pPr>
+            <a:r>
+              <a:rPr sz="2400" b="1">
+                <a:solidFill>
+                  <a:srgbClr val="1A1A1A"/>
+                </a:solidFill>
+                <a:latin typeface="Calibri"/>
+                <a:ea typeface="Calibri"/>
+                <a:cs typeface="Calibri"/>
+              </a:rPr>
+              <a:t>−31.0%</a:t>
+            </a:r>
+            <a:endParaRPr sz="2400"/>
+          </a:p>
+        </p:txBody>
+      </p:sp>
+      <p:sp>
+        <p:nvSpPr>
+          <p:cNvPr id="12" name="Shape 10">
+            <a:extLst xmlns:a="http://schemas.openxmlformats.org/drawingml/2006/main">
+              <a:ext uri="{FF2B5EF4-FFF2-40B4-BE49-F238E27FC236}">
+                <a16:creationId xmlns:a16="http://schemas.microsoft.com/office/drawing/2014/main" id="{A6D95D2A-7880-4259-927B-FBAE6B103E0F}"/>
+              </a:ext>
+            </a:extLst>
+          </p:cNvPr>
+          <p:cNvSpPr>
+            <a:spLocks xmlns:a="http://schemas.openxmlformats.org/drawingml/2006/main" noGrp="1"/>
+          </p:cNvSpPr>
+          <p:nvPr/>
+        </p:nvSpPr>
+        <p:spPr>
+          <a:xfrm xmlns:a="http://schemas.openxmlformats.org/drawingml/2006/main">
+            <a:off x="822960" y="3054096"/>
+            <a:ext cx="10545775" cy="0"/>
+          </a:xfrm>
+          <a:prstGeom xmlns:a="http://schemas.openxmlformats.org/drawingml/2006/main" prst="line">
+            <a:avLst/>
+          </a:prstGeom>
+          <a:noFill xmlns:a="http://schemas.openxmlformats.org/drawingml/2006/main"/>
+          <a:ln xmlns:a="http://schemas.openxmlformats.org/drawingml/2006/main" w="12700">
+            <a:solidFill>
+              <a:srgbClr val="E0E0E0"/>
+            </a:solidFill>
+            <a:prstDash val="solid"/>
+          </a:ln>
+        </p:spPr>
+      </p:sp>
+      <p:sp>
+        <p:nvSpPr>
+          <p:cNvPr id="13" name="Text 11">
+            <a:extLst xmlns:a="http://schemas.openxmlformats.org/drawingml/2006/main">
+              <a:ext uri="{FF2B5EF4-FFF2-40B4-BE49-F238E27FC236}">
+                <a16:creationId xmlns:a16="http://schemas.microsoft.com/office/drawing/2014/main" id="{D23E153E-2C02-40B3-9A38-1B1EB3F2F263}"/>
+              </a:ext>
+            </a:extLst>
+          </p:cNvPr>
+          <p:cNvSpPr>
+            <a:spLocks xmlns:a="http://schemas.openxmlformats.org/drawingml/2006/main" noGrp="1"/>
+          </p:cNvSpPr>
+          <p:nvPr/>
+        </p:nvSpPr>
+        <p:spPr>
+          <a:xfrm xmlns:a="http://schemas.openxmlformats.org/drawingml/2006/main">
+            <a:off x="822960" y="3054096"/>
+            <a:ext cx="6960212" cy="713232"/>
+          </a:xfrm>
+          <a:prstGeom xmlns:a="http://schemas.openxmlformats.org/drawingml/2006/main" prst="rect">
+            <a:avLst/>
+          </a:prstGeom>
+          <a:noFill xmlns:a="http://schemas.openxmlformats.org/drawingml/2006/main"/>
+        </p:spPr>
+        <p:txBody>
+          <a:bodyPr xmlns:a="http://schemas.openxmlformats.org/drawingml/2006/main" wrap="square" lIns="0" tIns="0" rIns="0" bIns="0" anchor="ctr"/>
+          <a:lstStyle xmlns:a="http://schemas.openxmlformats.org/drawingml/2006/main"/>
+          <a:p xmlns:a="http://schemas.openxmlformats.org/drawingml/2006/main">
+            <a:pPr marL="0" indent="0">
+              <a:buNone/>
+            </a:pPr>
+            <a:r>
+              <a:rPr sz="2400">
+                <a:solidFill>
+                  <a:srgbClr val="1A1A1A"/>
+                </a:solidFill>
+                <a:latin typeface="Calibri"/>
+                <a:ea typeface="Calibri"/>
+                <a:cs typeface="Calibri"/>
+              </a:rPr>
+              <a:t>Productised across five firms</a:t>
+            </a:r>
+            <a:endParaRPr sz="2400"/>
+          </a:p>
+        </p:txBody>
+      </p:sp>
+      <p:sp>
+        <p:nvSpPr>
+          <p:cNvPr id="14" name="Text 12">
+            <a:extLst xmlns:a="http://schemas.openxmlformats.org/drawingml/2006/main">
+              <a:ext uri="{FF2B5EF4-FFF2-40B4-BE49-F238E27FC236}">
+                <a16:creationId xmlns:a16="http://schemas.microsoft.com/office/drawing/2014/main" id="{F2B7E80B-E4B9-49B6-9B8F-91FEA9C3CD95}"/>
+              </a:ext>
+            </a:extLst>
+          </p:cNvPr>
+          <p:cNvSpPr>
+            <a:spLocks xmlns:a="http://schemas.openxmlformats.org/drawingml/2006/main" noGrp="1"/>
+          </p:cNvSpPr>
+          <p:nvPr/>
+        </p:nvSpPr>
+        <p:spPr>
+          <a:xfrm xmlns:a="http://schemas.openxmlformats.org/drawingml/2006/main">
+            <a:off x="7783172" y="3054096"/>
+            <a:ext cx="3585564" cy="713232"/>
+          </a:xfrm>
+          <a:prstGeom xmlns:a="http://schemas.openxmlformats.org/drawingml/2006/main" prst="rect">
+            <a:avLst/>
+          </a:prstGeom>
+          <a:noFill xmlns:a="http://schemas.openxmlformats.org/drawingml/2006/main"/>
+        </p:spPr>
+        <p:txBody>
+          <a:bodyPr xmlns:a="http://schemas.openxmlformats.org/drawingml/2006/main" wrap="square" lIns="0" tIns="0" rIns="0" bIns="0" anchor="ctr"/>
+          <a:lstStyle xmlns:a="http://schemas.openxmlformats.org/drawingml/2006/main"/>
+          <a:p xmlns:a="http://schemas.openxmlformats.org/drawingml/2006/main">
+            <a:pPr marL="0" indent="0" algn="r">
+              <a:buNone/>
+            </a:pPr>
+            <a:r>
+              <a:rPr sz="2400" b="1">
+                <a:solidFill>
+                  <a:srgbClr val="1A1A1A"/>
+                </a:solidFill>
+                <a:latin typeface="Calibri"/>
+                <a:ea typeface="Calibri"/>
+                <a:cs typeface="Calibri"/>
+              </a:rPr>
+              <a:t>+16.9%</a:t>
+            </a:r>
+            <a:endParaRPr sz="2400"/>
+          </a:p>
+        </p:txBody>
+      </p:sp>
+      <p:sp>
+        <p:nvSpPr>
+          <p:cNvPr id="15" name="Shape 13">
+            <a:extLst xmlns:a="http://schemas.openxmlformats.org/drawingml/2006/main">
+              <a:ext uri="{FF2B5EF4-FFF2-40B4-BE49-F238E27FC236}">
+                <a16:creationId xmlns:a16="http://schemas.microsoft.com/office/drawing/2014/main" id="{53EB53A7-E320-435A-ADC2-FA9CB0283D3D}"/>
+              </a:ext>
+            </a:extLst>
+          </p:cNvPr>
+          <p:cNvSpPr>
+            <a:spLocks xmlns:a="http://schemas.openxmlformats.org/drawingml/2006/main" noGrp="1"/>
+          </p:cNvSpPr>
+          <p:nvPr/>
+        </p:nvSpPr>
+        <p:spPr>
+          <a:xfrm xmlns:a="http://schemas.openxmlformats.org/drawingml/2006/main">
+            <a:off x="822960" y="3767328"/>
+            <a:ext cx="10545775" cy="0"/>
+          </a:xfrm>
+          <a:prstGeom xmlns:a="http://schemas.openxmlformats.org/drawingml/2006/main" prst="line">
+            <a:avLst/>
+          </a:prstGeom>
+          <a:noFill xmlns:a="http://schemas.openxmlformats.org/drawingml/2006/main"/>
+          <a:ln xmlns:a="http://schemas.openxmlformats.org/drawingml/2006/main" w="12700">
+            <a:solidFill>
+              <a:srgbClr val="E0E0E0"/>
+            </a:solidFill>
+            <a:prstDash val="solid"/>
+          </a:ln>
+        </p:spPr>
+      </p:sp>
+      <p:sp>
+        <p:nvSpPr>
+          <p:cNvPr id="16" name="Text 14">
+            <a:extLst xmlns:a="http://schemas.openxmlformats.org/drawingml/2006/main">
+              <a:ext uri="{FF2B5EF4-FFF2-40B4-BE49-F238E27FC236}">
+                <a16:creationId xmlns:a16="http://schemas.microsoft.com/office/drawing/2014/main" id="{68D789EC-727C-41DE-B802-79CF85117834}"/>
+              </a:ext>
+            </a:extLst>
+          </p:cNvPr>
+          <p:cNvSpPr>
+            <a:spLocks xmlns:a="http://schemas.openxmlformats.org/drawingml/2006/main" noGrp="1"/>
+          </p:cNvSpPr>
+          <p:nvPr/>
+        </p:nvSpPr>
+        <p:spPr>
+          <a:xfrm xmlns:a="http://schemas.openxmlformats.org/drawingml/2006/main">
+            <a:off x="822960" y="3767328"/>
+            <a:ext cx="6960212" cy="713232"/>
+          </a:xfrm>
+          <a:prstGeom xmlns:a="http://schemas.openxmlformats.org/drawingml/2006/main" prst="rect">
+            <a:avLst/>
+          </a:prstGeom>
+          <a:noFill xmlns:a="http://schemas.openxmlformats.org/drawingml/2006/main"/>
+        </p:spPr>
+        <p:txBody>
+          <a:bodyPr xmlns:a="http://schemas.openxmlformats.org/drawingml/2006/main" wrap="square" lIns="0" tIns="0" rIns="0" bIns="0" anchor="ctr"/>
+          <a:lstStyle xmlns:a="http://schemas.openxmlformats.org/drawingml/2006/main"/>
+          <a:p xmlns:a="http://schemas.openxmlformats.org/drawingml/2006/main">
+            <a:pPr marL="0" indent="0">
+              <a:buNone/>
+            </a:pPr>
+            <a:r>
+              <a:rPr sz="2400">
+                <a:solidFill>
+                  <a:srgbClr val="1A1A1A"/>
+                </a:solidFill>
+                <a:latin typeface="Calibri"/>
+                <a:ea typeface="Calibri"/>
+                <a:cs typeface="Calibri"/>
+              </a:rPr>
+              <a:t>Productised · oversight in-house</a:t>
+            </a:r>
+            <a:endParaRPr sz="2400"/>
+          </a:p>
+        </p:txBody>
+      </p:sp>
+      <p:sp>
+        <p:nvSpPr>
+          <p:cNvPr id="17" name="Text 15">
+            <a:extLst xmlns:a="http://schemas.openxmlformats.org/drawingml/2006/main">
+              <a:ext uri="{FF2B5EF4-FFF2-40B4-BE49-F238E27FC236}">
+                <a16:creationId xmlns:a16="http://schemas.microsoft.com/office/drawing/2014/main" id="{54E3E406-7F37-4FD0-8525-409866F41113}"/>
+              </a:ext>
+            </a:extLst>
+          </p:cNvPr>
+          <p:cNvSpPr>
+            <a:spLocks xmlns:a="http://schemas.openxmlformats.org/drawingml/2006/main" noGrp="1"/>
+          </p:cNvSpPr>
+          <p:nvPr/>
+        </p:nvSpPr>
+        <p:spPr>
+          <a:xfrm xmlns:a="http://schemas.openxmlformats.org/drawingml/2006/main">
+            <a:off x="7783172" y="3767328"/>
+            <a:ext cx="3585564" cy="713232"/>
+          </a:xfrm>
+          <a:prstGeom xmlns:a="http://schemas.openxmlformats.org/drawingml/2006/main" prst="rect">
+            <a:avLst/>
+          </a:prstGeom>
+          <a:noFill xmlns:a="http://schemas.openxmlformats.org/drawingml/2006/main"/>
+        </p:spPr>
+        <p:txBody>
+          <a:bodyPr xmlns:a="http://schemas.openxmlformats.org/drawingml/2006/main" wrap="square" lIns="0" tIns="0" rIns="0" bIns="0" anchor="ctr"/>
+          <a:lstStyle xmlns:a="http://schemas.openxmlformats.org/drawingml/2006/main"/>
+          <a:p xmlns:a="http://schemas.openxmlformats.org/drawingml/2006/main">
+            <a:pPr marL="0" indent="0" algn="r">
+              <a:buNone/>
+            </a:pPr>
+            <a:r>
+              <a:rPr sz="2400" b="1">
+                <a:solidFill>
+                  <a:srgbClr val="1A1A1A"/>
+                </a:solidFill>
+                <a:latin typeface="Calibri"/>
+                <a:ea typeface="Calibri"/>
+                <a:cs typeface="Calibri"/>
+              </a:rPr>
+              <a:t>+96.6%</a:t>
+            </a:r>
+            <a:endParaRPr sz="2400"/>
+          </a:p>
+        </p:txBody>
+      </p:sp>
+      <p:sp>
+        <p:nvSpPr>
+          <p:cNvPr id="18" name="Text 16">
+            <a:extLst xmlns:a="http://schemas.openxmlformats.org/drawingml/2006/main">
+              <a:ext uri="{FF2B5EF4-FFF2-40B4-BE49-F238E27FC236}">
+                <a16:creationId xmlns:a16="http://schemas.microsoft.com/office/drawing/2014/main" id="{ED24CD4C-9A82-4463-9BCD-BB4D966F4283}"/>
+              </a:ext>
+            </a:extLst>
+          </p:cNvPr>
+          <p:cNvSpPr>
+            <a:spLocks xmlns:a="http://schemas.openxmlformats.org/drawingml/2006/main" noGrp="1"/>
+          </p:cNvSpPr>
+          <p:nvPr/>
+        </p:nvSpPr>
+        <p:spPr>
+          <a:xfrm xmlns:a="http://schemas.openxmlformats.org/drawingml/2006/main">
+            <a:off x="822960" y="4864608"/>
             <a:ext cx="10545775" cy="475488"/>
           </a:xfrm>
           <a:prstGeom xmlns:a="http://schemas.openxmlformats.org/drawingml/2006/main" prst="rect">
@@ -9848,7 +10584,7 @@
               <a:buNone/>
             </a:pPr>
             <a:r>
-              <a:rPr sz="2600" b="1">
+              <a:rPr sz="2600">
                 <a:solidFill>
                   <a:srgbClr val="1A1A1A"/>
                 </a:solidFill>
@@ -9856,7 +10592,7 @@
                 <a:ea typeface="Calibri"/>
                 <a:cs typeface="Calibri"/>
               </a:rPr>
-              <a:t>Value assumptions fail on real data   4×5</a:t>
+              <a:t>At 2,426 complaints a year, bespoke deployment breaks even in month 69. Approximately 3,800 are needed.</a:t>
             </a:r>
             <a:endParaRPr sz="2600"/>
           </a:p>
@@ -9864,22 +10600,22 @@
       </p:sp>
       <p:sp>
         <p:nvSpPr>
-          <p:cNvPr id="8" name="Text 6">
-            <a:extLst xmlns:a="http://schemas.openxmlformats.org/drawingml/2006/main">
-              <a:ext uri="{FF2B5EF4-FFF2-40B4-BE49-F238E27FC236}">
-                <a16:creationId xmlns:a16="http://schemas.microsoft.com/office/drawing/2014/main" id="{8268CC89-A0B9-47E9-8B0A-043DD32B9B68}"/>
-              </a:ext>
-            </a:extLst>
-          </p:cNvPr>
-          <p:cNvSpPr>
-            <a:spLocks xmlns:a="http://schemas.openxmlformats.org/drawingml/2006/main" noGrp="1"/>
-          </p:cNvSpPr>
-          <p:nvPr/>
-        </p:nvSpPr>
-        <p:spPr>
-          <a:xfrm xmlns:a="http://schemas.openxmlformats.org/drawingml/2006/main">
-            <a:off x="822960" y="2249424"/>
-            <a:ext cx="10545775" cy="438912"/>
+          <p:cNvPr id="19" name="Text 17">
+            <a:extLst xmlns:a="http://schemas.openxmlformats.org/drawingml/2006/main">
+              <a:ext uri="{FF2B5EF4-FFF2-40B4-BE49-F238E27FC236}">
+                <a16:creationId xmlns:a16="http://schemas.microsoft.com/office/drawing/2014/main" id="{ED24CD4C-9A82-4463-9BCD-BB4D966F4284}"/>
+              </a:ext>
+            </a:extLst>
+          </p:cNvPr>
+          <p:cNvSpPr>
+            <a:spLocks xmlns:a="http://schemas.openxmlformats.org/drawingml/2006/main" noGrp="1"/>
+          </p:cNvSpPr>
+          <p:nvPr/>
+        </p:nvSpPr>
+        <p:spPr>
+          <a:xfrm xmlns:a="http://schemas.openxmlformats.org/drawingml/2006/main">
+            <a:off x="822960" y="5806440"/>
+            <a:ext cx="10545775" cy="475488"/>
           </a:xfrm>
           <a:prstGeom xmlns:a="http://schemas.openxmlformats.org/drawingml/2006/main" prst="rect">
             <a:avLst/>
@@ -9896,197 +10632,13 @@
             <a:r>
               <a:rPr sz="2400">
                 <a:solidFill>
-                  <a:srgbClr val="6B6B6B"/>
-                </a:solidFill>
-                <a:latin typeface="Calibri"/>
-                <a:ea typeface="Calibri"/>
-                <a:cs typeface="Calibri"/>
-              </a:rPr>
-              <a:t>Measure before committing to deployment. Fixed phase exits preserve the right to stop.</a:t>
-            </a:r>
-            <a:endParaRPr sz="2400"/>
-          </a:p>
-        </p:txBody>
-      </p:sp>
-      <p:sp>
-        <p:nvSpPr>
-          <p:cNvPr id="9" name="Text 7">
-            <a:extLst xmlns:a="http://schemas.openxmlformats.org/drawingml/2006/main">
-              <a:ext uri="{FF2B5EF4-FFF2-40B4-BE49-F238E27FC236}">
-                <a16:creationId xmlns:a16="http://schemas.microsoft.com/office/drawing/2014/main" id="{D2FE464A-D188-470D-82FB-F9BE9CDE16C5}"/>
-              </a:ext>
-            </a:extLst>
-          </p:cNvPr>
-          <p:cNvSpPr>
-            <a:spLocks xmlns:a="http://schemas.openxmlformats.org/drawingml/2006/main" noGrp="1"/>
-          </p:cNvSpPr>
-          <p:nvPr/>
-        </p:nvSpPr>
-        <p:spPr>
-          <a:xfrm xmlns:a="http://schemas.openxmlformats.org/drawingml/2006/main">
-            <a:off x="822960" y="3035808"/>
-            <a:ext cx="10545775" cy="475488"/>
-          </a:xfrm>
-          <a:prstGeom xmlns:a="http://schemas.openxmlformats.org/drawingml/2006/main" prst="rect">
-            <a:avLst/>
-          </a:prstGeom>
-          <a:noFill xmlns:a="http://schemas.openxmlformats.org/drawingml/2006/main"/>
-        </p:spPr>
-        <p:txBody>
-          <a:bodyPr xmlns:a="http://schemas.openxmlformats.org/drawingml/2006/main" wrap="square" lIns="0" tIns="0" rIns="0" bIns="0" anchor="t"/>
-          <a:lstStyle xmlns:a="http://schemas.openxmlformats.org/drawingml/2006/main"/>
-          <a:p xmlns:a="http://schemas.openxmlformats.org/drawingml/2006/main">
-            <a:pPr marL="0" indent="0">
-              <a:buNone/>
-            </a:pPr>
-            <a:r>
-              <a:rPr sz="2600" b="1">
-                <a:solidFill>
                   <a:srgbClr val="1A1A1A"/>
                 </a:solidFill>
                 <a:latin typeface="Calibri"/>
                 <a:ea typeface="Calibri"/>
                 <a:cs typeface="Calibri"/>
               </a:rPr>
-              <a:t>Handlers rubber-stamp proposals   4×4</a:t>
-            </a:r>
-            <a:endParaRPr sz="2600"/>
-          </a:p>
-        </p:txBody>
-      </p:sp>
-      <p:sp>
-        <p:nvSpPr>
-          <p:cNvPr id="10" name="Text 8">
-            <a:extLst xmlns:a="http://schemas.openxmlformats.org/drawingml/2006/main">
-              <a:ext uri="{FF2B5EF4-FFF2-40B4-BE49-F238E27FC236}">
-                <a16:creationId xmlns:a16="http://schemas.microsoft.com/office/drawing/2014/main" id="{09CD94B9-D13A-49E3-B76A-A01A32956C38}"/>
-              </a:ext>
-            </a:extLst>
-          </p:cNvPr>
-          <p:cNvSpPr>
-            <a:spLocks xmlns:a="http://schemas.openxmlformats.org/drawingml/2006/main" noGrp="1"/>
-          </p:cNvSpPr>
-          <p:nvPr/>
-        </p:nvSpPr>
-        <p:spPr>
-          <a:xfrm xmlns:a="http://schemas.openxmlformats.org/drawingml/2006/main">
-            <a:off x="822960" y="3511296"/>
-            <a:ext cx="10545775" cy="438912"/>
-          </a:xfrm>
-          <a:prstGeom xmlns:a="http://schemas.openxmlformats.org/drawingml/2006/main" prst="rect">
-            <a:avLst/>
-          </a:prstGeom>
-          <a:noFill xmlns:a="http://schemas.openxmlformats.org/drawingml/2006/main"/>
-        </p:spPr>
-        <p:txBody>
-          <a:bodyPr xmlns:a="http://schemas.openxmlformats.org/drawingml/2006/main" wrap="square" lIns="0" tIns="0" rIns="0" bIns="0" anchor="t"/>
-          <a:lstStyle xmlns:a="http://schemas.openxmlformats.org/drawingml/2006/main"/>
-          <a:p xmlns:a="http://schemas.openxmlformats.org/drawingml/2006/main">
-            <a:pPr marL="0" indent="0">
-              <a:buNone/>
-            </a:pPr>
-            <a:r>
-              <a:rPr sz="2400">
-                <a:solidFill>
-                  <a:srgbClr val="6B6B6B"/>
-                </a:solidFill>
-                <a:latin typeface="Calibri"/>
-                <a:ea typeface="Calibri"/>
-                <a:cs typeface="Calibri"/>
-              </a:rPr>
-              <a:t>Acceptance above 97% is a failure signal, measured per handler.</a:t>
-            </a:r>
-            <a:endParaRPr sz="2400"/>
-          </a:p>
-        </p:txBody>
-      </p:sp>
-      <p:sp>
-        <p:nvSpPr>
-          <p:cNvPr id="11" name="Text 9">
-            <a:extLst xmlns:a="http://schemas.openxmlformats.org/drawingml/2006/main">
-              <a:ext uri="{FF2B5EF4-FFF2-40B4-BE49-F238E27FC236}">
-                <a16:creationId xmlns:a16="http://schemas.microsoft.com/office/drawing/2014/main" id="{6D9EA6E0-65D8-49FE-B5BE-E961C035737F}"/>
-              </a:ext>
-            </a:extLst>
-          </p:cNvPr>
-          <p:cNvSpPr>
-            <a:spLocks xmlns:a="http://schemas.openxmlformats.org/drawingml/2006/main" noGrp="1"/>
-          </p:cNvSpPr>
-          <p:nvPr/>
-        </p:nvSpPr>
-        <p:spPr>
-          <a:xfrm xmlns:a="http://schemas.openxmlformats.org/drawingml/2006/main">
-            <a:off x="822960" y="4297680"/>
-            <a:ext cx="10545775" cy="475488"/>
-          </a:xfrm>
-          <a:prstGeom xmlns:a="http://schemas.openxmlformats.org/drawingml/2006/main" prst="rect">
-            <a:avLst/>
-          </a:prstGeom>
-          <a:noFill xmlns:a="http://schemas.openxmlformats.org/drawingml/2006/main"/>
-        </p:spPr>
-        <p:txBody>
-          <a:bodyPr xmlns:a="http://schemas.openxmlformats.org/drawingml/2006/main" wrap="square" lIns="0" tIns="0" rIns="0" bIns="0" anchor="t"/>
-          <a:lstStyle xmlns:a="http://schemas.openxmlformats.org/drawingml/2006/main"/>
-          <a:p xmlns:a="http://schemas.openxmlformats.org/drawingml/2006/main">
-            <a:pPr marL="0" indent="0">
-              <a:buNone/>
-            </a:pPr>
-            <a:r>
-              <a:rPr sz="2600" b="1">
-                <a:solidFill>
-                  <a:srgbClr val="1A1A1A"/>
-                </a:solidFill>
-                <a:latin typeface="Calibri"/>
-                <a:ea typeface="Calibri"/>
-                <a:cs typeface="Calibri"/>
-              </a:rPr>
-              <a:t>Oversight costs more than it saves   3×4</a:t>
-            </a:r>
-            <a:endParaRPr sz="2600"/>
-          </a:p>
-        </p:txBody>
-      </p:sp>
-      <p:sp>
-        <p:nvSpPr>
-          <p:cNvPr id="12" name="Text 10">
-            <a:extLst xmlns:a="http://schemas.openxmlformats.org/drawingml/2006/main">
-              <a:ext uri="{FF2B5EF4-FFF2-40B4-BE49-F238E27FC236}">
-                <a16:creationId xmlns:a16="http://schemas.microsoft.com/office/drawing/2014/main" id="{E6129510-3755-46A4-9705-BB6EA9A086DD}"/>
-              </a:ext>
-            </a:extLst>
-          </p:cNvPr>
-          <p:cNvSpPr>
-            <a:spLocks xmlns:a="http://schemas.openxmlformats.org/drawingml/2006/main" noGrp="1"/>
-          </p:cNvSpPr>
-          <p:nvPr/>
-        </p:nvSpPr>
-        <p:spPr>
-          <a:xfrm xmlns:a="http://schemas.openxmlformats.org/drawingml/2006/main">
-            <a:off x="822960" y="4773168"/>
-            <a:ext cx="10545775" cy="438912"/>
-          </a:xfrm>
-          <a:prstGeom xmlns:a="http://schemas.openxmlformats.org/drawingml/2006/main" prst="rect">
-            <a:avLst/>
-          </a:prstGeom>
-          <a:noFill xmlns:a="http://schemas.openxmlformats.org/drawingml/2006/main"/>
-        </p:spPr>
-        <p:txBody>
-          <a:bodyPr xmlns:a="http://schemas.openxmlformats.org/drawingml/2006/main" wrap="square" lIns="0" tIns="0" rIns="0" bIns="0" anchor="t"/>
-          <a:lstStyle xmlns:a="http://schemas.openxmlformats.org/drawingml/2006/main"/>
-          <a:p xmlns:a="http://schemas.openxmlformats.org/drawingml/2006/main">
-            <a:pPr marL="0" indent="0">
-              <a:buNone/>
-            </a:pPr>
-            <a:r>
-              <a:rPr sz="2400">
-                <a:solidFill>
-                  <a:srgbClr val="6B6B6B"/>
-                </a:solidFill>
-                <a:latin typeface="Calibri"/>
-                <a:ea typeface="Calibri"/>
-                <a:cs typeface="Calibri"/>
-              </a:rPr>
-              <a:t>Measure effort during the shadow pilot from day one.</a:t>
+              <a:t>€9,918 of €17,326 is cash — ombudsman fees and fraud losses, not saved time.</a:t>
             </a:r>
             <a:endParaRPr sz="2400"/>
           </a:p>
@@ -10095,7 +10647,7 @@
     </p:spTree>
     <p:extLst>
       <p:ext uri="{BB962C8B-B14F-4D97-AF65-F5344CB8AC3E}">
-        <p14:creationId xmlns:p14="http://schemas.microsoft.com/office/powerpoint/2010/main" val="773037288"/>
+        <p14:creationId xmlns:p14="http://schemas.microsoft.com/office/powerpoint/2010/main" val="296018473"/>
       </p:ext>
     </p:extLst>
   </p:cSld>
@@ -10126,7 +10678,7 @@
           <p:cNvPr id="2" name="Text 0">
             <a:extLst xmlns:a="http://schemas.openxmlformats.org/drawingml/2006/main">
               <a:ext uri="{FF2B5EF4-FFF2-40B4-BE49-F238E27FC236}">
-                <a16:creationId xmlns:a16="http://schemas.microsoft.com/office/drawing/2014/main" id="{FE9A16E5-808D-4E13-B1CF-A404528F0FB3}"/>
+                <a16:creationId xmlns:a16="http://schemas.microsoft.com/office/drawing/2014/main" id="{7AA92469-DF26-465E-AFC2-660C24768F2E}"/>
               </a:ext>
             </a:extLst>
           </p:cNvPr>
@@ -10161,7 +10713,7 @@
                 <a:ea typeface="Trebuchet MS"/>
                 <a:cs typeface="Trebuchet MS"/>
               </a:rPr>
-              <a:t>Not high-risk. Real-data use still has gates</a:t>
+              <a:t>Three risks decide whether a pilot is defensible</a:t>
             </a:r>
             <a:endParaRPr sz="3200"/>
           </a:p>
@@ -10172,7 +10724,7 @@
           <p:cNvPr id="3" name="Shape 1">
             <a:extLst xmlns:a="http://schemas.openxmlformats.org/drawingml/2006/main">
               <a:ext uri="{FF2B5EF4-FFF2-40B4-BE49-F238E27FC236}">
-                <a16:creationId xmlns:a16="http://schemas.microsoft.com/office/drawing/2014/main" id="{D4AA5190-0081-45AF-A5A7-B8AA87E6FEF1}"/>
+                <a16:creationId xmlns:a16="http://schemas.microsoft.com/office/drawing/2014/main" id="{5EB15278-A8A7-4A83-8739-79F3608EBE0A}"/>
               </a:ext>
             </a:extLst>
           </p:cNvPr>
@@ -10203,7 +10755,7 @@
           <p:cNvPr id="4" name="Shape 2">
             <a:extLst xmlns:a="http://schemas.openxmlformats.org/drawingml/2006/main">
               <a:ext uri="{FF2B5EF4-FFF2-40B4-BE49-F238E27FC236}">
-                <a16:creationId xmlns:a16="http://schemas.microsoft.com/office/drawing/2014/main" id="{37C74313-CEAA-4828-848C-8D225AB2EF35}"/>
+                <a16:creationId xmlns:a16="http://schemas.microsoft.com/office/drawing/2014/main" id="{1DC6D1FB-83CB-4EB1-B1E8-91F5BD6AF115}"/>
               </a:ext>
             </a:extLst>
           </p:cNvPr>
@@ -10234,7 +10786,7 @@
           <p:cNvPr id="5" name="Text 3">
             <a:extLst xmlns:a="http://schemas.openxmlformats.org/drawingml/2006/main">
               <a:ext uri="{FF2B5EF4-FFF2-40B4-BE49-F238E27FC236}">
-                <a16:creationId xmlns:a16="http://schemas.microsoft.com/office/drawing/2014/main" id="{17D17FAC-FB51-4B2D-BAE5-D6A5826C96DD}"/>
+                <a16:creationId xmlns:a16="http://schemas.microsoft.com/office/drawing/2014/main" id="{C1C7628B-63B9-4871-AFC6-FBC6F1031E8C}"/>
               </a:ext>
             </a:extLst>
           </p:cNvPr>
@@ -10280,7 +10832,7 @@
           <p:cNvPr id="6" name="Text 4">
             <a:extLst xmlns:a="http://schemas.openxmlformats.org/drawingml/2006/main">
               <a:ext uri="{FF2B5EF4-FFF2-40B4-BE49-F238E27FC236}">
-                <a16:creationId xmlns:a16="http://schemas.microsoft.com/office/drawing/2014/main" id="{3662326A-B1E7-4B72-AB1F-C370F161523C}"/>
+                <a16:creationId xmlns:a16="http://schemas.microsoft.com/office/drawing/2014/main" id="{0E31CB3C-6E5D-46A0-903A-FE524E9E44D0}"/>
               </a:ext>
             </a:extLst>
           </p:cNvPr>
@@ -10326,7 +10878,7 @@
           <p:cNvPr id="7" name="Text 5">
             <a:extLst xmlns:a="http://schemas.openxmlformats.org/drawingml/2006/main">
               <a:ext uri="{FF2B5EF4-FFF2-40B4-BE49-F238E27FC236}">
-                <a16:creationId xmlns:a16="http://schemas.microsoft.com/office/drawing/2014/main" id="{4B353CFD-797F-4173-A01B-F42835B33D2B}"/>
+                <a16:creationId xmlns:a16="http://schemas.microsoft.com/office/drawing/2014/main" id="{AC773AE0-99DC-4CCC-949D-EB1D44646FF5}"/>
               </a:ext>
             </a:extLst>
           </p:cNvPr>
@@ -10353,15 +10905,153 @@
               <a:buNone/>
             </a:pPr>
             <a:r>
+              <a:rPr sz="2600" b="1">
+                <a:solidFill>
+                  <a:srgbClr val="1A1A1A"/>
+                </a:solidFill>
+                <a:latin typeface="Calibri"/>
+                <a:ea typeface="Calibri"/>
+                <a:cs typeface="Calibri"/>
+              </a:rPr>
+              <a:t>Value assumptions fail on real data   4×5</a:t>
+            </a:r>
+            <a:endParaRPr sz="2600"/>
+          </a:p>
+        </p:txBody>
+      </p:sp>
+      <p:sp>
+        <p:nvSpPr>
+          <p:cNvPr id="8" name="Text 6">
+            <a:extLst xmlns:a="http://schemas.openxmlformats.org/drawingml/2006/main">
+              <a:ext uri="{FF2B5EF4-FFF2-40B4-BE49-F238E27FC236}">
+                <a16:creationId xmlns:a16="http://schemas.microsoft.com/office/drawing/2014/main" id="{8268CC89-A0B9-47E9-8B0A-043DD32B9B68}"/>
+              </a:ext>
+            </a:extLst>
+          </p:cNvPr>
+          <p:cNvSpPr>
+            <a:spLocks xmlns:a="http://schemas.openxmlformats.org/drawingml/2006/main" noGrp="1"/>
+          </p:cNvSpPr>
+          <p:nvPr/>
+        </p:nvSpPr>
+        <p:spPr>
+          <a:xfrm xmlns:a="http://schemas.openxmlformats.org/drawingml/2006/main">
+            <a:off x="822960" y="2249424"/>
+            <a:ext cx="10545775" cy="438912"/>
+          </a:xfrm>
+          <a:prstGeom xmlns:a="http://schemas.openxmlformats.org/drawingml/2006/main" prst="rect">
+            <a:avLst/>
+          </a:prstGeom>
+          <a:noFill xmlns:a="http://schemas.openxmlformats.org/drawingml/2006/main"/>
+        </p:spPr>
+        <p:txBody>
+          <a:bodyPr xmlns:a="http://schemas.openxmlformats.org/drawingml/2006/main" wrap="square" lIns="0" tIns="0" rIns="0" bIns="0" anchor="t"/>
+          <a:lstStyle xmlns:a="http://schemas.openxmlformats.org/drawingml/2006/main"/>
+          <a:p xmlns:a="http://schemas.openxmlformats.org/drawingml/2006/main">
+            <a:pPr marL="0" indent="0">
+              <a:buNone/>
+            </a:pPr>
+            <a:r>
               <a:rPr sz="2400">
                 <a:solidFill>
+                  <a:srgbClr val="6B6B6B"/>
+                </a:solidFill>
+                <a:latin typeface="Calibri"/>
+                <a:ea typeface="Calibri"/>
+                <a:cs typeface="Calibri"/>
+              </a:rPr>
+              <a:t>Measure before committing to deployment. Fixed phase exits preserve the right to stop.</a:t>
+            </a:r>
+            <a:endParaRPr sz="2400"/>
+          </a:p>
+        </p:txBody>
+      </p:sp>
+      <p:sp>
+        <p:nvSpPr>
+          <p:cNvPr id="9" name="Text 7">
+            <a:extLst xmlns:a="http://schemas.openxmlformats.org/drawingml/2006/main">
+              <a:ext uri="{FF2B5EF4-FFF2-40B4-BE49-F238E27FC236}">
+                <a16:creationId xmlns:a16="http://schemas.microsoft.com/office/drawing/2014/main" id="{D2FE464A-D188-470D-82FB-F9BE9CDE16C5}"/>
+              </a:ext>
+            </a:extLst>
+          </p:cNvPr>
+          <p:cNvSpPr>
+            <a:spLocks xmlns:a="http://schemas.openxmlformats.org/drawingml/2006/main" noGrp="1"/>
+          </p:cNvSpPr>
+          <p:nvPr/>
+        </p:nvSpPr>
+        <p:spPr>
+          <a:xfrm xmlns:a="http://schemas.openxmlformats.org/drawingml/2006/main">
+            <a:off x="822960" y="3035808"/>
+            <a:ext cx="10545775" cy="475488"/>
+          </a:xfrm>
+          <a:prstGeom xmlns:a="http://schemas.openxmlformats.org/drawingml/2006/main" prst="rect">
+            <a:avLst/>
+          </a:prstGeom>
+          <a:noFill xmlns:a="http://schemas.openxmlformats.org/drawingml/2006/main"/>
+        </p:spPr>
+        <p:txBody>
+          <a:bodyPr xmlns:a="http://schemas.openxmlformats.org/drawingml/2006/main" wrap="square" lIns="0" tIns="0" rIns="0" bIns="0" anchor="t"/>
+          <a:lstStyle xmlns:a="http://schemas.openxmlformats.org/drawingml/2006/main"/>
+          <a:p xmlns:a="http://schemas.openxmlformats.org/drawingml/2006/main">
+            <a:pPr marL="0" indent="0">
+              <a:buNone/>
+            </a:pPr>
+            <a:r>
+              <a:rPr sz="2600" b="1">
+                <a:solidFill>
                   <a:srgbClr val="1A1A1A"/>
                 </a:solidFill>
                 <a:latin typeface="Calibri"/>
                 <a:ea typeface="Calibri"/>
                 <a:cs typeface="Calibri"/>
               </a:rPr>
-              <a:t>AI Act: Triage and reporting are not high-risk.</a:t>
+              <a:t>Handlers rubber-stamp proposals   4×4</a:t>
+            </a:r>
+            <a:endParaRPr sz="2600"/>
+          </a:p>
+        </p:txBody>
+      </p:sp>
+      <p:sp>
+        <p:nvSpPr>
+          <p:cNvPr id="10" name="Text 8">
+            <a:extLst xmlns:a="http://schemas.openxmlformats.org/drawingml/2006/main">
+              <a:ext uri="{FF2B5EF4-FFF2-40B4-BE49-F238E27FC236}">
+                <a16:creationId xmlns:a16="http://schemas.microsoft.com/office/drawing/2014/main" id="{09CD94B9-D13A-49E3-B76A-A01A32956C38}"/>
+              </a:ext>
+            </a:extLst>
+          </p:cNvPr>
+          <p:cNvSpPr>
+            <a:spLocks xmlns:a="http://schemas.openxmlformats.org/drawingml/2006/main" noGrp="1"/>
+          </p:cNvSpPr>
+          <p:nvPr/>
+        </p:nvSpPr>
+        <p:spPr>
+          <a:xfrm xmlns:a="http://schemas.openxmlformats.org/drawingml/2006/main">
+            <a:off x="822960" y="3511296"/>
+            <a:ext cx="10545775" cy="438912"/>
+          </a:xfrm>
+          <a:prstGeom xmlns:a="http://schemas.openxmlformats.org/drawingml/2006/main" prst="rect">
+            <a:avLst/>
+          </a:prstGeom>
+          <a:noFill xmlns:a="http://schemas.openxmlformats.org/drawingml/2006/main"/>
+        </p:spPr>
+        <p:txBody>
+          <a:bodyPr xmlns:a="http://schemas.openxmlformats.org/drawingml/2006/main" wrap="square" lIns="0" tIns="0" rIns="0" bIns="0" anchor="t"/>
+          <a:lstStyle xmlns:a="http://schemas.openxmlformats.org/drawingml/2006/main"/>
+          <a:p xmlns:a="http://schemas.openxmlformats.org/drawingml/2006/main">
+            <a:pPr marL="0" indent="0">
+              <a:buNone/>
+            </a:pPr>
+            <a:r>
+              <a:rPr sz="2400">
+                <a:solidFill>
+                  <a:srgbClr val="6B6B6B"/>
+                </a:solidFill>
+                <a:latin typeface="Calibri"/>
+                <a:ea typeface="Calibri"/>
+                <a:cs typeface="Calibri"/>
+              </a:rPr>
+              <a:t>Acceptance above 97% is a failure signal, measured per handler.</a:t>
             </a:r>
             <a:endParaRPr sz="2400"/>
           </a:p>
@@ -10369,21 +11059,21 @@
       </p:sp>
       <p:sp>
         <p:nvSpPr>
-          <p:cNvPr id="8" name="Text 6">
-            <a:extLst xmlns:a="http://schemas.openxmlformats.org/drawingml/2006/main">
-              <a:ext uri="{FF2B5EF4-FFF2-40B4-BE49-F238E27FC236}">
-                <a16:creationId xmlns:a16="http://schemas.microsoft.com/office/drawing/2014/main" id="{9386379E-B987-4D52-B558-9892A45CF496}"/>
-              </a:ext>
-            </a:extLst>
-          </p:cNvPr>
-          <p:cNvSpPr>
-            <a:spLocks xmlns:a="http://schemas.openxmlformats.org/drawingml/2006/main" noGrp="1"/>
-          </p:cNvSpPr>
-          <p:nvPr/>
-        </p:nvSpPr>
-        <p:spPr>
-          <a:xfrm xmlns:a="http://schemas.openxmlformats.org/drawingml/2006/main">
-            <a:off x="822960" y="2487168"/>
+          <p:cNvPr id="11" name="Text 9">
+            <a:extLst xmlns:a="http://schemas.openxmlformats.org/drawingml/2006/main">
+              <a:ext uri="{FF2B5EF4-FFF2-40B4-BE49-F238E27FC236}">
+                <a16:creationId xmlns:a16="http://schemas.microsoft.com/office/drawing/2014/main" id="{6D9EA6E0-65D8-49FE-B5BE-E961C035737F}"/>
+              </a:ext>
+            </a:extLst>
+          </p:cNvPr>
+          <p:cNvSpPr>
+            <a:spLocks xmlns:a="http://schemas.openxmlformats.org/drawingml/2006/main" noGrp="1"/>
+          </p:cNvSpPr>
+          <p:nvPr/>
+        </p:nvSpPr>
+        <p:spPr>
+          <a:xfrm xmlns:a="http://schemas.openxmlformats.org/drawingml/2006/main">
+            <a:off x="822960" y="4297680"/>
             <a:ext cx="10545775" cy="475488"/>
           </a:xfrm>
           <a:prstGeom xmlns:a="http://schemas.openxmlformats.org/drawingml/2006/main" prst="rect">
@@ -10399,116 +11089,70 @@
               <a:buNone/>
             </a:pPr>
             <a:r>
+              <a:rPr sz="2600" b="1">
+                <a:solidFill>
+                  <a:srgbClr val="1A1A1A"/>
+                </a:solidFill>
+                <a:latin typeface="Calibri"/>
+                <a:ea typeface="Calibri"/>
+                <a:cs typeface="Calibri"/>
+              </a:rPr>
+              <a:t>Oversight costs more than it saves   3×4</a:t>
+            </a:r>
+            <a:endParaRPr sz="2600"/>
+          </a:p>
+        </p:txBody>
+      </p:sp>
+      <p:sp>
+        <p:nvSpPr>
+          <p:cNvPr id="12" name="Text 10">
+            <a:extLst xmlns:a="http://schemas.openxmlformats.org/drawingml/2006/main">
+              <a:ext uri="{FF2B5EF4-FFF2-40B4-BE49-F238E27FC236}">
+                <a16:creationId xmlns:a16="http://schemas.microsoft.com/office/drawing/2014/main" id="{E6129510-3755-46A4-9705-BB6EA9A086DD}"/>
+              </a:ext>
+            </a:extLst>
+          </p:cNvPr>
+          <p:cNvSpPr>
+            <a:spLocks xmlns:a="http://schemas.openxmlformats.org/drawingml/2006/main" noGrp="1"/>
+          </p:cNvSpPr>
+          <p:nvPr/>
+        </p:nvSpPr>
+        <p:spPr>
+          <a:xfrm xmlns:a="http://schemas.openxmlformats.org/drawingml/2006/main">
+            <a:off x="822960" y="4773168"/>
+            <a:ext cx="10545775" cy="438912"/>
+          </a:xfrm>
+          <a:prstGeom xmlns:a="http://schemas.openxmlformats.org/drawingml/2006/main" prst="rect">
+            <a:avLst/>
+          </a:prstGeom>
+          <a:noFill xmlns:a="http://schemas.openxmlformats.org/drawingml/2006/main"/>
+        </p:spPr>
+        <p:txBody>
+          <a:bodyPr xmlns:a="http://schemas.openxmlformats.org/drawingml/2006/main" wrap="square" lIns="0" tIns="0" rIns="0" bIns="0" anchor="t"/>
+          <a:lstStyle xmlns:a="http://schemas.openxmlformats.org/drawingml/2006/main"/>
+          <a:p xmlns:a="http://schemas.openxmlformats.org/drawingml/2006/main">
+            <a:pPr marL="0" indent="0">
+              <a:buNone/>
+            </a:pPr>
+            <a:r>
               <a:rPr sz="2400">
                 <a:solidFill>
-                  <a:srgbClr val="1A1A1A"/>
-                </a:solidFill>
-                <a:latin typeface="Calibri"/>
-                <a:ea typeface="Calibri"/>
-                <a:cs typeface="Calibri"/>
-              </a:rPr>
-              <a:t>Anomaly flagging requires counsel confirmation. AI literacy applies now.</a:t>
+                  <a:srgbClr val="6B6B6B"/>
+                </a:solidFill>
+                <a:latin typeface="Calibri"/>
+                <a:ea typeface="Calibri"/>
+                <a:cs typeface="Calibri"/>
+              </a:rPr>
+              <a:t>Measure effort during the shadow pilot from day one.</a:t>
             </a:r>
             <a:endParaRPr sz="2400"/>
-          </a:p>
-        </p:txBody>
-      </p:sp>
-      <p:sp>
-        <p:nvSpPr>
-          <p:cNvPr id="10" name="Text 8">
-            <a:extLst xmlns:a="http://schemas.openxmlformats.org/drawingml/2006/main">
-              <a:ext uri="{FF2B5EF4-FFF2-40B4-BE49-F238E27FC236}">
-                <a16:creationId xmlns:a16="http://schemas.microsoft.com/office/drawing/2014/main" id="{D4F74A11-44A8-436D-B84C-7A6AFBC1AEF1}"/>
-              </a:ext>
-            </a:extLst>
-          </p:cNvPr>
-          <p:cNvSpPr>
-            <a:spLocks xmlns:a="http://schemas.openxmlformats.org/drawingml/2006/main" noGrp="1"/>
-          </p:cNvSpPr>
-          <p:nvPr/>
-        </p:nvSpPr>
-        <p:spPr>
-          <a:xfrm xmlns:a="http://schemas.openxmlformats.org/drawingml/2006/main">
-            <a:off x="822960" y="3913632"/>
-            <a:ext cx="10545775" cy="475488"/>
-          </a:xfrm>
-          <a:prstGeom xmlns:a="http://schemas.openxmlformats.org/drawingml/2006/main" prst="rect">
-            <a:avLst/>
-          </a:prstGeom>
-          <a:noFill xmlns:a="http://schemas.openxmlformats.org/drawingml/2006/main"/>
-        </p:spPr>
-        <p:txBody>
-          <a:bodyPr xmlns:a="http://schemas.openxmlformats.org/drawingml/2006/main" wrap="square" lIns="0" tIns="0" rIns="0" bIns="0" anchor="t"/>
-          <a:lstStyle xmlns:a="http://schemas.openxmlformats.org/drawingml/2006/main"/>
-          <a:p xmlns:a="http://schemas.openxmlformats.org/drawingml/2006/main">
-            <a:pPr marL="0" indent="0">
-              <a:buNone/>
-            </a:pPr>
-            <a:r>
-              <a:rPr sz="2400">
-                <a:solidFill>
-                  <a:srgbClr val="1A1A1A"/>
-                </a:solidFill>
-                <a:latin typeface="Calibri"/>
-                <a:ea typeface="Calibri"/>
-                <a:cs typeface="Calibri"/>
-              </a:rPr>
-              <a:t>GDPR: The full complaint narrative reaches the provider.</a:t>
-            </a:r>
-            <a:endParaRPr sz="2400"/>
-          </a:p>
-        </p:txBody>
-      </p:sp>
-      <p:sp>
-        <p:nvSpPr>
-          <p:cNvPr id="11" name="Text 9">
-            <a:extLst xmlns:a="http://schemas.openxmlformats.org/drawingml/2006/main">
-              <a:ext uri="{FF2B5EF4-FFF2-40B4-BE49-F238E27FC236}">
-                <a16:creationId xmlns:a16="http://schemas.microsoft.com/office/drawing/2014/main" id="{CEF271E3-966B-4EBC-BFBC-4BEAEF6F86AF}"/>
-              </a:ext>
-            </a:extLst>
-          </p:cNvPr>
-          <p:cNvSpPr>
-            <a:spLocks xmlns:a="http://schemas.openxmlformats.org/drawingml/2006/main" noGrp="1"/>
-          </p:cNvSpPr>
-          <p:nvPr/>
-        </p:nvSpPr>
-        <p:spPr>
-          <a:xfrm xmlns:a="http://schemas.openxmlformats.org/drawingml/2006/main">
-            <a:off x="822960" y="4773168"/>
-            <a:ext cx="10545775" cy="475488"/>
-          </a:xfrm>
-          <a:prstGeom xmlns:a="http://schemas.openxmlformats.org/drawingml/2006/main" prst="rect">
-            <a:avLst/>
-          </a:prstGeom>
-          <a:noFill xmlns:a="http://schemas.openxmlformats.org/drawingml/2006/main"/>
-        </p:spPr>
-        <p:txBody>
-          <a:bodyPr xmlns:a="http://schemas.openxmlformats.org/drawingml/2006/main" wrap="square" lIns="0" tIns="0" rIns="0" bIns="0" anchor="t"/>
-          <a:lstStyle xmlns:a="http://schemas.openxmlformats.org/drawingml/2006/main"/>
-          <a:p xmlns:a="http://schemas.openxmlformats.org/drawingml/2006/main">
-            <a:pPr marL="0" indent="0">
-              <a:buNone/>
-            </a:pPr>
-            <a:r>
-              <a:rPr sz="2600">
-                <a:solidFill>
-                  <a:srgbClr val="1A1A1A"/>
-                </a:solidFill>
-                <a:latin typeface="Calibri"/>
-                <a:ea typeface="Calibri"/>
-                <a:cs typeface="Calibri"/>
-              </a:rPr>
-              <a:t>Close the DPA, transfer assessment and zero-retention controls before using real data.</a:t>
-            </a:r>
-            <a:endParaRPr sz="2600"/>
           </a:p>
         </p:txBody>
       </p:sp>
     </p:spTree>
     <p:extLst>
       <p:ext uri="{BB962C8B-B14F-4D97-AF65-F5344CB8AC3E}">
-        <p14:creationId xmlns:p14="http://schemas.microsoft.com/office/powerpoint/2010/main" val="1504768459"/>
+        <p14:creationId xmlns:p14="http://schemas.microsoft.com/office/powerpoint/2010/main" val="773037288"/>
       </p:ext>
     </p:extLst>
   </p:cSld>
@@ -10539,7 +11183,7 @@
           <p:cNvPr id="2" name="Text 0">
             <a:extLst xmlns:a="http://schemas.openxmlformats.org/drawingml/2006/main">
               <a:ext uri="{FF2B5EF4-FFF2-40B4-BE49-F238E27FC236}">
-                <a16:creationId xmlns:a16="http://schemas.microsoft.com/office/drawing/2014/main" id="{0AC23C2F-5DD1-4357-AA70-587A7DE6374B}"/>
+                <a16:creationId xmlns:a16="http://schemas.microsoft.com/office/drawing/2014/main" id="{FE9A16E5-808D-4E13-B1CF-A404528F0FB3}"/>
               </a:ext>
             </a:extLst>
           </p:cNvPr>
@@ -10574,7 +11218,7 @@
                 <a:ea typeface="Trebuchet MS"/>
                 <a:cs typeface="Trebuchet MS"/>
               </a:rPr>
-              <a:t>The programme earns each next step</a:t>
+              <a:t>Not high-risk. Real-data use still has gates</a:t>
             </a:r>
             <a:endParaRPr sz="3200"/>
           </a:p>
@@ -10585,7 +11229,7 @@
           <p:cNvPr id="3" name="Shape 1">
             <a:extLst xmlns:a="http://schemas.openxmlformats.org/drawingml/2006/main">
               <a:ext uri="{FF2B5EF4-FFF2-40B4-BE49-F238E27FC236}">
-                <a16:creationId xmlns:a16="http://schemas.microsoft.com/office/drawing/2014/main" id="{3F6C2007-D7BE-46D2-9445-C55D9392A447}"/>
+                <a16:creationId xmlns:a16="http://schemas.microsoft.com/office/drawing/2014/main" id="{D4AA5190-0081-45AF-A5A7-B8AA87E6FEF1}"/>
               </a:ext>
             </a:extLst>
           </p:cNvPr>
@@ -10616,7 +11260,7 @@
           <p:cNvPr id="4" name="Shape 2">
             <a:extLst xmlns:a="http://schemas.openxmlformats.org/drawingml/2006/main">
               <a:ext uri="{FF2B5EF4-FFF2-40B4-BE49-F238E27FC236}">
-                <a16:creationId xmlns:a16="http://schemas.microsoft.com/office/drawing/2014/main" id="{891083A5-37F5-4952-BBAE-2A7B32228296}"/>
+                <a16:creationId xmlns:a16="http://schemas.microsoft.com/office/drawing/2014/main" id="{37C74313-CEAA-4828-848C-8D225AB2EF35}"/>
               </a:ext>
             </a:extLst>
           </p:cNvPr>
@@ -10647,7 +11291,7 @@
           <p:cNvPr id="5" name="Text 3">
             <a:extLst xmlns:a="http://schemas.openxmlformats.org/drawingml/2006/main">
               <a:ext uri="{FF2B5EF4-FFF2-40B4-BE49-F238E27FC236}">
-                <a16:creationId xmlns:a16="http://schemas.microsoft.com/office/drawing/2014/main" id="{DA435F72-37F5-4464-B655-82F9C7FDFF94}"/>
+                <a16:creationId xmlns:a16="http://schemas.microsoft.com/office/drawing/2014/main" id="{17D17FAC-FB51-4B2D-BAE5-D6A5826C96DD}"/>
               </a:ext>
             </a:extLst>
           </p:cNvPr>
@@ -10693,7 +11337,7 @@
           <p:cNvPr id="6" name="Text 4">
             <a:extLst xmlns:a="http://schemas.openxmlformats.org/drawingml/2006/main">
               <a:ext uri="{FF2B5EF4-FFF2-40B4-BE49-F238E27FC236}">
-                <a16:creationId xmlns:a16="http://schemas.microsoft.com/office/drawing/2014/main" id="{A8FB78A4-8745-434B-AAA7-838895409356}"/>
+                <a16:creationId xmlns:a16="http://schemas.microsoft.com/office/drawing/2014/main" id="{3662326A-B1E7-4B72-AB1F-C370F161523C}"/>
               </a:ext>
             </a:extLst>
           </p:cNvPr>
@@ -10739,7 +11383,7 @@
           <p:cNvPr id="7" name="Text 5">
             <a:extLst xmlns:a="http://schemas.openxmlformats.org/drawingml/2006/main">
               <a:ext uri="{FF2B5EF4-FFF2-40B4-BE49-F238E27FC236}">
-                <a16:creationId xmlns:a16="http://schemas.microsoft.com/office/drawing/2014/main" id="{66ADF4B7-39F1-45F5-A0ED-3C53C700F125}"/>
+                <a16:creationId xmlns:a16="http://schemas.microsoft.com/office/drawing/2014/main" id="{4B353CFD-797F-4173-A01B-F42835B33D2B}"/>
               </a:ext>
             </a:extLst>
           </p:cNvPr>
@@ -10751,30 +11395,30 @@
         <p:spPr>
           <a:xfrm xmlns:a="http://schemas.openxmlformats.org/drawingml/2006/main">
             <a:off x="822960" y="1773936"/>
-            <a:ext cx="6327465" cy="402336"/>
-          </a:xfrm>
-          <a:prstGeom xmlns:a="http://schemas.openxmlformats.org/drawingml/2006/main" prst="rect">
-            <a:avLst/>
-          </a:prstGeom>
-          <a:noFill xmlns:a="http://schemas.openxmlformats.org/drawingml/2006/main"/>
-        </p:spPr>
-        <p:txBody>
-          <a:bodyPr xmlns:a="http://schemas.openxmlformats.org/drawingml/2006/main" wrap="square" lIns="0" tIns="0" rIns="0" bIns="0" anchor="ctr"/>
+            <a:ext cx="10545775" cy="475488"/>
+          </a:xfrm>
+          <a:prstGeom xmlns:a="http://schemas.openxmlformats.org/drawingml/2006/main" prst="rect">
+            <a:avLst/>
+          </a:prstGeom>
+          <a:noFill xmlns:a="http://schemas.openxmlformats.org/drawingml/2006/main"/>
+        </p:spPr>
+        <p:txBody>
+          <a:bodyPr xmlns:a="http://schemas.openxmlformats.org/drawingml/2006/main" wrap="square" lIns="0" tIns="0" rIns="0" bIns="0" anchor="t"/>
           <a:lstStyle xmlns:a="http://schemas.openxmlformats.org/drawingml/2006/main"/>
           <a:p xmlns:a="http://schemas.openxmlformats.org/drawingml/2006/main">
             <a:pPr marL="0" indent="0">
               <a:buNone/>
             </a:pPr>
             <a:r>
-              <a:rPr sz="2400" b="1" spc="100">
-                <a:solidFill>
-                  <a:srgbClr val="B0341F"/>
-                </a:solidFill>
-                <a:latin typeface="Calibri"/>
-                <a:ea typeface="Calibri"/>
-                <a:cs typeface="Calibri"/>
-              </a:rPr>
-              <a:t>PHASE · WHAT IT BUYS</a:t>
+              <a:rPr sz="2400">
+                <a:solidFill>
+                  <a:srgbClr val="1A1A1A"/>
+                </a:solidFill>
+                <a:latin typeface="Calibri"/>
+                <a:ea typeface="Calibri"/>
+                <a:cs typeface="Calibri"/>
+              </a:rPr>
+              <a:t>AI Act: Triage and reporting are not high-risk.</a:t>
             </a:r>
             <a:endParaRPr sz="2400"/>
           </a:p>
@@ -10785,42 +11429,42 @@
           <p:cNvPr id="8" name="Text 6">
             <a:extLst xmlns:a="http://schemas.openxmlformats.org/drawingml/2006/main">
               <a:ext uri="{FF2B5EF4-FFF2-40B4-BE49-F238E27FC236}">
-                <a16:creationId xmlns:a16="http://schemas.microsoft.com/office/drawing/2014/main" id="{9917ED35-A1CF-4979-8734-A2E7619ADBA5}"/>
-              </a:ext>
-            </a:extLst>
-          </p:cNvPr>
-          <p:cNvSpPr>
-            <a:spLocks xmlns:a="http://schemas.openxmlformats.org/drawingml/2006/main" noGrp="1"/>
-          </p:cNvSpPr>
-          <p:nvPr/>
-        </p:nvSpPr>
-        <p:spPr>
-          <a:xfrm xmlns:a="http://schemas.openxmlformats.org/drawingml/2006/main">
-            <a:off x="7150425" y="1773936"/>
-            <a:ext cx="4218310" cy="402336"/>
-          </a:xfrm>
-          <a:prstGeom xmlns:a="http://schemas.openxmlformats.org/drawingml/2006/main" prst="rect">
-            <a:avLst/>
-          </a:prstGeom>
-          <a:noFill xmlns:a="http://schemas.openxmlformats.org/drawingml/2006/main"/>
-        </p:spPr>
-        <p:txBody>
-          <a:bodyPr xmlns:a="http://schemas.openxmlformats.org/drawingml/2006/main" wrap="square" lIns="0" tIns="0" rIns="0" bIns="0" anchor="ctr"/>
-          <a:lstStyle xmlns:a="http://schemas.openxmlformats.org/drawingml/2006/main"/>
-          <a:p xmlns:a="http://schemas.openxmlformats.org/drawingml/2006/main">
-            <a:pPr marL="0" indent="0" algn="r">
-              <a:buNone/>
-            </a:pPr>
-            <a:r>
-              <a:rPr sz="2400" b="1" spc="100">
-                <a:solidFill>
-                  <a:srgbClr val="B0341F"/>
-                </a:solidFill>
-                <a:latin typeface="Calibri"/>
-                <a:ea typeface="Calibri"/>
-                <a:cs typeface="Calibri"/>
-              </a:rPr>
-              <a:t>FEE · EXIT</a:t>
+                <a16:creationId xmlns:a16="http://schemas.microsoft.com/office/drawing/2014/main" id="{9386379E-B987-4D52-B558-9892A45CF496}"/>
+              </a:ext>
+            </a:extLst>
+          </p:cNvPr>
+          <p:cNvSpPr>
+            <a:spLocks xmlns:a="http://schemas.openxmlformats.org/drawingml/2006/main" noGrp="1"/>
+          </p:cNvSpPr>
+          <p:nvPr/>
+        </p:nvSpPr>
+        <p:spPr>
+          <a:xfrm xmlns:a="http://schemas.openxmlformats.org/drawingml/2006/main">
+            <a:off x="822960" y="2487168"/>
+            <a:ext cx="10545775" cy="475488"/>
+          </a:xfrm>
+          <a:prstGeom xmlns:a="http://schemas.openxmlformats.org/drawingml/2006/main" prst="rect">
+            <a:avLst/>
+          </a:prstGeom>
+          <a:noFill xmlns:a="http://schemas.openxmlformats.org/drawingml/2006/main"/>
+        </p:spPr>
+        <p:txBody>
+          <a:bodyPr xmlns:a="http://schemas.openxmlformats.org/drawingml/2006/main" wrap="square" lIns="0" tIns="0" rIns="0" bIns="0" anchor="t"/>
+          <a:lstStyle xmlns:a="http://schemas.openxmlformats.org/drawingml/2006/main"/>
+          <a:p xmlns:a="http://schemas.openxmlformats.org/drawingml/2006/main">
+            <a:pPr marL="0" indent="0">
+              <a:buNone/>
+            </a:pPr>
+            <a:r>
+              <a:rPr sz="2400">
+                <a:solidFill>
+                  <a:srgbClr val="1A1A1A"/>
+                </a:solidFill>
+                <a:latin typeface="Calibri"/>
+                <a:ea typeface="Calibri"/>
+                <a:cs typeface="Calibri"/>
+              </a:rPr>
+              <a:t>Anomaly flagging requires counsel confirmation. AI literacy applies now.</a:t>
             </a:r>
             <a:endParaRPr sz="2400"/>
           </a:p>
@@ -10828,61 +11472,30 @@
       </p:sp>
       <p:sp>
         <p:nvSpPr>
-          <p:cNvPr id="9" name="Shape 7">
-            <a:extLst xmlns:a="http://schemas.openxmlformats.org/drawingml/2006/main">
-              <a:ext uri="{FF2B5EF4-FFF2-40B4-BE49-F238E27FC236}">
-                <a16:creationId xmlns:a16="http://schemas.microsoft.com/office/drawing/2014/main" id="{C3025A76-167A-4DF6-8E7F-A19E7E59DA63}"/>
-              </a:ext>
-            </a:extLst>
-          </p:cNvPr>
-          <p:cNvSpPr>
-            <a:spLocks xmlns:a="http://schemas.openxmlformats.org/drawingml/2006/main" noGrp="1"/>
-          </p:cNvSpPr>
-          <p:nvPr/>
-        </p:nvSpPr>
-        <p:spPr>
-          <a:xfrm xmlns:a="http://schemas.openxmlformats.org/drawingml/2006/main">
-            <a:off x="822960" y="2212848"/>
-            <a:ext cx="10545775" cy="0"/>
-          </a:xfrm>
-          <a:prstGeom xmlns:a="http://schemas.openxmlformats.org/drawingml/2006/main" prst="line">
-            <a:avLst/>
-          </a:prstGeom>
-          <a:noFill xmlns:a="http://schemas.openxmlformats.org/drawingml/2006/main"/>
-          <a:ln xmlns:a="http://schemas.openxmlformats.org/drawingml/2006/main" w="12700">
-            <a:solidFill>
-              <a:srgbClr val="1A1A1A"/>
-            </a:solidFill>
-            <a:prstDash val="solid"/>
-          </a:ln>
-        </p:spPr>
-      </p:sp>
-      <p:sp>
-        <p:nvSpPr>
           <p:cNvPr id="10" name="Text 8">
             <a:extLst xmlns:a="http://schemas.openxmlformats.org/drawingml/2006/main">
               <a:ext uri="{FF2B5EF4-FFF2-40B4-BE49-F238E27FC236}">
-                <a16:creationId xmlns:a16="http://schemas.microsoft.com/office/drawing/2014/main" id="{11753659-222F-4C71-8118-70BF22934537}"/>
-              </a:ext>
-            </a:extLst>
-          </p:cNvPr>
-          <p:cNvSpPr>
-            <a:spLocks xmlns:a="http://schemas.openxmlformats.org/drawingml/2006/main" noGrp="1"/>
-          </p:cNvSpPr>
-          <p:nvPr/>
-        </p:nvSpPr>
-        <p:spPr>
-          <a:xfrm xmlns:a="http://schemas.openxmlformats.org/drawingml/2006/main">
-            <a:off x="822960" y="2340864"/>
-            <a:ext cx="6327465" cy="713232"/>
-          </a:xfrm>
-          <a:prstGeom xmlns:a="http://schemas.openxmlformats.org/drawingml/2006/main" prst="rect">
-            <a:avLst/>
-          </a:prstGeom>
-          <a:noFill xmlns:a="http://schemas.openxmlformats.org/drawingml/2006/main"/>
-        </p:spPr>
-        <p:txBody>
-          <a:bodyPr xmlns:a="http://schemas.openxmlformats.org/drawingml/2006/main" wrap="square" lIns="0" tIns="0" rIns="0" bIns="0" anchor="ctr"/>
+                <a16:creationId xmlns:a16="http://schemas.microsoft.com/office/drawing/2014/main" id="{D4F74A11-44A8-436D-B84C-7A6AFBC1AEF1}"/>
+              </a:ext>
+            </a:extLst>
+          </p:cNvPr>
+          <p:cNvSpPr>
+            <a:spLocks xmlns:a="http://schemas.openxmlformats.org/drawingml/2006/main" noGrp="1"/>
+          </p:cNvSpPr>
+          <p:nvPr/>
+        </p:nvSpPr>
+        <p:spPr>
+          <a:xfrm xmlns:a="http://schemas.openxmlformats.org/drawingml/2006/main">
+            <a:off x="822960" y="3913632"/>
+            <a:ext cx="10545775" cy="475488"/>
+          </a:xfrm>
+          <a:prstGeom xmlns:a="http://schemas.openxmlformats.org/drawingml/2006/main" prst="rect">
+            <a:avLst/>
+          </a:prstGeom>
+          <a:noFill xmlns:a="http://schemas.openxmlformats.org/drawingml/2006/main"/>
+        </p:spPr>
+        <p:txBody>
+          <a:bodyPr xmlns:a="http://schemas.openxmlformats.org/drawingml/2006/main" wrap="square" lIns="0" tIns="0" rIns="0" bIns="0" anchor="t"/>
           <a:lstStyle xmlns:a="http://schemas.openxmlformats.org/drawingml/2006/main"/>
           <a:p xmlns:a="http://schemas.openxmlformats.org/drawingml/2006/main">
             <a:pPr marL="0" indent="0">
@@ -10897,7 +11510,7 @@
                 <a:ea typeface="Calibri"/>
                 <a:cs typeface="Calibri"/>
               </a:rPr>
-              <a:t>0 · Ground truth, baselines, legal closure</a:t>
+              <a:t>GDPR: The full complaint narrative reaches the provider.</a:t>
             </a:r>
             <a:endParaRPr sz="2400"/>
           </a:p>
@@ -10908,34 +11521,34 @@
           <p:cNvPr id="11" name="Text 9">
             <a:extLst xmlns:a="http://schemas.openxmlformats.org/drawingml/2006/main">
               <a:ext uri="{FF2B5EF4-FFF2-40B4-BE49-F238E27FC236}">
-                <a16:creationId xmlns:a16="http://schemas.microsoft.com/office/drawing/2014/main" id="{81253715-BDEB-4913-B940-E7CF247B6507}"/>
-              </a:ext>
-            </a:extLst>
-          </p:cNvPr>
-          <p:cNvSpPr>
-            <a:spLocks xmlns:a="http://schemas.openxmlformats.org/drawingml/2006/main" noGrp="1"/>
-          </p:cNvSpPr>
-          <p:nvPr/>
-        </p:nvSpPr>
-        <p:spPr>
-          <a:xfrm xmlns:a="http://schemas.openxmlformats.org/drawingml/2006/main">
-            <a:off x="7150425" y="2340864"/>
-            <a:ext cx="4218310" cy="713232"/>
-          </a:xfrm>
-          <a:prstGeom xmlns:a="http://schemas.openxmlformats.org/drawingml/2006/main" prst="rect">
-            <a:avLst/>
-          </a:prstGeom>
-          <a:noFill xmlns:a="http://schemas.openxmlformats.org/drawingml/2006/main"/>
-        </p:spPr>
-        <p:txBody>
-          <a:bodyPr xmlns:a="http://schemas.openxmlformats.org/drawingml/2006/main" wrap="square" lIns="0" tIns="0" rIns="0" bIns="0" anchor="ctr"/>
-          <a:lstStyle xmlns:a="http://schemas.openxmlformats.org/drawingml/2006/main"/>
-          <a:p xmlns:a="http://schemas.openxmlformats.org/drawingml/2006/main">
-            <a:pPr marL="0" indent="0" algn="r">
-              <a:buNone/>
-            </a:pPr>
-            <a:r>
-              <a:rPr sz="2400" b="1">
+                <a16:creationId xmlns:a16="http://schemas.microsoft.com/office/drawing/2014/main" id="{CEF271E3-966B-4EBC-BFBC-4BEAEF6F86AF}"/>
+              </a:ext>
+            </a:extLst>
+          </p:cNvPr>
+          <p:cNvSpPr>
+            <a:spLocks xmlns:a="http://schemas.openxmlformats.org/drawingml/2006/main" noGrp="1"/>
+          </p:cNvSpPr>
+          <p:nvPr/>
+        </p:nvSpPr>
+        <p:spPr>
+          <a:xfrm xmlns:a="http://schemas.openxmlformats.org/drawingml/2006/main">
+            <a:off x="822960" y="4773168"/>
+            <a:ext cx="10545775" cy="475488"/>
+          </a:xfrm>
+          <a:prstGeom xmlns:a="http://schemas.openxmlformats.org/drawingml/2006/main" prst="rect">
+            <a:avLst/>
+          </a:prstGeom>
+          <a:noFill xmlns:a="http://schemas.openxmlformats.org/drawingml/2006/main"/>
+        </p:spPr>
+        <p:txBody>
+          <a:bodyPr xmlns:a="http://schemas.openxmlformats.org/drawingml/2006/main" wrap="square" lIns="0" tIns="0" rIns="0" bIns="0" anchor="t"/>
+          <a:lstStyle xmlns:a="http://schemas.openxmlformats.org/drawingml/2006/main"/>
+          <a:p xmlns:a="http://schemas.openxmlformats.org/drawingml/2006/main">
+            <a:pPr marL="0" indent="0">
+              <a:buNone/>
+            </a:pPr>
+            <a:r>
+              <a:rPr sz="2600">
                 <a:solidFill>
                   <a:srgbClr val="1A1A1A"/>
                 </a:solidFill>
@@ -10943,354 +11556,16 @@
                 <a:ea typeface="Calibri"/>
                 <a:cs typeface="Calibri"/>
               </a:rPr>
-              <a:t>€5,600 · go/no-go on pilot</a:t>
-            </a:r>
-            <a:endParaRPr sz="2400"/>
-          </a:p>
-        </p:txBody>
-      </p:sp>
-      <p:sp>
-        <p:nvSpPr>
-          <p:cNvPr id="12" name="Shape 10">
-            <a:extLst xmlns:a="http://schemas.openxmlformats.org/drawingml/2006/main">
-              <a:ext uri="{FF2B5EF4-FFF2-40B4-BE49-F238E27FC236}">
-                <a16:creationId xmlns:a16="http://schemas.microsoft.com/office/drawing/2014/main" id="{730D92FD-A2AE-49E1-9A09-9F9781456F2F}"/>
-              </a:ext>
-            </a:extLst>
-          </p:cNvPr>
-          <p:cNvSpPr>
-            <a:spLocks xmlns:a="http://schemas.openxmlformats.org/drawingml/2006/main" noGrp="1"/>
-          </p:cNvSpPr>
-          <p:nvPr/>
-        </p:nvSpPr>
-        <p:spPr>
-          <a:xfrm xmlns:a="http://schemas.openxmlformats.org/drawingml/2006/main">
-            <a:off x="822960" y="3054096"/>
-            <a:ext cx="10545775" cy="0"/>
-          </a:xfrm>
-          <a:prstGeom xmlns:a="http://schemas.openxmlformats.org/drawingml/2006/main" prst="line">
-            <a:avLst/>
-          </a:prstGeom>
-          <a:noFill xmlns:a="http://schemas.openxmlformats.org/drawingml/2006/main"/>
-          <a:ln xmlns:a="http://schemas.openxmlformats.org/drawingml/2006/main" w="12700">
-            <a:solidFill>
-              <a:srgbClr val="E0E0E0"/>
-            </a:solidFill>
-            <a:prstDash val="solid"/>
-          </a:ln>
-        </p:spPr>
-      </p:sp>
-      <p:sp>
-        <p:nvSpPr>
-          <p:cNvPr id="13" name="Text 11">
-            <a:extLst xmlns:a="http://schemas.openxmlformats.org/drawingml/2006/main">
-              <a:ext uri="{FF2B5EF4-FFF2-40B4-BE49-F238E27FC236}">
-                <a16:creationId xmlns:a16="http://schemas.microsoft.com/office/drawing/2014/main" id="{926EECE5-3C0D-4D64-95E6-34B2BA0793E1}"/>
-              </a:ext>
-            </a:extLst>
-          </p:cNvPr>
-          <p:cNvSpPr>
-            <a:spLocks xmlns:a="http://schemas.openxmlformats.org/drawingml/2006/main" noGrp="1"/>
-          </p:cNvSpPr>
-          <p:nvPr/>
-        </p:nvSpPr>
-        <p:spPr>
-          <a:xfrm xmlns:a="http://schemas.openxmlformats.org/drawingml/2006/main">
-            <a:off x="822960" y="3054096"/>
-            <a:ext cx="6327465" cy="713232"/>
-          </a:xfrm>
-          <a:prstGeom xmlns:a="http://schemas.openxmlformats.org/drawingml/2006/main" prst="rect">
-            <a:avLst/>
-          </a:prstGeom>
-          <a:noFill xmlns:a="http://schemas.openxmlformats.org/drawingml/2006/main"/>
-        </p:spPr>
-        <p:txBody>
-          <a:bodyPr xmlns:a="http://schemas.openxmlformats.org/drawingml/2006/main" wrap="square" lIns="0" tIns="0" rIns="0" bIns="0" anchor="ctr"/>
-          <a:lstStyle xmlns:a="http://schemas.openxmlformats.org/drawingml/2006/main"/>
-          <a:p xmlns:a="http://schemas.openxmlformats.org/drawingml/2006/main">
-            <a:pPr marL="0" indent="0">
-              <a:buNone/>
-            </a:pPr>
-            <a:r>
-              <a:rPr sz="2400">
-                <a:solidFill>
-                  <a:srgbClr val="1A1A1A"/>
-                </a:solidFill>
-                <a:latin typeface="Calibri"/>
-                <a:ea typeface="Calibri"/>
-                <a:cs typeface="Calibri"/>
-              </a:rPr>
-              <a:t>1 · Configuration + 60-day shadow run</a:t>
-            </a:r>
-            <a:endParaRPr sz="2400"/>
-          </a:p>
-        </p:txBody>
-      </p:sp>
-      <p:sp>
-        <p:nvSpPr>
-          <p:cNvPr id="14" name="Text 12">
-            <a:extLst xmlns:a="http://schemas.openxmlformats.org/drawingml/2006/main">
-              <a:ext uri="{FF2B5EF4-FFF2-40B4-BE49-F238E27FC236}">
-                <a16:creationId xmlns:a16="http://schemas.microsoft.com/office/drawing/2014/main" id="{598228BD-E4A1-466E-B72C-BAD12A29F0D6}"/>
-              </a:ext>
-            </a:extLst>
-          </p:cNvPr>
-          <p:cNvSpPr>
-            <a:spLocks xmlns:a="http://schemas.openxmlformats.org/drawingml/2006/main" noGrp="1"/>
-          </p:cNvSpPr>
-          <p:nvPr/>
-        </p:nvSpPr>
-        <p:spPr>
-          <a:xfrm xmlns:a="http://schemas.openxmlformats.org/drawingml/2006/main">
-            <a:off x="7150425" y="3054096"/>
-            <a:ext cx="4218310" cy="713232"/>
-          </a:xfrm>
-          <a:prstGeom xmlns:a="http://schemas.openxmlformats.org/drawingml/2006/main" prst="rect">
-            <a:avLst/>
-          </a:prstGeom>
-          <a:noFill xmlns:a="http://schemas.openxmlformats.org/drawingml/2006/main"/>
-        </p:spPr>
-        <p:txBody>
-          <a:bodyPr xmlns:a="http://schemas.openxmlformats.org/drawingml/2006/main" wrap="square" lIns="0" tIns="0" rIns="0" bIns="0" anchor="ctr"/>
-          <a:lstStyle xmlns:a="http://schemas.openxmlformats.org/drawingml/2006/main"/>
-          <a:p xmlns:a="http://schemas.openxmlformats.org/drawingml/2006/main">
-            <a:pPr marL="0" indent="0" algn="r">
-              <a:buNone/>
-            </a:pPr>
-            <a:r>
-              <a:rPr sz="2400" b="1">
-                <a:solidFill>
-                  <a:srgbClr val="1A1A1A"/>
-                </a:solidFill>
-                <a:latin typeface="Calibri"/>
-                <a:ea typeface="Calibri"/>
-                <a:cs typeface="Calibri"/>
-              </a:rPr>
-              <a:t>€12,600 · go/no-go on deployment</a:t>
-            </a:r>
-            <a:endParaRPr sz="2400"/>
-          </a:p>
-        </p:txBody>
-      </p:sp>
-      <p:sp>
-        <p:nvSpPr>
-          <p:cNvPr id="15" name="Shape 13">
-            <a:extLst xmlns:a="http://schemas.openxmlformats.org/drawingml/2006/main">
-              <a:ext uri="{FF2B5EF4-FFF2-40B4-BE49-F238E27FC236}">
-                <a16:creationId xmlns:a16="http://schemas.microsoft.com/office/drawing/2014/main" id="{35286158-A485-4199-A972-A7BEF4434C40}"/>
-              </a:ext>
-            </a:extLst>
-          </p:cNvPr>
-          <p:cNvSpPr>
-            <a:spLocks xmlns:a="http://schemas.openxmlformats.org/drawingml/2006/main" noGrp="1"/>
-          </p:cNvSpPr>
-          <p:nvPr/>
-        </p:nvSpPr>
-        <p:spPr>
-          <a:xfrm xmlns:a="http://schemas.openxmlformats.org/drawingml/2006/main">
-            <a:off x="822960" y="3767328"/>
-            <a:ext cx="10545775" cy="0"/>
-          </a:xfrm>
-          <a:prstGeom xmlns:a="http://schemas.openxmlformats.org/drawingml/2006/main" prst="line">
-            <a:avLst/>
-          </a:prstGeom>
-          <a:noFill xmlns:a="http://schemas.openxmlformats.org/drawingml/2006/main"/>
-          <a:ln xmlns:a="http://schemas.openxmlformats.org/drawingml/2006/main" w="12700">
-            <a:solidFill>
-              <a:srgbClr val="E0E0E0"/>
-            </a:solidFill>
-            <a:prstDash val="solid"/>
-          </a:ln>
-        </p:spPr>
-      </p:sp>
-      <p:sp>
-        <p:nvSpPr>
-          <p:cNvPr id="16" name="Text 14">
-            <a:extLst xmlns:a="http://schemas.openxmlformats.org/drawingml/2006/main">
-              <a:ext uri="{FF2B5EF4-FFF2-40B4-BE49-F238E27FC236}">
-                <a16:creationId xmlns:a16="http://schemas.microsoft.com/office/drawing/2014/main" id="{3C5609FB-D36B-491E-A331-FBBEA9127F41}"/>
-              </a:ext>
-            </a:extLst>
-          </p:cNvPr>
-          <p:cNvSpPr>
-            <a:spLocks xmlns:a="http://schemas.openxmlformats.org/drawingml/2006/main" noGrp="1"/>
-          </p:cNvSpPr>
-          <p:nvPr/>
-        </p:nvSpPr>
-        <p:spPr>
-          <a:xfrm xmlns:a="http://schemas.openxmlformats.org/drawingml/2006/main">
-            <a:off x="822960" y="3767328"/>
-            <a:ext cx="6327465" cy="713232"/>
-          </a:xfrm>
-          <a:prstGeom xmlns:a="http://schemas.openxmlformats.org/drawingml/2006/main" prst="rect">
-            <a:avLst/>
-          </a:prstGeom>
-          <a:noFill xmlns:a="http://schemas.openxmlformats.org/drawingml/2006/main"/>
-        </p:spPr>
-        <p:txBody>
-          <a:bodyPr xmlns:a="http://schemas.openxmlformats.org/drawingml/2006/main" wrap="square" lIns="0" tIns="0" rIns="0" bIns="0" anchor="ctr"/>
-          <a:lstStyle xmlns:a="http://schemas.openxmlformats.org/drawingml/2006/main"/>
-          <a:p xmlns:a="http://schemas.openxmlformats.org/drawingml/2006/main">
-            <a:pPr marL="0" indent="0">
-              <a:buNone/>
-            </a:pPr>
-            <a:r>
-              <a:rPr sz="2400">
-                <a:solidFill>
-                  <a:srgbClr val="1A1A1A"/>
-                </a:solidFill>
-                <a:latin typeface="Calibri"/>
-                <a:ea typeface="Calibri"/>
-                <a:cs typeface="Calibri"/>
-              </a:rPr>
-              <a:t>2 · Integration, training and handover</a:t>
-            </a:r>
-            <a:endParaRPr sz="2400"/>
-          </a:p>
-        </p:txBody>
-      </p:sp>
-      <p:sp>
-        <p:nvSpPr>
-          <p:cNvPr id="17" name="Text 15">
-            <a:extLst xmlns:a="http://schemas.openxmlformats.org/drawingml/2006/main">
-              <a:ext uri="{FF2B5EF4-FFF2-40B4-BE49-F238E27FC236}">
-                <a16:creationId xmlns:a16="http://schemas.microsoft.com/office/drawing/2014/main" id="{0364A474-D0DB-40F4-96D9-F098C96FE46C}"/>
-              </a:ext>
-            </a:extLst>
-          </p:cNvPr>
-          <p:cNvSpPr>
-            <a:spLocks xmlns:a="http://schemas.openxmlformats.org/drawingml/2006/main" noGrp="1"/>
-          </p:cNvSpPr>
-          <p:nvPr/>
-        </p:nvSpPr>
-        <p:spPr>
-          <a:xfrm xmlns:a="http://schemas.openxmlformats.org/drawingml/2006/main">
-            <a:off x="7150425" y="3767328"/>
-            <a:ext cx="4218310" cy="713232"/>
-          </a:xfrm>
-          <a:prstGeom xmlns:a="http://schemas.openxmlformats.org/drawingml/2006/main" prst="rect">
-            <a:avLst/>
-          </a:prstGeom>
-          <a:noFill xmlns:a="http://schemas.openxmlformats.org/drawingml/2006/main"/>
-        </p:spPr>
-        <p:txBody>
-          <a:bodyPr xmlns:a="http://schemas.openxmlformats.org/drawingml/2006/main" wrap="square" lIns="0" tIns="0" rIns="0" bIns="0" anchor="ctr"/>
-          <a:lstStyle xmlns:a="http://schemas.openxmlformats.org/drawingml/2006/main"/>
-          <a:p xmlns:a="http://schemas.openxmlformats.org/drawingml/2006/main">
-            <a:pPr marL="0" indent="0" algn="r">
-              <a:buNone/>
-            </a:pPr>
-            <a:r>
-              <a:rPr sz="2400" b="1">
-                <a:solidFill>
-                  <a:srgbClr val="1A1A1A"/>
-                </a:solidFill>
-                <a:latin typeface="Calibri"/>
-                <a:ea typeface="Calibri"/>
-                <a:cs typeface="Calibri"/>
-              </a:rPr>
-              <a:t>€14,000 · only if gates pass</a:t>
-            </a:r>
-            <a:endParaRPr sz="2400"/>
-          </a:p>
-        </p:txBody>
-      </p:sp>
-      <p:sp>
-        <p:nvSpPr>
-          <p:cNvPr id="18" name="Text 16">
-            <a:extLst xmlns:a="http://schemas.openxmlformats.org/drawingml/2006/main">
-              <a:ext uri="{FF2B5EF4-FFF2-40B4-BE49-F238E27FC236}">
-                <a16:creationId xmlns:a16="http://schemas.microsoft.com/office/drawing/2014/main" id="{9FE2B717-5068-4870-9CBA-3151C865FE72}"/>
-              </a:ext>
-            </a:extLst>
-          </p:cNvPr>
-          <p:cNvSpPr>
-            <a:spLocks xmlns:a="http://schemas.openxmlformats.org/drawingml/2006/main" noGrp="1"/>
-          </p:cNvSpPr>
-          <p:nvPr/>
-        </p:nvSpPr>
-        <p:spPr>
-          <a:xfrm xmlns:a="http://schemas.openxmlformats.org/drawingml/2006/main">
-            <a:off x="822960" y="4809744"/>
-            <a:ext cx="10545775" cy="475488"/>
-          </a:xfrm>
-          <a:prstGeom xmlns:a="http://schemas.openxmlformats.org/drawingml/2006/main" prst="rect">
-            <a:avLst/>
-          </a:prstGeom>
-          <a:noFill xmlns:a="http://schemas.openxmlformats.org/drawingml/2006/main"/>
-        </p:spPr>
-        <p:txBody>
-          <a:bodyPr xmlns:a="http://schemas.openxmlformats.org/drawingml/2006/main" wrap="square" lIns="0" tIns="0" rIns="0" bIns="0" anchor="t"/>
-          <a:lstStyle xmlns:a="http://schemas.openxmlformats.org/drawingml/2006/main"/>
-          <a:p xmlns:a="http://schemas.openxmlformats.org/drawingml/2006/main">
-            <a:pPr marL="0" indent="0">
-              <a:buNone/>
-            </a:pPr>
-            <a:r>
-              <a:rPr sz="2400">
-                <a:solidFill>
-                  <a:srgbClr val="1A1A1A"/>
-                </a:solidFill>
-                <a:latin typeface="Calibri"/>
-                <a:ea typeface="Calibri"/>
-                <a:cs typeface="Calibri"/>
-              </a:rPr>
-              <a:t>€18,200 reaches the deployment decision. Nobody acts on a suggestion in shadow.</a:t>
-            </a:r>
-            <a:endParaRPr sz="2400"/>
-          </a:p>
-        </p:txBody>
-      </p:sp>
-      <p:sp>
-        <p:nvSpPr>
-          <p:cNvPr id="19" name="Text 17">
-            <a:extLst xmlns:a="http://schemas.openxmlformats.org/drawingml/2006/main">
-              <a:ext uri="{FF2B5EF4-FFF2-40B4-BE49-F238E27FC236}">
-                <a16:creationId xmlns:a16="http://schemas.microsoft.com/office/drawing/2014/main" id="{2B05168D-C2C7-40C4-8D32-DD4EA667F053}"/>
-              </a:ext>
-            </a:extLst>
-          </p:cNvPr>
-          <p:cNvSpPr>
-            <a:spLocks xmlns:a="http://schemas.openxmlformats.org/drawingml/2006/main" noGrp="1"/>
-          </p:cNvSpPr>
-          <p:nvPr/>
-        </p:nvSpPr>
-        <p:spPr>
-          <a:xfrm xmlns:a="http://schemas.openxmlformats.org/drawingml/2006/main">
-            <a:off x="822960" y="5559552"/>
-            <a:ext cx="10545775" cy="475488"/>
-          </a:xfrm>
-          <a:prstGeom xmlns:a="http://schemas.openxmlformats.org/drawingml/2006/main" prst="rect">
-            <a:avLst/>
-          </a:prstGeom>
-          <a:noFill xmlns:a="http://schemas.openxmlformats.org/drawingml/2006/main"/>
-        </p:spPr>
-        <p:txBody>
-          <a:bodyPr xmlns:a="http://schemas.openxmlformats.org/drawingml/2006/main" wrap="square" lIns="0" tIns="0" rIns="0" bIns="0" anchor="t"/>
-          <a:lstStyle xmlns:a="http://schemas.openxmlformats.org/drawingml/2006/main"/>
-          <a:p xmlns:a="http://schemas.openxmlformats.org/drawingml/2006/main">
-            <a:pPr marL="0" indent="0">
-              <a:buNone/>
-            </a:pPr>
-            <a:r>
-              <a:rPr sz="2400">
-                <a:solidFill>
-                  <a:srgbClr val="1A1A1A"/>
-                </a:solidFill>
-                <a:latin typeface="Calibri"/>
-                <a:ea typeface="Calibri"/>
-                <a:cs typeface="Calibri"/>
-              </a:rPr>
-              <a:t>Hard gates: ≥80% accuracy · 75–97% acceptance · zero ungrounded outputs.</a:t>
-            </a:r>
-            <a:endParaRPr sz="2400"/>
+              <a:t>Close the DPA, transfer assessment and zero-retention controls before using real data.</a:t>
+            </a:r>
+            <a:endParaRPr sz="2600"/>
           </a:p>
         </p:txBody>
       </p:sp>
     </p:spTree>
     <p:extLst>
       <p:ext uri="{BB962C8B-B14F-4D97-AF65-F5344CB8AC3E}">
-        <p14:creationId xmlns:p14="http://schemas.microsoft.com/office/powerpoint/2010/main" val="391381697"/>
+        <p14:creationId xmlns:p14="http://schemas.microsoft.com/office/powerpoint/2010/main" val="1504768459"/>
       </p:ext>
     </p:extLst>
   </p:cSld>

--- a/presentation.pptx
+++ b/presentation.pptx
@@ -787,7 +787,7 @@
           <a:lstStyle xmlns:a="http://schemas.openxmlformats.org/drawingml/2006/main"/>
           <a:p xmlns:a="http://schemas.openxmlformats.org/drawingml/2006/main">
             <a:r>
-              <a:t>These figures are diagnostic, not client performance. The 60.5 per cent is agreement with complainant-selected CFPB labels, not expert accuracy. The model agreed with itself on 88.0 per cent of repeated inputs, showing that the disagreement is systematic rather than random; it does not identify the cause. The anomaly detector reached 97.1 per cent precision on synthetic data designed around its thresholds. Phase 0 creates the client benchmark.</a:t>
+              <a:t>These figures are diagnostic, not client performance. The 60.5 per cent is agreement with complainant-selected CFPB labels, not expert accuracy. The model agreed with itself on 88.0 per cent of repeated inputs, showing that the disagreement is systematic rather than random; it does not identify the cause. The anomaly detector reached 97.9 per cent precision on synthetic data designed around its thresholds, and 98.9 per cent recall — it now misses one pattern in twenty on threshold structuring, which appeared only once the fixture grew from forty accounts to two hundred. Phase 0 creates the client benchmark.</a:t>
             </a:r>
           </a:p>
           <a:p xmlns:a="http://schemas.openxmlformats.org/drawingml/2006/main">

--- a/presentation.pptx
+++ b/presentation.pptx
@@ -1671,7 +1671,7 @@
           <a:lstStyle xmlns:a="http://schemas.openxmlformats.org/drawingml/2006/main"/>
           <a:p xmlns:a="http://schemas.openxmlformats.org/drawingml/2006/main">
             <a:r>
-              <a:t>At 2,426 complaints a year, bespoke deployment returns minus 31 per cent over 36 months and breaks even in month 69. About 3,800 complaints are needed. Productising the build across five firms produces a positive 36-month return; moving oversight in-house improves it further. The pilot must prove value before deployment and avoid making one firm fund the entire build.  Of the 17,326 euro annual value, 9,918 is cash the firm does not spend: ombudsman case fees avoided at 650 pounds each, and fraud redress avoided by catching it earlier. The remaining 7,408 is displaced time, and displaced time is not a saving unless the hours are actually removed or redeployed. Three minutes on 2,426 complaints is 121 hours a year, which is seven per cent of one person. The model does not bank it. So the case rests on four avoided ombudsman referrals a year, and that is exactly what the shadow pilot is built to measure.</a:t>
+              <a:t>At 2,426 complaints a year, bespoke deployment returns minus 18 per cent over 36 months and breaks even in month 46. About 3,100 complaints are needed. That already assumes the consultant hands oversight to a named internal owner after year one — charging the consultant rate for all three years would read minus 31, and would be pricing an engagement nobody is offering. Productising the build across five firms produces a positive return; absorbing the oversight into an existing remit improves it further. The pilot must prove value before deployment and avoid making one firm fund the entire build.  Of the 17,326 euro annual value, 9,918 is cash the firm does not spend: ombudsman case fees avoided at 650 pounds each, and fraud redress avoided by catching it earlier. The remaining 7,408 is displaced time, and displaced time is not a saving unless the hours are actually removed or redeployed. Three minutes on 2,426 complaints is 121 hours a year, which is seven per cent of one person. The model does not bank it. So the case rests on four avoided ombudsman referrals a year, and that is exactly what the shadow pilot is built to measure.</a:t>
             </a:r>
           </a:p>
           <a:p xmlns:a="http://schemas.openxmlformats.org/drawingml/2006/main">
@@ -10254,7 +10254,7 @@
                 <a:ea typeface="Calibri"/>
                 <a:cs typeface="Calibri"/>
               </a:rPr>
-              <a:t>Bespoke build · consultant oversight</a:t>
+              <a:t>Bespoke build · consultant year one</a:t>
             </a:r>
             <a:endParaRPr sz="2400"/>
           </a:p>
@@ -10300,7 +10300,7 @@
                 <a:ea typeface="Calibri"/>
                 <a:cs typeface="Calibri"/>
               </a:rPr>
-              <a:t>−31.0%</a:t>
+              <a:t>−18.0%</a:t>
             </a:r>
             <a:endParaRPr sz="2400"/>
           </a:p>
@@ -10423,7 +10423,7 @@
                 <a:ea typeface="Calibri"/>
                 <a:cs typeface="Calibri"/>
               </a:rPr>
-              <a:t>+16.9%</a:t>
+              <a:t>+60.2%</a:t>
             </a:r>
             <a:endParaRPr sz="2400"/>
           </a:p>
@@ -10500,7 +10500,7 @@
                 <a:ea typeface="Calibri"/>
                 <a:cs typeface="Calibri"/>
               </a:rPr>
-              <a:t>Productised · oversight in-house</a:t>
+              <a:t>Productised · oversight absorbed</a:t>
             </a:r>
             <a:endParaRPr sz="2400"/>
           </a:p>
@@ -10546,7 +10546,7 @@
                 <a:ea typeface="Calibri"/>
                 <a:cs typeface="Calibri"/>
               </a:rPr>
-              <a:t>+96.6%</a:t>
+              <a:t>+114.0%</a:t>
             </a:r>
             <a:endParaRPr sz="2400"/>
           </a:p>
@@ -10592,7 +10592,7 @@
                 <a:ea typeface="Calibri"/>
                 <a:cs typeface="Calibri"/>
               </a:rPr>
-              <a:t>At 2,426 complaints a year, bespoke deployment breaks even in month 69. Approximately 3,800 are needed.</a:t>
+              <a:t>At 2,426 complaints a year, bespoke deployment breaks even in month 46. Approximately 3,100 are needed.</a:t>
             </a:r>
             <a:endParaRPr sz="2600"/>
           </a:p>

--- a/presentation.pptx
+++ b/presentation.pptx
@@ -3894,7 +3894,7 @@
       </p:sp>
       <p:pic>
         <p:nvPicPr>
-          <p:cNvPr id="15" name="Image 0"/>
+          <p:cNvPr id="15" name="Image 0" descr="The MVP's complaint queue with one case open: the proposal, the sentence it quoted, the six checks it passed, and the buttons a person presses."/>
           <p:cNvPicPr>
             <a:picLocks xmlns:a="http://schemas.openxmlformats.org/drawingml/2006/main" noChangeAspect="1"/>
           </p:cNvPicPr>
@@ -9414,7 +9414,7 @@
       <p:grpSpPr/>
       <p:pic>
         <p:nvPicPr>
-          <p:cNvPr id="2" name="Picture 1" descr="spine_band.png"/>
+          <p:cNvPr id="2" name="Picture 1" descr="The system proposes. A person decides. — three use cases, what makes each proposal, what each must prove, and the person who decides."/>
           <p:cNvPicPr>
             <a:picLocks noChangeAspect="1"/>
           </p:cNvPicPr>
@@ -9851,7 +9851,7 @@
       </p:sp>
       <p:pic>
         <p:nvPicPr>
-          <p:cNvPr id="15" name="Image 0"/>
+          <p:cNvPr id="15" name="Image 0" descr="The proof-of-concept workflow in n8n, executed green from trigger to proposal."/>
           <p:cNvPicPr>
             <a:picLocks xmlns:a="http://schemas.openxmlformats.org/drawingml/2006/main" noChangeAspect="1"/>
           </p:cNvPicPr>

--- a/presentation.pptx
+++ b/presentation.pptx
@@ -787,7 +787,8 @@
           <a:lstStyle xmlns:a="http://schemas.openxmlformats.org/drawingml/2006/main"/>
           <a:p xmlns:a="http://schemas.openxmlformats.org/drawingml/2006/main">
             <a:r>
-              <a:t>These figures are diagnostic, not client performance. The 60.5 per cent is agreement with complainant-selected CFPB labels, not expert accuracy. The model agreed with itself on 88.0 per cent of repeated inputs, showing that the disagreement is systematic rather than random; it does not identify the cause. The anomaly detector reached 97.9 per cent precision on synthetic data designed around its thresholds, and 98.9 per cent recall — it now misses one pattern in twenty on threshold structuring, which appeared only once the fixture grew from forty accounts to two hundred. Phase 0 creates the client benchmark.</a:t>
+              <a:t>These figures are diagnostic, not client performance. The 60.5 per cent is agreement with complainant-selected CFPB labels, not expert accuracy. The model agreed with itself on 88.0 per cent of repeated inputs, showing that the disagreement is systematic rather than random; it does not identify the cause. The anomaly detector reached 97.9 per cent precision on synthetic data designed around its thresholds, and 98.9 per cent recall — it now misses one pattern in twenty on threshold structuring, which appeared only once the fixture grew from forty accounts to two hundred. Phase 0 creates the client benchmark.
+[If someone opens FINDINGS.md and sees different numbers] These are the 2026-08-28 run, which is the baseline this whole deck was built on, and FINDINGS.md says so. Re-running the identical sample six days later, gpt-4o came back within a third of a point — so the sampling, prompt and scoring are all doing the same thing — but gpt-4o-mini moved from 56.8 to 61.6, twelve of two hundred and forty predictions flipping. Nothing in the repo changed; the alias almost certainly resolves to a newer snapshot. The conclusion gets stronger, not weaker: the premium I charged gpt-4o with earning does not reproduce. Both runs are committed with dated evidence files.</a:t>
             </a:r>
           </a:p>
           <a:p xmlns:a="http://schemas.openxmlformats.org/drawingml/2006/main">
